--- a/activities/Activity-04-Create-a-Shape-Icon-and-SmartArt-System/A04-Create-a-Shape-Icon-and-SmartArt-System-Sample.pptx
+++ b/activities/Activity-04-Create-a-Shape-Icon-and-SmartArt-System/A04-Create-a-Shape-Icon-and-SmartArt-System-Sample.pptx
@@ -10,6 +10,8 @@
     <p:sldId id="258" r:id="rId9"/>
     <p:sldId id="259" r:id="rId10"/>
     <p:sldId id="260" r:id="rId11"/>
+    <p:sldId id="261" r:id="rId12"/>
+    <p:sldId id="262" r:id="rId13"/>
   </p:sldIdLst>
   <p:sldSz cx="12191695" cy="6858000" type="screen4x3"/>
   <p:notesSz cx="6858000" cy="9144000"/>
@@ -3292,7 +3294,7 @@
                 </a:solidFill>
                 <a:latin typeface="Arial"/>
               </a:rPr>
-              <a:t>Create a Shape, Icon and SmartArt System</a:t>
+              <a:t>Generate Visual Assets and Refine Them in PowerPoint</a:t>
             </a:r>
           </a:p>
         </p:txBody>
@@ -3442,7 +3444,7 @@
                 </a:solidFill>
                 <a:latin typeface="Arial"/>
               </a:rPr>
-              <a:t>PowerPoint Shapes, Icons and SmartArt</a:t>
+              <a:t>Text-to-image AI + PowerPoint</a:t>
             </a:r>
           </a:p>
         </p:txBody>
@@ -3525,6 +3527,246 @@
             <a:avLst/>
           </a:prstGeom>
           <a:solidFill>
+            <a:srgbClr val="7C3AED"/>
+          </a:solidFill>
+          <a:ln>
+            <a:solidFill>
+              <a:srgbClr val="7C3AED"/>
+            </a:solidFill>
+          </a:ln>
+        </p:spPr>
+        <p:style>
+          <a:lnRef idx="1">
+            <a:schemeClr val="accent1"/>
+          </a:lnRef>
+          <a:fillRef idx="3">
+            <a:schemeClr val="accent1"/>
+          </a:fillRef>
+          <a:effectRef idx="2">
+            <a:schemeClr val="accent1"/>
+          </a:effectRef>
+          <a:fontRef idx="minor">
+            <a:schemeClr val="lt1"/>
+          </a:fontRef>
+        </p:style>
+        <p:txBody>
+          <a:bodyPr rtlCol="0" anchor="ctr"/>
+          <a:lstStyle/>
+          <a:p>
+            <a:pPr algn="ctr"/>
+          </a:p>
+        </p:txBody>
+      </p:sp>
+      <p:sp>
+        <p:nvSpPr>
+          <p:cNvPr id="4" name="TextBox 3"/>
+          <p:cNvSpPr txBox="1"/>
+          <p:nvPr/>
+        </p:nvSpPr>
+        <p:spPr>
+          <a:xfrm>
+            <a:off x="658368" y="384048"/>
+            <a:ext cx="10789920" cy="320040"/>
+          </a:xfrm>
+          <a:prstGeom prst="rect">
+            <a:avLst/>
+          </a:prstGeom>
+          <a:noFill/>
+        </p:spPr>
+        <p:txBody>
+          <a:bodyPr wrap="square" anchor="t">
+            <a:spAutoFit/>
+          </a:bodyPr>
+          <a:lstStyle/>
+          <a:p>
+            <a:pPr algn="l"/>
+            <a:r>
+              <a:rPr sz="1100" b="1">
+                <a:solidFill>
+                  <a:srgbClr val="7C3AED"/>
+                </a:solidFill>
+                <a:latin typeface="Arial"/>
+              </a:rPr>
+              <a:t>ACTIVITY 04 · FULL COPY-READY TEXT IN PROMPTS.MD AND AI PROMPT LAB</a:t>
+            </a:r>
+          </a:p>
+        </p:txBody>
+      </p:sp>
+      <p:sp>
+        <p:nvSpPr>
+          <p:cNvPr id="5" name="TextBox 4"/>
+          <p:cNvSpPr txBox="1"/>
+          <p:nvPr/>
+        </p:nvSpPr>
+        <p:spPr>
+          <a:xfrm>
+            <a:off x="658368" y="749808"/>
+            <a:ext cx="10789920" cy="658368"/>
+          </a:xfrm>
+          <a:prstGeom prst="rect">
+            <a:avLst/>
+          </a:prstGeom>
+          <a:noFill/>
+        </p:spPr>
+        <p:txBody>
+          <a:bodyPr wrap="square" anchor="t">
+            <a:spAutoFit/>
+          </a:bodyPr>
+          <a:lstStyle/>
+          <a:p>
+            <a:pPr algn="l"/>
+            <a:r>
+              <a:rPr sz="2700" b="1">
+                <a:solidFill>
+                  <a:srgbClr val="161B26"/>
+                </a:solidFill>
+                <a:latin typeface="Arial"/>
+              </a:rPr>
+              <a:t>AI Prompt Starters</a:t>
+            </a:r>
+          </a:p>
+        </p:txBody>
+      </p:sp>
+      <p:sp>
+        <p:nvSpPr>
+          <p:cNvPr id="6" name="Rectangle 5"/>
+          <p:cNvSpPr/>
+          <p:nvPr/>
+        </p:nvSpPr>
+        <p:spPr>
+          <a:xfrm>
+            <a:off x="658368" y="1444752"/>
+            <a:ext cx="10881360" cy="18288"/>
+          </a:xfrm>
+          <a:prstGeom prst="rect">
+            <a:avLst/>
+          </a:prstGeom>
+          <a:solidFill>
+            <a:srgbClr val="E2E8F0"/>
+          </a:solidFill>
+          <a:ln>
+            <a:solidFill>
+              <a:srgbClr val="E2E8F0"/>
+            </a:solidFill>
+          </a:ln>
+        </p:spPr>
+        <p:style>
+          <a:lnRef idx="1">
+            <a:schemeClr val="accent1"/>
+          </a:lnRef>
+          <a:fillRef idx="3">
+            <a:schemeClr val="accent1"/>
+          </a:fillRef>
+          <a:effectRef idx="2">
+            <a:schemeClr val="accent1"/>
+          </a:effectRef>
+          <a:fontRef idx="minor">
+            <a:schemeClr val="lt1"/>
+          </a:fontRef>
+        </p:style>
+        <p:txBody>
+          <a:bodyPr rtlCol="0" anchor="ctr"/>
+          <a:lstStyle/>
+          <a:p>
+            <a:pPr algn="ctr"/>
+          </a:p>
+        </p:txBody>
+      </p:sp>
+      <p:sp>
+        <p:nvSpPr>
+          <p:cNvPr id="7" name="TextBox 6"/>
+          <p:cNvSpPr txBox="1"/>
+          <p:nvPr/>
+        </p:nvSpPr>
+        <p:spPr>
+          <a:xfrm>
+            <a:off x="658368" y="6473952"/>
+            <a:ext cx="9875520" cy="201168"/>
+          </a:xfrm>
+          <a:prstGeom prst="rect">
+            <a:avLst/>
+          </a:prstGeom>
+          <a:noFill/>
+        </p:spPr>
+        <p:txBody>
+          <a:bodyPr wrap="square" anchor="t">
+            <a:spAutoFit/>
+          </a:bodyPr>
+          <a:lstStyle/>
+          <a:p>
+            <a:pPr algn="l"/>
+            <a:r>
+              <a:rPr sz="800" b="0">
+                <a:solidFill>
+                  <a:srgbClr val="5B6372"/>
+                </a:solidFill>
+                <a:latin typeface="Arial"/>
+              </a:rPr>
+              <a:t>TGS-2026064178 · ACTIVITY PRACTICE · Tertiary Infotech Academy Pte Ltd</a:t>
+            </a:r>
+          </a:p>
+        </p:txBody>
+      </p:sp>
+      <p:sp>
+        <p:nvSpPr>
+          <p:cNvPr id="8" name="Rounded Rectangle 7"/>
+          <p:cNvSpPr/>
+          <p:nvPr/>
+        </p:nvSpPr>
+        <p:spPr>
+          <a:xfrm>
+            <a:off x="731520" y="1755648"/>
+            <a:ext cx="5166360" cy="1847088"/>
+          </a:xfrm>
+          <a:prstGeom prst="roundRect">
+            <a:avLst/>
+          </a:prstGeom>
+          <a:solidFill>
+            <a:srgbClr val="F5F8FC"/>
+          </a:solidFill>
+          <a:ln>
+            <a:solidFill>
+              <a:srgbClr val="E2E8F0"/>
+            </a:solidFill>
+          </a:ln>
+        </p:spPr>
+        <p:style>
+          <a:lnRef idx="1">
+            <a:schemeClr val="accent1"/>
+          </a:lnRef>
+          <a:fillRef idx="3">
+            <a:schemeClr val="accent1"/>
+          </a:fillRef>
+          <a:effectRef idx="2">
+            <a:schemeClr val="accent1"/>
+          </a:effectRef>
+          <a:fontRef idx="minor">
+            <a:schemeClr val="lt1"/>
+          </a:fontRef>
+        </p:style>
+        <p:txBody>
+          <a:bodyPr rtlCol="0" anchor="ctr"/>
+          <a:lstStyle/>
+          <a:p>
+            <a:pPr algn="ctr"/>
+          </a:p>
+        </p:txBody>
+      </p:sp>
+      <p:sp>
+        <p:nvSpPr>
+          <p:cNvPr id="9" name="Rectangle 8"/>
+          <p:cNvSpPr/>
+          <p:nvPr/>
+        </p:nvSpPr>
+        <p:spPr>
+          <a:xfrm>
+            <a:off x="731520" y="1755648"/>
+            <a:ext cx="73152" cy="1847088"/>
+          </a:xfrm>
+          <a:prstGeom prst="rect">
+            <a:avLst/>
+          </a:prstGeom>
+          <a:solidFill>
             <a:srgbClr val="1F6FEB"/>
           </a:solidFill>
           <a:ln>
@@ -3557,14 +3799,94 @@
       </p:sp>
       <p:sp>
         <p:nvSpPr>
-          <p:cNvPr id="4" name="TextBox 3"/>
+          <p:cNvPr id="10" name="Rounded Rectangle 9"/>
+          <p:cNvSpPr/>
+          <p:nvPr/>
+        </p:nvSpPr>
+        <p:spPr>
+          <a:xfrm>
+            <a:off x="932688" y="1975104"/>
+            <a:ext cx="438912" cy="438912"/>
+          </a:xfrm>
+          <a:prstGeom prst="roundRect">
+            <a:avLst/>
+          </a:prstGeom>
+          <a:solidFill>
+            <a:srgbClr val="1F6FEB"/>
+          </a:solidFill>
+          <a:ln>
+            <a:solidFill>
+              <a:srgbClr val="1F6FEB"/>
+            </a:solidFill>
+          </a:ln>
+        </p:spPr>
+        <p:style>
+          <a:lnRef idx="1">
+            <a:schemeClr val="accent1"/>
+          </a:lnRef>
+          <a:fillRef idx="3">
+            <a:schemeClr val="accent1"/>
+          </a:fillRef>
+          <a:effectRef idx="2">
+            <a:schemeClr val="accent1"/>
+          </a:effectRef>
+          <a:fontRef idx="minor">
+            <a:schemeClr val="lt1"/>
+          </a:fontRef>
+        </p:style>
+        <p:txBody>
+          <a:bodyPr rtlCol="0" anchor="ctr"/>
+          <a:lstStyle/>
+          <a:p>
+            <a:pPr algn="ctr"/>
+          </a:p>
+        </p:txBody>
+      </p:sp>
+      <p:sp>
+        <p:nvSpPr>
+          <p:cNvPr id="11" name="TextBox 10"/>
           <p:cNvSpPr txBox="1"/>
           <p:nvPr/>
         </p:nvSpPr>
         <p:spPr>
           <a:xfrm>
-            <a:off x="658368" y="384048"/>
-            <a:ext cx="10789920" cy="320040"/>
+            <a:off x="932688" y="1984248"/>
+            <a:ext cx="438912" cy="420624"/>
+          </a:xfrm>
+          <a:prstGeom prst="rect">
+            <a:avLst/>
+          </a:prstGeom>
+          <a:noFill/>
+        </p:spPr>
+        <p:txBody>
+          <a:bodyPr wrap="square" anchor="ctr">
+            <a:spAutoFit/>
+          </a:bodyPr>
+          <a:lstStyle/>
+          <a:p>
+            <a:pPr algn="ctr"/>
+            <a:r>
+              <a:rPr sz="1400" b="1">
+                <a:solidFill>
+                  <a:srgbClr val="FFFFFF"/>
+                </a:solidFill>
+                <a:latin typeface="Arial"/>
+              </a:rPr>
+              <a:t>1</a:t>
+            </a:r>
+          </a:p>
+        </p:txBody>
+      </p:sp>
+      <p:sp>
+        <p:nvSpPr>
+          <p:cNvPr id="12" name="TextBox 11"/>
+          <p:cNvSpPr txBox="1"/>
+          <p:nvPr/>
+        </p:nvSpPr>
+        <p:spPr>
+          <a:xfrm>
+            <a:off x="1536192" y="1938528"/>
+            <a:ext cx="4178808" cy="329184"/>
           </a:xfrm>
           <a:prstGeom prst="rect">
             <a:avLst/>
@@ -3579,27 +3901,27 @@
           <a:p>
             <a:pPr algn="l"/>
             <a:r>
-              <a:rPr sz="1100" b="1">
+              <a:rPr sz="1400" b="1">
                 <a:solidFill>
                   <a:srgbClr val="1F6FEB"/>
                 </a:solidFill>
                 <a:latin typeface="Arial"/>
               </a:rPr>
-              <a:t>ACTIVITY 04 · CONTEXT</a:t>
-            </a:r>
-          </a:p>
-        </p:txBody>
-      </p:sp>
-      <p:sp>
-        <p:nvSpPr>
-          <p:cNvPr id="5" name="TextBox 4"/>
+              <a:t>Data analyst</a:t>
+            </a:r>
+          </a:p>
+        </p:txBody>
+      </p:sp>
+      <p:sp>
+        <p:nvSpPr>
+          <p:cNvPr id="13" name="TextBox 12"/>
           <p:cNvSpPr txBox="1"/>
           <p:nvPr/>
         </p:nvSpPr>
         <p:spPr>
           <a:xfrm>
-            <a:off x="658368" y="749808"/>
-            <a:ext cx="10789920" cy="658368"/>
+            <a:off x="1536192" y="2322576"/>
+            <a:ext cx="4178808" cy="1133856"/>
           </a:xfrm>
           <a:prstGeom prst="rect">
             <a:avLst/>
@@ -3614,33 +3936,33 @@
           <a:p>
             <a:pPr algn="l"/>
             <a:r>
-              <a:rPr sz="2700" b="1">
+              <a:rPr sz="1150" b="0">
                 <a:solidFill>
                   <a:srgbClr val="161B26"/>
                 </a:solidFill>
                 <a:latin typeface="Arial"/>
               </a:rPr>
-              <a:t>The Scenario</a:t>
-            </a:r>
-          </a:p>
-        </p:txBody>
-      </p:sp>
-      <p:sp>
-        <p:nvSpPr>
-          <p:cNvPr id="6" name="Rectangle 5"/>
+              <a:t>Using only the attached approved sources, create a source register, identify duplicates or conflicting definitions, clean the table, show formulas or transformations, and return five candidate insights with citations, caveats and a con…</a:t>
+            </a:r>
+          </a:p>
+        </p:txBody>
+      </p:sp>
+      <p:sp>
+        <p:nvSpPr>
+          <p:cNvPr id="14" name="Rounded Rectangle 13"/>
           <p:cNvSpPr/>
           <p:nvPr/>
         </p:nvSpPr>
         <p:spPr>
           <a:xfrm>
-            <a:off x="658368" y="1444752"/>
-            <a:ext cx="10881360" cy="18288"/>
-          </a:xfrm>
-          <a:prstGeom prst="rect">
-            <a:avLst/>
-          </a:prstGeom>
-          <a:solidFill>
-            <a:srgbClr val="E2E8F0"/>
+            <a:off x="6144768" y="1755648"/>
+            <a:ext cx="5166360" cy="1847088"/>
+          </a:xfrm>
+          <a:prstGeom prst="roundRect">
+            <a:avLst/>
+          </a:prstGeom>
+          <a:solidFill>
+            <a:srgbClr val="F5F8FC"/>
           </a:solidFill>
           <a:ln>
             <a:solidFill>
@@ -3672,14 +3994,139 @@
       </p:sp>
       <p:sp>
         <p:nvSpPr>
-          <p:cNvPr id="7" name="TextBox 6"/>
+          <p:cNvPr id="15" name="Rectangle 14"/>
+          <p:cNvSpPr/>
+          <p:nvPr/>
+        </p:nvSpPr>
+        <p:spPr>
+          <a:xfrm>
+            <a:off x="6144768" y="1755648"/>
+            <a:ext cx="73152" cy="1847088"/>
+          </a:xfrm>
+          <a:prstGeom prst="rect">
+            <a:avLst/>
+          </a:prstGeom>
+          <a:solidFill>
+            <a:srgbClr val="10B981"/>
+          </a:solidFill>
+          <a:ln>
+            <a:solidFill>
+              <a:srgbClr val="10B981"/>
+            </a:solidFill>
+          </a:ln>
+        </p:spPr>
+        <p:style>
+          <a:lnRef idx="1">
+            <a:schemeClr val="accent1"/>
+          </a:lnRef>
+          <a:fillRef idx="3">
+            <a:schemeClr val="accent1"/>
+          </a:fillRef>
+          <a:effectRef idx="2">
+            <a:schemeClr val="accent1"/>
+          </a:effectRef>
+          <a:fontRef idx="minor">
+            <a:schemeClr val="lt1"/>
+          </a:fontRef>
+        </p:style>
+        <p:txBody>
+          <a:bodyPr rtlCol="0" anchor="ctr"/>
+          <a:lstStyle/>
+          <a:p>
+            <a:pPr algn="ctr"/>
+          </a:p>
+        </p:txBody>
+      </p:sp>
+      <p:sp>
+        <p:nvSpPr>
+          <p:cNvPr id="16" name="Rounded Rectangle 15"/>
+          <p:cNvSpPr/>
+          <p:nvPr/>
+        </p:nvSpPr>
+        <p:spPr>
+          <a:xfrm>
+            <a:off x="6345936" y="1975104"/>
+            <a:ext cx="438912" cy="438912"/>
+          </a:xfrm>
+          <a:prstGeom prst="roundRect">
+            <a:avLst/>
+          </a:prstGeom>
+          <a:solidFill>
+            <a:srgbClr val="10B981"/>
+          </a:solidFill>
+          <a:ln>
+            <a:solidFill>
+              <a:srgbClr val="10B981"/>
+            </a:solidFill>
+          </a:ln>
+        </p:spPr>
+        <p:style>
+          <a:lnRef idx="1">
+            <a:schemeClr val="accent1"/>
+          </a:lnRef>
+          <a:fillRef idx="3">
+            <a:schemeClr val="accent1"/>
+          </a:fillRef>
+          <a:effectRef idx="2">
+            <a:schemeClr val="accent1"/>
+          </a:effectRef>
+          <a:fontRef idx="minor">
+            <a:schemeClr val="lt1"/>
+          </a:fontRef>
+        </p:style>
+        <p:txBody>
+          <a:bodyPr rtlCol="0" anchor="ctr"/>
+          <a:lstStyle/>
+          <a:p>
+            <a:pPr algn="ctr"/>
+          </a:p>
+        </p:txBody>
+      </p:sp>
+      <p:sp>
+        <p:nvSpPr>
+          <p:cNvPr id="17" name="TextBox 16"/>
           <p:cNvSpPr txBox="1"/>
           <p:nvPr/>
         </p:nvSpPr>
         <p:spPr>
           <a:xfrm>
-            <a:off x="658368" y="6473952"/>
-            <a:ext cx="9875520" cy="201168"/>
+            <a:off x="6345936" y="1984248"/>
+            <a:ext cx="438912" cy="420624"/>
+          </a:xfrm>
+          <a:prstGeom prst="rect">
+            <a:avLst/>
+          </a:prstGeom>
+          <a:noFill/>
+        </p:spPr>
+        <p:txBody>
+          <a:bodyPr wrap="square" anchor="ctr">
+            <a:spAutoFit/>
+          </a:bodyPr>
+          <a:lstStyle/>
+          <a:p>
+            <a:pPr algn="ctr"/>
+            <a:r>
+              <a:rPr sz="1400" b="1">
+                <a:solidFill>
+                  <a:srgbClr val="FFFFFF"/>
+                </a:solidFill>
+                <a:latin typeface="Arial"/>
+              </a:rPr>
+              <a:t>2</a:t>
+            </a:r>
+          </a:p>
+        </p:txBody>
+      </p:sp>
+      <p:sp>
+        <p:nvSpPr>
+          <p:cNvPr id="18" name="TextBox 17"/>
+          <p:cNvSpPr txBox="1"/>
+          <p:nvPr/>
+        </p:nvSpPr>
+        <p:spPr>
+          <a:xfrm>
+            <a:off x="6949440" y="1938528"/>
+            <a:ext cx="4178808" cy="329184"/>
           </a:xfrm>
           <a:prstGeom prst="rect">
             <a:avLst/>
@@ -3694,27 +4141,62 @@
           <a:p>
             <a:pPr algn="l"/>
             <a:r>
-              <a:rPr sz="800" b="0">
-                <a:solidFill>
-                  <a:srgbClr val="5B6372"/>
+              <a:rPr sz="1400" b="1">
+                <a:solidFill>
+                  <a:srgbClr val="10B981"/>
                 </a:solidFill>
                 <a:latin typeface="Arial"/>
               </a:rPr>
-              <a:t>TGS-2024048310 · ACTIVITY PRACTICE · Tertiary Infotech Academy Pte Ltd</a:t>
-            </a:r>
-          </a:p>
-        </p:txBody>
-      </p:sp>
-      <p:sp>
-        <p:nvSpPr>
-          <p:cNvPr id="8" name="Rounded Rectangle 7"/>
+              <a:t>Infographic</a:t>
+            </a:r>
+          </a:p>
+        </p:txBody>
+      </p:sp>
+      <p:sp>
+        <p:nvSpPr>
+          <p:cNvPr id="19" name="TextBox 18"/>
+          <p:cNvSpPr txBox="1"/>
+          <p:nvPr/>
+        </p:nvSpPr>
+        <p:spPr>
+          <a:xfrm>
+            <a:off x="6949440" y="2322576"/>
+            <a:ext cx="4178808" cy="1133856"/>
+          </a:xfrm>
+          <a:prstGeom prst="rect">
+            <a:avLst/>
+          </a:prstGeom>
+          <a:noFill/>
+        </p:spPr>
+        <p:txBody>
+          <a:bodyPr wrap="square" anchor="t">
+            <a:spAutoFit/>
+          </a:bodyPr>
+          <a:lstStyle/>
+          <a:p>
+            <a:pPr algn="l"/>
+            <a:r>
+              <a:rPr sz="1150" b="0">
+                <a:solidFill>
+                  <a:srgbClr val="161B26"/>
+                </a:solidFill>
+                <a:latin typeface="Arial"/>
+              </a:rPr>
+              <a:t>Create a one-page executive infographic for Singapore retail managers. Lead with one decision insight, show three supporting metrics, include a five-stage flow and a source footer. Use a clean professional style, strong hierarchy and n…</a:t>
+            </a:r>
+          </a:p>
+        </p:txBody>
+      </p:sp>
+      <p:sp>
+        <p:nvSpPr>
+          <p:cNvPr id="20" name="Rounded Rectangle 19"/>
           <p:cNvSpPr/>
           <p:nvPr/>
         </p:nvSpPr>
         <p:spPr>
           <a:xfrm>
-            <a:off x="731520" y="1783080"/>
-            <a:ext cx="10698480" cy="1691640"/>
+            <a:off x="731520" y="3877056"/>
+            <a:ext cx="5166360" cy="1847088"/>
           </a:xfrm>
           <a:prstGeom prst="roundRect">
             <a:avLst/>
@@ -3752,24 +4234,24 @@
       </p:sp>
       <p:sp>
         <p:nvSpPr>
-          <p:cNvPr id="9" name="Rectangle 8"/>
+          <p:cNvPr id="21" name="Rectangle 20"/>
           <p:cNvSpPr/>
           <p:nvPr/>
         </p:nvSpPr>
         <p:spPr>
           <a:xfrm>
-            <a:off x="731520" y="1783080"/>
-            <a:ext cx="73152" cy="1691640"/>
-          </a:xfrm>
-          <a:prstGeom prst="rect">
-            <a:avLst/>
-          </a:prstGeom>
-          <a:solidFill>
-            <a:srgbClr val="1F6FEB"/>
+            <a:off x="731520" y="3877056"/>
+            <a:ext cx="73152" cy="1847088"/>
+          </a:xfrm>
+          <a:prstGeom prst="rect">
+            <a:avLst/>
+          </a:prstGeom>
+          <a:solidFill>
+            <a:srgbClr val="7C3AED"/>
           </a:solidFill>
           <a:ln>
             <a:solidFill>
-              <a:srgbClr val="1F6FEB"/>
+              <a:srgbClr val="7C3AED"/>
             </a:solidFill>
           </a:ln>
         </p:spPr>
@@ -3797,24 +4279,24 @@
       </p:sp>
       <p:sp>
         <p:nvSpPr>
-          <p:cNvPr id="10" name="Rounded Rectangle 9"/>
+          <p:cNvPr id="22" name="Rounded Rectangle 21"/>
           <p:cNvSpPr/>
           <p:nvPr/>
         </p:nvSpPr>
         <p:spPr>
           <a:xfrm>
-            <a:off x="932688" y="2002536"/>
+            <a:off x="932688" y="4096512"/>
             <a:ext cx="438912" cy="438912"/>
           </a:xfrm>
           <a:prstGeom prst="roundRect">
             <a:avLst/>
           </a:prstGeom>
           <a:solidFill>
-            <a:srgbClr val="1F6FEB"/>
+            <a:srgbClr val="7C3AED"/>
           </a:solidFill>
           <a:ln>
             <a:solidFill>
-              <a:srgbClr val="1F6FEB"/>
+              <a:srgbClr val="7C3AED"/>
             </a:solidFill>
           </a:ln>
         </p:spPr>
@@ -3842,13 +4324,13 @@
       </p:sp>
       <p:sp>
         <p:nvSpPr>
-          <p:cNvPr id="11" name="TextBox 10"/>
+          <p:cNvPr id="23" name="TextBox 22"/>
           <p:cNvSpPr txBox="1"/>
           <p:nvPr/>
         </p:nvSpPr>
         <p:spPr>
           <a:xfrm>
-            <a:off x="932688" y="2011680"/>
+            <a:off x="932688" y="4105656"/>
             <a:ext cx="438912" cy="420624"/>
           </a:xfrm>
           <a:prstGeom prst="rect">
@@ -3870,21 +4352,21 @@
                 </a:solidFill>
                 <a:latin typeface="Arial"/>
               </a:rPr>
-              <a:t>1</a:t>
-            </a:r>
-          </a:p>
-        </p:txBody>
-      </p:sp>
-      <p:sp>
-        <p:nvSpPr>
-          <p:cNvPr id="12" name="TextBox 11"/>
+              <a:t>3</a:t>
+            </a:r>
+          </a:p>
+        </p:txBody>
+      </p:sp>
+      <p:sp>
+        <p:nvSpPr>
+          <p:cNvPr id="24" name="TextBox 23"/>
           <p:cNvSpPr txBox="1"/>
           <p:nvPr/>
         </p:nvSpPr>
         <p:spPr>
           <a:xfrm>
-            <a:off x="1536192" y="1965960"/>
-            <a:ext cx="9710928" cy="329184"/>
+            <a:off x="1536192" y="4059936"/>
+            <a:ext cx="4178808" cy="329184"/>
           </a:xfrm>
           <a:prstGeom prst="rect">
             <a:avLst/>
@@ -3901,25 +4383,25 @@
             <a:r>
               <a:rPr sz="1400" b="1">
                 <a:solidFill>
-                  <a:srgbClr val="1F6FEB"/>
+                  <a:srgbClr val="7C3AED"/>
                 </a:solidFill>
                 <a:latin typeface="Arial"/>
               </a:rPr>
-              <a:t>Context</a:t>
-            </a:r>
-          </a:p>
-        </p:txBody>
-      </p:sp>
-      <p:sp>
-        <p:nvSpPr>
-          <p:cNvPr id="13" name="TextBox 12"/>
+              <a:t>Text to image</a:t>
+            </a:r>
+          </a:p>
+        </p:txBody>
+      </p:sp>
+      <p:sp>
+        <p:nvSpPr>
+          <p:cNvPr id="25" name="TextBox 24"/>
           <p:cNvSpPr txBox="1"/>
           <p:nvPr/>
         </p:nvSpPr>
         <p:spPr>
           <a:xfrm>
-            <a:off x="1536192" y="2350008"/>
-            <a:ext cx="9710928" cy="978408"/>
+            <a:off x="1536192" y="4443984"/>
+            <a:ext cx="4178808" cy="1133856"/>
           </a:xfrm>
           <a:prstGeom prst="rect">
             <a:avLst/>
@@ -3940,21 +4422,21 @@
                 </a:solidFill>
                 <a:latin typeface="Arial"/>
               </a:rPr>
-              <a:t>Northstar needs an editable five-stage process infographic for store managers. The current draft mixes icons, connector styles and uneven spacing.</a:t>
-            </a:r>
-          </a:p>
-        </p:txBody>
-      </p:sp>
-      <p:sp>
-        <p:nvSpPr>
-          <p:cNvPr id="14" name="Rounded Rectangle 13"/>
+              <a:t>Create a clean vector-like sustainability delivery illustration for a PowerPoint infographic: one electric van, one reusable parcel, a simple route and a feedback symbol. Transparent background, consistent blue/teal/violet/amber palett…</a:t>
+            </a:r>
+          </a:p>
+        </p:txBody>
+      </p:sp>
+      <p:sp>
+        <p:nvSpPr>
+          <p:cNvPr id="26" name="Rounded Rectangle 25"/>
           <p:cNvSpPr/>
           <p:nvPr/>
         </p:nvSpPr>
         <p:spPr>
           <a:xfrm>
-            <a:off x="731520" y="3776472"/>
-            <a:ext cx="10698480" cy="1691640"/>
+            <a:off x="6144768" y="3877056"/>
+            <a:ext cx="5166360" cy="1847088"/>
           </a:xfrm>
           <a:prstGeom prst="roundRect">
             <a:avLst/>
@@ -3992,24 +4474,24 @@
       </p:sp>
       <p:sp>
         <p:nvSpPr>
-          <p:cNvPr id="15" name="Rectangle 14"/>
+          <p:cNvPr id="27" name="Rectangle 26"/>
           <p:cNvSpPr/>
           <p:nvPr/>
         </p:nvSpPr>
         <p:spPr>
           <a:xfrm>
-            <a:off x="731520" y="3776472"/>
-            <a:ext cx="73152" cy="1691640"/>
-          </a:xfrm>
-          <a:prstGeom prst="rect">
-            <a:avLst/>
-          </a:prstGeom>
-          <a:solidFill>
-            <a:srgbClr val="10B981"/>
+            <a:off x="6144768" y="3877056"/>
+            <a:ext cx="73152" cy="1847088"/>
+          </a:xfrm>
+          <a:prstGeom prst="rect">
+            <a:avLst/>
+          </a:prstGeom>
+          <a:solidFill>
+            <a:srgbClr val="F59E0B"/>
           </a:solidFill>
           <a:ln>
             <a:solidFill>
-              <a:srgbClr val="10B981"/>
+              <a:srgbClr val="F59E0B"/>
             </a:solidFill>
           </a:ln>
         </p:spPr>
@@ -4037,24 +4519,24 @@
       </p:sp>
       <p:sp>
         <p:nvSpPr>
-          <p:cNvPr id="16" name="Rounded Rectangle 15"/>
+          <p:cNvPr id="28" name="Rounded Rectangle 27"/>
           <p:cNvSpPr/>
           <p:nvPr/>
         </p:nvSpPr>
         <p:spPr>
           <a:xfrm>
-            <a:off x="932688" y="3995928"/>
+            <a:off x="6345936" y="4096512"/>
             <a:ext cx="438912" cy="438912"/>
           </a:xfrm>
           <a:prstGeom prst="roundRect">
             <a:avLst/>
           </a:prstGeom>
           <a:solidFill>
-            <a:srgbClr val="10B981"/>
+            <a:srgbClr val="F59E0B"/>
           </a:solidFill>
           <a:ln>
             <a:solidFill>
-              <a:srgbClr val="10B981"/>
+              <a:srgbClr val="F59E0B"/>
             </a:solidFill>
           </a:ln>
         </p:spPr>
@@ -4082,13 +4564,13 @@
       </p:sp>
       <p:sp>
         <p:nvSpPr>
-          <p:cNvPr id="17" name="TextBox 16"/>
+          <p:cNvPr id="29" name="TextBox 28"/>
           <p:cNvSpPr txBox="1"/>
           <p:nvPr/>
         </p:nvSpPr>
         <p:spPr>
           <a:xfrm>
-            <a:off x="932688" y="4005072"/>
+            <a:off x="6345936" y="4105656"/>
             <a:ext cx="438912" cy="420624"/>
           </a:xfrm>
           <a:prstGeom prst="rect">
@@ -4110,21 +4592,21 @@
                 </a:solidFill>
                 <a:latin typeface="Arial"/>
               </a:rPr>
-              <a:t>2</a:t>
-            </a:r>
-          </a:p>
-        </p:txBody>
-      </p:sp>
-      <p:sp>
-        <p:nvSpPr>
-          <p:cNvPr id="18" name="TextBox 17"/>
+              <a:t>4</a:t>
+            </a:r>
+          </a:p>
+        </p:txBody>
+      </p:sp>
+      <p:sp>
+        <p:nvSpPr>
+          <p:cNvPr id="30" name="TextBox 29"/>
           <p:cNvSpPr txBox="1"/>
           <p:nvPr/>
         </p:nvSpPr>
         <p:spPr>
           <a:xfrm>
-            <a:off x="1536192" y="3959352"/>
-            <a:ext cx="9710928" cy="329184"/>
+            <a:off x="6949440" y="4059936"/>
+            <a:ext cx="4178808" cy="329184"/>
           </a:xfrm>
           <a:prstGeom prst="rect">
             <a:avLst/>
@@ -4141,25 +4623,25 @@
             <a:r>
               <a:rPr sz="1400" b="1">
                 <a:solidFill>
-                  <a:srgbClr val="10B981"/>
+                  <a:srgbClr val="F59E0B"/>
                 </a:solidFill>
                 <a:latin typeface="Arial"/>
               </a:rPr>
-              <a:t>Decision pressure</a:t>
-            </a:r>
-          </a:p>
-        </p:txBody>
-      </p:sp>
-      <p:sp>
-        <p:nvSpPr>
-          <p:cNvPr id="19" name="TextBox 18"/>
+              <a:t>Gemini Notebook deck</a:t>
+            </a:r>
+          </a:p>
+        </p:txBody>
+      </p:sp>
+      <p:sp>
+        <p:nvSpPr>
+          <p:cNvPr id="31" name="TextBox 30"/>
           <p:cNvSpPr txBox="1"/>
           <p:nvPr/>
         </p:nvSpPr>
         <p:spPr>
           <a:xfrm>
-            <a:off x="1536192" y="4343400"/>
-            <a:ext cx="9710928" cy="978408"/>
+            <a:off x="6949440" y="4443984"/>
+            <a:ext cx="4178808" cy="1133856"/>
           </a:xfrm>
           <a:prstGeom prst="rect">
             <a:avLst/>
@@ -4180,7 +4662,7 @@
                 </a:solidFill>
                 <a:latin typeface="Arial"/>
               </a:rPr>
-              <a:t>Rebuild the process with a reusable stage component, PowerPoint alignment tools and a consistent icon/SmartArt choice.</a:t>
+              <a:t>Create Presenter Slides for business stakeholders. Focus on the verified decision insight, use a concise professional style, include source-grounded comparisons and a final recommendation. Avoid claims not supported by selected sources…</a:t>
             </a:r>
           </a:p>
         </p:txBody>
@@ -4263,6 +4745,486 @@
             <a:avLst/>
           </a:prstGeom>
           <a:solidFill>
+            <a:srgbClr val="1F6FEB"/>
+          </a:solidFill>
+          <a:ln>
+            <a:solidFill>
+              <a:srgbClr val="1F6FEB"/>
+            </a:solidFill>
+          </a:ln>
+        </p:spPr>
+        <p:style>
+          <a:lnRef idx="1">
+            <a:schemeClr val="accent1"/>
+          </a:lnRef>
+          <a:fillRef idx="3">
+            <a:schemeClr val="accent1"/>
+          </a:fillRef>
+          <a:effectRef idx="2">
+            <a:schemeClr val="accent1"/>
+          </a:effectRef>
+          <a:fontRef idx="minor">
+            <a:schemeClr val="lt1"/>
+          </a:fontRef>
+        </p:style>
+        <p:txBody>
+          <a:bodyPr rtlCol="0" anchor="ctr"/>
+          <a:lstStyle/>
+          <a:p>
+            <a:pPr algn="ctr"/>
+          </a:p>
+        </p:txBody>
+      </p:sp>
+      <p:sp>
+        <p:nvSpPr>
+          <p:cNvPr id="4" name="TextBox 3"/>
+          <p:cNvSpPr txBox="1"/>
+          <p:nvPr/>
+        </p:nvSpPr>
+        <p:spPr>
+          <a:xfrm>
+            <a:off x="658368" y="384048"/>
+            <a:ext cx="10789920" cy="320040"/>
+          </a:xfrm>
+          <a:prstGeom prst="rect">
+            <a:avLst/>
+          </a:prstGeom>
+          <a:noFill/>
+        </p:spPr>
+        <p:txBody>
+          <a:bodyPr wrap="square" anchor="t">
+            <a:spAutoFit/>
+          </a:bodyPr>
+          <a:lstStyle/>
+          <a:p>
+            <a:pPr algn="l"/>
+            <a:r>
+              <a:rPr sz="1100" b="1">
+                <a:solidFill>
+                  <a:srgbClr val="1F6FEB"/>
+                </a:solidFill>
+                <a:latin typeface="Arial"/>
+              </a:rPr>
+              <a:t>ACTIVITY 04 · CONTEXT</a:t>
+            </a:r>
+          </a:p>
+        </p:txBody>
+      </p:sp>
+      <p:sp>
+        <p:nvSpPr>
+          <p:cNvPr id="5" name="TextBox 4"/>
+          <p:cNvSpPr txBox="1"/>
+          <p:nvPr/>
+        </p:nvSpPr>
+        <p:spPr>
+          <a:xfrm>
+            <a:off x="658368" y="749808"/>
+            <a:ext cx="10789920" cy="658368"/>
+          </a:xfrm>
+          <a:prstGeom prst="rect">
+            <a:avLst/>
+          </a:prstGeom>
+          <a:noFill/>
+        </p:spPr>
+        <p:txBody>
+          <a:bodyPr wrap="square" anchor="t">
+            <a:spAutoFit/>
+          </a:bodyPr>
+          <a:lstStyle/>
+          <a:p>
+            <a:pPr algn="l"/>
+            <a:r>
+              <a:rPr sz="2700" b="1">
+                <a:solidFill>
+                  <a:srgbClr val="161B26"/>
+                </a:solidFill>
+                <a:latin typeface="Arial"/>
+              </a:rPr>
+              <a:t>The Scenario</a:t>
+            </a:r>
+          </a:p>
+        </p:txBody>
+      </p:sp>
+      <p:sp>
+        <p:nvSpPr>
+          <p:cNvPr id="6" name="Rectangle 5"/>
+          <p:cNvSpPr/>
+          <p:nvPr/>
+        </p:nvSpPr>
+        <p:spPr>
+          <a:xfrm>
+            <a:off x="658368" y="1444752"/>
+            <a:ext cx="10881360" cy="18288"/>
+          </a:xfrm>
+          <a:prstGeom prst="rect">
+            <a:avLst/>
+          </a:prstGeom>
+          <a:solidFill>
+            <a:srgbClr val="E2E8F0"/>
+          </a:solidFill>
+          <a:ln>
+            <a:solidFill>
+              <a:srgbClr val="E2E8F0"/>
+            </a:solidFill>
+          </a:ln>
+        </p:spPr>
+        <p:style>
+          <a:lnRef idx="1">
+            <a:schemeClr val="accent1"/>
+          </a:lnRef>
+          <a:fillRef idx="3">
+            <a:schemeClr val="accent1"/>
+          </a:fillRef>
+          <a:effectRef idx="2">
+            <a:schemeClr val="accent1"/>
+          </a:effectRef>
+          <a:fontRef idx="minor">
+            <a:schemeClr val="lt1"/>
+          </a:fontRef>
+        </p:style>
+        <p:txBody>
+          <a:bodyPr rtlCol="0" anchor="ctr"/>
+          <a:lstStyle/>
+          <a:p>
+            <a:pPr algn="ctr"/>
+          </a:p>
+        </p:txBody>
+      </p:sp>
+      <p:sp>
+        <p:nvSpPr>
+          <p:cNvPr id="7" name="TextBox 6"/>
+          <p:cNvSpPr txBox="1"/>
+          <p:nvPr/>
+        </p:nvSpPr>
+        <p:spPr>
+          <a:xfrm>
+            <a:off x="658368" y="6473952"/>
+            <a:ext cx="9875520" cy="201168"/>
+          </a:xfrm>
+          <a:prstGeom prst="rect">
+            <a:avLst/>
+          </a:prstGeom>
+          <a:noFill/>
+        </p:spPr>
+        <p:txBody>
+          <a:bodyPr wrap="square" anchor="t">
+            <a:spAutoFit/>
+          </a:bodyPr>
+          <a:lstStyle/>
+          <a:p>
+            <a:pPr algn="l"/>
+            <a:r>
+              <a:rPr sz="800" b="0">
+                <a:solidFill>
+                  <a:srgbClr val="5B6372"/>
+                </a:solidFill>
+                <a:latin typeface="Arial"/>
+              </a:rPr>
+              <a:t>TGS-2026064178 · ACTIVITY PRACTICE · Tertiary Infotech Academy Pte Ltd</a:t>
+            </a:r>
+          </a:p>
+        </p:txBody>
+      </p:sp>
+      <p:sp>
+        <p:nvSpPr>
+          <p:cNvPr id="8" name="Rounded Rectangle 7"/>
+          <p:cNvSpPr/>
+          <p:nvPr/>
+        </p:nvSpPr>
+        <p:spPr>
+          <a:xfrm>
+            <a:off x="731520" y="1783080"/>
+            <a:ext cx="10698480" cy="1691640"/>
+          </a:xfrm>
+          <a:prstGeom prst="roundRect">
+            <a:avLst/>
+          </a:prstGeom>
+          <a:solidFill>
+            <a:srgbClr val="F5F8FC"/>
+          </a:solidFill>
+          <a:ln>
+            <a:solidFill>
+              <a:srgbClr val="E2E8F0"/>
+            </a:solidFill>
+          </a:ln>
+        </p:spPr>
+        <p:style>
+          <a:lnRef idx="1">
+            <a:schemeClr val="accent1"/>
+          </a:lnRef>
+          <a:fillRef idx="3">
+            <a:schemeClr val="accent1"/>
+          </a:fillRef>
+          <a:effectRef idx="2">
+            <a:schemeClr val="accent1"/>
+          </a:effectRef>
+          <a:fontRef idx="minor">
+            <a:schemeClr val="lt1"/>
+          </a:fontRef>
+        </p:style>
+        <p:txBody>
+          <a:bodyPr rtlCol="0" anchor="ctr"/>
+          <a:lstStyle/>
+          <a:p>
+            <a:pPr algn="ctr"/>
+          </a:p>
+        </p:txBody>
+      </p:sp>
+      <p:sp>
+        <p:nvSpPr>
+          <p:cNvPr id="9" name="Rectangle 8"/>
+          <p:cNvSpPr/>
+          <p:nvPr/>
+        </p:nvSpPr>
+        <p:spPr>
+          <a:xfrm>
+            <a:off x="731520" y="1783080"/>
+            <a:ext cx="73152" cy="1691640"/>
+          </a:xfrm>
+          <a:prstGeom prst="rect">
+            <a:avLst/>
+          </a:prstGeom>
+          <a:solidFill>
+            <a:srgbClr val="1F6FEB"/>
+          </a:solidFill>
+          <a:ln>
+            <a:solidFill>
+              <a:srgbClr val="1F6FEB"/>
+            </a:solidFill>
+          </a:ln>
+        </p:spPr>
+        <p:style>
+          <a:lnRef idx="1">
+            <a:schemeClr val="accent1"/>
+          </a:lnRef>
+          <a:fillRef idx="3">
+            <a:schemeClr val="accent1"/>
+          </a:fillRef>
+          <a:effectRef idx="2">
+            <a:schemeClr val="accent1"/>
+          </a:effectRef>
+          <a:fontRef idx="minor">
+            <a:schemeClr val="lt1"/>
+          </a:fontRef>
+        </p:style>
+        <p:txBody>
+          <a:bodyPr rtlCol="0" anchor="ctr"/>
+          <a:lstStyle/>
+          <a:p>
+            <a:pPr algn="ctr"/>
+          </a:p>
+        </p:txBody>
+      </p:sp>
+      <p:sp>
+        <p:nvSpPr>
+          <p:cNvPr id="10" name="Rounded Rectangle 9"/>
+          <p:cNvSpPr/>
+          <p:nvPr/>
+        </p:nvSpPr>
+        <p:spPr>
+          <a:xfrm>
+            <a:off x="932688" y="2002536"/>
+            <a:ext cx="438912" cy="438912"/>
+          </a:xfrm>
+          <a:prstGeom prst="roundRect">
+            <a:avLst/>
+          </a:prstGeom>
+          <a:solidFill>
+            <a:srgbClr val="1F6FEB"/>
+          </a:solidFill>
+          <a:ln>
+            <a:solidFill>
+              <a:srgbClr val="1F6FEB"/>
+            </a:solidFill>
+          </a:ln>
+        </p:spPr>
+        <p:style>
+          <a:lnRef idx="1">
+            <a:schemeClr val="accent1"/>
+          </a:lnRef>
+          <a:fillRef idx="3">
+            <a:schemeClr val="accent1"/>
+          </a:fillRef>
+          <a:effectRef idx="2">
+            <a:schemeClr val="accent1"/>
+          </a:effectRef>
+          <a:fontRef idx="minor">
+            <a:schemeClr val="lt1"/>
+          </a:fontRef>
+        </p:style>
+        <p:txBody>
+          <a:bodyPr rtlCol="0" anchor="ctr"/>
+          <a:lstStyle/>
+          <a:p>
+            <a:pPr algn="ctr"/>
+          </a:p>
+        </p:txBody>
+      </p:sp>
+      <p:sp>
+        <p:nvSpPr>
+          <p:cNvPr id="11" name="TextBox 10"/>
+          <p:cNvSpPr txBox="1"/>
+          <p:nvPr/>
+        </p:nvSpPr>
+        <p:spPr>
+          <a:xfrm>
+            <a:off x="932688" y="2011680"/>
+            <a:ext cx="438912" cy="420624"/>
+          </a:xfrm>
+          <a:prstGeom prst="rect">
+            <a:avLst/>
+          </a:prstGeom>
+          <a:noFill/>
+        </p:spPr>
+        <p:txBody>
+          <a:bodyPr wrap="square" anchor="ctr">
+            <a:spAutoFit/>
+          </a:bodyPr>
+          <a:lstStyle/>
+          <a:p>
+            <a:pPr algn="ctr"/>
+            <a:r>
+              <a:rPr sz="1400" b="1">
+                <a:solidFill>
+                  <a:srgbClr val="FFFFFF"/>
+                </a:solidFill>
+                <a:latin typeface="Arial"/>
+              </a:rPr>
+              <a:t>1</a:t>
+            </a:r>
+          </a:p>
+        </p:txBody>
+      </p:sp>
+      <p:sp>
+        <p:nvSpPr>
+          <p:cNvPr id="12" name="TextBox 11"/>
+          <p:cNvSpPr txBox="1"/>
+          <p:nvPr/>
+        </p:nvSpPr>
+        <p:spPr>
+          <a:xfrm>
+            <a:off x="1536192" y="1965960"/>
+            <a:ext cx="9710928" cy="329184"/>
+          </a:xfrm>
+          <a:prstGeom prst="rect">
+            <a:avLst/>
+          </a:prstGeom>
+          <a:noFill/>
+        </p:spPr>
+        <p:txBody>
+          <a:bodyPr wrap="square" anchor="t">
+            <a:spAutoFit/>
+          </a:bodyPr>
+          <a:lstStyle/>
+          <a:p>
+            <a:pPr algn="l"/>
+            <a:r>
+              <a:rPr sz="1400" b="1">
+                <a:solidFill>
+                  <a:srgbClr val="1F6FEB"/>
+                </a:solidFill>
+                <a:latin typeface="Arial"/>
+              </a:rPr>
+              <a:t>Context</a:t>
+            </a:r>
+          </a:p>
+        </p:txBody>
+      </p:sp>
+      <p:sp>
+        <p:nvSpPr>
+          <p:cNvPr id="13" name="TextBox 12"/>
+          <p:cNvSpPr txBox="1"/>
+          <p:nvPr/>
+        </p:nvSpPr>
+        <p:spPr>
+          <a:xfrm>
+            <a:off x="1536192" y="2350008"/>
+            <a:ext cx="9710928" cy="978408"/>
+          </a:xfrm>
+          <a:prstGeom prst="rect">
+            <a:avLst/>
+          </a:prstGeom>
+          <a:noFill/>
+        </p:spPr>
+        <p:txBody>
+          <a:bodyPr wrap="square" anchor="t">
+            <a:spAutoFit/>
+          </a:bodyPr>
+          <a:lstStyle/>
+          <a:p>
+            <a:pPr algn="l"/>
+            <a:r>
+              <a:rPr sz="1150" b="0">
+                <a:solidFill>
+                  <a:srgbClr val="161B26"/>
+                </a:solidFill>
+                <a:latin typeface="Arial"/>
+              </a:rPr>
+              <a:t>Northstar needs an editable five-stage process infographic for store managers. Use the supplied AI-generated sustainability asset sheet or regenerate a new set from the recorded text-to-image prompt.</a:t>
+            </a:r>
+          </a:p>
+        </p:txBody>
+      </p:sp>
+      <p:sp>
+        <p:nvSpPr>
+          <p:cNvPr id="14" name="Rounded Rectangle 13"/>
+          <p:cNvSpPr/>
+          <p:nvPr/>
+        </p:nvSpPr>
+        <p:spPr>
+          <a:xfrm>
+            <a:off x="731520" y="3776472"/>
+            <a:ext cx="10698480" cy="1691640"/>
+          </a:xfrm>
+          <a:prstGeom prst="roundRect">
+            <a:avLst/>
+          </a:prstGeom>
+          <a:solidFill>
+            <a:srgbClr val="F5F8FC"/>
+          </a:solidFill>
+          <a:ln>
+            <a:solidFill>
+              <a:srgbClr val="E2E8F0"/>
+            </a:solidFill>
+          </a:ln>
+        </p:spPr>
+        <p:style>
+          <a:lnRef idx="1">
+            <a:schemeClr val="accent1"/>
+          </a:lnRef>
+          <a:fillRef idx="3">
+            <a:schemeClr val="accent1"/>
+          </a:fillRef>
+          <a:effectRef idx="2">
+            <a:schemeClr val="accent1"/>
+          </a:effectRef>
+          <a:fontRef idx="minor">
+            <a:schemeClr val="lt1"/>
+          </a:fontRef>
+        </p:style>
+        <p:txBody>
+          <a:bodyPr rtlCol="0" anchor="ctr"/>
+          <a:lstStyle/>
+          <a:p>
+            <a:pPr algn="ctr"/>
+          </a:p>
+        </p:txBody>
+      </p:sp>
+      <p:sp>
+        <p:nvSpPr>
+          <p:cNvPr id="15" name="Rectangle 14"/>
+          <p:cNvSpPr/>
+          <p:nvPr/>
+        </p:nvSpPr>
+        <p:spPr>
+          <a:xfrm>
+            <a:off x="731520" y="3776472"/>
+            <a:ext cx="73152" cy="1691640"/>
+          </a:xfrm>
+          <a:prstGeom prst="rect">
+            <a:avLst/>
+          </a:prstGeom>
+          <a:solidFill>
             <a:srgbClr val="10B981"/>
           </a:solidFill>
           <a:ln>
@@ -4295,94 +5257,24 @@
       </p:sp>
       <p:sp>
         <p:nvSpPr>
-          <p:cNvPr id="4" name="TextBox 3"/>
-          <p:cNvSpPr txBox="1"/>
-          <p:nvPr/>
-        </p:nvSpPr>
-        <p:spPr>
-          <a:xfrm>
-            <a:off x="658368" y="384048"/>
-            <a:ext cx="10789920" cy="320040"/>
-          </a:xfrm>
-          <a:prstGeom prst="rect">
-            <a:avLst/>
-          </a:prstGeom>
-          <a:noFill/>
-        </p:spPr>
-        <p:txBody>
-          <a:bodyPr wrap="square" anchor="t">
-            <a:spAutoFit/>
-          </a:bodyPr>
-          <a:lstStyle/>
-          <a:p>
-            <a:pPr algn="l"/>
-            <a:r>
-              <a:rPr sz="1100" b="1">
-                <a:solidFill>
-                  <a:srgbClr val="10B981"/>
-                </a:solidFill>
-                <a:latin typeface="Arial"/>
-              </a:rPr>
-              <a:t>ACTIVITY 04 · FRAMEWORK</a:t>
-            </a:r>
-          </a:p>
-        </p:txBody>
-      </p:sp>
-      <p:sp>
-        <p:nvSpPr>
-          <p:cNvPr id="5" name="TextBox 4"/>
-          <p:cNvSpPr txBox="1"/>
-          <p:nvPr/>
-        </p:nvSpPr>
-        <p:spPr>
-          <a:xfrm>
-            <a:off x="658368" y="749808"/>
-            <a:ext cx="10789920" cy="658368"/>
-          </a:xfrm>
-          <a:prstGeom prst="rect">
-            <a:avLst/>
-          </a:prstGeom>
-          <a:noFill/>
-        </p:spPr>
-        <p:txBody>
-          <a:bodyPr wrap="square" anchor="t">
-            <a:spAutoFit/>
-          </a:bodyPr>
-          <a:lstStyle/>
-          <a:p>
-            <a:pPr algn="l"/>
-            <a:r>
-              <a:rPr sz="2700" b="1">
-                <a:solidFill>
-                  <a:srgbClr val="161B26"/>
-                </a:solidFill>
-                <a:latin typeface="Arial"/>
-              </a:rPr>
-              <a:t>Construct the Visual Grammar</a:t>
-            </a:r>
-          </a:p>
-        </p:txBody>
-      </p:sp>
-      <p:sp>
-        <p:nvSpPr>
-          <p:cNvPr id="6" name="Rectangle 5"/>
+          <p:cNvPr id="16" name="Rounded Rectangle 15"/>
           <p:cNvSpPr/>
           <p:nvPr/>
         </p:nvSpPr>
         <p:spPr>
           <a:xfrm>
-            <a:off x="658368" y="1444752"/>
-            <a:ext cx="10881360" cy="18288"/>
-          </a:xfrm>
-          <a:prstGeom prst="rect">
-            <a:avLst/>
-          </a:prstGeom>
-          <a:solidFill>
-            <a:srgbClr val="E2E8F0"/>
+            <a:off x="932688" y="3995928"/>
+            <a:ext cx="438912" cy="438912"/>
+          </a:xfrm>
+          <a:prstGeom prst="roundRect">
+            <a:avLst/>
+          </a:prstGeom>
+          <a:solidFill>
+            <a:srgbClr val="10B981"/>
           </a:solidFill>
           <a:ln>
             <a:solidFill>
-              <a:srgbClr val="E2E8F0"/>
+              <a:srgbClr val="10B981"/>
             </a:solidFill>
           </a:ln>
         </p:spPr>
@@ -4410,14 +5302,49 @@
       </p:sp>
       <p:sp>
         <p:nvSpPr>
-          <p:cNvPr id="7" name="TextBox 6"/>
+          <p:cNvPr id="17" name="TextBox 16"/>
           <p:cNvSpPr txBox="1"/>
           <p:nvPr/>
         </p:nvSpPr>
         <p:spPr>
           <a:xfrm>
-            <a:off x="658368" y="6473952"/>
-            <a:ext cx="9875520" cy="201168"/>
+            <a:off x="932688" y="4005072"/>
+            <a:ext cx="438912" cy="420624"/>
+          </a:xfrm>
+          <a:prstGeom prst="rect">
+            <a:avLst/>
+          </a:prstGeom>
+          <a:noFill/>
+        </p:spPr>
+        <p:txBody>
+          <a:bodyPr wrap="square" anchor="ctr">
+            <a:spAutoFit/>
+          </a:bodyPr>
+          <a:lstStyle/>
+          <a:p>
+            <a:pPr algn="ctr"/>
+            <a:r>
+              <a:rPr sz="1400" b="1">
+                <a:solidFill>
+                  <a:srgbClr val="FFFFFF"/>
+                </a:solidFill>
+                <a:latin typeface="Arial"/>
+              </a:rPr>
+              <a:t>2</a:t>
+            </a:r>
+          </a:p>
+        </p:txBody>
+      </p:sp>
+      <p:sp>
+        <p:nvSpPr>
+          <p:cNvPr id="18" name="TextBox 17"/>
+          <p:cNvSpPr txBox="1"/>
+          <p:nvPr/>
+        </p:nvSpPr>
+        <p:spPr>
+          <a:xfrm>
+            <a:off x="1536192" y="3959352"/>
+            <a:ext cx="9710928" cy="329184"/>
           </a:xfrm>
           <a:prstGeom prst="rect">
             <a:avLst/>
@@ -4432,197 +5359,27 @@
           <a:p>
             <a:pPr algn="l"/>
             <a:r>
-              <a:rPr sz="800" b="0">
-                <a:solidFill>
-                  <a:srgbClr val="5B6372"/>
+              <a:rPr sz="1400" b="1">
+                <a:solidFill>
+                  <a:srgbClr val="10B981"/>
                 </a:solidFill>
                 <a:latin typeface="Arial"/>
               </a:rPr>
-              <a:t>TGS-2024048310 · ACTIVITY PRACTICE · Tertiary Infotech Academy Pte Ltd</a:t>
-            </a:r>
-          </a:p>
-        </p:txBody>
-      </p:sp>
-      <p:sp>
-        <p:nvSpPr>
-          <p:cNvPr id="8" name="Rounded Rectangle 7"/>
-          <p:cNvSpPr/>
-          <p:nvPr/>
-        </p:nvSpPr>
-        <p:spPr>
-          <a:xfrm>
-            <a:off x="685800" y="1920240"/>
-            <a:ext cx="1997049" cy="3566160"/>
-          </a:xfrm>
-          <a:prstGeom prst="roundRect">
-            <a:avLst/>
-          </a:prstGeom>
-          <a:solidFill>
-            <a:srgbClr val="F5F8FC"/>
-          </a:solidFill>
-          <a:ln>
-            <a:solidFill>
-              <a:srgbClr val="E2E8F0"/>
-            </a:solidFill>
-          </a:ln>
-        </p:spPr>
-        <p:style>
-          <a:lnRef idx="1">
-            <a:schemeClr val="accent1"/>
-          </a:lnRef>
-          <a:fillRef idx="3">
-            <a:schemeClr val="accent1"/>
-          </a:fillRef>
-          <a:effectRef idx="2">
-            <a:schemeClr val="accent1"/>
-          </a:effectRef>
-          <a:fontRef idx="minor">
-            <a:schemeClr val="lt1"/>
-          </a:fontRef>
-        </p:style>
-        <p:txBody>
-          <a:bodyPr rtlCol="0" anchor="ctr"/>
-          <a:lstStyle/>
-          <a:p>
-            <a:pPr algn="ctr"/>
-          </a:p>
-        </p:txBody>
-      </p:sp>
-      <p:sp>
-        <p:nvSpPr>
-          <p:cNvPr id="9" name="Rectangle 8"/>
-          <p:cNvSpPr/>
-          <p:nvPr/>
-        </p:nvSpPr>
-        <p:spPr>
-          <a:xfrm>
-            <a:off x="685800" y="1920240"/>
-            <a:ext cx="73152" cy="3566160"/>
-          </a:xfrm>
-          <a:prstGeom prst="rect">
-            <a:avLst/>
-          </a:prstGeom>
-          <a:solidFill>
-            <a:srgbClr val="1F6FEB"/>
-          </a:solidFill>
-          <a:ln>
-            <a:solidFill>
-              <a:srgbClr val="1F6FEB"/>
-            </a:solidFill>
-          </a:ln>
-        </p:spPr>
-        <p:style>
-          <a:lnRef idx="1">
-            <a:schemeClr val="accent1"/>
-          </a:lnRef>
-          <a:fillRef idx="3">
-            <a:schemeClr val="accent1"/>
-          </a:fillRef>
-          <a:effectRef idx="2">
-            <a:schemeClr val="accent1"/>
-          </a:effectRef>
-          <a:fontRef idx="minor">
-            <a:schemeClr val="lt1"/>
-          </a:fontRef>
-        </p:style>
-        <p:txBody>
-          <a:bodyPr rtlCol="0" anchor="ctr"/>
-          <a:lstStyle/>
-          <a:p>
-            <a:pPr algn="ctr"/>
-          </a:p>
-        </p:txBody>
-      </p:sp>
-      <p:sp>
-        <p:nvSpPr>
-          <p:cNvPr id="10" name="Rounded Rectangle 9"/>
-          <p:cNvSpPr/>
-          <p:nvPr/>
-        </p:nvSpPr>
-        <p:spPr>
-          <a:xfrm>
-            <a:off x="886968" y="2139696"/>
-            <a:ext cx="438912" cy="438912"/>
-          </a:xfrm>
-          <a:prstGeom prst="roundRect">
-            <a:avLst/>
-          </a:prstGeom>
-          <a:solidFill>
-            <a:srgbClr val="1F6FEB"/>
-          </a:solidFill>
-          <a:ln>
-            <a:solidFill>
-              <a:srgbClr val="1F6FEB"/>
-            </a:solidFill>
-          </a:ln>
-        </p:spPr>
-        <p:style>
-          <a:lnRef idx="1">
-            <a:schemeClr val="accent1"/>
-          </a:lnRef>
-          <a:fillRef idx="3">
-            <a:schemeClr val="accent1"/>
-          </a:fillRef>
-          <a:effectRef idx="2">
-            <a:schemeClr val="accent1"/>
-          </a:effectRef>
-          <a:fontRef idx="minor">
-            <a:schemeClr val="lt1"/>
-          </a:fontRef>
-        </p:style>
-        <p:txBody>
-          <a:bodyPr rtlCol="0" anchor="ctr"/>
-          <a:lstStyle/>
-          <a:p>
-            <a:pPr algn="ctr"/>
-          </a:p>
-        </p:txBody>
-      </p:sp>
-      <p:sp>
-        <p:nvSpPr>
-          <p:cNvPr id="11" name="TextBox 10"/>
+              <a:t>Decision pressure</a:t>
+            </a:r>
+          </a:p>
+        </p:txBody>
+      </p:sp>
+      <p:sp>
+        <p:nvSpPr>
+          <p:cNvPr id="19" name="TextBox 18"/>
           <p:cNvSpPr txBox="1"/>
           <p:nvPr/>
         </p:nvSpPr>
         <p:spPr>
           <a:xfrm>
-            <a:off x="886968" y="2148840"/>
-            <a:ext cx="438912" cy="420624"/>
-          </a:xfrm>
-          <a:prstGeom prst="rect">
-            <a:avLst/>
-          </a:prstGeom>
-          <a:noFill/>
-        </p:spPr>
-        <p:txBody>
-          <a:bodyPr wrap="square" anchor="ctr">
-            <a:spAutoFit/>
-          </a:bodyPr>
-          <a:lstStyle/>
-          <a:p>
-            <a:pPr algn="ctr"/>
-            <a:r>
-              <a:rPr sz="1400" b="1">
-                <a:solidFill>
-                  <a:srgbClr val="FFFFFF"/>
-                </a:solidFill>
-                <a:latin typeface="Arial"/>
-              </a:rPr>
-              <a:t>1</a:t>
-            </a:r>
-          </a:p>
-        </p:txBody>
-      </p:sp>
-      <p:sp>
-        <p:nvSpPr>
-          <p:cNvPr id="12" name="TextBox 11"/>
-          <p:cNvSpPr txBox="1"/>
-          <p:nvPr/>
-        </p:nvSpPr>
-        <p:spPr>
-          <a:xfrm>
-            <a:off x="1490472" y="2103120"/>
-            <a:ext cx="1009497" cy="329184"/>
+            <a:off x="1536192" y="4343400"/>
+            <a:ext cx="9710928" cy="978408"/>
           </a:xfrm>
           <a:prstGeom prst="rect">
             <a:avLst/>
@@ -4637,1008 +5394,13 @@
           <a:p>
             <a:pPr algn="l"/>
             <a:r>
-              <a:rPr sz="1400" b="1">
-                <a:solidFill>
-                  <a:srgbClr val="1F6FEB"/>
+              <a:rPr sz="1150" b="0">
+                <a:solidFill>
+                  <a:srgbClr val="161B26"/>
                 </a:solidFill>
                 <a:latin typeface="Arial"/>
               </a:rPr>
-              <a:t>Grid</a:t>
-            </a:r>
-          </a:p>
-        </p:txBody>
-      </p:sp>
-      <p:sp>
-        <p:nvSpPr>
-          <p:cNvPr id="13" name="TextBox 12"/>
-          <p:cNvSpPr txBox="1"/>
-          <p:nvPr/>
-        </p:nvSpPr>
-        <p:spPr>
-          <a:xfrm>
-            <a:off x="1490472" y="2487168"/>
-            <a:ext cx="1009497" cy="2852928"/>
-          </a:xfrm>
-          <a:prstGeom prst="rect">
-            <a:avLst/>
-          </a:prstGeom>
-          <a:noFill/>
-        </p:spPr>
-        <p:txBody>
-          <a:bodyPr wrap="square" anchor="t">
-            <a:spAutoFit/>
-          </a:bodyPr>
-          <a:lstStyle/>
-          <a:p>
-            <a:pPr algn="l"/>
-            <a:r>
-              <a:rPr sz="1150" b="0">
-                <a:solidFill>
-                  <a:srgbClr val="161B26"/>
-                </a:solidFill>
-                <a:latin typeface="Arial"/>
-              </a:rPr>
-              <a:t>Set guides, margins and safe areas.</a:t>
-            </a:r>
-          </a:p>
-        </p:txBody>
-      </p:sp>
-      <p:sp>
-        <p:nvSpPr>
-          <p:cNvPr id="14" name="Rounded Rectangle 13"/>
-          <p:cNvSpPr/>
-          <p:nvPr/>
-        </p:nvSpPr>
-        <p:spPr>
-          <a:xfrm>
-            <a:off x="2884017" y="1920240"/>
-            <a:ext cx="1997049" cy="3566160"/>
-          </a:xfrm>
-          <a:prstGeom prst="roundRect">
-            <a:avLst/>
-          </a:prstGeom>
-          <a:solidFill>
-            <a:srgbClr val="F5F8FC"/>
-          </a:solidFill>
-          <a:ln>
-            <a:solidFill>
-              <a:srgbClr val="E2E8F0"/>
-            </a:solidFill>
-          </a:ln>
-        </p:spPr>
-        <p:style>
-          <a:lnRef idx="1">
-            <a:schemeClr val="accent1"/>
-          </a:lnRef>
-          <a:fillRef idx="3">
-            <a:schemeClr val="accent1"/>
-          </a:fillRef>
-          <a:effectRef idx="2">
-            <a:schemeClr val="accent1"/>
-          </a:effectRef>
-          <a:fontRef idx="minor">
-            <a:schemeClr val="lt1"/>
-          </a:fontRef>
-        </p:style>
-        <p:txBody>
-          <a:bodyPr rtlCol="0" anchor="ctr"/>
-          <a:lstStyle/>
-          <a:p>
-            <a:pPr algn="ctr"/>
-          </a:p>
-        </p:txBody>
-      </p:sp>
-      <p:sp>
-        <p:nvSpPr>
-          <p:cNvPr id="15" name="Rectangle 14"/>
-          <p:cNvSpPr/>
-          <p:nvPr/>
-        </p:nvSpPr>
-        <p:spPr>
-          <a:xfrm>
-            <a:off x="2884017" y="1920240"/>
-            <a:ext cx="73152" cy="3566160"/>
-          </a:xfrm>
-          <a:prstGeom prst="rect">
-            <a:avLst/>
-          </a:prstGeom>
-          <a:solidFill>
-            <a:srgbClr val="10B981"/>
-          </a:solidFill>
-          <a:ln>
-            <a:solidFill>
-              <a:srgbClr val="10B981"/>
-            </a:solidFill>
-          </a:ln>
-        </p:spPr>
-        <p:style>
-          <a:lnRef idx="1">
-            <a:schemeClr val="accent1"/>
-          </a:lnRef>
-          <a:fillRef idx="3">
-            <a:schemeClr val="accent1"/>
-          </a:fillRef>
-          <a:effectRef idx="2">
-            <a:schemeClr val="accent1"/>
-          </a:effectRef>
-          <a:fontRef idx="minor">
-            <a:schemeClr val="lt1"/>
-          </a:fontRef>
-        </p:style>
-        <p:txBody>
-          <a:bodyPr rtlCol="0" anchor="ctr"/>
-          <a:lstStyle/>
-          <a:p>
-            <a:pPr algn="ctr"/>
-          </a:p>
-        </p:txBody>
-      </p:sp>
-      <p:sp>
-        <p:nvSpPr>
-          <p:cNvPr id="16" name="Rounded Rectangle 15"/>
-          <p:cNvSpPr/>
-          <p:nvPr/>
-        </p:nvSpPr>
-        <p:spPr>
-          <a:xfrm>
-            <a:off x="3085185" y="2139696"/>
-            <a:ext cx="438912" cy="438912"/>
-          </a:xfrm>
-          <a:prstGeom prst="roundRect">
-            <a:avLst/>
-          </a:prstGeom>
-          <a:solidFill>
-            <a:srgbClr val="10B981"/>
-          </a:solidFill>
-          <a:ln>
-            <a:solidFill>
-              <a:srgbClr val="10B981"/>
-            </a:solidFill>
-          </a:ln>
-        </p:spPr>
-        <p:style>
-          <a:lnRef idx="1">
-            <a:schemeClr val="accent1"/>
-          </a:lnRef>
-          <a:fillRef idx="3">
-            <a:schemeClr val="accent1"/>
-          </a:fillRef>
-          <a:effectRef idx="2">
-            <a:schemeClr val="accent1"/>
-          </a:effectRef>
-          <a:fontRef idx="minor">
-            <a:schemeClr val="lt1"/>
-          </a:fontRef>
-        </p:style>
-        <p:txBody>
-          <a:bodyPr rtlCol="0" anchor="ctr"/>
-          <a:lstStyle/>
-          <a:p>
-            <a:pPr algn="ctr"/>
-          </a:p>
-        </p:txBody>
-      </p:sp>
-      <p:sp>
-        <p:nvSpPr>
-          <p:cNvPr id="17" name="TextBox 16"/>
-          <p:cNvSpPr txBox="1"/>
-          <p:nvPr/>
-        </p:nvSpPr>
-        <p:spPr>
-          <a:xfrm>
-            <a:off x="3085185" y="2148840"/>
-            <a:ext cx="438912" cy="420624"/>
-          </a:xfrm>
-          <a:prstGeom prst="rect">
-            <a:avLst/>
-          </a:prstGeom>
-          <a:noFill/>
-        </p:spPr>
-        <p:txBody>
-          <a:bodyPr wrap="square" anchor="ctr">
-            <a:spAutoFit/>
-          </a:bodyPr>
-          <a:lstStyle/>
-          <a:p>
-            <a:pPr algn="ctr"/>
-            <a:r>
-              <a:rPr sz="1400" b="1">
-                <a:solidFill>
-                  <a:srgbClr val="FFFFFF"/>
-                </a:solidFill>
-                <a:latin typeface="Arial"/>
-              </a:rPr>
-              <a:t>2</a:t>
-            </a:r>
-          </a:p>
-        </p:txBody>
-      </p:sp>
-      <p:sp>
-        <p:nvSpPr>
-          <p:cNvPr id="18" name="TextBox 17"/>
-          <p:cNvSpPr txBox="1"/>
-          <p:nvPr/>
-        </p:nvSpPr>
-        <p:spPr>
-          <a:xfrm>
-            <a:off x="3688689" y="2103120"/>
-            <a:ext cx="1009497" cy="329184"/>
-          </a:xfrm>
-          <a:prstGeom prst="rect">
-            <a:avLst/>
-          </a:prstGeom>
-          <a:noFill/>
-        </p:spPr>
-        <p:txBody>
-          <a:bodyPr wrap="square" anchor="t">
-            <a:spAutoFit/>
-          </a:bodyPr>
-          <a:lstStyle/>
-          <a:p>
-            <a:pPr algn="l"/>
-            <a:r>
-              <a:rPr sz="1400" b="1">
-                <a:solidFill>
-                  <a:srgbClr val="10B981"/>
-                </a:solidFill>
-                <a:latin typeface="Arial"/>
-              </a:rPr>
-              <a:t>Shapes</a:t>
-            </a:r>
-          </a:p>
-        </p:txBody>
-      </p:sp>
-      <p:sp>
-        <p:nvSpPr>
-          <p:cNvPr id="19" name="TextBox 18"/>
-          <p:cNvSpPr txBox="1"/>
-          <p:nvPr/>
-        </p:nvSpPr>
-        <p:spPr>
-          <a:xfrm>
-            <a:off x="3688689" y="2487168"/>
-            <a:ext cx="1009497" cy="2852928"/>
-          </a:xfrm>
-          <a:prstGeom prst="rect">
-            <a:avLst/>
-          </a:prstGeom>
-          <a:noFill/>
-        </p:spPr>
-        <p:txBody>
-          <a:bodyPr wrap="square" anchor="t">
-            <a:spAutoFit/>
-          </a:bodyPr>
-          <a:lstStyle/>
-          <a:p>
-            <a:pPr algn="l"/>
-            <a:r>
-              <a:rPr sz="1150" b="0">
-                <a:solidFill>
-                  <a:srgbClr val="161B26"/>
-                </a:solidFill>
-                <a:latin typeface="Arial"/>
-              </a:rPr>
-              <a:t>Create one stage component and duplicate it.</a:t>
-            </a:r>
-          </a:p>
-        </p:txBody>
-      </p:sp>
-      <p:sp>
-        <p:nvSpPr>
-          <p:cNvPr id="20" name="Rounded Rectangle 19"/>
-          <p:cNvSpPr/>
-          <p:nvPr/>
-        </p:nvSpPr>
-        <p:spPr>
-          <a:xfrm>
-            <a:off x="5082235" y="1920240"/>
-            <a:ext cx="1997049" cy="3566160"/>
-          </a:xfrm>
-          <a:prstGeom prst="roundRect">
-            <a:avLst/>
-          </a:prstGeom>
-          <a:solidFill>
-            <a:srgbClr val="F5F8FC"/>
-          </a:solidFill>
-          <a:ln>
-            <a:solidFill>
-              <a:srgbClr val="E2E8F0"/>
-            </a:solidFill>
-          </a:ln>
-        </p:spPr>
-        <p:style>
-          <a:lnRef idx="1">
-            <a:schemeClr val="accent1"/>
-          </a:lnRef>
-          <a:fillRef idx="3">
-            <a:schemeClr val="accent1"/>
-          </a:fillRef>
-          <a:effectRef idx="2">
-            <a:schemeClr val="accent1"/>
-          </a:effectRef>
-          <a:fontRef idx="minor">
-            <a:schemeClr val="lt1"/>
-          </a:fontRef>
-        </p:style>
-        <p:txBody>
-          <a:bodyPr rtlCol="0" anchor="ctr"/>
-          <a:lstStyle/>
-          <a:p>
-            <a:pPr algn="ctr"/>
-          </a:p>
-        </p:txBody>
-      </p:sp>
-      <p:sp>
-        <p:nvSpPr>
-          <p:cNvPr id="21" name="Rectangle 20"/>
-          <p:cNvSpPr/>
-          <p:nvPr/>
-        </p:nvSpPr>
-        <p:spPr>
-          <a:xfrm>
-            <a:off x="5082235" y="1920240"/>
-            <a:ext cx="73152" cy="3566160"/>
-          </a:xfrm>
-          <a:prstGeom prst="rect">
-            <a:avLst/>
-          </a:prstGeom>
-          <a:solidFill>
-            <a:srgbClr val="7C3AED"/>
-          </a:solidFill>
-          <a:ln>
-            <a:solidFill>
-              <a:srgbClr val="7C3AED"/>
-            </a:solidFill>
-          </a:ln>
-        </p:spPr>
-        <p:style>
-          <a:lnRef idx="1">
-            <a:schemeClr val="accent1"/>
-          </a:lnRef>
-          <a:fillRef idx="3">
-            <a:schemeClr val="accent1"/>
-          </a:fillRef>
-          <a:effectRef idx="2">
-            <a:schemeClr val="accent1"/>
-          </a:effectRef>
-          <a:fontRef idx="minor">
-            <a:schemeClr val="lt1"/>
-          </a:fontRef>
-        </p:style>
-        <p:txBody>
-          <a:bodyPr rtlCol="0" anchor="ctr"/>
-          <a:lstStyle/>
-          <a:p>
-            <a:pPr algn="ctr"/>
-          </a:p>
-        </p:txBody>
-      </p:sp>
-      <p:sp>
-        <p:nvSpPr>
-          <p:cNvPr id="22" name="Rounded Rectangle 21"/>
-          <p:cNvSpPr/>
-          <p:nvPr/>
-        </p:nvSpPr>
-        <p:spPr>
-          <a:xfrm>
-            <a:off x="5283403" y="2139696"/>
-            <a:ext cx="438912" cy="438912"/>
-          </a:xfrm>
-          <a:prstGeom prst="roundRect">
-            <a:avLst/>
-          </a:prstGeom>
-          <a:solidFill>
-            <a:srgbClr val="7C3AED"/>
-          </a:solidFill>
-          <a:ln>
-            <a:solidFill>
-              <a:srgbClr val="7C3AED"/>
-            </a:solidFill>
-          </a:ln>
-        </p:spPr>
-        <p:style>
-          <a:lnRef idx="1">
-            <a:schemeClr val="accent1"/>
-          </a:lnRef>
-          <a:fillRef idx="3">
-            <a:schemeClr val="accent1"/>
-          </a:fillRef>
-          <a:effectRef idx="2">
-            <a:schemeClr val="accent1"/>
-          </a:effectRef>
-          <a:fontRef idx="minor">
-            <a:schemeClr val="lt1"/>
-          </a:fontRef>
-        </p:style>
-        <p:txBody>
-          <a:bodyPr rtlCol="0" anchor="ctr"/>
-          <a:lstStyle/>
-          <a:p>
-            <a:pPr algn="ctr"/>
-          </a:p>
-        </p:txBody>
-      </p:sp>
-      <p:sp>
-        <p:nvSpPr>
-          <p:cNvPr id="23" name="TextBox 22"/>
-          <p:cNvSpPr txBox="1"/>
-          <p:nvPr/>
-        </p:nvSpPr>
-        <p:spPr>
-          <a:xfrm>
-            <a:off x="5283403" y="2148840"/>
-            <a:ext cx="438912" cy="420624"/>
-          </a:xfrm>
-          <a:prstGeom prst="rect">
-            <a:avLst/>
-          </a:prstGeom>
-          <a:noFill/>
-        </p:spPr>
-        <p:txBody>
-          <a:bodyPr wrap="square" anchor="ctr">
-            <a:spAutoFit/>
-          </a:bodyPr>
-          <a:lstStyle/>
-          <a:p>
-            <a:pPr algn="ctr"/>
-            <a:r>
-              <a:rPr sz="1400" b="1">
-                <a:solidFill>
-                  <a:srgbClr val="FFFFFF"/>
-                </a:solidFill>
-                <a:latin typeface="Arial"/>
-              </a:rPr>
-              <a:t>3</a:t>
-            </a:r>
-          </a:p>
-        </p:txBody>
-      </p:sp>
-      <p:sp>
-        <p:nvSpPr>
-          <p:cNvPr id="24" name="TextBox 23"/>
-          <p:cNvSpPr txBox="1"/>
-          <p:nvPr/>
-        </p:nvSpPr>
-        <p:spPr>
-          <a:xfrm>
-            <a:off x="5886907" y="2103120"/>
-            <a:ext cx="1009497" cy="329184"/>
-          </a:xfrm>
-          <a:prstGeom prst="rect">
-            <a:avLst/>
-          </a:prstGeom>
-          <a:noFill/>
-        </p:spPr>
-        <p:txBody>
-          <a:bodyPr wrap="square" anchor="t">
-            <a:spAutoFit/>
-          </a:bodyPr>
-          <a:lstStyle/>
-          <a:p>
-            <a:pPr algn="l"/>
-            <a:r>
-              <a:rPr sz="1400" b="1">
-                <a:solidFill>
-                  <a:srgbClr val="7C3AED"/>
-                </a:solidFill>
-                <a:latin typeface="Arial"/>
-              </a:rPr>
-              <a:t>Icons</a:t>
-            </a:r>
-          </a:p>
-        </p:txBody>
-      </p:sp>
-      <p:sp>
-        <p:nvSpPr>
-          <p:cNvPr id="25" name="TextBox 24"/>
-          <p:cNvSpPr txBox="1"/>
-          <p:nvPr/>
-        </p:nvSpPr>
-        <p:spPr>
-          <a:xfrm>
-            <a:off x="5886907" y="2487168"/>
-            <a:ext cx="1009497" cy="2852928"/>
-          </a:xfrm>
-          <a:prstGeom prst="rect">
-            <a:avLst/>
-          </a:prstGeom>
-          <a:noFill/>
-        </p:spPr>
-        <p:txBody>
-          <a:bodyPr wrap="square" anchor="t">
-            <a:spAutoFit/>
-          </a:bodyPr>
-          <a:lstStyle/>
-          <a:p>
-            <a:pPr algn="l"/>
-            <a:r>
-              <a:rPr sz="1150" b="0">
-                <a:solidFill>
-                  <a:srgbClr val="161B26"/>
-                </a:solidFill>
-                <a:latin typeface="Arial"/>
-              </a:rPr>
-              <a:t>Insert one consistent icon family.</a:t>
-            </a:r>
-          </a:p>
-        </p:txBody>
-      </p:sp>
-      <p:sp>
-        <p:nvSpPr>
-          <p:cNvPr id="26" name="Rounded Rectangle 25"/>
-          <p:cNvSpPr/>
-          <p:nvPr/>
-        </p:nvSpPr>
-        <p:spPr>
-          <a:xfrm>
-            <a:off x="7280452" y="1920240"/>
-            <a:ext cx="1997049" cy="3566160"/>
-          </a:xfrm>
-          <a:prstGeom prst="roundRect">
-            <a:avLst/>
-          </a:prstGeom>
-          <a:solidFill>
-            <a:srgbClr val="F5F8FC"/>
-          </a:solidFill>
-          <a:ln>
-            <a:solidFill>
-              <a:srgbClr val="E2E8F0"/>
-            </a:solidFill>
-          </a:ln>
-        </p:spPr>
-        <p:style>
-          <a:lnRef idx="1">
-            <a:schemeClr val="accent1"/>
-          </a:lnRef>
-          <a:fillRef idx="3">
-            <a:schemeClr val="accent1"/>
-          </a:fillRef>
-          <a:effectRef idx="2">
-            <a:schemeClr val="accent1"/>
-          </a:effectRef>
-          <a:fontRef idx="minor">
-            <a:schemeClr val="lt1"/>
-          </a:fontRef>
-        </p:style>
-        <p:txBody>
-          <a:bodyPr rtlCol="0" anchor="ctr"/>
-          <a:lstStyle/>
-          <a:p>
-            <a:pPr algn="ctr"/>
-          </a:p>
-        </p:txBody>
-      </p:sp>
-      <p:sp>
-        <p:nvSpPr>
-          <p:cNvPr id="27" name="Rectangle 26"/>
-          <p:cNvSpPr/>
-          <p:nvPr/>
-        </p:nvSpPr>
-        <p:spPr>
-          <a:xfrm>
-            <a:off x="7280452" y="1920240"/>
-            <a:ext cx="73152" cy="3566160"/>
-          </a:xfrm>
-          <a:prstGeom prst="rect">
-            <a:avLst/>
-          </a:prstGeom>
-          <a:solidFill>
-            <a:srgbClr val="F59E0B"/>
-          </a:solidFill>
-          <a:ln>
-            <a:solidFill>
-              <a:srgbClr val="F59E0B"/>
-            </a:solidFill>
-          </a:ln>
-        </p:spPr>
-        <p:style>
-          <a:lnRef idx="1">
-            <a:schemeClr val="accent1"/>
-          </a:lnRef>
-          <a:fillRef idx="3">
-            <a:schemeClr val="accent1"/>
-          </a:fillRef>
-          <a:effectRef idx="2">
-            <a:schemeClr val="accent1"/>
-          </a:effectRef>
-          <a:fontRef idx="minor">
-            <a:schemeClr val="lt1"/>
-          </a:fontRef>
-        </p:style>
-        <p:txBody>
-          <a:bodyPr rtlCol="0" anchor="ctr"/>
-          <a:lstStyle/>
-          <a:p>
-            <a:pPr algn="ctr"/>
-          </a:p>
-        </p:txBody>
-      </p:sp>
-      <p:sp>
-        <p:nvSpPr>
-          <p:cNvPr id="28" name="Rounded Rectangle 27"/>
-          <p:cNvSpPr/>
-          <p:nvPr/>
-        </p:nvSpPr>
-        <p:spPr>
-          <a:xfrm>
-            <a:off x="7481620" y="2139696"/>
-            <a:ext cx="438912" cy="438912"/>
-          </a:xfrm>
-          <a:prstGeom prst="roundRect">
-            <a:avLst/>
-          </a:prstGeom>
-          <a:solidFill>
-            <a:srgbClr val="F59E0B"/>
-          </a:solidFill>
-          <a:ln>
-            <a:solidFill>
-              <a:srgbClr val="F59E0B"/>
-            </a:solidFill>
-          </a:ln>
-        </p:spPr>
-        <p:style>
-          <a:lnRef idx="1">
-            <a:schemeClr val="accent1"/>
-          </a:lnRef>
-          <a:fillRef idx="3">
-            <a:schemeClr val="accent1"/>
-          </a:fillRef>
-          <a:effectRef idx="2">
-            <a:schemeClr val="accent1"/>
-          </a:effectRef>
-          <a:fontRef idx="minor">
-            <a:schemeClr val="lt1"/>
-          </a:fontRef>
-        </p:style>
-        <p:txBody>
-          <a:bodyPr rtlCol="0" anchor="ctr"/>
-          <a:lstStyle/>
-          <a:p>
-            <a:pPr algn="ctr"/>
-          </a:p>
-        </p:txBody>
-      </p:sp>
-      <p:sp>
-        <p:nvSpPr>
-          <p:cNvPr id="29" name="TextBox 28"/>
-          <p:cNvSpPr txBox="1"/>
-          <p:nvPr/>
-        </p:nvSpPr>
-        <p:spPr>
-          <a:xfrm>
-            <a:off x="7481620" y="2148840"/>
-            <a:ext cx="438912" cy="420624"/>
-          </a:xfrm>
-          <a:prstGeom prst="rect">
-            <a:avLst/>
-          </a:prstGeom>
-          <a:noFill/>
-        </p:spPr>
-        <p:txBody>
-          <a:bodyPr wrap="square" anchor="ctr">
-            <a:spAutoFit/>
-          </a:bodyPr>
-          <a:lstStyle/>
-          <a:p>
-            <a:pPr algn="ctr"/>
-            <a:r>
-              <a:rPr sz="1400" b="1">
-                <a:solidFill>
-                  <a:srgbClr val="FFFFFF"/>
-                </a:solidFill>
-                <a:latin typeface="Arial"/>
-              </a:rPr>
-              <a:t>4</a:t>
-            </a:r>
-          </a:p>
-        </p:txBody>
-      </p:sp>
-      <p:sp>
-        <p:nvSpPr>
-          <p:cNvPr id="30" name="TextBox 29"/>
-          <p:cNvSpPr txBox="1"/>
-          <p:nvPr/>
-        </p:nvSpPr>
-        <p:spPr>
-          <a:xfrm>
-            <a:off x="8085124" y="2103120"/>
-            <a:ext cx="1009497" cy="329184"/>
-          </a:xfrm>
-          <a:prstGeom prst="rect">
-            <a:avLst/>
-          </a:prstGeom>
-          <a:noFill/>
-        </p:spPr>
-        <p:txBody>
-          <a:bodyPr wrap="square" anchor="t">
-            <a:spAutoFit/>
-          </a:bodyPr>
-          <a:lstStyle/>
-          <a:p>
-            <a:pPr algn="l"/>
-            <a:r>
-              <a:rPr sz="1400" b="1">
-                <a:solidFill>
-                  <a:srgbClr val="F59E0B"/>
-                </a:solidFill>
-                <a:latin typeface="Arial"/>
-              </a:rPr>
-              <a:t>Labels</a:t>
-            </a:r>
-          </a:p>
-        </p:txBody>
-      </p:sp>
-      <p:sp>
-        <p:nvSpPr>
-          <p:cNvPr id="31" name="TextBox 30"/>
-          <p:cNvSpPr txBox="1"/>
-          <p:nvPr/>
-        </p:nvSpPr>
-        <p:spPr>
-          <a:xfrm>
-            <a:off x="8085124" y="2487168"/>
-            <a:ext cx="1009497" cy="2852928"/>
-          </a:xfrm>
-          <a:prstGeom prst="rect">
-            <a:avLst/>
-          </a:prstGeom>
-          <a:noFill/>
-        </p:spPr>
-        <p:txBody>
-          <a:bodyPr wrap="square" anchor="t">
-            <a:spAutoFit/>
-          </a:bodyPr>
-          <a:lstStyle/>
-          <a:p>
-            <a:pPr algn="l"/>
-            <a:r>
-              <a:rPr sz="1150" b="0">
-                <a:solidFill>
-                  <a:srgbClr val="161B26"/>
-                </a:solidFill>
-                <a:latin typeface="Arial"/>
-              </a:rPr>
-              <a:t>Use short headings and direct explanations.</a:t>
-            </a:r>
-          </a:p>
-        </p:txBody>
-      </p:sp>
-      <p:sp>
-        <p:nvSpPr>
-          <p:cNvPr id="32" name="Rounded Rectangle 31"/>
-          <p:cNvSpPr/>
-          <p:nvPr/>
-        </p:nvSpPr>
-        <p:spPr>
-          <a:xfrm>
-            <a:off x="9478670" y="1920240"/>
-            <a:ext cx="1997049" cy="3566160"/>
-          </a:xfrm>
-          <a:prstGeom prst="roundRect">
-            <a:avLst/>
-          </a:prstGeom>
-          <a:solidFill>
-            <a:srgbClr val="F5F8FC"/>
-          </a:solidFill>
-          <a:ln>
-            <a:solidFill>
-              <a:srgbClr val="E2E8F0"/>
-            </a:solidFill>
-          </a:ln>
-        </p:spPr>
-        <p:style>
-          <a:lnRef idx="1">
-            <a:schemeClr val="accent1"/>
-          </a:lnRef>
-          <a:fillRef idx="3">
-            <a:schemeClr val="accent1"/>
-          </a:fillRef>
-          <a:effectRef idx="2">
-            <a:schemeClr val="accent1"/>
-          </a:effectRef>
-          <a:fontRef idx="minor">
-            <a:schemeClr val="lt1"/>
-          </a:fontRef>
-        </p:style>
-        <p:txBody>
-          <a:bodyPr rtlCol="0" anchor="ctr"/>
-          <a:lstStyle/>
-          <a:p>
-            <a:pPr algn="ctr"/>
-          </a:p>
-        </p:txBody>
-      </p:sp>
-      <p:sp>
-        <p:nvSpPr>
-          <p:cNvPr id="33" name="Rectangle 32"/>
-          <p:cNvSpPr/>
-          <p:nvPr/>
-        </p:nvSpPr>
-        <p:spPr>
-          <a:xfrm>
-            <a:off x="9478670" y="1920240"/>
-            <a:ext cx="73152" cy="3566160"/>
-          </a:xfrm>
-          <a:prstGeom prst="rect">
-            <a:avLst/>
-          </a:prstGeom>
-          <a:solidFill>
-            <a:srgbClr val="1F6FEB"/>
-          </a:solidFill>
-          <a:ln>
-            <a:solidFill>
-              <a:srgbClr val="1F6FEB"/>
-            </a:solidFill>
-          </a:ln>
-        </p:spPr>
-        <p:style>
-          <a:lnRef idx="1">
-            <a:schemeClr val="accent1"/>
-          </a:lnRef>
-          <a:fillRef idx="3">
-            <a:schemeClr val="accent1"/>
-          </a:fillRef>
-          <a:effectRef idx="2">
-            <a:schemeClr val="accent1"/>
-          </a:effectRef>
-          <a:fontRef idx="minor">
-            <a:schemeClr val="lt1"/>
-          </a:fontRef>
-        </p:style>
-        <p:txBody>
-          <a:bodyPr rtlCol="0" anchor="ctr"/>
-          <a:lstStyle/>
-          <a:p>
-            <a:pPr algn="ctr"/>
-          </a:p>
-        </p:txBody>
-      </p:sp>
-      <p:sp>
-        <p:nvSpPr>
-          <p:cNvPr id="34" name="Rounded Rectangle 33"/>
-          <p:cNvSpPr/>
-          <p:nvPr/>
-        </p:nvSpPr>
-        <p:spPr>
-          <a:xfrm>
-            <a:off x="9679838" y="2139696"/>
-            <a:ext cx="438912" cy="438912"/>
-          </a:xfrm>
-          <a:prstGeom prst="roundRect">
-            <a:avLst/>
-          </a:prstGeom>
-          <a:solidFill>
-            <a:srgbClr val="1F6FEB"/>
-          </a:solidFill>
-          <a:ln>
-            <a:solidFill>
-              <a:srgbClr val="1F6FEB"/>
-            </a:solidFill>
-          </a:ln>
-        </p:spPr>
-        <p:style>
-          <a:lnRef idx="1">
-            <a:schemeClr val="accent1"/>
-          </a:lnRef>
-          <a:fillRef idx="3">
-            <a:schemeClr val="accent1"/>
-          </a:fillRef>
-          <a:effectRef idx="2">
-            <a:schemeClr val="accent1"/>
-          </a:effectRef>
-          <a:fontRef idx="minor">
-            <a:schemeClr val="lt1"/>
-          </a:fontRef>
-        </p:style>
-        <p:txBody>
-          <a:bodyPr rtlCol="0" anchor="ctr"/>
-          <a:lstStyle/>
-          <a:p>
-            <a:pPr algn="ctr"/>
-          </a:p>
-        </p:txBody>
-      </p:sp>
-      <p:sp>
-        <p:nvSpPr>
-          <p:cNvPr id="35" name="TextBox 34"/>
-          <p:cNvSpPr txBox="1"/>
-          <p:nvPr/>
-        </p:nvSpPr>
-        <p:spPr>
-          <a:xfrm>
-            <a:off x="9679838" y="2148840"/>
-            <a:ext cx="438912" cy="420624"/>
-          </a:xfrm>
-          <a:prstGeom prst="rect">
-            <a:avLst/>
-          </a:prstGeom>
-          <a:noFill/>
-        </p:spPr>
-        <p:txBody>
-          <a:bodyPr wrap="square" anchor="ctr">
-            <a:spAutoFit/>
-          </a:bodyPr>
-          <a:lstStyle/>
-          <a:p>
-            <a:pPr algn="ctr"/>
-            <a:r>
-              <a:rPr sz="1400" b="1">
-                <a:solidFill>
-                  <a:srgbClr val="FFFFFF"/>
-                </a:solidFill>
-                <a:latin typeface="Arial"/>
-              </a:rPr>
-              <a:t>5</a:t>
-            </a:r>
-          </a:p>
-        </p:txBody>
-      </p:sp>
-      <p:sp>
-        <p:nvSpPr>
-          <p:cNvPr id="36" name="TextBox 35"/>
-          <p:cNvSpPr txBox="1"/>
-          <p:nvPr/>
-        </p:nvSpPr>
-        <p:spPr>
-          <a:xfrm>
-            <a:off x="10283342" y="2103120"/>
-            <a:ext cx="1009497" cy="329184"/>
-          </a:xfrm>
-          <a:prstGeom prst="rect">
-            <a:avLst/>
-          </a:prstGeom>
-          <a:noFill/>
-        </p:spPr>
-        <p:txBody>
-          <a:bodyPr wrap="square" anchor="t">
-            <a:spAutoFit/>
-          </a:bodyPr>
-          <a:lstStyle/>
-          <a:p>
-            <a:pPr algn="l"/>
-            <a:r>
-              <a:rPr sz="1400" b="1">
-                <a:solidFill>
-                  <a:srgbClr val="1F6FEB"/>
-                </a:solidFill>
-                <a:latin typeface="Arial"/>
-              </a:rPr>
-              <a:t>Align</a:t>
-            </a:r>
-          </a:p>
-        </p:txBody>
-      </p:sp>
-      <p:sp>
-        <p:nvSpPr>
-          <p:cNvPr id="37" name="TextBox 36"/>
-          <p:cNvSpPr txBox="1"/>
-          <p:nvPr/>
-        </p:nvSpPr>
-        <p:spPr>
-          <a:xfrm>
-            <a:off x="10283342" y="2487168"/>
-            <a:ext cx="1009497" cy="2852928"/>
-          </a:xfrm>
-          <a:prstGeom prst="rect">
-            <a:avLst/>
-          </a:prstGeom>
-          <a:noFill/>
-        </p:spPr>
-        <p:txBody>
-          <a:bodyPr wrap="square" anchor="t">
-            <a:spAutoFit/>
-          </a:bodyPr>
-          <a:lstStyle/>
-          <a:p>
-            <a:pPr algn="l"/>
-            <a:r>
-              <a:rPr sz="1150" b="0">
-                <a:solidFill>
-                  <a:srgbClr val="161B26"/>
-                </a:solidFill>
-                <a:latin typeface="Arial"/>
-              </a:rPr>
-              <a:t>Distribute, group and test the reading path.</a:t>
+              <a:t>Use the images only as supporting visuals. Build all stage names, values, connectors, source labels and decision meaning as editable PowerPoint objects.</a:t>
             </a:r>
           </a:p>
         </p:txBody>
@@ -5721,6 +5483,726 @@
             <a:avLst/>
           </a:prstGeom>
           <a:solidFill>
+            <a:srgbClr val="10B981"/>
+          </a:solidFill>
+          <a:ln>
+            <a:solidFill>
+              <a:srgbClr val="10B981"/>
+            </a:solidFill>
+          </a:ln>
+        </p:spPr>
+        <p:style>
+          <a:lnRef idx="1">
+            <a:schemeClr val="accent1"/>
+          </a:lnRef>
+          <a:fillRef idx="3">
+            <a:schemeClr val="accent1"/>
+          </a:fillRef>
+          <a:effectRef idx="2">
+            <a:schemeClr val="accent1"/>
+          </a:effectRef>
+          <a:fontRef idx="minor">
+            <a:schemeClr val="lt1"/>
+          </a:fontRef>
+        </p:style>
+        <p:txBody>
+          <a:bodyPr rtlCol="0" anchor="ctr"/>
+          <a:lstStyle/>
+          <a:p>
+            <a:pPr algn="ctr"/>
+          </a:p>
+        </p:txBody>
+      </p:sp>
+      <p:sp>
+        <p:nvSpPr>
+          <p:cNvPr id="4" name="TextBox 3"/>
+          <p:cNvSpPr txBox="1"/>
+          <p:nvPr/>
+        </p:nvSpPr>
+        <p:spPr>
+          <a:xfrm>
+            <a:off x="658368" y="384048"/>
+            <a:ext cx="10789920" cy="320040"/>
+          </a:xfrm>
+          <a:prstGeom prst="rect">
+            <a:avLst/>
+          </a:prstGeom>
+          <a:noFill/>
+        </p:spPr>
+        <p:txBody>
+          <a:bodyPr wrap="square" anchor="t">
+            <a:spAutoFit/>
+          </a:bodyPr>
+          <a:lstStyle/>
+          <a:p>
+            <a:pPr algn="l"/>
+            <a:r>
+              <a:rPr sz="1100" b="1">
+                <a:solidFill>
+                  <a:srgbClr val="10B981"/>
+                </a:solidFill>
+                <a:latin typeface="Arial"/>
+              </a:rPr>
+              <a:t>ACTIVITY 04 · FRAMEWORK</a:t>
+            </a:r>
+          </a:p>
+        </p:txBody>
+      </p:sp>
+      <p:sp>
+        <p:nvSpPr>
+          <p:cNvPr id="5" name="TextBox 4"/>
+          <p:cNvSpPr txBox="1"/>
+          <p:nvPr/>
+        </p:nvSpPr>
+        <p:spPr>
+          <a:xfrm>
+            <a:off x="658368" y="749808"/>
+            <a:ext cx="10789920" cy="658368"/>
+          </a:xfrm>
+          <a:prstGeom prst="rect">
+            <a:avLst/>
+          </a:prstGeom>
+          <a:noFill/>
+        </p:spPr>
+        <p:txBody>
+          <a:bodyPr wrap="square" anchor="t">
+            <a:spAutoFit/>
+          </a:bodyPr>
+          <a:lstStyle/>
+          <a:p>
+            <a:pPr algn="l"/>
+            <a:r>
+              <a:rPr sz="2700" b="1">
+                <a:solidFill>
+                  <a:srgbClr val="161B26"/>
+                </a:solidFill>
+                <a:latin typeface="Arial"/>
+              </a:rPr>
+              <a:t>Prompt-to-Asset-to-PowerPoint</a:t>
+            </a:r>
+          </a:p>
+        </p:txBody>
+      </p:sp>
+      <p:sp>
+        <p:nvSpPr>
+          <p:cNvPr id="6" name="Rectangle 5"/>
+          <p:cNvSpPr/>
+          <p:nvPr/>
+        </p:nvSpPr>
+        <p:spPr>
+          <a:xfrm>
+            <a:off x="658368" y="1444752"/>
+            <a:ext cx="10881360" cy="18288"/>
+          </a:xfrm>
+          <a:prstGeom prst="rect">
+            <a:avLst/>
+          </a:prstGeom>
+          <a:solidFill>
+            <a:srgbClr val="E2E8F0"/>
+          </a:solidFill>
+          <a:ln>
+            <a:solidFill>
+              <a:srgbClr val="E2E8F0"/>
+            </a:solidFill>
+          </a:ln>
+        </p:spPr>
+        <p:style>
+          <a:lnRef idx="1">
+            <a:schemeClr val="accent1"/>
+          </a:lnRef>
+          <a:fillRef idx="3">
+            <a:schemeClr val="accent1"/>
+          </a:fillRef>
+          <a:effectRef idx="2">
+            <a:schemeClr val="accent1"/>
+          </a:effectRef>
+          <a:fontRef idx="minor">
+            <a:schemeClr val="lt1"/>
+          </a:fontRef>
+        </p:style>
+        <p:txBody>
+          <a:bodyPr rtlCol="0" anchor="ctr"/>
+          <a:lstStyle/>
+          <a:p>
+            <a:pPr algn="ctr"/>
+          </a:p>
+        </p:txBody>
+      </p:sp>
+      <p:sp>
+        <p:nvSpPr>
+          <p:cNvPr id="7" name="TextBox 6"/>
+          <p:cNvSpPr txBox="1"/>
+          <p:nvPr/>
+        </p:nvSpPr>
+        <p:spPr>
+          <a:xfrm>
+            <a:off x="658368" y="6473952"/>
+            <a:ext cx="9875520" cy="201168"/>
+          </a:xfrm>
+          <a:prstGeom prst="rect">
+            <a:avLst/>
+          </a:prstGeom>
+          <a:noFill/>
+        </p:spPr>
+        <p:txBody>
+          <a:bodyPr wrap="square" anchor="t">
+            <a:spAutoFit/>
+          </a:bodyPr>
+          <a:lstStyle/>
+          <a:p>
+            <a:pPr algn="l"/>
+            <a:r>
+              <a:rPr sz="800" b="0">
+                <a:solidFill>
+                  <a:srgbClr val="5B6372"/>
+                </a:solidFill>
+                <a:latin typeface="Arial"/>
+              </a:rPr>
+              <a:t>TGS-2026064178 · ACTIVITY PRACTICE · Tertiary Infotech Academy Pte Ltd</a:t>
+            </a:r>
+          </a:p>
+        </p:txBody>
+      </p:sp>
+      <p:sp>
+        <p:nvSpPr>
+          <p:cNvPr id="8" name="Rounded Rectangle 7"/>
+          <p:cNvSpPr/>
+          <p:nvPr/>
+        </p:nvSpPr>
+        <p:spPr>
+          <a:xfrm>
+            <a:off x="685800" y="1920240"/>
+            <a:ext cx="1997049" cy="3566160"/>
+          </a:xfrm>
+          <a:prstGeom prst="roundRect">
+            <a:avLst/>
+          </a:prstGeom>
+          <a:solidFill>
+            <a:srgbClr val="F5F8FC"/>
+          </a:solidFill>
+          <a:ln>
+            <a:solidFill>
+              <a:srgbClr val="E2E8F0"/>
+            </a:solidFill>
+          </a:ln>
+        </p:spPr>
+        <p:style>
+          <a:lnRef idx="1">
+            <a:schemeClr val="accent1"/>
+          </a:lnRef>
+          <a:fillRef idx="3">
+            <a:schemeClr val="accent1"/>
+          </a:fillRef>
+          <a:effectRef idx="2">
+            <a:schemeClr val="accent1"/>
+          </a:effectRef>
+          <a:fontRef idx="minor">
+            <a:schemeClr val="lt1"/>
+          </a:fontRef>
+        </p:style>
+        <p:txBody>
+          <a:bodyPr rtlCol="0" anchor="ctr"/>
+          <a:lstStyle/>
+          <a:p>
+            <a:pPr algn="ctr"/>
+          </a:p>
+        </p:txBody>
+      </p:sp>
+      <p:sp>
+        <p:nvSpPr>
+          <p:cNvPr id="9" name="Rectangle 8"/>
+          <p:cNvSpPr/>
+          <p:nvPr/>
+        </p:nvSpPr>
+        <p:spPr>
+          <a:xfrm>
+            <a:off x="685800" y="1920240"/>
+            <a:ext cx="73152" cy="3566160"/>
+          </a:xfrm>
+          <a:prstGeom prst="rect">
+            <a:avLst/>
+          </a:prstGeom>
+          <a:solidFill>
+            <a:srgbClr val="1F6FEB"/>
+          </a:solidFill>
+          <a:ln>
+            <a:solidFill>
+              <a:srgbClr val="1F6FEB"/>
+            </a:solidFill>
+          </a:ln>
+        </p:spPr>
+        <p:style>
+          <a:lnRef idx="1">
+            <a:schemeClr val="accent1"/>
+          </a:lnRef>
+          <a:fillRef idx="3">
+            <a:schemeClr val="accent1"/>
+          </a:fillRef>
+          <a:effectRef idx="2">
+            <a:schemeClr val="accent1"/>
+          </a:effectRef>
+          <a:fontRef idx="minor">
+            <a:schemeClr val="lt1"/>
+          </a:fontRef>
+        </p:style>
+        <p:txBody>
+          <a:bodyPr rtlCol="0" anchor="ctr"/>
+          <a:lstStyle/>
+          <a:p>
+            <a:pPr algn="ctr"/>
+          </a:p>
+        </p:txBody>
+      </p:sp>
+      <p:sp>
+        <p:nvSpPr>
+          <p:cNvPr id="10" name="Rounded Rectangle 9"/>
+          <p:cNvSpPr/>
+          <p:nvPr/>
+        </p:nvSpPr>
+        <p:spPr>
+          <a:xfrm>
+            <a:off x="886968" y="2139696"/>
+            <a:ext cx="438912" cy="438912"/>
+          </a:xfrm>
+          <a:prstGeom prst="roundRect">
+            <a:avLst/>
+          </a:prstGeom>
+          <a:solidFill>
+            <a:srgbClr val="1F6FEB"/>
+          </a:solidFill>
+          <a:ln>
+            <a:solidFill>
+              <a:srgbClr val="1F6FEB"/>
+            </a:solidFill>
+          </a:ln>
+        </p:spPr>
+        <p:style>
+          <a:lnRef idx="1">
+            <a:schemeClr val="accent1"/>
+          </a:lnRef>
+          <a:fillRef idx="3">
+            <a:schemeClr val="accent1"/>
+          </a:fillRef>
+          <a:effectRef idx="2">
+            <a:schemeClr val="accent1"/>
+          </a:effectRef>
+          <a:fontRef idx="minor">
+            <a:schemeClr val="lt1"/>
+          </a:fontRef>
+        </p:style>
+        <p:txBody>
+          <a:bodyPr rtlCol="0" anchor="ctr"/>
+          <a:lstStyle/>
+          <a:p>
+            <a:pPr algn="ctr"/>
+          </a:p>
+        </p:txBody>
+      </p:sp>
+      <p:sp>
+        <p:nvSpPr>
+          <p:cNvPr id="11" name="TextBox 10"/>
+          <p:cNvSpPr txBox="1"/>
+          <p:nvPr/>
+        </p:nvSpPr>
+        <p:spPr>
+          <a:xfrm>
+            <a:off x="886968" y="2148840"/>
+            <a:ext cx="438912" cy="420624"/>
+          </a:xfrm>
+          <a:prstGeom prst="rect">
+            <a:avLst/>
+          </a:prstGeom>
+          <a:noFill/>
+        </p:spPr>
+        <p:txBody>
+          <a:bodyPr wrap="square" anchor="ctr">
+            <a:spAutoFit/>
+          </a:bodyPr>
+          <a:lstStyle/>
+          <a:p>
+            <a:pPr algn="ctr"/>
+            <a:r>
+              <a:rPr sz="1400" b="1">
+                <a:solidFill>
+                  <a:srgbClr val="FFFFFF"/>
+                </a:solidFill>
+                <a:latin typeface="Arial"/>
+              </a:rPr>
+              <a:t>1</a:t>
+            </a:r>
+          </a:p>
+        </p:txBody>
+      </p:sp>
+      <p:sp>
+        <p:nvSpPr>
+          <p:cNvPr id="12" name="TextBox 11"/>
+          <p:cNvSpPr txBox="1"/>
+          <p:nvPr/>
+        </p:nvSpPr>
+        <p:spPr>
+          <a:xfrm>
+            <a:off x="1490472" y="2103120"/>
+            <a:ext cx="1009497" cy="329184"/>
+          </a:xfrm>
+          <a:prstGeom prst="rect">
+            <a:avLst/>
+          </a:prstGeom>
+          <a:noFill/>
+        </p:spPr>
+        <p:txBody>
+          <a:bodyPr wrap="square" anchor="t">
+            <a:spAutoFit/>
+          </a:bodyPr>
+          <a:lstStyle/>
+          <a:p>
+            <a:pPr algn="l"/>
+            <a:r>
+              <a:rPr sz="1400" b="1">
+                <a:solidFill>
+                  <a:srgbClr val="1F6FEB"/>
+                </a:solidFill>
+                <a:latin typeface="Arial"/>
+              </a:rPr>
+              <a:t>Prompt</a:t>
+            </a:r>
+          </a:p>
+        </p:txBody>
+      </p:sp>
+      <p:sp>
+        <p:nvSpPr>
+          <p:cNvPr id="13" name="TextBox 12"/>
+          <p:cNvSpPr txBox="1"/>
+          <p:nvPr/>
+        </p:nvSpPr>
+        <p:spPr>
+          <a:xfrm>
+            <a:off x="1490472" y="2487168"/>
+            <a:ext cx="1009497" cy="2852928"/>
+          </a:xfrm>
+          <a:prstGeom prst="rect">
+            <a:avLst/>
+          </a:prstGeom>
+          <a:noFill/>
+        </p:spPr>
+        <p:txBody>
+          <a:bodyPr wrap="square" anchor="t">
+            <a:spAutoFit/>
+          </a:bodyPr>
+          <a:lstStyle/>
+          <a:p>
+            <a:pPr algn="l"/>
+            <a:r>
+              <a:rPr sz="1150" b="0">
+                <a:solidFill>
+                  <a:srgbClr val="161B26"/>
+                </a:solidFill>
+                <a:latin typeface="Arial"/>
+              </a:rPr>
+              <a:t>Describe use, subject, style, palette and constraints.</a:t>
+            </a:r>
+          </a:p>
+        </p:txBody>
+      </p:sp>
+      <p:sp>
+        <p:nvSpPr>
+          <p:cNvPr id="14" name="Rounded Rectangle 13"/>
+          <p:cNvSpPr/>
+          <p:nvPr/>
+        </p:nvSpPr>
+        <p:spPr>
+          <a:xfrm>
+            <a:off x="2884017" y="1920240"/>
+            <a:ext cx="1997049" cy="3566160"/>
+          </a:xfrm>
+          <a:prstGeom prst="roundRect">
+            <a:avLst/>
+          </a:prstGeom>
+          <a:solidFill>
+            <a:srgbClr val="F5F8FC"/>
+          </a:solidFill>
+          <a:ln>
+            <a:solidFill>
+              <a:srgbClr val="E2E8F0"/>
+            </a:solidFill>
+          </a:ln>
+        </p:spPr>
+        <p:style>
+          <a:lnRef idx="1">
+            <a:schemeClr val="accent1"/>
+          </a:lnRef>
+          <a:fillRef idx="3">
+            <a:schemeClr val="accent1"/>
+          </a:fillRef>
+          <a:effectRef idx="2">
+            <a:schemeClr val="accent1"/>
+          </a:effectRef>
+          <a:fontRef idx="minor">
+            <a:schemeClr val="lt1"/>
+          </a:fontRef>
+        </p:style>
+        <p:txBody>
+          <a:bodyPr rtlCol="0" anchor="ctr"/>
+          <a:lstStyle/>
+          <a:p>
+            <a:pPr algn="ctr"/>
+          </a:p>
+        </p:txBody>
+      </p:sp>
+      <p:sp>
+        <p:nvSpPr>
+          <p:cNvPr id="15" name="Rectangle 14"/>
+          <p:cNvSpPr/>
+          <p:nvPr/>
+        </p:nvSpPr>
+        <p:spPr>
+          <a:xfrm>
+            <a:off x="2884017" y="1920240"/>
+            <a:ext cx="73152" cy="3566160"/>
+          </a:xfrm>
+          <a:prstGeom prst="rect">
+            <a:avLst/>
+          </a:prstGeom>
+          <a:solidFill>
+            <a:srgbClr val="10B981"/>
+          </a:solidFill>
+          <a:ln>
+            <a:solidFill>
+              <a:srgbClr val="10B981"/>
+            </a:solidFill>
+          </a:ln>
+        </p:spPr>
+        <p:style>
+          <a:lnRef idx="1">
+            <a:schemeClr val="accent1"/>
+          </a:lnRef>
+          <a:fillRef idx="3">
+            <a:schemeClr val="accent1"/>
+          </a:fillRef>
+          <a:effectRef idx="2">
+            <a:schemeClr val="accent1"/>
+          </a:effectRef>
+          <a:fontRef idx="minor">
+            <a:schemeClr val="lt1"/>
+          </a:fontRef>
+        </p:style>
+        <p:txBody>
+          <a:bodyPr rtlCol="0" anchor="ctr"/>
+          <a:lstStyle/>
+          <a:p>
+            <a:pPr algn="ctr"/>
+          </a:p>
+        </p:txBody>
+      </p:sp>
+      <p:sp>
+        <p:nvSpPr>
+          <p:cNvPr id="16" name="Rounded Rectangle 15"/>
+          <p:cNvSpPr/>
+          <p:nvPr/>
+        </p:nvSpPr>
+        <p:spPr>
+          <a:xfrm>
+            <a:off x="3085185" y="2139696"/>
+            <a:ext cx="438912" cy="438912"/>
+          </a:xfrm>
+          <a:prstGeom prst="roundRect">
+            <a:avLst/>
+          </a:prstGeom>
+          <a:solidFill>
+            <a:srgbClr val="10B981"/>
+          </a:solidFill>
+          <a:ln>
+            <a:solidFill>
+              <a:srgbClr val="10B981"/>
+            </a:solidFill>
+          </a:ln>
+        </p:spPr>
+        <p:style>
+          <a:lnRef idx="1">
+            <a:schemeClr val="accent1"/>
+          </a:lnRef>
+          <a:fillRef idx="3">
+            <a:schemeClr val="accent1"/>
+          </a:fillRef>
+          <a:effectRef idx="2">
+            <a:schemeClr val="accent1"/>
+          </a:effectRef>
+          <a:fontRef idx="minor">
+            <a:schemeClr val="lt1"/>
+          </a:fontRef>
+        </p:style>
+        <p:txBody>
+          <a:bodyPr rtlCol="0" anchor="ctr"/>
+          <a:lstStyle/>
+          <a:p>
+            <a:pPr algn="ctr"/>
+          </a:p>
+        </p:txBody>
+      </p:sp>
+      <p:sp>
+        <p:nvSpPr>
+          <p:cNvPr id="17" name="TextBox 16"/>
+          <p:cNvSpPr txBox="1"/>
+          <p:nvPr/>
+        </p:nvSpPr>
+        <p:spPr>
+          <a:xfrm>
+            <a:off x="3085185" y="2148840"/>
+            <a:ext cx="438912" cy="420624"/>
+          </a:xfrm>
+          <a:prstGeom prst="rect">
+            <a:avLst/>
+          </a:prstGeom>
+          <a:noFill/>
+        </p:spPr>
+        <p:txBody>
+          <a:bodyPr wrap="square" anchor="ctr">
+            <a:spAutoFit/>
+          </a:bodyPr>
+          <a:lstStyle/>
+          <a:p>
+            <a:pPr algn="ctr"/>
+            <a:r>
+              <a:rPr sz="1400" b="1">
+                <a:solidFill>
+                  <a:srgbClr val="FFFFFF"/>
+                </a:solidFill>
+                <a:latin typeface="Arial"/>
+              </a:rPr>
+              <a:t>2</a:t>
+            </a:r>
+          </a:p>
+        </p:txBody>
+      </p:sp>
+      <p:sp>
+        <p:nvSpPr>
+          <p:cNvPr id="18" name="TextBox 17"/>
+          <p:cNvSpPr txBox="1"/>
+          <p:nvPr/>
+        </p:nvSpPr>
+        <p:spPr>
+          <a:xfrm>
+            <a:off x="3688689" y="2103120"/>
+            <a:ext cx="1009497" cy="329184"/>
+          </a:xfrm>
+          <a:prstGeom prst="rect">
+            <a:avLst/>
+          </a:prstGeom>
+          <a:noFill/>
+        </p:spPr>
+        <p:txBody>
+          <a:bodyPr wrap="square" anchor="t">
+            <a:spAutoFit/>
+          </a:bodyPr>
+          <a:lstStyle/>
+          <a:p>
+            <a:pPr algn="l"/>
+            <a:r>
+              <a:rPr sz="1400" b="1">
+                <a:solidFill>
+                  <a:srgbClr val="10B981"/>
+                </a:solidFill>
+                <a:latin typeface="Arial"/>
+              </a:rPr>
+              <a:t>Generate</a:t>
+            </a:r>
+          </a:p>
+        </p:txBody>
+      </p:sp>
+      <p:sp>
+        <p:nvSpPr>
+          <p:cNvPr id="19" name="TextBox 18"/>
+          <p:cNvSpPr txBox="1"/>
+          <p:nvPr/>
+        </p:nvSpPr>
+        <p:spPr>
+          <a:xfrm>
+            <a:off x="3688689" y="2487168"/>
+            <a:ext cx="1009497" cy="2852928"/>
+          </a:xfrm>
+          <a:prstGeom prst="rect">
+            <a:avLst/>
+          </a:prstGeom>
+          <a:noFill/>
+        </p:spPr>
+        <p:txBody>
+          <a:bodyPr wrap="square" anchor="t">
+            <a:spAutoFit/>
+          </a:bodyPr>
+          <a:lstStyle/>
+          <a:p>
+            <a:pPr algn="l"/>
+            <a:r>
+              <a:rPr sz="1150" b="0">
+                <a:solidFill>
+                  <a:srgbClr val="161B26"/>
+                </a:solidFill>
+                <a:latin typeface="Arial"/>
+              </a:rPr>
+              <a:t>Create one asset sheet or a consistent set of separate visuals.</a:t>
+            </a:r>
+          </a:p>
+        </p:txBody>
+      </p:sp>
+      <p:sp>
+        <p:nvSpPr>
+          <p:cNvPr id="20" name="Rounded Rectangle 19"/>
+          <p:cNvSpPr/>
+          <p:nvPr/>
+        </p:nvSpPr>
+        <p:spPr>
+          <a:xfrm>
+            <a:off x="5082235" y="1920240"/>
+            <a:ext cx="1997049" cy="3566160"/>
+          </a:xfrm>
+          <a:prstGeom prst="roundRect">
+            <a:avLst/>
+          </a:prstGeom>
+          <a:solidFill>
+            <a:srgbClr val="F5F8FC"/>
+          </a:solidFill>
+          <a:ln>
+            <a:solidFill>
+              <a:srgbClr val="E2E8F0"/>
+            </a:solidFill>
+          </a:ln>
+        </p:spPr>
+        <p:style>
+          <a:lnRef idx="1">
+            <a:schemeClr val="accent1"/>
+          </a:lnRef>
+          <a:fillRef idx="3">
+            <a:schemeClr val="accent1"/>
+          </a:fillRef>
+          <a:effectRef idx="2">
+            <a:schemeClr val="accent1"/>
+          </a:effectRef>
+          <a:fontRef idx="minor">
+            <a:schemeClr val="lt1"/>
+          </a:fontRef>
+        </p:style>
+        <p:txBody>
+          <a:bodyPr rtlCol="0" anchor="ctr"/>
+          <a:lstStyle/>
+          <a:p>
+            <a:pPr algn="ctr"/>
+          </a:p>
+        </p:txBody>
+      </p:sp>
+      <p:sp>
+        <p:nvSpPr>
+          <p:cNvPr id="21" name="Rectangle 20"/>
+          <p:cNvSpPr/>
+          <p:nvPr/>
+        </p:nvSpPr>
+        <p:spPr>
+          <a:xfrm>
+            <a:off x="5082235" y="1920240"/>
+            <a:ext cx="73152" cy="3566160"/>
+          </a:xfrm>
+          <a:prstGeom prst="rect">
+            <a:avLst/>
+          </a:prstGeom>
+          <a:solidFill>
             <a:srgbClr val="7C3AED"/>
           </a:solidFill>
           <a:ln>
@@ -5753,14 +6235,94 @@
       </p:sp>
       <p:sp>
         <p:nvSpPr>
-          <p:cNvPr id="4" name="TextBox 3"/>
+          <p:cNvPr id="22" name="Rounded Rectangle 21"/>
+          <p:cNvSpPr/>
+          <p:nvPr/>
+        </p:nvSpPr>
+        <p:spPr>
+          <a:xfrm>
+            <a:off x="5283403" y="2139696"/>
+            <a:ext cx="438912" cy="438912"/>
+          </a:xfrm>
+          <a:prstGeom prst="roundRect">
+            <a:avLst/>
+          </a:prstGeom>
+          <a:solidFill>
+            <a:srgbClr val="7C3AED"/>
+          </a:solidFill>
+          <a:ln>
+            <a:solidFill>
+              <a:srgbClr val="7C3AED"/>
+            </a:solidFill>
+          </a:ln>
+        </p:spPr>
+        <p:style>
+          <a:lnRef idx="1">
+            <a:schemeClr val="accent1"/>
+          </a:lnRef>
+          <a:fillRef idx="3">
+            <a:schemeClr val="accent1"/>
+          </a:fillRef>
+          <a:effectRef idx="2">
+            <a:schemeClr val="accent1"/>
+          </a:effectRef>
+          <a:fontRef idx="minor">
+            <a:schemeClr val="lt1"/>
+          </a:fontRef>
+        </p:style>
+        <p:txBody>
+          <a:bodyPr rtlCol="0" anchor="ctr"/>
+          <a:lstStyle/>
+          <a:p>
+            <a:pPr algn="ctr"/>
+          </a:p>
+        </p:txBody>
+      </p:sp>
+      <p:sp>
+        <p:nvSpPr>
+          <p:cNvPr id="23" name="TextBox 22"/>
           <p:cNvSpPr txBox="1"/>
           <p:nvPr/>
         </p:nvSpPr>
         <p:spPr>
           <a:xfrm>
-            <a:off x="658368" y="384048"/>
-            <a:ext cx="10789920" cy="320040"/>
+            <a:off x="5283403" y="2148840"/>
+            <a:ext cx="438912" cy="420624"/>
+          </a:xfrm>
+          <a:prstGeom prst="rect">
+            <a:avLst/>
+          </a:prstGeom>
+          <a:noFill/>
+        </p:spPr>
+        <p:txBody>
+          <a:bodyPr wrap="square" anchor="ctr">
+            <a:spAutoFit/>
+          </a:bodyPr>
+          <a:lstStyle/>
+          <a:p>
+            <a:pPr algn="ctr"/>
+            <a:r>
+              <a:rPr sz="1400" b="1">
+                <a:solidFill>
+                  <a:srgbClr val="FFFFFF"/>
+                </a:solidFill>
+                <a:latin typeface="Arial"/>
+              </a:rPr>
+              <a:t>3</a:t>
+            </a:r>
+          </a:p>
+        </p:txBody>
+      </p:sp>
+      <p:sp>
+        <p:nvSpPr>
+          <p:cNvPr id="24" name="TextBox 23"/>
+          <p:cNvSpPr txBox="1"/>
+          <p:nvPr/>
+        </p:nvSpPr>
+        <p:spPr>
+          <a:xfrm>
+            <a:off x="5886907" y="2103120"/>
+            <a:ext cx="1009497" cy="329184"/>
           </a:xfrm>
           <a:prstGeom prst="rect">
             <a:avLst/>
@@ -5775,27 +6337,27 @@
           <a:p>
             <a:pPr algn="l"/>
             <a:r>
-              <a:rPr sz="1100" b="1">
+              <a:rPr sz="1400" b="1">
                 <a:solidFill>
                   <a:srgbClr val="7C3AED"/>
                 </a:solidFill>
                 <a:latin typeface="Arial"/>
               </a:rPr>
-              <a:t>ACTIVITY 04 · EXAMPLE</a:t>
-            </a:r>
-          </a:p>
-        </p:txBody>
-      </p:sp>
-      <p:sp>
-        <p:nvSpPr>
-          <p:cNvPr id="5" name="TextBox 4"/>
+              <a:t>Inspect</a:t>
+            </a:r>
+          </a:p>
+        </p:txBody>
+      </p:sp>
+      <p:sp>
+        <p:nvSpPr>
+          <p:cNvPr id="25" name="TextBox 24"/>
           <p:cNvSpPr txBox="1"/>
           <p:nvPr/>
         </p:nvSpPr>
         <p:spPr>
           <a:xfrm>
-            <a:off x="658368" y="749808"/>
-            <a:ext cx="10789920" cy="658368"/>
+            <a:off x="5886907" y="2487168"/>
+            <a:ext cx="1009497" cy="2852928"/>
           </a:xfrm>
           <a:prstGeom prst="rect">
             <a:avLst/>
@@ -5810,33 +6372,33 @@
           <a:p>
             <a:pPr algn="l"/>
             <a:r>
-              <a:rPr sz="2700" b="1">
+              <a:rPr sz="1150" b="0">
                 <a:solidFill>
                   <a:srgbClr val="161B26"/>
                 </a:solidFill>
                 <a:latin typeface="Arial"/>
               </a:rPr>
-              <a:t>Worked Output</a:t>
-            </a:r>
-          </a:p>
-        </p:txBody>
-      </p:sp>
-      <p:sp>
-        <p:nvSpPr>
-          <p:cNvPr id="6" name="Rectangle 5"/>
+              <a:t>Reject text errors, visual ambiguity, rights risks and inconsistent style.</a:t>
+            </a:r>
+          </a:p>
+        </p:txBody>
+      </p:sp>
+      <p:sp>
+        <p:nvSpPr>
+          <p:cNvPr id="26" name="Rounded Rectangle 25"/>
           <p:cNvSpPr/>
           <p:nvPr/>
         </p:nvSpPr>
         <p:spPr>
           <a:xfrm>
-            <a:off x="658368" y="1444752"/>
-            <a:ext cx="10881360" cy="18288"/>
-          </a:xfrm>
-          <a:prstGeom prst="rect">
-            <a:avLst/>
-          </a:prstGeom>
-          <a:solidFill>
-            <a:srgbClr val="E2E8F0"/>
+            <a:off x="7280452" y="1920240"/>
+            <a:ext cx="1997049" cy="3566160"/>
+          </a:xfrm>
+          <a:prstGeom prst="roundRect">
+            <a:avLst/>
+          </a:prstGeom>
+          <a:solidFill>
+            <a:srgbClr val="F5F8FC"/>
           </a:solidFill>
           <a:ln>
             <a:solidFill>
@@ -5868,14 +6430,139 @@
       </p:sp>
       <p:sp>
         <p:nvSpPr>
-          <p:cNvPr id="7" name="TextBox 6"/>
+          <p:cNvPr id="27" name="Rectangle 26"/>
+          <p:cNvSpPr/>
+          <p:nvPr/>
+        </p:nvSpPr>
+        <p:spPr>
+          <a:xfrm>
+            <a:off x="7280452" y="1920240"/>
+            <a:ext cx="73152" cy="3566160"/>
+          </a:xfrm>
+          <a:prstGeom prst="rect">
+            <a:avLst/>
+          </a:prstGeom>
+          <a:solidFill>
+            <a:srgbClr val="F59E0B"/>
+          </a:solidFill>
+          <a:ln>
+            <a:solidFill>
+              <a:srgbClr val="F59E0B"/>
+            </a:solidFill>
+          </a:ln>
+        </p:spPr>
+        <p:style>
+          <a:lnRef idx="1">
+            <a:schemeClr val="accent1"/>
+          </a:lnRef>
+          <a:fillRef idx="3">
+            <a:schemeClr val="accent1"/>
+          </a:fillRef>
+          <a:effectRef idx="2">
+            <a:schemeClr val="accent1"/>
+          </a:effectRef>
+          <a:fontRef idx="minor">
+            <a:schemeClr val="lt1"/>
+          </a:fontRef>
+        </p:style>
+        <p:txBody>
+          <a:bodyPr rtlCol="0" anchor="ctr"/>
+          <a:lstStyle/>
+          <a:p>
+            <a:pPr algn="ctr"/>
+          </a:p>
+        </p:txBody>
+      </p:sp>
+      <p:sp>
+        <p:nvSpPr>
+          <p:cNvPr id="28" name="Rounded Rectangle 27"/>
+          <p:cNvSpPr/>
+          <p:nvPr/>
+        </p:nvSpPr>
+        <p:spPr>
+          <a:xfrm>
+            <a:off x="7481620" y="2139696"/>
+            <a:ext cx="438912" cy="438912"/>
+          </a:xfrm>
+          <a:prstGeom prst="roundRect">
+            <a:avLst/>
+          </a:prstGeom>
+          <a:solidFill>
+            <a:srgbClr val="F59E0B"/>
+          </a:solidFill>
+          <a:ln>
+            <a:solidFill>
+              <a:srgbClr val="F59E0B"/>
+            </a:solidFill>
+          </a:ln>
+        </p:spPr>
+        <p:style>
+          <a:lnRef idx="1">
+            <a:schemeClr val="accent1"/>
+          </a:lnRef>
+          <a:fillRef idx="3">
+            <a:schemeClr val="accent1"/>
+          </a:fillRef>
+          <a:effectRef idx="2">
+            <a:schemeClr val="accent1"/>
+          </a:effectRef>
+          <a:fontRef idx="minor">
+            <a:schemeClr val="lt1"/>
+          </a:fontRef>
+        </p:style>
+        <p:txBody>
+          <a:bodyPr rtlCol="0" anchor="ctr"/>
+          <a:lstStyle/>
+          <a:p>
+            <a:pPr algn="ctr"/>
+          </a:p>
+        </p:txBody>
+      </p:sp>
+      <p:sp>
+        <p:nvSpPr>
+          <p:cNvPr id="29" name="TextBox 28"/>
           <p:cNvSpPr txBox="1"/>
           <p:nvPr/>
         </p:nvSpPr>
         <p:spPr>
           <a:xfrm>
-            <a:off x="658368" y="6473952"/>
-            <a:ext cx="9875520" cy="201168"/>
+            <a:off x="7481620" y="2148840"/>
+            <a:ext cx="438912" cy="420624"/>
+          </a:xfrm>
+          <a:prstGeom prst="rect">
+            <a:avLst/>
+          </a:prstGeom>
+          <a:noFill/>
+        </p:spPr>
+        <p:txBody>
+          <a:bodyPr wrap="square" anchor="ctr">
+            <a:spAutoFit/>
+          </a:bodyPr>
+          <a:lstStyle/>
+          <a:p>
+            <a:pPr algn="ctr"/>
+            <a:r>
+              <a:rPr sz="1400" b="1">
+                <a:solidFill>
+                  <a:srgbClr val="FFFFFF"/>
+                </a:solidFill>
+                <a:latin typeface="Arial"/>
+              </a:rPr>
+              <a:t>4</a:t>
+            </a:r>
+          </a:p>
+        </p:txBody>
+      </p:sp>
+      <p:sp>
+        <p:nvSpPr>
+          <p:cNvPr id="30" name="TextBox 29"/>
+          <p:cNvSpPr txBox="1"/>
+          <p:nvPr/>
+        </p:nvSpPr>
+        <p:spPr>
+          <a:xfrm>
+            <a:off x="8085124" y="2103120"/>
+            <a:ext cx="1009497" cy="329184"/>
           </a:xfrm>
           <a:prstGeom prst="rect">
             <a:avLst/>
@@ -5890,27 +6577,62 @@
           <a:p>
             <a:pPr algn="l"/>
             <a:r>
-              <a:rPr sz="800" b="0">
-                <a:solidFill>
-                  <a:srgbClr val="5B6372"/>
+              <a:rPr sz="1400" b="1">
+                <a:solidFill>
+                  <a:srgbClr val="F59E0B"/>
                 </a:solidFill>
                 <a:latin typeface="Arial"/>
               </a:rPr>
-              <a:t>TGS-2024048310 · ACTIVITY PRACTICE · Tertiary Infotech Academy Pte Ltd</a:t>
-            </a:r>
-          </a:p>
-        </p:txBody>
-      </p:sp>
-      <p:sp>
-        <p:nvSpPr>
-          <p:cNvPr id="8" name="Rounded Rectangle 7"/>
+              <a:t>Insert</a:t>
+            </a:r>
+          </a:p>
+        </p:txBody>
+      </p:sp>
+      <p:sp>
+        <p:nvSpPr>
+          <p:cNvPr id="31" name="TextBox 30"/>
+          <p:cNvSpPr txBox="1"/>
+          <p:nvPr/>
+        </p:nvSpPr>
+        <p:spPr>
+          <a:xfrm>
+            <a:off x="8085124" y="2487168"/>
+            <a:ext cx="1009497" cy="2852928"/>
+          </a:xfrm>
+          <a:prstGeom prst="rect">
+            <a:avLst/>
+          </a:prstGeom>
+          <a:noFill/>
+        </p:spPr>
+        <p:txBody>
+          <a:bodyPr wrap="square" anchor="t">
+            <a:spAutoFit/>
+          </a:bodyPr>
+          <a:lstStyle/>
+          <a:p>
+            <a:pPr algn="l"/>
+            <a:r>
+              <a:rPr sz="1150" b="0">
+                <a:solidFill>
+                  <a:srgbClr val="161B26"/>
+                </a:solidFill>
+                <a:latin typeface="Arial"/>
+              </a:rPr>
+              <a:t>Place approved assets without treating them as measured evidence.</a:t>
+            </a:r>
+          </a:p>
+        </p:txBody>
+      </p:sp>
+      <p:sp>
+        <p:nvSpPr>
+          <p:cNvPr id="32" name="Rounded Rectangle 31"/>
           <p:cNvSpPr/>
           <p:nvPr/>
         </p:nvSpPr>
         <p:spPr>
           <a:xfrm>
-            <a:off x="731520" y="1783080"/>
-            <a:ext cx="3401568" cy="1719072"/>
+            <a:off x="9478670" y="1920240"/>
+            <a:ext cx="1997049" cy="3566160"/>
           </a:xfrm>
           <a:prstGeom prst="roundRect">
             <a:avLst/>
@@ -5948,14 +6670,14 @@
       </p:sp>
       <p:sp>
         <p:nvSpPr>
-          <p:cNvPr id="9" name="Rectangle 8"/>
+          <p:cNvPr id="33" name="Rectangle 32"/>
           <p:cNvSpPr/>
           <p:nvPr/>
         </p:nvSpPr>
         <p:spPr>
           <a:xfrm>
-            <a:off x="731520" y="1783080"/>
-            <a:ext cx="73152" cy="1719072"/>
+            <a:off x="9478670" y="1920240"/>
+            <a:ext cx="73152" cy="3566160"/>
           </a:xfrm>
           <a:prstGeom prst="rect">
             <a:avLst/>
@@ -5993,13 +6715,13 @@
       </p:sp>
       <p:sp>
         <p:nvSpPr>
-          <p:cNvPr id="10" name="Rounded Rectangle 9"/>
+          <p:cNvPr id="34" name="Rounded Rectangle 33"/>
           <p:cNvSpPr/>
           <p:nvPr/>
         </p:nvSpPr>
         <p:spPr>
           <a:xfrm>
-            <a:off x="932688" y="2002536"/>
+            <a:off x="9679838" y="2139696"/>
             <a:ext cx="438912" cy="438912"/>
           </a:xfrm>
           <a:prstGeom prst="roundRect">
@@ -6038,13 +6760,13 @@
       </p:sp>
       <p:sp>
         <p:nvSpPr>
-          <p:cNvPr id="11" name="TextBox 10"/>
+          <p:cNvPr id="35" name="TextBox 34"/>
           <p:cNvSpPr txBox="1"/>
           <p:nvPr/>
         </p:nvSpPr>
         <p:spPr>
           <a:xfrm>
-            <a:off x="932688" y="2011680"/>
+            <a:off x="9679838" y="2148840"/>
             <a:ext cx="438912" cy="420624"/>
           </a:xfrm>
           <a:prstGeom prst="rect">
@@ -6066,21 +6788,21 @@
                 </a:solidFill>
                 <a:latin typeface="Arial"/>
               </a:rPr>
-              <a:t>1</a:t>
-            </a:r>
-          </a:p>
-        </p:txBody>
-      </p:sp>
-      <p:sp>
-        <p:nvSpPr>
-          <p:cNvPr id="12" name="TextBox 11"/>
+              <a:t>5</a:t>
+            </a:r>
+          </a:p>
+        </p:txBody>
+      </p:sp>
+      <p:sp>
+        <p:nvSpPr>
+          <p:cNvPr id="36" name="TextBox 35"/>
           <p:cNvSpPr txBox="1"/>
           <p:nvPr/>
         </p:nvSpPr>
         <p:spPr>
           <a:xfrm>
-            <a:off x="1536192" y="1965960"/>
-            <a:ext cx="2414016" cy="329184"/>
+            <a:off x="10283342" y="2103120"/>
+            <a:ext cx="1009497" cy="329184"/>
           </a:xfrm>
           <a:prstGeom prst="rect">
             <a:avLst/>
@@ -6101,21 +6823,21 @@
                 </a:solidFill>
                 <a:latin typeface="Arial"/>
               </a:rPr>
-              <a:t>1</a:t>
-            </a:r>
-          </a:p>
-        </p:txBody>
-      </p:sp>
-      <p:sp>
-        <p:nvSpPr>
-          <p:cNvPr id="13" name="TextBox 12"/>
+              <a:t>Refine</a:t>
+            </a:r>
+          </a:p>
+        </p:txBody>
+      </p:sp>
+      <p:sp>
+        <p:nvSpPr>
+          <p:cNvPr id="37" name="TextBox 36"/>
           <p:cNvSpPr txBox="1"/>
           <p:nvPr/>
         </p:nvSpPr>
         <p:spPr>
           <a:xfrm>
-            <a:off x="1536192" y="2350008"/>
-            <a:ext cx="2414016" cy="1005839"/>
+            <a:off x="10283342" y="2487168"/>
+            <a:ext cx="1009497" cy="2852928"/>
           </a:xfrm>
           <a:prstGeom prst="rect">
             <a:avLst/>
@@ -6136,1207 +6858,7 @@
                 </a:solidFill>
                 <a:latin typeface="Arial"/>
               </a:rPr>
-              <a:t>Order confirmed</a:t>
-            </a:r>
-          </a:p>
-        </p:txBody>
-      </p:sp>
-      <p:sp>
-        <p:nvSpPr>
-          <p:cNvPr id="14" name="Rounded Rectangle 13"/>
-          <p:cNvSpPr/>
-          <p:nvPr/>
-        </p:nvSpPr>
-        <p:spPr>
-          <a:xfrm>
-            <a:off x="4315968" y="1783080"/>
-            <a:ext cx="3401568" cy="1719072"/>
-          </a:xfrm>
-          <a:prstGeom prst="roundRect">
-            <a:avLst/>
-          </a:prstGeom>
-          <a:solidFill>
-            <a:srgbClr val="F5F8FC"/>
-          </a:solidFill>
-          <a:ln>
-            <a:solidFill>
-              <a:srgbClr val="E2E8F0"/>
-            </a:solidFill>
-          </a:ln>
-        </p:spPr>
-        <p:style>
-          <a:lnRef idx="1">
-            <a:schemeClr val="accent1"/>
-          </a:lnRef>
-          <a:fillRef idx="3">
-            <a:schemeClr val="accent1"/>
-          </a:fillRef>
-          <a:effectRef idx="2">
-            <a:schemeClr val="accent1"/>
-          </a:effectRef>
-          <a:fontRef idx="minor">
-            <a:schemeClr val="lt1"/>
-          </a:fontRef>
-        </p:style>
-        <p:txBody>
-          <a:bodyPr rtlCol="0" anchor="ctr"/>
-          <a:lstStyle/>
-          <a:p>
-            <a:pPr algn="ctr"/>
-          </a:p>
-        </p:txBody>
-      </p:sp>
-      <p:sp>
-        <p:nvSpPr>
-          <p:cNvPr id="15" name="Rectangle 14"/>
-          <p:cNvSpPr/>
-          <p:nvPr/>
-        </p:nvSpPr>
-        <p:spPr>
-          <a:xfrm>
-            <a:off x="4315968" y="1783080"/>
-            <a:ext cx="73152" cy="1719072"/>
-          </a:xfrm>
-          <a:prstGeom prst="rect">
-            <a:avLst/>
-          </a:prstGeom>
-          <a:solidFill>
-            <a:srgbClr val="10B981"/>
-          </a:solidFill>
-          <a:ln>
-            <a:solidFill>
-              <a:srgbClr val="10B981"/>
-            </a:solidFill>
-          </a:ln>
-        </p:spPr>
-        <p:style>
-          <a:lnRef idx="1">
-            <a:schemeClr val="accent1"/>
-          </a:lnRef>
-          <a:fillRef idx="3">
-            <a:schemeClr val="accent1"/>
-          </a:fillRef>
-          <a:effectRef idx="2">
-            <a:schemeClr val="accent1"/>
-          </a:effectRef>
-          <a:fontRef idx="minor">
-            <a:schemeClr val="lt1"/>
-          </a:fontRef>
-        </p:style>
-        <p:txBody>
-          <a:bodyPr rtlCol="0" anchor="ctr"/>
-          <a:lstStyle/>
-          <a:p>
-            <a:pPr algn="ctr"/>
-          </a:p>
-        </p:txBody>
-      </p:sp>
-      <p:sp>
-        <p:nvSpPr>
-          <p:cNvPr id="16" name="Rounded Rectangle 15"/>
-          <p:cNvSpPr/>
-          <p:nvPr/>
-        </p:nvSpPr>
-        <p:spPr>
-          <a:xfrm>
-            <a:off x="4517136" y="2002536"/>
-            <a:ext cx="438912" cy="438912"/>
-          </a:xfrm>
-          <a:prstGeom prst="roundRect">
-            <a:avLst/>
-          </a:prstGeom>
-          <a:solidFill>
-            <a:srgbClr val="10B981"/>
-          </a:solidFill>
-          <a:ln>
-            <a:solidFill>
-              <a:srgbClr val="10B981"/>
-            </a:solidFill>
-          </a:ln>
-        </p:spPr>
-        <p:style>
-          <a:lnRef idx="1">
-            <a:schemeClr val="accent1"/>
-          </a:lnRef>
-          <a:fillRef idx="3">
-            <a:schemeClr val="accent1"/>
-          </a:fillRef>
-          <a:effectRef idx="2">
-            <a:schemeClr val="accent1"/>
-          </a:effectRef>
-          <a:fontRef idx="minor">
-            <a:schemeClr val="lt1"/>
-          </a:fontRef>
-        </p:style>
-        <p:txBody>
-          <a:bodyPr rtlCol="0" anchor="ctr"/>
-          <a:lstStyle/>
-          <a:p>
-            <a:pPr algn="ctr"/>
-          </a:p>
-        </p:txBody>
-      </p:sp>
-      <p:sp>
-        <p:nvSpPr>
-          <p:cNvPr id="17" name="TextBox 16"/>
-          <p:cNvSpPr txBox="1"/>
-          <p:nvPr/>
-        </p:nvSpPr>
-        <p:spPr>
-          <a:xfrm>
-            <a:off x="4517136" y="2011680"/>
-            <a:ext cx="438912" cy="420624"/>
-          </a:xfrm>
-          <a:prstGeom prst="rect">
-            <a:avLst/>
-          </a:prstGeom>
-          <a:noFill/>
-        </p:spPr>
-        <p:txBody>
-          <a:bodyPr wrap="square" anchor="ctr">
-            <a:spAutoFit/>
-          </a:bodyPr>
-          <a:lstStyle/>
-          <a:p>
-            <a:pPr algn="ctr"/>
-            <a:r>
-              <a:rPr sz="1400" b="1">
-                <a:solidFill>
-                  <a:srgbClr val="FFFFFF"/>
-                </a:solidFill>
-                <a:latin typeface="Arial"/>
-              </a:rPr>
-              <a:t>2</a:t>
-            </a:r>
-          </a:p>
-        </p:txBody>
-      </p:sp>
-      <p:sp>
-        <p:nvSpPr>
-          <p:cNvPr id="18" name="TextBox 17"/>
-          <p:cNvSpPr txBox="1"/>
-          <p:nvPr/>
-        </p:nvSpPr>
-        <p:spPr>
-          <a:xfrm>
-            <a:off x="5120640" y="1965960"/>
-            <a:ext cx="2414016" cy="329184"/>
-          </a:xfrm>
-          <a:prstGeom prst="rect">
-            <a:avLst/>
-          </a:prstGeom>
-          <a:noFill/>
-        </p:spPr>
-        <p:txBody>
-          <a:bodyPr wrap="square" anchor="t">
-            <a:spAutoFit/>
-          </a:bodyPr>
-          <a:lstStyle/>
-          <a:p>
-            <a:pPr algn="l"/>
-            <a:r>
-              <a:rPr sz="1400" b="1">
-                <a:solidFill>
-                  <a:srgbClr val="10B981"/>
-                </a:solidFill>
-                <a:latin typeface="Arial"/>
-              </a:rPr>
-              <a:t>2</a:t>
-            </a:r>
-          </a:p>
-        </p:txBody>
-      </p:sp>
-      <p:sp>
-        <p:nvSpPr>
-          <p:cNvPr id="19" name="TextBox 18"/>
-          <p:cNvSpPr txBox="1"/>
-          <p:nvPr/>
-        </p:nvSpPr>
-        <p:spPr>
-          <a:xfrm>
-            <a:off x="5120640" y="2350008"/>
-            <a:ext cx="2414016" cy="1005839"/>
-          </a:xfrm>
-          <a:prstGeom prst="rect">
-            <a:avLst/>
-          </a:prstGeom>
-          <a:noFill/>
-        </p:spPr>
-        <p:txBody>
-          <a:bodyPr wrap="square" anchor="t">
-            <a:spAutoFit/>
-          </a:bodyPr>
-          <a:lstStyle/>
-          <a:p>
-            <a:pPr algn="l"/>
-            <a:r>
-              <a:rPr sz="1150" b="0">
-                <a:solidFill>
-                  <a:srgbClr val="161B26"/>
-                </a:solidFill>
-                <a:latin typeface="Arial"/>
-              </a:rPr>
-              <a:t>Inventory reserved</a:t>
-            </a:r>
-          </a:p>
-        </p:txBody>
-      </p:sp>
-      <p:sp>
-        <p:nvSpPr>
-          <p:cNvPr id="20" name="Rounded Rectangle 19"/>
-          <p:cNvSpPr/>
-          <p:nvPr/>
-        </p:nvSpPr>
-        <p:spPr>
-          <a:xfrm>
-            <a:off x="7900416" y="1783080"/>
-            <a:ext cx="3401568" cy="1719072"/>
-          </a:xfrm>
-          <a:prstGeom prst="roundRect">
-            <a:avLst/>
-          </a:prstGeom>
-          <a:solidFill>
-            <a:srgbClr val="F5F8FC"/>
-          </a:solidFill>
-          <a:ln>
-            <a:solidFill>
-              <a:srgbClr val="E2E8F0"/>
-            </a:solidFill>
-          </a:ln>
-        </p:spPr>
-        <p:style>
-          <a:lnRef idx="1">
-            <a:schemeClr val="accent1"/>
-          </a:lnRef>
-          <a:fillRef idx="3">
-            <a:schemeClr val="accent1"/>
-          </a:fillRef>
-          <a:effectRef idx="2">
-            <a:schemeClr val="accent1"/>
-          </a:effectRef>
-          <a:fontRef idx="minor">
-            <a:schemeClr val="lt1"/>
-          </a:fontRef>
-        </p:style>
-        <p:txBody>
-          <a:bodyPr rtlCol="0" anchor="ctr"/>
-          <a:lstStyle/>
-          <a:p>
-            <a:pPr algn="ctr"/>
-          </a:p>
-        </p:txBody>
-      </p:sp>
-      <p:sp>
-        <p:nvSpPr>
-          <p:cNvPr id="21" name="Rectangle 20"/>
-          <p:cNvSpPr/>
-          <p:nvPr/>
-        </p:nvSpPr>
-        <p:spPr>
-          <a:xfrm>
-            <a:off x="7900416" y="1783080"/>
-            <a:ext cx="73152" cy="1719072"/>
-          </a:xfrm>
-          <a:prstGeom prst="rect">
-            <a:avLst/>
-          </a:prstGeom>
-          <a:solidFill>
-            <a:srgbClr val="7C3AED"/>
-          </a:solidFill>
-          <a:ln>
-            <a:solidFill>
-              <a:srgbClr val="7C3AED"/>
-            </a:solidFill>
-          </a:ln>
-        </p:spPr>
-        <p:style>
-          <a:lnRef idx="1">
-            <a:schemeClr val="accent1"/>
-          </a:lnRef>
-          <a:fillRef idx="3">
-            <a:schemeClr val="accent1"/>
-          </a:fillRef>
-          <a:effectRef idx="2">
-            <a:schemeClr val="accent1"/>
-          </a:effectRef>
-          <a:fontRef idx="minor">
-            <a:schemeClr val="lt1"/>
-          </a:fontRef>
-        </p:style>
-        <p:txBody>
-          <a:bodyPr rtlCol="0" anchor="ctr"/>
-          <a:lstStyle/>
-          <a:p>
-            <a:pPr algn="ctr"/>
-          </a:p>
-        </p:txBody>
-      </p:sp>
-      <p:sp>
-        <p:nvSpPr>
-          <p:cNvPr id="22" name="Rounded Rectangle 21"/>
-          <p:cNvSpPr/>
-          <p:nvPr/>
-        </p:nvSpPr>
-        <p:spPr>
-          <a:xfrm>
-            <a:off x="8101584" y="2002536"/>
-            <a:ext cx="438912" cy="438912"/>
-          </a:xfrm>
-          <a:prstGeom prst="roundRect">
-            <a:avLst/>
-          </a:prstGeom>
-          <a:solidFill>
-            <a:srgbClr val="7C3AED"/>
-          </a:solidFill>
-          <a:ln>
-            <a:solidFill>
-              <a:srgbClr val="7C3AED"/>
-            </a:solidFill>
-          </a:ln>
-        </p:spPr>
-        <p:style>
-          <a:lnRef idx="1">
-            <a:schemeClr val="accent1"/>
-          </a:lnRef>
-          <a:fillRef idx="3">
-            <a:schemeClr val="accent1"/>
-          </a:fillRef>
-          <a:effectRef idx="2">
-            <a:schemeClr val="accent1"/>
-          </a:effectRef>
-          <a:fontRef idx="minor">
-            <a:schemeClr val="lt1"/>
-          </a:fontRef>
-        </p:style>
-        <p:txBody>
-          <a:bodyPr rtlCol="0" anchor="ctr"/>
-          <a:lstStyle/>
-          <a:p>
-            <a:pPr algn="ctr"/>
-          </a:p>
-        </p:txBody>
-      </p:sp>
-      <p:sp>
-        <p:nvSpPr>
-          <p:cNvPr id="23" name="TextBox 22"/>
-          <p:cNvSpPr txBox="1"/>
-          <p:nvPr/>
-        </p:nvSpPr>
-        <p:spPr>
-          <a:xfrm>
-            <a:off x="8101584" y="2011680"/>
-            <a:ext cx="438912" cy="420624"/>
-          </a:xfrm>
-          <a:prstGeom prst="rect">
-            <a:avLst/>
-          </a:prstGeom>
-          <a:noFill/>
-        </p:spPr>
-        <p:txBody>
-          <a:bodyPr wrap="square" anchor="ctr">
-            <a:spAutoFit/>
-          </a:bodyPr>
-          <a:lstStyle/>
-          <a:p>
-            <a:pPr algn="ctr"/>
-            <a:r>
-              <a:rPr sz="1400" b="1">
-                <a:solidFill>
-                  <a:srgbClr val="FFFFFF"/>
-                </a:solidFill>
-                <a:latin typeface="Arial"/>
-              </a:rPr>
-              <a:t>3</a:t>
-            </a:r>
-          </a:p>
-        </p:txBody>
-      </p:sp>
-      <p:sp>
-        <p:nvSpPr>
-          <p:cNvPr id="24" name="TextBox 23"/>
-          <p:cNvSpPr txBox="1"/>
-          <p:nvPr/>
-        </p:nvSpPr>
-        <p:spPr>
-          <a:xfrm>
-            <a:off x="8705088" y="1965960"/>
-            <a:ext cx="2414016" cy="329184"/>
-          </a:xfrm>
-          <a:prstGeom prst="rect">
-            <a:avLst/>
-          </a:prstGeom>
-          <a:noFill/>
-        </p:spPr>
-        <p:txBody>
-          <a:bodyPr wrap="square" anchor="t">
-            <a:spAutoFit/>
-          </a:bodyPr>
-          <a:lstStyle/>
-          <a:p>
-            <a:pPr algn="l"/>
-            <a:r>
-              <a:rPr sz="1400" b="1">
-                <a:solidFill>
-                  <a:srgbClr val="7C3AED"/>
-                </a:solidFill>
-                <a:latin typeface="Arial"/>
-              </a:rPr>
-              <a:t>3</a:t>
-            </a:r>
-          </a:p>
-        </p:txBody>
-      </p:sp>
-      <p:sp>
-        <p:nvSpPr>
-          <p:cNvPr id="25" name="TextBox 24"/>
-          <p:cNvSpPr txBox="1"/>
-          <p:nvPr/>
-        </p:nvSpPr>
-        <p:spPr>
-          <a:xfrm>
-            <a:off x="8705088" y="2350008"/>
-            <a:ext cx="2414016" cy="1005839"/>
-          </a:xfrm>
-          <a:prstGeom prst="rect">
-            <a:avLst/>
-          </a:prstGeom>
-          <a:noFill/>
-        </p:spPr>
-        <p:txBody>
-          <a:bodyPr wrap="square" anchor="t">
-            <a:spAutoFit/>
-          </a:bodyPr>
-          <a:lstStyle/>
-          <a:p>
-            <a:pPr algn="l"/>
-            <a:r>
-              <a:rPr sz="1150" b="0">
-                <a:solidFill>
-                  <a:srgbClr val="161B26"/>
-                </a:solidFill>
-                <a:latin typeface="Arial"/>
-              </a:rPr>
-              <a:t>Route optimised</a:t>
-            </a:r>
-          </a:p>
-        </p:txBody>
-      </p:sp>
-      <p:sp>
-        <p:nvSpPr>
-          <p:cNvPr id="26" name="Rounded Rectangle 25"/>
-          <p:cNvSpPr/>
-          <p:nvPr/>
-        </p:nvSpPr>
-        <p:spPr>
-          <a:xfrm>
-            <a:off x="731520" y="3776472"/>
-            <a:ext cx="3401568" cy="1719072"/>
-          </a:xfrm>
-          <a:prstGeom prst="roundRect">
-            <a:avLst/>
-          </a:prstGeom>
-          <a:solidFill>
-            <a:srgbClr val="F5F8FC"/>
-          </a:solidFill>
-          <a:ln>
-            <a:solidFill>
-              <a:srgbClr val="E2E8F0"/>
-            </a:solidFill>
-          </a:ln>
-        </p:spPr>
-        <p:style>
-          <a:lnRef idx="1">
-            <a:schemeClr val="accent1"/>
-          </a:lnRef>
-          <a:fillRef idx="3">
-            <a:schemeClr val="accent1"/>
-          </a:fillRef>
-          <a:effectRef idx="2">
-            <a:schemeClr val="accent1"/>
-          </a:effectRef>
-          <a:fontRef idx="minor">
-            <a:schemeClr val="lt1"/>
-          </a:fontRef>
-        </p:style>
-        <p:txBody>
-          <a:bodyPr rtlCol="0" anchor="ctr"/>
-          <a:lstStyle/>
-          <a:p>
-            <a:pPr algn="ctr"/>
-          </a:p>
-        </p:txBody>
-      </p:sp>
-      <p:sp>
-        <p:nvSpPr>
-          <p:cNvPr id="27" name="Rectangle 26"/>
-          <p:cNvSpPr/>
-          <p:nvPr/>
-        </p:nvSpPr>
-        <p:spPr>
-          <a:xfrm>
-            <a:off x="731520" y="3776472"/>
-            <a:ext cx="73152" cy="1719072"/>
-          </a:xfrm>
-          <a:prstGeom prst="rect">
-            <a:avLst/>
-          </a:prstGeom>
-          <a:solidFill>
-            <a:srgbClr val="F59E0B"/>
-          </a:solidFill>
-          <a:ln>
-            <a:solidFill>
-              <a:srgbClr val="F59E0B"/>
-            </a:solidFill>
-          </a:ln>
-        </p:spPr>
-        <p:style>
-          <a:lnRef idx="1">
-            <a:schemeClr val="accent1"/>
-          </a:lnRef>
-          <a:fillRef idx="3">
-            <a:schemeClr val="accent1"/>
-          </a:fillRef>
-          <a:effectRef idx="2">
-            <a:schemeClr val="accent1"/>
-          </a:effectRef>
-          <a:fontRef idx="minor">
-            <a:schemeClr val="lt1"/>
-          </a:fontRef>
-        </p:style>
-        <p:txBody>
-          <a:bodyPr rtlCol="0" anchor="ctr"/>
-          <a:lstStyle/>
-          <a:p>
-            <a:pPr algn="ctr"/>
-          </a:p>
-        </p:txBody>
-      </p:sp>
-      <p:sp>
-        <p:nvSpPr>
-          <p:cNvPr id="28" name="Rounded Rectangle 27"/>
-          <p:cNvSpPr/>
-          <p:nvPr/>
-        </p:nvSpPr>
-        <p:spPr>
-          <a:xfrm>
-            <a:off x="932688" y="3995928"/>
-            <a:ext cx="438912" cy="438912"/>
-          </a:xfrm>
-          <a:prstGeom prst="roundRect">
-            <a:avLst/>
-          </a:prstGeom>
-          <a:solidFill>
-            <a:srgbClr val="F59E0B"/>
-          </a:solidFill>
-          <a:ln>
-            <a:solidFill>
-              <a:srgbClr val="F59E0B"/>
-            </a:solidFill>
-          </a:ln>
-        </p:spPr>
-        <p:style>
-          <a:lnRef idx="1">
-            <a:schemeClr val="accent1"/>
-          </a:lnRef>
-          <a:fillRef idx="3">
-            <a:schemeClr val="accent1"/>
-          </a:fillRef>
-          <a:effectRef idx="2">
-            <a:schemeClr val="accent1"/>
-          </a:effectRef>
-          <a:fontRef idx="minor">
-            <a:schemeClr val="lt1"/>
-          </a:fontRef>
-        </p:style>
-        <p:txBody>
-          <a:bodyPr rtlCol="0" anchor="ctr"/>
-          <a:lstStyle/>
-          <a:p>
-            <a:pPr algn="ctr"/>
-          </a:p>
-        </p:txBody>
-      </p:sp>
-      <p:sp>
-        <p:nvSpPr>
-          <p:cNvPr id="29" name="TextBox 28"/>
-          <p:cNvSpPr txBox="1"/>
-          <p:nvPr/>
-        </p:nvSpPr>
-        <p:spPr>
-          <a:xfrm>
-            <a:off x="932688" y="4005072"/>
-            <a:ext cx="438912" cy="420624"/>
-          </a:xfrm>
-          <a:prstGeom prst="rect">
-            <a:avLst/>
-          </a:prstGeom>
-          <a:noFill/>
-        </p:spPr>
-        <p:txBody>
-          <a:bodyPr wrap="square" anchor="ctr">
-            <a:spAutoFit/>
-          </a:bodyPr>
-          <a:lstStyle/>
-          <a:p>
-            <a:pPr algn="ctr"/>
-            <a:r>
-              <a:rPr sz="1400" b="1">
-                <a:solidFill>
-                  <a:srgbClr val="FFFFFF"/>
-                </a:solidFill>
-                <a:latin typeface="Arial"/>
-              </a:rPr>
-              <a:t>4</a:t>
-            </a:r>
-          </a:p>
-        </p:txBody>
-      </p:sp>
-      <p:sp>
-        <p:nvSpPr>
-          <p:cNvPr id="30" name="TextBox 29"/>
-          <p:cNvSpPr txBox="1"/>
-          <p:nvPr/>
-        </p:nvSpPr>
-        <p:spPr>
-          <a:xfrm>
-            <a:off x="1536192" y="3959352"/>
-            <a:ext cx="2414016" cy="329184"/>
-          </a:xfrm>
-          <a:prstGeom prst="rect">
-            <a:avLst/>
-          </a:prstGeom>
-          <a:noFill/>
-        </p:spPr>
-        <p:txBody>
-          <a:bodyPr wrap="square" anchor="t">
-            <a:spAutoFit/>
-          </a:bodyPr>
-          <a:lstStyle/>
-          <a:p>
-            <a:pPr algn="l"/>
-            <a:r>
-              <a:rPr sz="1400" b="1">
-                <a:solidFill>
-                  <a:srgbClr val="F59E0B"/>
-                </a:solidFill>
-                <a:latin typeface="Arial"/>
-              </a:rPr>
-              <a:t>4</a:t>
-            </a:r>
-          </a:p>
-        </p:txBody>
-      </p:sp>
-      <p:sp>
-        <p:nvSpPr>
-          <p:cNvPr id="31" name="TextBox 30"/>
-          <p:cNvSpPr txBox="1"/>
-          <p:nvPr/>
-        </p:nvSpPr>
-        <p:spPr>
-          <a:xfrm>
-            <a:off x="1536192" y="4343400"/>
-            <a:ext cx="2414016" cy="1005839"/>
-          </a:xfrm>
-          <a:prstGeom prst="rect">
-            <a:avLst/>
-          </a:prstGeom>
-          <a:noFill/>
-        </p:spPr>
-        <p:txBody>
-          <a:bodyPr wrap="square" anchor="t">
-            <a:spAutoFit/>
-          </a:bodyPr>
-          <a:lstStyle/>
-          <a:p>
-            <a:pPr algn="l"/>
-            <a:r>
-              <a:rPr sz="1150" b="0">
-                <a:solidFill>
-                  <a:srgbClr val="161B26"/>
-                </a:solidFill>
-                <a:latin typeface="Arial"/>
-              </a:rPr>
-              <a:t>Low-emission delivery</a:t>
-            </a:r>
-          </a:p>
-        </p:txBody>
-      </p:sp>
-      <p:sp>
-        <p:nvSpPr>
-          <p:cNvPr id="32" name="Rounded Rectangle 31"/>
-          <p:cNvSpPr/>
-          <p:nvPr/>
-        </p:nvSpPr>
-        <p:spPr>
-          <a:xfrm>
-            <a:off x="4315968" y="3776472"/>
-            <a:ext cx="3401568" cy="1719072"/>
-          </a:xfrm>
-          <a:prstGeom prst="roundRect">
-            <a:avLst/>
-          </a:prstGeom>
-          <a:solidFill>
-            <a:srgbClr val="F5F8FC"/>
-          </a:solidFill>
-          <a:ln>
-            <a:solidFill>
-              <a:srgbClr val="E2E8F0"/>
-            </a:solidFill>
-          </a:ln>
-        </p:spPr>
-        <p:style>
-          <a:lnRef idx="1">
-            <a:schemeClr val="accent1"/>
-          </a:lnRef>
-          <a:fillRef idx="3">
-            <a:schemeClr val="accent1"/>
-          </a:fillRef>
-          <a:effectRef idx="2">
-            <a:schemeClr val="accent1"/>
-          </a:effectRef>
-          <a:fontRef idx="minor">
-            <a:schemeClr val="lt1"/>
-          </a:fontRef>
-        </p:style>
-        <p:txBody>
-          <a:bodyPr rtlCol="0" anchor="ctr"/>
-          <a:lstStyle/>
-          <a:p>
-            <a:pPr algn="ctr"/>
-          </a:p>
-        </p:txBody>
-      </p:sp>
-      <p:sp>
-        <p:nvSpPr>
-          <p:cNvPr id="33" name="Rectangle 32"/>
-          <p:cNvSpPr/>
-          <p:nvPr/>
-        </p:nvSpPr>
-        <p:spPr>
-          <a:xfrm>
-            <a:off x="4315968" y="3776472"/>
-            <a:ext cx="73152" cy="1719072"/>
-          </a:xfrm>
-          <a:prstGeom prst="rect">
-            <a:avLst/>
-          </a:prstGeom>
-          <a:solidFill>
-            <a:srgbClr val="1F6FEB"/>
-          </a:solidFill>
-          <a:ln>
-            <a:solidFill>
-              <a:srgbClr val="1F6FEB"/>
-            </a:solidFill>
-          </a:ln>
-        </p:spPr>
-        <p:style>
-          <a:lnRef idx="1">
-            <a:schemeClr val="accent1"/>
-          </a:lnRef>
-          <a:fillRef idx="3">
-            <a:schemeClr val="accent1"/>
-          </a:fillRef>
-          <a:effectRef idx="2">
-            <a:schemeClr val="accent1"/>
-          </a:effectRef>
-          <a:fontRef idx="minor">
-            <a:schemeClr val="lt1"/>
-          </a:fontRef>
-        </p:style>
-        <p:txBody>
-          <a:bodyPr rtlCol="0" anchor="ctr"/>
-          <a:lstStyle/>
-          <a:p>
-            <a:pPr algn="ctr"/>
-          </a:p>
-        </p:txBody>
-      </p:sp>
-      <p:sp>
-        <p:nvSpPr>
-          <p:cNvPr id="34" name="Rounded Rectangle 33"/>
-          <p:cNvSpPr/>
-          <p:nvPr/>
-        </p:nvSpPr>
-        <p:spPr>
-          <a:xfrm>
-            <a:off x="4517136" y="3995928"/>
-            <a:ext cx="438912" cy="438912"/>
-          </a:xfrm>
-          <a:prstGeom prst="roundRect">
-            <a:avLst/>
-          </a:prstGeom>
-          <a:solidFill>
-            <a:srgbClr val="1F6FEB"/>
-          </a:solidFill>
-          <a:ln>
-            <a:solidFill>
-              <a:srgbClr val="1F6FEB"/>
-            </a:solidFill>
-          </a:ln>
-        </p:spPr>
-        <p:style>
-          <a:lnRef idx="1">
-            <a:schemeClr val="accent1"/>
-          </a:lnRef>
-          <a:fillRef idx="3">
-            <a:schemeClr val="accent1"/>
-          </a:fillRef>
-          <a:effectRef idx="2">
-            <a:schemeClr val="accent1"/>
-          </a:effectRef>
-          <a:fontRef idx="minor">
-            <a:schemeClr val="lt1"/>
-          </a:fontRef>
-        </p:style>
-        <p:txBody>
-          <a:bodyPr rtlCol="0" anchor="ctr"/>
-          <a:lstStyle/>
-          <a:p>
-            <a:pPr algn="ctr"/>
-          </a:p>
-        </p:txBody>
-      </p:sp>
-      <p:sp>
-        <p:nvSpPr>
-          <p:cNvPr id="35" name="TextBox 34"/>
-          <p:cNvSpPr txBox="1"/>
-          <p:nvPr/>
-        </p:nvSpPr>
-        <p:spPr>
-          <a:xfrm>
-            <a:off x="4517136" y="4005072"/>
-            <a:ext cx="438912" cy="420624"/>
-          </a:xfrm>
-          <a:prstGeom prst="rect">
-            <a:avLst/>
-          </a:prstGeom>
-          <a:noFill/>
-        </p:spPr>
-        <p:txBody>
-          <a:bodyPr wrap="square" anchor="ctr">
-            <a:spAutoFit/>
-          </a:bodyPr>
-          <a:lstStyle/>
-          <a:p>
-            <a:pPr algn="ctr"/>
-            <a:r>
-              <a:rPr sz="1400" b="1">
-                <a:solidFill>
-                  <a:srgbClr val="FFFFFF"/>
-                </a:solidFill>
-                <a:latin typeface="Arial"/>
-              </a:rPr>
-              <a:t>5</a:t>
-            </a:r>
-          </a:p>
-        </p:txBody>
-      </p:sp>
-      <p:sp>
-        <p:nvSpPr>
-          <p:cNvPr id="36" name="TextBox 35"/>
-          <p:cNvSpPr txBox="1"/>
-          <p:nvPr/>
-        </p:nvSpPr>
-        <p:spPr>
-          <a:xfrm>
-            <a:off x="5120640" y="3959352"/>
-            <a:ext cx="2414016" cy="329184"/>
-          </a:xfrm>
-          <a:prstGeom prst="rect">
-            <a:avLst/>
-          </a:prstGeom>
-          <a:noFill/>
-        </p:spPr>
-        <p:txBody>
-          <a:bodyPr wrap="square" anchor="t">
-            <a:spAutoFit/>
-          </a:bodyPr>
-          <a:lstStyle/>
-          <a:p>
-            <a:pPr algn="l"/>
-            <a:r>
-              <a:rPr sz="1400" b="1">
-                <a:solidFill>
-                  <a:srgbClr val="1F6FEB"/>
-                </a:solidFill>
-                <a:latin typeface="Arial"/>
-              </a:rPr>
-              <a:t>5</a:t>
-            </a:r>
-          </a:p>
-        </p:txBody>
-      </p:sp>
-      <p:sp>
-        <p:nvSpPr>
-          <p:cNvPr id="37" name="TextBox 36"/>
-          <p:cNvSpPr txBox="1"/>
-          <p:nvPr/>
-        </p:nvSpPr>
-        <p:spPr>
-          <a:xfrm>
-            <a:off x="5120640" y="4343400"/>
-            <a:ext cx="2414016" cy="1005839"/>
-          </a:xfrm>
-          <a:prstGeom prst="rect">
-            <a:avLst/>
-          </a:prstGeom>
-          <a:noFill/>
-        </p:spPr>
-        <p:txBody>
-          <a:bodyPr wrap="square" anchor="t">
-            <a:spAutoFit/>
-          </a:bodyPr>
-          <a:lstStyle/>
-          <a:p>
-            <a:pPr algn="l"/>
-            <a:r>
-              <a:rPr sz="1150" b="0">
-                <a:solidFill>
-                  <a:srgbClr val="161B26"/>
-                </a:solidFill>
-                <a:latin typeface="Arial"/>
-              </a:rPr>
-              <a:t>Customer feedback</a:t>
-            </a:r>
-          </a:p>
-        </p:txBody>
-      </p:sp>
-      <p:sp>
-        <p:nvSpPr>
-          <p:cNvPr id="38" name="Rounded Rectangle 37"/>
-          <p:cNvSpPr/>
-          <p:nvPr/>
-        </p:nvSpPr>
-        <p:spPr>
-          <a:xfrm>
-            <a:off x="7900416" y="3776472"/>
-            <a:ext cx="3401568" cy="1719072"/>
-          </a:xfrm>
-          <a:prstGeom prst="roundRect">
-            <a:avLst/>
-          </a:prstGeom>
-          <a:solidFill>
-            <a:srgbClr val="F5F8FC"/>
-          </a:solidFill>
-          <a:ln>
-            <a:solidFill>
-              <a:srgbClr val="E2E8F0"/>
-            </a:solidFill>
-          </a:ln>
-        </p:spPr>
-        <p:style>
-          <a:lnRef idx="1">
-            <a:schemeClr val="accent1"/>
-          </a:lnRef>
-          <a:fillRef idx="3">
-            <a:schemeClr val="accent1"/>
-          </a:fillRef>
-          <a:effectRef idx="2">
-            <a:schemeClr val="accent1"/>
-          </a:effectRef>
-          <a:fontRef idx="minor">
-            <a:schemeClr val="lt1"/>
-          </a:fontRef>
-        </p:style>
-        <p:txBody>
-          <a:bodyPr rtlCol="0" anchor="ctr"/>
-          <a:lstStyle/>
-          <a:p>
-            <a:pPr algn="ctr"/>
-          </a:p>
-        </p:txBody>
-      </p:sp>
-      <p:sp>
-        <p:nvSpPr>
-          <p:cNvPr id="39" name="Rectangle 38"/>
-          <p:cNvSpPr/>
-          <p:nvPr/>
-        </p:nvSpPr>
-        <p:spPr>
-          <a:xfrm>
-            <a:off x="7900416" y="3776472"/>
-            <a:ext cx="73152" cy="1719072"/>
-          </a:xfrm>
-          <a:prstGeom prst="rect">
-            <a:avLst/>
-          </a:prstGeom>
-          <a:solidFill>
-            <a:srgbClr val="10B981"/>
-          </a:solidFill>
-          <a:ln>
-            <a:solidFill>
-              <a:srgbClr val="10B981"/>
-            </a:solidFill>
-          </a:ln>
-        </p:spPr>
-        <p:style>
-          <a:lnRef idx="1">
-            <a:schemeClr val="accent1"/>
-          </a:lnRef>
-          <a:fillRef idx="3">
-            <a:schemeClr val="accent1"/>
-          </a:fillRef>
-          <a:effectRef idx="2">
-            <a:schemeClr val="accent1"/>
-          </a:effectRef>
-          <a:fontRef idx="minor">
-            <a:schemeClr val="lt1"/>
-          </a:fontRef>
-        </p:style>
-        <p:txBody>
-          <a:bodyPr rtlCol="0" anchor="ctr"/>
-          <a:lstStyle/>
-          <a:p>
-            <a:pPr algn="ctr"/>
-          </a:p>
-        </p:txBody>
-      </p:sp>
-      <p:sp>
-        <p:nvSpPr>
-          <p:cNvPr id="40" name="Rounded Rectangle 39"/>
-          <p:cNvSpPr/>
-          <p:nvPr/>
-        </p:nvSpPr>
-        <p:spPr>
-          <a:xfrm>
-            <a:off x="8101584" y="3995928"/>
-            <a:ext cx="438912" cy="438912"/>
-          </a:xfrm>
-          <a:prstGeom prst="roundRect">
-            <a:avLst/>
-          </a:prstGeom>
-          <a:solidFill>
-            <a:srgbClr val="10B981"/>
-          </a:solidFill>
-          <a:ln>
-            <a:solidFill>
-              <a:srgbClr val="10B981"/>
-            </a:solidFill>
-          </a:ln>
-        </p:spPr>
-        <p:style>
-          <a:lnRef idx="1">
-            <a:schemeClr val="accent1"/>
-          </a:lnRef>
-          <a:fillRef idx="3">
-            <a:schemeClr val="accent1"/>
-          </a:fillRef>
-          <a:effectRef idx="2">
-            <a:schemeClr val="accent1"/>
-          </a:effectRef>
-          <a:fontRef idx="minor">
-            <a:schemeClr val="lt1"/>
-          </a:fontRef>
-        </p:style>
-        <p:txBody>
-          <a:bodyPr rtlCol="0" anchor="ctr"/>
-          <a:lstStyle/>
-          <a:p>
-            <a:pPr algn="ctr"/>
-          </a:p>
-        </p:txBody>
-      </p:sp>
-      <p:sp>
-        <p:nvSpPr>
-          <p:cNvPr id="41" name="TextBox 40"/>
-          <p:cNvSpPr txBox="1"/>
-          <p:nvPr/>
-        </p:nvSpPr>
-        <p:spPr>
-          <a:xfrm>
-            <a:off x="8101584" y="4005072"/>
-            <a:ext cx="438912" cy="420624"/>
-          </a:xfrm>
-          <a:prstGeom prst="rect">
-            <a:avLst/>
-          </a:prstGeom>
-          <a:noFill/>
-        </p:spPr>
-        <p:txBody>
-          <a:bodyPr wrap="square" anchor="ctr">
-            <a:spAutoFit/>
-          </a:bodyPr>
-          <a:lstStyle/>
-          <a:p>
-            <a:pPr algn="ctr"/>
-            <a:r>
-              <a:rPr sz="1400" b="1">
-                <a:solidFill>
-                  <a:srgbClr val="FFFFFF"/>
-                </a:solidFill>
-                <a:latin typeface="Arial"/>
-              </a:rPr>
-              <a:t>6</a:t>
-            </a:r>
-          </a:p>
-        </p:txBody>
-      </p:sp>
-      <p:sp>
-        <p:nvSpPr>
-          <p:cNvPr id="42" name="TextBox 41"/>
-          <p:cNvSpPr txBox="1"/>
-          <p:nvPr/>
-        </p:nvSpPr>
-        <p:spPr>
-          <a:xfrm>
-            <a:off x="8705088" y="3959352"/>
-            <a:ext cx="2414016" cy="329184"/>
-          </a:xfrm>
-          <a:prstGeom prst="rect">
-            <a:avLst/>
-          </a:prstGeom>
-          <a:noFill/>
-        </p:spPr>
-        <p:txBody>
-          <a:bodyPr wrap="square" anchor="t">
-            <a:spAutoFit/>
-          </a:bodyPr>
-          <a:lstStyle/>
-          <a:p>
-            <a:pPr algn="l"/>
-            <a:r>
-              <a:rPr sz="1400" b="1">
-                <a:solidFill>
-                  <a:srgbClr val="10B981"/>
-                </a:solidFill>
-                <a:latin typeface="Arial"/>
-              </a:rPr>
-              <a:t>Rule</a:t>
-            </a:r>
-          </a:p>
-        </p:txBody>
-      </p:sp>
-      <p:sp>
-        <p:nvSpPr>
-          <p:cNvPr id="43" name="TextBox 42"/>
-          <p:cNvSpPr txBox="1"/>
-          <p:nvPr/>
-        </p:nvSpPr>
-        <p:spPr>
-          <a:xfrm>
-            <a:off x="8705088" y="4343400"/>
-            <a:ext cx="2414016" cy="1005839"/>
-          </a:xfrm>
-          <a:prstGeom prst="rect">
-            <a:avLst/>
-          </a:prstGeom>
-          <a:noFill/>
-        </p:spPr>
-        <p:txBody>
-          <a:bodyPr wrap="square" anchor="t">
-            <a:spAutoFit/>
-          </a:bodyPr>
-          <a:lstStyle/>
-          <a:p>
-            <a:pPr algn="l"/>
-            <a:r>
-              <a:rPr sz="1150" b="0">
-                <a:solidFill>
-                  <a:srgbClr val="161B26"/>
-                </a:solidFill>
-                <a:latin typeface="Arial"/>
-              </a:rPr>
-              <a:t>One stage, one verb, one icon</a:t>
+              <a:t>Add editable labels, shapes, connectors, alt text and source notes.</a:t>
             </a:r>
           </a:p>
         </p:txBody>
@@ -7419,6 +6941,246 @@
             <a:avLst/>
           </a:prstGeom>
           <a:solidFill>
+            <a:srgbClr val="7C3AED"/>
+          </a:solidFill>
+          <a:ln>
+            <a:solidFill>
+              <a:srgbClr val="7C3AED"/>
+            </a:solidFill>
+          </a:ln>
+        </p:spPr>
+        <p:style>
+          <a:lnRef idx="1">
+            <a:schemeClr val="accent1"/>
+          </a:lnRef>
+          <a:fillRef idx="3">
+            <a:schemeClr val="accent1"/>
+          </a:fillRef>
+          <a:effectRef idx="2">
+            <a:schemeClr val="accent1"/>
+          </a:effectRef>
+          <a:fontRef idx="minor">
+            <a:schemeClr val="lt1"/>
+          </a:fontRef>
+        </p:style>
+        <p:txBody>
+          <a:bodyPr rtlCol="0" anchor="ctr"/>
+          <a:lstStyle/>
+          <a:p>
+            <a:pPr algn="ctr"/>
+          </a:p>
+        </p:txBody>
+      </p:sp>
+      <p:sp>
+        <p:nvSpPr>
+          <p:cNvPr id="4" name="TextBox 3"/>
+          <p:cNvSpPr txBox="1"/>
+          <p:nvPr/>
+        </p:nvSpPr>
+        <p:spPr>
+          <a:xfrm>
+            <a:off x="658368" y="384048"/>
+            <a:ext cx="10789920" cy="320040"/>
+          </a:xfrm>
+          <a:prstGeom prst="rect">
+            <a:avLst/>
+          </a:prstGeom>
+          <a:noFill/>
+        </p:spPr>
+        <p:txBody>
+          <a:bodyPr wrap="square" anchor="t">
+            <a:spAutoFit/>
+          </a:bodyPr>
+          <a:lstStyle/>
+          <a:p>
+            <a:pPr algn="l"/>
+            <a:r>
+              <a:rPr sz="1100" b="1">
+                <a:solidFill>
+                  <a:srgbClr val="7C3AED"/>
+                </a:solidFill>
+                <a:latin typeface="Arial"/>
+              </a:rPr>
+              <a:t>ACTIVITY 04 · EXAMPLE</a:t>
+            </a:r>
+          </a:p>
+        </p:txBody>
+      </p:sp>
+      <p:sp>
+        <p:nvSpPr>
+          <p:cNvPr id="5" name="TextBox 4"/>
+          <p:cNvSpPr txBox="1"/>
+          <p:nvPr/>
+        </p:nvSpPr>
+        <p:spPr>
+          <a:xfrm>
+            <a:off x="658368" y="749808"/>
+            <a:ext cx="10789920" cy="658368"/>
+          </a:xfrm>
+          <a:prstGeom prst="rect">
+            <a:avLst/>
+          </a:prstGeom>
+          <a:noFill/>
+        </p:spPr>
+        <p:txBody>
+          <a:bodyPr wrap="square" anchor="t">
+            <a:spAutoFit/>
+          </a:bodyPr>
+          <a:lstStyle/>
+          <a:p>
+            <a:pPr algn="l"/>
+            <a:r>
+              <a:rPr sz="2700" b="1">
+                <a:solidFill>
+                  <a:srgbClr val="161B26"/>
+                </a:solidFill>
+                <a:latin typeface="Arial"/>
+              </a:rPr>
+              <a:t>Worked Output</a:t>
+            </a:r>
+          </a:p>
+        </p:txBody>
+      </p:sp>
+      <p:sp>
+        <p:nvSpPr>
+          <p:cNvPr id="6" name="Rectangle 5"/>
+          <p:cNvSpPr/>
+          <p:nvPr/>
+        </p:nvSpPr>
+        <p:spPr>
+          <a:xfrm>
+            <a:off x="658368" y="1444752"/>
+            <a:ext cx="10881360" cy="18288"/>
+          </a:xfrm>
+          <a:prstGeom prst="rect">
+            <a:avLst/>
+          </a:prstGeom>
+          <a:solidFill>
+            <a:srgbClr val="E2E8F0"/>
+          </a:solidFill>
+          <a:ln>
+            <a:solidFill>
+              <a:srgbClr val="E2E8F0"/>
+            </a:solidFill>
+          </a:ln>
+        </p:spPr>
+        <p:style>
+          <a:lnRef idx="1">
+            <a:schemeClr val="accent1"/>
+          </a:lnRef>
+          <a:fillRef idx="3">
+            <a:schemeClr val="accent1"/>
+          </a:fillRef>
+          <a:effectRef idx="2">
+            <a:schemeClr val="accent1"/>
+          </a:effectRef>
+          <a:fontRef idx="minor">
+            <a:schemeClr val="lt1"/>
+          </a:fontRef>
+        </p:style>
+        <p:txBody>
+          <a:bodyPr rtlCol="0" anchor="ctr"/>
+          <a:lstStyle/>
+          <a:p>
+            <a:pPr algn="ctr"/>
+          </a:p>
+        </p:txBody>
+      </p:sp>
+      <p:sp>
+        <p:nvSpPr>
+          <p:cNvPr id="7" name="TextBox 6"/>
+          <p:cNvSpPr txBox="1"/>
+          <p:nvPr/>
+        </p:nvSpPr>
+        <p:spPr>
+          <a:xfrm>
+            <a:off x="658368" y="6473952"/>
+            <a:ext cx="9875520" cy="201168"/>
+          </a:xfrm>
+          <a:prstGeom prst="rect">
+            <a:avLst/>
+          </a:prstGeom>
+          <a:noFill/>
+        </p:spPr>
+        <p:txBody>
+          <a:bodyPr wrap="square" anchor="t">
+            <a:spAutoFit/>
+          </a:bodyPr>
+          <a:lstStyle/>
+          <a:p>
+            <a:pPr algn="l"/>
+            <a:r>
+              <a:rPr sz="800" b="0">
+                <a:solidFill>
+                  <a:srgbClr val="5B6372"/>
+                </a:solidFill>
+                <a:latin typeface="Arial"/>
+              </a:rPr>
+              <a:t>TGS-2026064178 · ACTIVITY PRACTICE · Tertiary Infotech Academy Pte Ltd</a:t>
+            </a:r>
+          </a:p>
+        </p:txBody>
+      </p:sp>
+      <p:sp>
+        <p:nvSpPr>
+          <p:cNvPr id="8" name="Rounded Rectangle 7"/>
+          <p:cNvSpPr/>
+          <p:nvPr/>
+        </p:nvSpPr>
+        <p:spPr>
+          <a:xfrm>
+            <a:off x="731520" y="1783080"/>
+            <a:ext cx="3401568" cy="1719072"/>
+          </a:xfrm>
+          <a:prstGeom prst="roundRect">
+            <a:avLst/>
+          </a:prstGeom>
+          <a:solidFill>
+            <a:srgbClr val="F5F8FC"/>
+          </a:solidFill>
+          <a:ln>
+            <a:solidFill>
+              <a:srgbClr val="E2E8F0"/>
+            </a:solidFill>
+          </a:ln>
+        </p:spPr>
+        <p:style>
+          <a:lnRef idx="1">
+            <a:schemeClr val="accent1"/>
+          </a:lnRef>
+          <a:fillRef idx="3">
+            <a:schemeClr val="accent1"/>
+          </a:fillRef>
+          <a:effectRef idx="2">
+            <a:schemeClr val="accent1"/>
+          </a:effectRef>
+          <a:fontRef idx="minor">
+            <a:schemeClr val="lt1"/>
+          </a:fontRef>
+        </p:style>
+        <p:txBody>
+          <a:bodyPr rtlCol="0" anchor="ctr"/>
+          <a:lstStyle/>
+          <a:p>
+            <a:pPr algn="ctr"/>
+          </a:p>
+        </p:txBody>
+      </p:sp>
+      <p:sp>
+        <p:nvSpPr>
+          <p:cNvPr id="9" name="Rectangle 8"/>
+          <p:cNvSpPr/>
+          <p:nvPr/>
+        </p:nvSpPr>
+        <p:spPr>
+          <a:xfrm>
+            <a:off x="731520" y="1783080"/>
+            <a:ext cx="73152" cy="1719072"/>
+          </a:xfrm>
+          <a:prstGeom prst="rect">
+            <a:avLst/>
+          </a:prstGeom>
+          <a:solidFill>
             <a:srgbClr val="1F6FEB"/>
           </a:solidFill>
           <a:ln>
@@ -7451,14 +7213,94 @@
       </p:sp>
       <p:sp>
         <p:nvSpPr>
-          <p:cNvPr id="4" name="TextBox 3"/>
+          <p:cNvPr id="10" name="Rounded Rectangle 9"/>
+          <p:cNvSpPr/>
+          <p:nvPr/>
+        </p:nvSpPr>
+        <p:spPr>
+          <a:xfrm>
+            <a:off x="932688" y="2002536"/>
+            <a:ext cx="438912" cy="438912"/>
+          </a:xfrm>
+          <a:prstGeom prst="roundRect">
+            <a:avLst/>
+          </a:prstGeom>
+          <a:solidFill>
+            <a:srgbClr val="1F6FEB"/>
+          </a:solidFill>
+          <a:ln>
+            <a:solidFill>
+              <a:srgbClr val="1F6FEB"/>
+            </a:solidFill>
+          </a:ln>
+        </p:spPr>
+        <p:style>
+          <a:lnRef idx="1">
+            <a:schemeClr val="accent1"/>
+          </a:lnRef>
+          <a:fillRef idx="3">
+            <a:schemeClr val="accent1"/>
+          </a:fillRef>
+          <a:effectRef idx="2">
+            <a:schemeClr val="accent1"/>
+          </a:effectRef>
+          <a:fontRef idx="minor">
+            <a:schemeClr val="lt1"/>
+          </a:fontRef>
+        </p:style>
+        <p:txBody>
+          <a:bodyPr rtlCol="0" anchor="ctr"/>
+          <a:lstStyle/>
+          <a:p>
+            <a:pPr algn="ctr"/>
+          </a:p>
+        </p:txBody>
+      </p:sp>
+      <p:sp>
+        <p:nvSpPr>
+          <p:cNvPr id="11" name="TextBox 10"/>
           <p:cNvSpPr txBox="1"/>
           <p:nvPr/>
         </p:nvSpPr>
         <p:spPr>
           <a:xfrm>
-            <a:off x="658368" y="384048"/>
-            <a:ext cx="10789920" cy="320040"/>
+            <a:off x="932688" y="2011680"/>
+            <a:ext cx="438912" cy="420624"/>
+          </a:xfrm>
+          <a:prstGeom prst="rect">
+            <a:avLst/>
+          </a:prstGeom>
+          <a:noFill/>
+        </p:spPr>
+        <p:txBody>
+          <a:bodyPr wrap="square" anchor="ctr">
+            <a:spAutoFit/>
+          </a:bodyPr>
+          <a:lstStyle/>
+          <a:p>
+            <a:pPr algn="ctr"/>
+            <a:r>
+              <a:rPr sz="1400" b="1">
+                <a:solidFill>
+                  <a:srgbClr val="FFFFFF"/>
+                </a:solidFill>
+                <a:latin typeface="Arial"/>
+              </a:rPr>
+              <a:t>1</a:t>
+            </a:r>
+          </a:p>
+        </p:txBody>
+      </p:sp>
+      <p:sp>
+        <p:nvSpPr>
+          <p:cNvPr id="12" name="TextBox 11"/>
+          <p:cNvSpPr txBox="1"/>
+          <p:nvPr/>
+        </p:nvSpPr>
+        <p:spPr>
+          <a:xfrm>
+            <a:off x="1536192" y="1965960"/>
+            <a:ext cx="2414016" cy="329184"/>
           </a:xfrm>
           <a:prstGeom prst="rect">
             <a:avLst/>
@@ -7473,27 +7315,27 @@
           <a:p>
             <a:pPr algn="l"/>
             <a:r>
-              <a:rPr sz="1100" b="1">
+              <a:rPr sz="1400" b="1">
                 <a:solidFill>
                   <a:srgbClr val="1F6FEB"/>
                 </a:solidFill>
                 <a:latin typeface="Arial"/>
               </a:rPr>
-              <a:t>ACTIVITY 04 · ACCEPTANCE</a:t>
-            </a:r>
-          </a:p>
-        </p:txBody>
-      </p:sp>
-      <p:sp>
-        <p:nvSpPr>
-          <p:cNvPr id="5" name="TextBox 4"/>
+              <a:t>1</a:t>
+            </a:r>
+          </a:p>
+        </p:txBody>
+      </p:sp>
+      <p:sp>
+        <p:nvSpPr>
+          <p:cNvPr id="13" name="TextBox 12"/>
           <p:cNvSpPr txBox="1"/>
           <p:nvPr/>
         </p:nvSpPr>
         <p:spPr>
           <a:xfrm>
-            <a:off x="658368" y="749808"/>
-            <a:ext cx="10789920" cy="658368"/>
+            <a:off x="1536192" y="2350008"/>
+            <a:ext cx="2414016" cy="1005839"/>
           </a:xfrm>
           <a:prstGeom prst="rect">
             <a:avLst/>
@@ -7508,33 +7350,33 @@
           <a:p>
             <a:pPr algn="l"/>
             <a:r>
-              <a:rPr sz="2700" b="1">
+              <a:rPr sz="1150" b="0">
                 <a:solidFill>
                   <a:srgbClr val="161B26"/>
                 </a:solidFill>
                 <a:latin typeface="Arial"/>
               </a:rPr>
-              <a:t>What Good Looks Like</a:t>
-            </a:r>
-          </a:p>
-        </p:txBody>
-      </p:sp>
-      <p:sp>
-        <p:nvSpPr>
-          <p:cNvPr id="6" name="Rectangle 5"/>
+              <a:t>Order confirmed</a:t>
+            </a:r>
+          </a:p>
+        </p:txBody>
+      </p:sp>
+      <p:sp>
+        <p:nvSpPr>
+          <p:cNvPr id="14" name="Rounded Rectangle 13"/>
           <p:cNvSpPr/>
           <p:nvPr/>
         </p:nvSpPr>
         <p:spPr>
           <a:xfrm>
-            <a:off x="658368" y="1444752"/>
-            <a:ext cx="10881360" cy="18288"/>
-          </a:xfrm>
-          <a:prstGeom prst="rect">
-            <a:avLst/>
-          </a:prstGeom>
-          <a:solidFill>
-            <a:srgbClr val="E2E8F0"/>
+            <a:off x="4315968" y="1783080"/>
+            <a:ext cx="3401568" cy="1719072"/>
+          </a:xfrm>
+          <a:prstGeom prst="roundRect">
+            <a:avLst/>
+          </a:prstGeom>
+          <a:solidFill>
+            <a:srgbClr val="F5F8FC"/>
           </a:solidFill>
           <a:ln>
             <a:solidFill>
@@ -7566,14 +7408,139 @@
       </p:sp>
       <p:sp>
         <p:nvSpPr>
-          <p:cNvPr id="7" name="TextBox 6"/>
+          <p:cNvPr id="15" name="Rectangle 14"/>
+          <p:cNvSpPr/>
+          <p:nvPr/>
+        </p:nvSpPr>
+        <p:spPr>
+          <a:xfrm>
+            <a:off x="4315968" y="1783080"/>
+            <a:ext cx="73152" cy="1719072"/>
+          </a:xfrm>
+          <a:prstGeom prst="rect">
+            <a:avLst/>
+          </a:prstGeom>
+          <a:solidFill>
+            <a:srgbClr val="10B981"/>
+          </a:solidFill>
+          <a:ln>
+            <a:solidFill>
+              <a:srgbClr val="10B981"/>
+            </a:solidFill>
+          </a:ln>
+        </p:spPr>
+        <p:style>
+          <a:lnRef idx="1">
+            <a:schemeClr val="accent1"/>
+          </a:lnRef>
+          <a:fillRef idx="3">
+            <a:schemeClr val="accent1"/>
+          </a:fillRef>
+          <a:effectRef idx="2">
+            <a:schemeClr val="accent1"/>
+          </a:effectRef>
+          <a:fontRef idx="minor">
+            <a:schemeClr val="lt1"/>
+          </a:fontRef>
+        </p:style>
+        <p:txBody>
+          <a:bodyPr rtlCol="0" anchor="ctr"/>
+          <a:lstStyle/>
+          <a:p>
+            <a:pPr algn="ctr"/>
+          </a:p>
+        </p:txBody>
+      </p:sp>
+      <p:sp>
+        <p:nvSpPr>
+          <p:cNvPr id="16" name="Rounded Rectangle 15"/>
+          <p:cNvSpPr/>
+          <p:nvPr/>
+        </p:nvSpPr>
+        <p:spPr>
+          <a:xfrm>
+            <a:off x="4517136" y="2002536"/>
+            <a:ext cx="438912" cy="438912"/>
+          </a:xfrm>
+          <a:prstGeom prst="roundRect">
+            <a:avLst/>
+          </a:prstGeom>
+          <a:solidFill>
+            <a:srgbClr val="10B981"/>
+          </a:solidFill>
+          <a:ln>
+            <a:solidFill>
+              <a:srgbClr val="10B981"/>
+            </a:solidFill>
+          </a:ln>
+        </p:spPr>
+        <p:style>
+          <a:lnRef idx="1">
+            <a:schemeClr val="accent1"/>
+          </a:lnRef>
+          <a:fillRef idx="3">
+            <a:schemeClr val="accent1"/>
+          </a:fillRef>
+          <a:effectRef idx="2">
+            <a:schemeClr val="accent1"/>
+          </a:effectRef>
+          <a:fontRef idx="minor">
+            <a:schemeClr val="lt1"/>
+          </a:fontRef>
+        </p:style>
+        <p:txBody>
+          <a:bodyPr rtlCol="0" anchor="ctr"/>
+          <a:lstStyle/>
+          <a:p>
+            <a:pPr algn="ctr"/>
+          </a:p>
+        </p:txBody>
+      </p:sp>
+      <p:sp>
+        <p:nvSpPr>
+          <p:cNvPr id="17" name="TextBox 16"/>
           <p:cNvSpPr txBox="1"/>
           <p:nvPr/>
         </p:nvSpPr>
         <p:spPr>
           <a:xfrm>
-            <a:off x="658368" y="6473952"/>
-            <a:ext cx="9875520" cy="201168"/>
+            <a:off x="4517136" y="2011680"/>
+            <a:ext cx="438912" cy="420624"/>
+          </a:xfrm>
+          <a:prstGeom prst="rect">
+            <a:avLst/>
+          </a:prstGeom>
+          <a:noFill/>
+        </p:spPr>
+        <p:txBody>
+          <a:bodyPr wrap="square" anchor="ctr">
+            <a:spAutoFit/>
+          </a:bodyPr>
+          <a:lstStyle/>
+          <a:p>
+            <a:pPr algn="ctr"/>
+            <a:r>
+              <a:rPr sz="1400" b="1">
+                <a:solidFill>
+                  <a:srgbClr val="FFFFFF"/>
+                </a:solidFill>
+                <a:latin typeface="Arial"/>
+              </a:rPr>
+              <a:t>2</a:t>
+            </a:r>
+          </a:p>
+        </p:txBody>
+      </p:sp>
+      <p:sp>
+        <p:nvSpPr>
+          <p:cNvPr id="18" name="TextBox 17"/>
+          <p:cNvSpPr txBox="1"/>
+          <p:nvPr/>
+        </p:nvSpPr>
+        <p:spPr>
+          <a:xfrm>
+            <a:off x="5120640" y="1965960"/>
+            <a:ext cx="2414016" cy="329184"/>
           </a:xfrm>
           <a:prstGeom prst="rect">
             <a:avLst/>
@@ -7588,29 +7555,589 @@
           <a:p>
             <a:pPr algn="l"/>
             <a:r>
-              <a:rPr sz="800" b="0">
-                <a:solidFill>
-                  <a:srgbClr val="5B6372"/>
+              <a:rPr sz="1400" b="1">
+                <a:solidFill>
+                  <a:srgbClr val="10B981"/>
                 </a:solidFill>
                 <a:latin typeface="Arial"/>
               </a:rPr>
-              <a:t>TGS-2024048310 · ACTIVITY PRACTICE · Tertiary Infotech Academy Pte Ltd</a:t>
-            </a:r>
-          </a:p>
-        </p:txBody>
-      </p:sp>
-      <p:sp>
-        <p:nvSpPr>
-          <p:cNvPr id="8" name="Rounded Rectangle 7"/>
+              <a:t>2</a:t>
+            </a:r>
+          </a:p>
+        </p:txBody>
+      </p:sp>
+      <p:sp>
+        <p:nvSpPr>
+          <p:cNvPr id="19" name="TextBox 18"/>
+          <p:cNvSpPr txBox="1"/>
+          <p:nvPr/>
+        </p:nvSpPr>
+        <p:spPr>
+          <a:xfrm>
+            <a:off x="5120640" y="2350008"/>
+            <a:ext cx="2414016" cy="1005839"/>
+          </a:xfrm>
+          <a:prstGeom prst="rect">
+            <a:avLst/>
+          </a:prstGeom>
+          <a:noFill/>
+        </p:spPr>
+        <p:txBody>
+          <a:bodyPr wrap="square" anchor="t">
+            <a:spAutoFit/>
+          </a:bodyPr>
+          <a:lstStyle/>
+          <a:p>
+            <a:pPr algn="l"/>
+            <a:r>
+              <a:rPr sz="1150" b="0">
+                <a:solidFill>
+                  <a:srgbClr val="161B26"/>
+                </a:solidFill>
+                <a:latin typeface="Arial"/>
+              </a:rPr>
+              <a:t>Inventory reserved</a:t>
+            </a:r>
+          </a:p>
+        </p:txBody>
+      </p:sp>
+      <p:sp>
+        <p:nvSpPr>
+          <p:cNvPr id="20" name="Rounded Rectangle 19"/>
           <p:cNvSpPr/>
           <p:nvPr/>
         </p:nvSpPr>
         <p:spPr>
           <a:xfrm>
-            <a:off x="749808" y="1810512"/>
-            <a:ext cx="10652760" cy="1005840"/>
+            <a:off x="7900416" y="1783080"/>
+            <a:ext cx="3401568" cy="1719072"/>
           </a:xfrm>
           <a:prstGeom prst="roundRect">
+            <a:avLst/>
+          </a:prstGeom>
+          <a:solidFill>
+            <a:srgbClr val="F5F8FC"/>
+          </a:solidFill>
+          <a:ln>
+            <a:solidFill>
+              <a:srgbClr val="E2E8F0"/>
+            </a:solidFill>
+          </a:ln>
+        </p:spPr>
+        <p:style>
+          <a:lnRef idx="1">
+            <a:schemeClr val="accent1"/>
+          </a:lnRef>
+          <a:fillRef idx="3">
+            <a:schemeClr val="accent1"/>
+          </a:fillRef>
+          <a:effectRef idx="2">
+            <a:schemeClr val="accent1"/>
+          </a:effectRef>
+          <a:fontRef idx="minor">
+            <a:schemeClr val="lt1"/>
+          </a:fontRef>
+        </p:style>
+        <p:txBody>
+          <a:bodyPr rtlCol="0" anchor="ctr"/>
+          <a:lstStyle/>
+          <a:p>
+            <a:pPr algn="ctr"/>
+          </a:p>
+        </p:txBody>
+      </p:sp>
+      <p:sp>
+        <p:nvSpPr>
+          <p:cNvPr id="21" name="Rectangle 20"/>
+          <p:cNvSpPr/>
+          <p:nvPr/>
+        </p:nvSpPr>
+        <p:spPr>
+          <a:xfrm>
+            <a:off x="7900416" y="1783080"/>
+            <a:ext cx="73152" cy="1719072"/>
+          </a:xfrm>
+          <a:prstGeom prst="rect">
+            <a:avLst/>
+          </a:prstGeom>
+          <a:solidFill>
+            <a:srgbClr val="7C3AED"/>
+          </a:solidFill>
+          <a:ln>
+            <a:solidFill>
+              <a:srgbClr val="7C3AED"/>
+            </a:solidFill>
+          </a:ln>
+        </p:spPr>
+        <p:style>
+          <a:lnRef idx="1">
+            <a:schemeClr val="accent1"/>
+          </a:lnRef>
+          <a:fillRef idx="3">
+            <a:schemeClr val="accent1"/>
+          </a:fillRef>
+          <a:effectRef idx="2">
+            <a:schemeClr val="accent1"/>
+          </a:effectRef>
+          <a:fontRef idx="minor">
+            <a:schemeClr val="lt1"/>
+          </a:fontRef>
+        </p:style>
+        <p:txBody>
+          <a:bodyPr rtlCol="0" anchor="ctr"/>
+          <a:lstStyle/>
+          <a:p>
+            <a:pPr algn="ctr"/>
+          </a:p>
+        </p:txBody>
+      </p:sp>
+      <p:sp>
+        <p:nvSpPr>
+          <p:cNvPr id="22" name="Rounded Rectangle 21"/>
+          <p:cNvSpPr/>
+          <p:nvPr/>
+        </p:nvSpPr>
+        <p:spPr>
+          <a:xfrm>
+            <a:off x="8101584" y="2002536"/>
+            <a:ext cx="438912" cy="438912"/>
+          </a:xfrm>
+          <a:prstGeom prst="roundRect">
+            <a:avLst/>
+          </a:prstGeom>
+          <a:solidFill>
+            <a:srgbClr val="7C3AED"/>
+          </a:solidFill>
+          <a:ln>
+            <a:solidFill>
+              <a:srgbClr val="7C3AED"/>
+            </a:solidFill>
+          </a:ln>
+        </p:spPr>
+        <p:style>
+          <a:lnRef idx="1">
+            <a:schemeClr val="accent1"/>
+          </a:lnRef>
+          <a:fillRef idx="3">
+            <a:schemeClr val="accent1"/>
+          </a:fillRef>
+          <a:effectRef idx="2">
+            <a:schemeClr val="accent1"/>
+          </a:effectRef>
+          <a:fontRef idx="minor">
+            <a:schemeClr val="lt1"/>
+          </a:fontRef>
+        </p:style>
+        <p:txBody>
+          <a:bodyPr rtlCol="0" anchor="ctr"/>
+          <a:lstStyle/>
+          <a:p>
+            <a:pPr algn="ctr"/>
+          </a:p>
+        </p:txBody>
+      </p:sp>
+      <p:sp>
+        <p:nvSpPr>
+          <p:cNvPr id="23" name="TextBox 22"/>
+          <p:cNvSpPr txBox="1"/>
+          <p:nvPr/>
+        </p:nvSpPr>
+        <p:spPr>
+          <a:xfrm>
+            <a:off x="8101584" y="2011680"/>
+            <a:ext cx="438912" cy="420624"/>
+          </a:xfrm>
+          <a:prstGeom prst="rect">
+            <a:avLst/>
+          </a:prstGeom>
+          <a:noFill/>
+        </p:spPr>
+        <p:txBody>
+          <a:bodyPr wrap="square" anchor="ctr">
+            <a:spAutoFit/>
+          </a:bodyPr>
+          <a:lstStyle/>
+          <a:p>
+            <a:pPr algn="ctr"/>
+            <a:r>
+              <a:rPr sz="1400" b="1">
+                <a:solidFill>
+                  <a:srgbClr val="FFFFFF"/>
+                </a:solidFill>
+                <a:latin typeface="Arial"/>
+              </a:rPr>
+              <a:t>3</a:t>
+            </a:r>
+          </a:p>
+        </p:txBody>
+      </p:sp>
+      <p:sp>
+        <p:nvSpPr>
+          <p:cNvPr id="24" name="TextBox 23"/>
+          <p:cNvSpPr txBox="1"/>
+          <p:nvPr/>
+        </p:nvSpPr>
+        <p:spPr>
+          <a:xfrm>
+            <a:off x="8705088" y="1965960"/>
+            <a:ext cx="2414016" cy="329184"/>
+          </a:xfrm>
+          <a:prstGeom prst="rect">
+            <a:avLst/>
+          </a:prstGeom>
+          <a:noFill/>
+        </p:spPr>
+        <p:txBody>
+          <a:bodyPr wrap="square" anchor="t">
+            <a:spAutoFit/>
+          </a:bodyPr>
+          <a:lstStyle/>
+          <a:p>
+            <a:pPr algn="l"/>
+            <a:r>
+              <a:rPr sz="1400" b="1">
+                <a:solidFill>
+                  <a:srgbClr val="7C3AED"/>
+                </a:solidFill>
+                <a:latin typeface="Arial"/>
+              </a:rPr>
+              <a:t>3</a:t>
+            </a:r>
+          </a:p>
+        </p:txBody>
+      </p:sp>
+      <p:sp>
+        <p:nvSpPr>
+          <p:cNvPr id="25" name="TextBox 24"/>
+          <p:cNvSpPr txBox="1"/>
+          <p:nvPr/>
+        </p:nvSpPr>
+        <p:spPr>
+          <a:xfrm>
+            <a:off x="8705088" y="2350008"/>
+            <a:ext cx="2414016" cy="1005839"/>
+          </a:xfrm>
+          <a:prstGeom prst="rect">
+            <a:avLst/>
+          </a:prstGeom>
+          <a:noFill/>
+        </p:spPr>
+        <p:txBody>
+          <a:bodyPr wrap="square" anchor="t">
+            <a:spAutoFit/>
+          </a:bodyPr>
+          <a:lstStyle/>
+          <a:p>
+            <a:pPr algn="l"/>
+            <a:r>
+              <a:rPr sz="1150" b="0">
+                <a:solidFill>
+                  <a:srgbClr val="161B26"/>
+                </a:solidFill>
+                <a:latin typeface="Arial"/>
+              </a:rPr>
+              <a:t>Route optimised</a:t>
+            </a:r>
+          </a:p>
+        </p:txBody>
+      </p:sp>
+      <p:sp>
+        <p:nvSpPr>
+          <p:cNvPr id="26" name="Rounded Rectangle 25"/>
+          <p:cNvSpPr/>
+          <p:nvPr/>
+        </p:nvSpPr>
+        <p:spPr>
+          <a:xfrm>
+            <a:off x="731520" y="3776472"/>
+            <a:ext cx="3401568" cy="1719072"/>
+          </a:xfrm>
+          <a:prstGeom prst="roundRect">
+            <a:avLst/>
+          </a:prstGeom>
+          <a:solidFill>
+            <a:srgbClr val="F5F8FC"/>
+          </a:solidFill>
+          <a:ln>
+            <a:solidFill>
+              <a:srgbClr val="E2E8F0"/>
+            </a:solidFill>
+          </a:ln>
+        </p:spPr>
+        <p:style>
+          <a:lnRef idx="1">
+            <a:schemeClr val="accent1"/>
+          </a:lnRef>
+          <a:fillRef idx="3">
+            <a:schemeClr val="accent1"/>
+          </a:fillRef>
+          <a:effectRef idx="2">
+            <a:schemeClr val="accent1"/>
+          </a:effectRef>
+          <a:fontRef idx="minor">
+            <a:schemeClr val="lt1"/>
+          </a:fontRef>
+        </p:style>
+        <p:txBody>
+          <a:bodyPr rtlCol="0" anchor="ctr"/>
+          <a:lstStyle/>
+          <a:p>
+            <a:pPr algn="ctr"/>
+          </a:p>
+        </p:txBody>
+      </p:sp>
+      <p:sp>
+        <p:nvSpPr>
+          <p:cNvPr id="27" name="Rectangle 26"/>
+          <p:cNvSpPr/>
+          <p:nvPr/>
+        </p:nvSpPr>
+        <p:spPr>
+          <a:xfrm>
+            <a:off x="731520" y="3776472"/>
+            <a:ext cx="73152" cy="1719072"/>
+          </a:xfrm>
+          <a:prstGeom prst="rect">
+            <a:avLst/>
+          </a:prstGeom>
+          <a:solidFill>
+            <a:srgbClr val="F59E0B"/>
+          </a:solidFill>
+          <a:ln>
+            <a:solidFill>
+              <a:srgbClr val="F59E0B"/>
+            </a:solidFill>
+          </a:ln>
+        </p:spPr>
+        <p:style>
+          <a:lnRef idx="1">
+            <a:schemeClr val="accent1"/>
+          </a:lnRef>
+          <a:fillRef idx="3">
+            <a:schemeClr val="accent1"/>
+          </a:fillRef>
+          <a:effectRef idx="2">
+            <a:schemeClr val="accent1"/>
+          </a:effectRef>
+          <a:fontRef idx="minor">
+            <a:schemeClr val="lt1"/>
+          </a:fontRef>
+        </p:style>
+        <p:txBody>
+          <a:bodyPr rtlCol="0" anchor="ctr"/>
+          <a:lstStyle/>
+          <a:p>
+            <a:pPr algn="ctr"/>
+          </a:p>
+        </p:txBody>
+      </p:sp>
+      <p:sp>
+        <p:nvSpPr>
+          <p:cNvPr id="28" name="Rounded Rectangle 27"/>
+          <p:cNvSpPr/>
+          <p:nvPr/>
+        </p:nvSpPr>
+        <p:spPr>
+          <a:xfrm>
+            <a:off x="932688" y="3995928"/>
+            <a:ext cx="438912" cy="438912"/>
+          </a:xfrm>
+          <a:prstGeom prst="roundRect">
+            <a:avLst/>
+          </a:prstGeom>
+          <a:solidFill>
+            <a:srgbClr val="F59E0B"/>
+          </a:solidFill>
+          <a:ln>
+            <a:solidFill>
+              <a:srgbClr val="F59E0B"/>
+            </a:solidFill>
+          </a:ln>
+        </p:spPr>
+        <p:style>
+          <a:lnRef idx="1">
+            <a:schemeClr val="accent1"/>
+          </a:lnRef>
+          <a:fillRef idx="3">
+            <a:schemeClr val="accent1"/>
+          </a:fillRef>
+          <a:effectRef idx="2">
+            <a:schemeClr val="accent1"/>
+          </a:effectRef>
+          <a:fontRef idx="minor">
+            <a:schemeClr val="lt1"/>
+          </a:fontRef>
+        </p:style>
+        <p:txBody>
+          <a:bodyPr rtlCol="0" anchor="ctr"/>
+          <a:lstStyle/>
+          <a:p>
+            <a:pPr algn="ctr"/>
+          </a:p>
+        </p:txBody>
+      </p:sp>
+      <p:sp>
+        <p:nvSpPr>
+          <p:cNvPr id="29" name="TextBox 28"/>
+          <p:cNvSpPr txBox="1"/>
+          <p:nvPr/>
+        </p:nvSpPr>
+        <p:spPr>
+          <a:xfrm>
+            <a:off x="932688" y="4005072"/>
+            <a:ext cx="438912" cy="420624"/>
+          </a:xfrm>
+          <a:prstGeom prst="rect">
+            <a:avLst/>
+          </a:prstGeom>
+          <a:noFill/>
+        </p:spPr>
+        <p:txBody>
+          <a:bodyPr wrap="square" anchor="ctr">
+            <a:spAutoFit/>
+          </a:bodyPr>
+          <a:lstStyle/>
+          <a:p>
+            <a:pPr algn="ctr"/>
+            <a:r>
+              <a:rPr sz="1400" b="1">
+                <a:solidFill>
+                  <a:srgbClr val="FFFFFF"/>
+                </a:solidFill>
+                <a:latin typeface="Arial"/>
+              </a:rPr>
+              <a:t>4</a:t>
+            </a:r>
+          </a:p>
+        </p:txBody>
+      </p:sp>
+      <p:sp>
+        <p:nvSpPr>
+          <p:cNvPr id="30" name="TextBox 29"/>
+          <p:cNvSpPr txBox="1"/>
+          <p:nvPr/>
+        </p:nvSpPr>
+        <p:spPr>
+          <a:xfrm>
+            <a:off x="1536192" y="3959352"/>
+            <a:ext cx="2414016" cy="329184"/>
+          </a:xfrm>
+          <a:prstGeom prst="rect">
+            <a:avLst/>
+          </a:prstGeom>
+          <a:noFill/>
+        </p:spPr>
+        <p:txBody>
+          <a:bodyPr wrap="square" anchor="t">
+            <a:spAutoFit/>
+          </a:bodyPr>
+          <a:lstStyle/>
+          <a:p>
+            <a:pPr algn="l"/>
+            <a:r>
+              <a:rPr sz="1400" b="1">
+                <a:solidFill>
+                  <a:srgbClr val="F59E0B"/>
+                </a:solidFill>
+                <a:latin typeface="Arial"/>
+              </a:rPr>
+              <a:t>4</a:t>
+            </a:r>
+          </a:p>
+        </p:txBody>
+      </p:sp>
+      <p:sp>
+        <p:nvSpPr>
+          <p:cNvPr id="31" name="TextBox 30"/>
+          <p:cNvSpPr txBox="1"/>
+          <p:nvPr/>
+        </p:nvSpPr>
+        <p:spPr>
+          <a:xfrm>
+            <a:off x="1536192" y="4343400"/>
+            <a:ext cx="2414016" cy="1005839"/>
+          </a:xfrm>
+          <a:prstGeom prst="rect">
+            <a:avLst/>
+          </a:prstGeom>
+          <a:noFill/>
+        </p:spPr>
+        <p:txBody>
+          <a:bodyPr wrap="square" anchor="t">
+            <a:spAutoFit/>
+          </a:bodyPr>
+          <a:lstStyle/>
+          <a:p>
+            <a:pPr algn="l"/>
+            <a:r>
+              <a:rPr sz="1150" b="0">
+                <a:solidFill>
+                  <a:srgbClr val="161B26"/>
+                </a:solidFill>
+                <a:latin typeface="Arial"/>
+              </a:rPr>
+              <a:t>Low-emission delivery</a:t>
+            </a:r>
+          </a:p>
+        </p:txBody>
+      </p:sp>
+      <p:sp>
+        <p:nvSpPr>
+          <p:cNvPr id="32" name="Rounded Rectangle 31"/>
+          <p:cNvSpPr/>
+          <p:nvPr/>
+        </p:nvSpPr>
+        <p:spPr>
+          <a:xfrm>
+            <a:off x="4315968" y="3776472"/>
+            <a:ext cx="3401568" cy="1719072"/>
+          </a:xfrm>
+          <a:prstGeom prst="roundRect">
+            <a:avLst/>
+          </a:prstGeom>
+          <a:solidFill>
+            <a:srgbClr val="F5F8FC"/>
+          </a:solidFill>
+          <a:ln>
+            <a:solidFill>
+              <a:srgbClr val="E2E8F0"/>
+            </a:solidFill>
+          </a:ln>
+        </p:spPr>
+        <p:style>
+          <a:lnRef idx="1">
+            <a:schemeClr val="accent1"/>
+          </a:lnRef>
+          <a:fillRef idx="3">
+            <a:schemeClr val="accent1"/>
+          </a:fillRef>
+          <a:effectRef idx="2">
+            <a:schemeClr val="accent1"/>
+          </a:effectRef>
+          <a:fontRef idx="minor">
+            <a:schemeClr val="lt1"/>
+          </a:fontRef>
+        </p:style>
+        <p:txBody>
+          <a:bodyPr rtlCol="0" anchor="ctr"/>
+          <a:lstStyle/>
+          <a:p>
+            <a:pPr algn="ctr"/>
+          </a:p>
+        </p:txBody>
+      </p:sp>
+      <p:sp>
+        <p:nvSpPr>
+          <p:cNvPr id="33" name="Rectangle 32"/>
+          <p:cNvSpPr/>
+          <p:nvPr/>
+        </p:nvSpPr>
+        <p:spPr>
+          <a:xfrm>
+            <a:off x="4315968" y="3776472"/>
+            <a:ext cx="73152" cy="1719072"/>
+          </a:xfrm>
+          <a:prstGeom prst="rect">
             <a:avLst/>
           </a:prstGeom>
           <a:solidFill>
@@ -7646,14 +8173,59 @@
       </p:sp>
       <p:sp>
         <p:nvSpPr>
-          <p:cNvPr id="9" name="TextBox 8"/>
+          <p:cNvPr id="34" name="Rounded Rectangle 33"/>
+          <p:cNvSpPr/>
+          <p:nvPr/>
+        </p:nvSpPr>
+        <p:spPr>
+          <a:xfrm>
+            <a:off x="4517136" y="3995928"/>
+            <a:ext cx="438912" cy="438912"/>
+          </a:xfrm>
+          <a:prstGeom prst="roundRect">
+            <a:avLst/>
+          </a:prstGeom>
+          <a:solidFill>
+            <a:srgbClr val="1F6FEB"/>
+          </a:solidFill>
+          <a:ln>
+            <a:solidFill>
+              <a:srgbClr val="1F6FEB"/>
+            </a:solidFill>
+          </a:ln>
+        </p:spPr>
+        <p:style>
+          <a:lnRef idx="1">
+            <a:schemeClr val="accent1"/>
+          </a:lnRef>
+          <a:fillRef idx="3">
+            <a:schemeClr val="accent1"/>
+          </a:fillRef>
+          <a:effectRef idx="2">
+            <a:schemeClr val="accent1"/>
+          </a:effectRef>
+          <a:fontRef idx="minor">
+            <a:schemeClr val="lt1"/>
+          </a:fontRef>
+        </p:style>
+        <p:txBody>
+          <a:bodyPr rtlCol="0" anchor="ctr"/>
+          <a:lstStyle/>
+          <a:p>
+            <a:pPr algn="ctr"/>
+          </a:p>
+        </p:txBody>
+      </p:sp>
+      <p:sp>
+        <p:nvSpPr>
+          <p:cNvPr id="35" name="TextBox 34"/>
           <p:cNvSpPr txBox="1"/>
           <p:nvPr/>
         </p:nvSpPr>
         <p:spPr>
           <a:xfrm>
-            <a:off x="1051560" y="2011680"/>
-            <a:ext cx="10058400" cy="566928"/>
+            <a:off x="4517136" y="4005072"/>
+            <a:ext cx="438912" cy="420624"/>
           </a:xfrm>
           <a:prstGeom prst="rect">
             <a:avLst/>
@@ -7668,13 +8240,978 @@
           <a:p>
             <a:pPr algn="ctr"/>
             <a:r>
-              <a:rPr sz="1900" b="1">
+              <a:rPr sz="1400" b="1">
                 <a:solidFill>
                   <a:srgbClr val="FFFFFF"/>
                 </a:solidFill>
                 <a:latin typeface="Arial"/>
               </a:rPr>
-              <a:t>A five-stage process infographic and reusable component library slide</a:t>
+              <a:t>5</a:t>
+            </a:r>
+          </a:p>
+        </p:txBody>
+      </p:sp>
+      <p:sp>
+        <p:nvSpPr>
+          <p:cNvPr id="36" name="TextBox 35"/>
+          <p:cNvSpPr txBox="1"/>
+          <p:nvPr/>
+        </p:nvSpPr>
+        <p:spPr>
+          <a:xfrm>
+            <a:off x="5120640" y="3959352"/>
+            <a:ext cx="2414016" cy="329184"/>
+          </a:xfrm>
+          <a:prstGeom prst="rect">
+            <a:avLst/>
+          </a:prstGeom>
+          <a:noFill/>
+        </p:spPr>
+        <p:txBody>
+          <a:bodyPr wrap="square" anchor="t">
+            <a:spAutoFit/>
+          </a:bodyPr>
+          <a:lstStyle/>
+          <a:p>
+            <a:pPr algn="l"/>
+            <a:r>
+              <a:rPr sz="1400" b="1">
+                <a:solidFill>
+                  <a:srgbClr val="1F6FEB"/>
+                </a:solidFill>
+                <a:latin typeface="Arial"/>
+              </a:rPr>
+              <a:t>5</a:t>
+            </a:r>
+          </a:p>
+        </p:txBody>
+      </p:sp>
+      <p:sp>
+        <p:nvSpPr>
+          <p:cNvPr id="37" name="TextBox 36"/>
+          <p:cNvSpPr txBox="1"/>
+          <p:nvPr/>
+        </p:nvSpPr>
+        <p:spPr>
+          <a:xfrm>
+            <a:off x="5120640" y="4343400"/>
+            <a:ext cx="2414016" cy="1005839"/>
+          </a:xfrm>
+          <a:prstGeom prst="rect">
+            <a:avLst/>
+          </a:prstGeom>
+          <a:noFill/>
+        </p:spPr>
+        <p:txBody>
+          <a:bodyPr wrap="square" anchor="t">
+            <a:spAutoFit/>
+          </a:bodyPr>
+          <a:lstStyle/>
+          <a:p>
+            <a:pPr algn="l"/>
+            <a:r>
+              <a:rPr sz="1150" b="0">
+                <a:solidFill>
+                  <a:srgbClr val="161B26"/>
+                </a:solidFill>
+                <a:latin typeface="Arial"/>
+              </a:rPr>
+              <a:t>Customer feedback</a:t>
+            </a:r>
+          </a:p>
+        </p:txBody>
+      </p:sp>
+      <p:sp>
+        <p:nvSpPr>
+          <p:cNvPr id="38" name="Rounded Rectangle 37"/>
+          <p:cNvSpPr/>
+          <p:nvPr/>
+        </p:nvSpPr>
+        <p:spPr>
+          <a:xfrm>
+            <a:off x="7900416" y="3776472"/>
+            <a:ext cx="3401568" cy="1719072"/>
+          </a:xfrm>
+          <a:prstGeom prst="roundRect">
+            <a:avLst/>
+          </a:prstGeom>
+          <a:solidFill>
+            <a:srgbClr val="F5F8FC"/>
+          </a:solidFill>
+          <a:ln>
+            <a:solidFill>
+              <a:srgbClr val="E2E8F0"/>
+            </a:solidFill>
+          </a:ln>
+        </p:spPr>
+        <p:style>
+          <a:lnRef idx="1">
+            <a:schemeClr val="accent1"/>
+          </a:lnRef>
+          <a:fillRef idx="3">
+            <a:schemeClr val="accent1"/>
+          </a:fillRef>
+          <a:effectRef idx="2">
+            <a:schemeClr val="accent1"/>
+          </a:effectRef>
+          <a:fontRef idx="minor">
+            <a:schemeClr val="lt1"/>
+          </a:fontRef>
+        </p:style>
+        <p:txBody>
+          <a:bodyPr rtlCol="0" anchor="ctr"/>
+          <a:lstStyle/>
+          <a:p>
+            <a:pPr algn="ctr"/>
+          </a:p>
+        </p:txBody>
+      </p:sp>
+      <p:sp>
+        <p:nvSpPr>
+          <p:cNvPr id="39" name="Rectangle 38"/>
+          <p:cNvSpPr/>
+          <p:nvPr/>
+        </p:nvSpPr>
+        <p:spPr>
+          <a:xfrm>
+            <a:off x="7900416" y="3776472"/>
+            <a:ext cx="73152" cy="1719072"/>
+          </a:xfrm>
+          <a:prstGeom prst="rect">
+            <a:avLst/>
+          </a:prstGeom>
+          <a:solidFill>
+            <a:srgbClr val="10B981"/>
+          </a:solidFill>
+          <a:ln>
+            <a:solidFill>
+              <a:srgbClr val="10B981"/>
+            </a:solidFill>
+          </a:ln>
+        </p:spPr>
+        <p:style>
+          <a:lnRef idx="1">
+            <a:schemeClr val="accent1"/>
+          </a:lnRef>
+          <a:fillRef idx="3">
+            <a:schemeClr val="accent1"/>
+          </a:fillRef>
+          <a:effectRef idx="2">
+            <a:schemeClr val="accent1"/>
+          </a:effectRef>
+          <a:fontRef idx="minor">
+            <a:schemeClr val="lt1"/>
+          </a:fontRef>
+        </p:style>
+        <p:txBody>
+          <a:bodyPr rtlCol="0" anchor="ctr"/>
+          <a:lstStyle/>
+          <a:p>
+            <a:pPr algn="ctr"/>
+          </a:p>
+        </p:txBody>
+      </p:sp>
+      <p:sp>
+        <p:nvSpPr>
+          <p:cNvPr id="40" name="Rounded Rectangle 39"/>
+          <p:cNvSpPr/>
+          <p:nvPr/>
+        </p:nvSpPr>
+        <p:spPr>
+          <a:xfrm>
+            <a:off x="8101584" y="3995928"/>
+            <a:ext cx="438912" cy="438912"/>
+          </a:xfrm>
+          <a:prstGeom prst="roundRect">
+            <a:avLst/>
+          </a:prstGeom>
+          <a:solidFill>
+            <a:srgbClr val="10B981"/>
+          </a:solidFill>
+          <a:ln>
+            <a:solidFill>
+              <a:srgbClr val="10B981"/>
+            </a:solidFill>
+          </a:ln>
+        </p:spPr>
+        <p:style>
+          <a:lnRef idx="1">
+            <a:schemeClr val="accent1"/>
+          </a:lnRef>
+          <a:fillRef idx="3">
+            <a:schemeClr val="accent1"/>
+          </a:fillRef>
+          <a:effectRef idx="2">
+            <a:schemeClr val="accent1"/>
+          </a:effectRef>
+          <a:fontRef idx="minor">
+            <a:schemeClr val="lt1"/>
+          </a:fontRef>
+        </p:style>
+        <p:txBody>
+          <a:bodyPr rtlCol="0" anchor="ctr"/>
+          <a:lstStyle/>
+          <a:p>
+            <a:pPr algn="ctr"/>
+          </a:p>
+        </p:txBody>
+      </p:sp>
+      <p:sp>
+        <p:nvSpPr>
+          <p:cNvPr id="41" name="TextBox 40"/>
+          <p:cNvSpPr txBox="1"/>
+          <p:nvPr/>
+        </p:nvSpPr>
+        <p:spPr>
+          <a:xfrm>
+            <a:off x="8101584" y="4005072"/>
+            <a:ext cx="438912" cy="420624"/>
+          </a:xfrm>
+          <a:prstGeom prst="rect">
+            <a:avLst/>
+          </a:prstGeom>
+          <a:noFill/>
+        </p:spPr>
+        <p:txBody>
+          <a:bodyPr wrap="square" anchor="ctr">
+            <a:spAutoFit/>
+          </a:bodyPr>
+          <a:lstStyle/>
+          <a:p>
+            <a:pPr algn="ctr"/>
+            <a:r>
+              <a:rPr sz="1400" b="1">
+                <a:solidFill>
+                  <a:srgbClr val="FFFFFF"/>
+                </a:solidFill>
+                <a:latin typeface="Arial"/>
+              </a:rPr>
+              <a:t>6</a:t>
+            </a:r>
+          </a:p>
+        </p:txBody>
+      </p:sp>
+      <p:sp>
+        <p:nvSpPr>
+          <p:cNvPr id="42" name="TextBox 41"/>
+          <p:cNvSpPr txBox="1"/>
+          <p:nvPr/>
+        </p:nvSpPr>
+        <p:spPr>
+          <a:xfrm>
+            <a:off x="8705088" y="3959352"/>
+            <a:ext cx="2414016" cy="329184"/>
+          </a:xfrm>
+          <a:prstGeom prst="rect">
+            <a:avLst/>
+          </a:prstGeom>
+          <a:noFill/>
+        </p:spPr>
+        <p:txBody>
+          <a:bodyPr wrap="square" anchor="t">
+            <a:spAutoFit/>
+          </a:bodyPr>
+          <a:lstStyle/>
+          <a:p>
+            <a:pPr algn="l"/>
+            <a:r>
+              <a:rPr sz="1400" b="1">
+                <a:solidFill>
+                  <a:srgbClr val="10B981"/>
+                </a:solidFill>
+                <a:latin typeface="Arial"/>
+              </a:rPr>
+              <a:t>Rule</a:t>
+            </a:r>
+          </a:p>
+        </p:txBody>
+      </p:sp>
+      <p:sp>
+        <p:nvSpPr>
+          <p:cNvPr id="43" name="TextBox 42"/>
+          <p:cNvSpPr txBox="1"/>
+          <p:nvPr/>
+        </p:nvSpPr>
+        <p:spPr>
+          <a:xfrm>
+            <a:off x="8705088" y="4343400"/>
+            <a:ext cx="2414016" cy="1005839"/>
+          </a:xfrm>
+          <a:prstGeom prst="rect">
+            <a:avLst/>
+          </a:prstGeom>
+          <a:noFill/>
+        </p:spPr>
+        <p:txBody>
+          <a:bodyPr wrap="square" anchor="t">
+            <a:spAutoFit/>
+          </a:bodyPr>
+          <a:lstStyle/>
+          <a:p>
+            <a:pPr algn="l"/>
+            <a:r>
+              <a:rPr sz="1150" b="0">
+                <a:solidFill>
+                  <a:srgbClr val="161B26"/>
+                </a:solidFill>
+                <a:latin typeface="Arial"/>
+              </a:rPr>
+              <a:t>One stage, one verb, one icon</a:t>
+            </a:r>
+          </a:p>
+        </p:txBody>
+      </p:sp>
+    </p:spTree>
+  </p:cSld>
+  <p:clrMapOvr>
+    <a:masterClrMapping/>
+  </p:clrMapOvr>
+</p:sld>
+</file>
+
+<file path=ppt/slides/slide6.xml><?xml version="1.0" encoding="utf-8"?>
+<p:sld xmlns:a="http://schemas.openxmlformats.org/drawingml/2006/main" xmlns:p="http://schemas.openxmlformats.org/presentationml/2006/main" xmlns:r="http://schemas.openxmlformats.org/officeDocument/2006/relationships">
+  <p:cSld>
+    <p:spTree>
+      <p:nvGrpSpPr>
+        <p:cNvPr id="1" name=""/>
+        <p:cNvGrpSpPr/>
+        <p:nvPr/>
+      </p:nvGrpSpPr>
+      <p:grpSpPr/>
+      <p:sp>
+        <p:nvSpPr>
+          <p:cNvPr id="2" name="Rectangle 1"/>
+          <p:cNvSpPr/>
+          <p:nvPr/>
+        </p:nvSpPr>
+        <p:spPr>
+          <a:xfrm>
+            <a:off x="0" y="0"/>
+            <a:ext cx="12191695" cy="6858000"/>
+          </a:xfrm>
+          <a:prstGeom prst="rect">
+            <a:avLst/>
+          </a:prstGeom>
+          <a:solidFill>
+            <a:srgbClr val="FFFFFF"/>
+          </a:solidFill>
+          <a:ln>
+            <a:solidFill>
+              <a:srgbClr val="FFFFFF"/>
+            </a:solidFill>
+          </a:ln>
+        </p:spPr>
+        <p:style>
+          <a:lnRef idx="1">
+            <a:schemeClr val="accent1"/>
+          </a:lnRef>
+          <a:fillRef idx="3">
+            <a:schemeClr val="accent1"/>
+          </a:fillRef>
+          <a:effectRef idx="2">
+            <a:schemeClr val="accent1"/>
+          </a:effectRef>
+          <a:fontRef idx="minor">
+            <a:schemeClr val="lt1"/>
+          </a:fontRef>
+        </p:style>
+        <p:txBody>
+          <a:bodyPr rtlCol="0" anchor="ctr"/>
+          <a:lstStyle/>
+          <a:p>
+            <a:pPr algn="ctr"/>
+          </a:p>
+        </p:txBody>
+      </p:sp>
+      <p:sp>
+        <p:nvSpPr>
+          <p:cNvPr id="3" name="Rectangle 2"/>
+          <p:cNvSpPr/>
+          <p:nvPr/>
+        </p:nvSpPr>
+        <p:spPr>
+          <a:xfrm>
+            <a:off x="0" y="0"/>
+            <a:ext cx="164592" cy="6858000"/>
+          </a:xfrm>
+          <a:prstGeom prst="rect">
+            <a:avLst/>
+          </a:prstGeom>
+          <a:solidFill>
+            <a:srgbClr val="10B981"/>
+          </a:solidFill>
+          <a:ln>
+            <a:solidFill>
+              <a:srgbClr val="10B981"/>
+            </a:solidFill>
+          </a:ln>
+        </p:spPr>
+        <p:style>
+          <a:lnRef idx="1">
+            <a:schemeClr val="accent1"/>
+          </a:lnRef>
+          <a:fillRef idx="3">
+            <a:schemeClr val="accent1"/>
+          </a:fillRef>
+          <a:effectRef idx="2">
+            <a:schemeClr val="accent1"/>
+          </a:effectRef>
+          <a:fontRef idx="minor">
+            <a:schemeClr val="lt1"/>
+          </a:fontRef>
+        </p:style>
+        <p:txBody>
+          <a:bodyPr rtlCol="0" anchor="ctr"/>
+          <a:lstStyle/>
+          <a:p>
+            <a:pPr algn="ctr"/>
+          </a:p>
+        </p:txBody>
+      </p:sp>
+      <p:sp>
+        <p:nvSpPr>
+          <p:cNvPr id="4" name="TextBox 3"/>
+          <p:cNvSpPr txBox="1"/>
+          <p:nvPr/>
+        </p:nvSpPr>
+        <p:spPr>
+          <a:xfrm>
+            <a:off x="658368" y="384048"/>
+            <a:ext cx="10789920" cy="320040"/>
+          </a:xfrm>
+          <a:prstGeom prst="rect">
+            <a:avLst/>
+          </a:prstGeom>
+          <a:noFill/>
+        </p:spPr>
+        <p:txBody>
+          <a:bodyPr wrap="square" anchor="t">
+            <a:spAutoFit/>
+          </a:bodyPr>
+          <a:lstStyle/>
+          <a:p>
+            <a:pPr algn="l"/>
+            <a:r>
+              <a:rPr sz="1100" b="1">
+                <a:solidFill>
+                  <a:srgbClr val="10B981"/>
+                </a:solidFill>
+                <a:latin typeface="Arial"/>
+              </a:rPr>
+              <a:t>ACTIVITY 04 · SYNTHETIC VISUAL ASSETS</a:t>
+            </a:r>
+          </a:p>
+        </p:txBody>
+      </p:sp>
+      <p:sp>
+        <p:nvSpPr>
+          <p:cNvPr id="5" name="TextBox 4"/>
+          <p:cNvSpPr txBox="1"/>
+          <p:nvPr/>
+        </p:nvSpPr>
+        <p:spPr>
+          <a:xfrm>
+            <a:off x="658368" y="749808"/>
+            <a:ext cx="10789920" cy="658368"/>
+          </a:xfrm>
+          <a:prstGeom prst="rect">
+            <a:avLst/>
+          </a:prstGeom>
+          <a:noFill/>
+        </p:spPr>
+        <p:txBody>
+          <a:bodyPr wrap="square" anchor="t">
+            <a:spAutoFit/>
+          </a:bodyPr>
+          <a:lstStyle/>
+          <a:p>
+            <a:pPr algn="l"/>
+            <a:r>
+              <a:rPr sz="2700" b="1">
+                <a:solidFill>
+                  <a:srgbClr val="161B26"/>
+                </a:solidFill>
+                <a:latin typeface="Arial"/>
+              </a:rPr>
+              <a:t>AI-Generated Practice Asset Sheet</a:t>
+            </a:r>
+          </a:p>
+        </p:txBody>
+      </p:sp>
+      <p:sp>
+        <p:nvSpPr>
+          <p:cNvPr id="6" name="Rectangle 5"/>
+          <p:cNvSpPr/>
+          <p:nvPr/>
+        </p:nvSpPr>
+        <p:spPr>
+          <a:xfrm>
+            <a:off x="658368" y="1444752"/>
+            <a:ext cx="10881360" cy="18288"/>
+          </a:xfrm>
+          <a:prstGeom prst="rect">
+            <a:avLst/>
+          </a:prstGeom>
+          <a:solidFill>
+            <a:srgbClr val="E2E8F0"/>
+          </a:solidFill>
+          <a:ln>
+            <a:solidFill>
+              <a:srgbClr val="E2E8F0"/>
+            </a:solidFill>
+          </a:ln>
+        </p:spPr>
+        <p:style>
+          <a:lnRef idx="1">
+            <a:schemeClr val="accent1"/>
+          </a:lnRef>
+          <a:fillRef idx="3">
+            <a:schemeClr val="accent1"/>
+          </a:fillRef>
+          <a:effectRef idx="2">
+            <a:schemeClr val="accent1"/>
+          </a:effectRef>
+          <a:fontRef idx="minor">
+            <a:schemeClr val="lt1"/>
+          </a:fontRef>
+        </p:style>
+        <p:txBody>
+          <a:bodyPr rtlCol="0" anchor="ctr"/>
+          <a:lstStyle/>
+          <a:p>
+            <a:pPr algn="ctr"/>
+          </a:p>
+        </p:txBody>
+      </p:sp>
+      <p:sp>
+        <p:nvSpPr>
+          <p:cNvPr id="7" name="TextBox 6"/>
+          <p:cNvSpPr txBox="1"/>
+          <p:nvPr/>
+        </p:nvSpPr>
+        <p:spPr>
+          <a:xfrm>
+            <a:off x="658368" y="6473952"/>
+            <a:ext cx="9875520" cy="201168"/>
+          </a:xfrm>
+          <a:prstGeom prst="rect">
+            <a:avLst/>
+          </a:prstGeom>
+          <a:noFill/>
+        </p:spPr>
+        <p:txBody>
+          <a:bodyPr wrap="square" anchor="t">
+            <a:spAutoFit/>
+          </a:bodyPr>
+          <a:lstStyle/>
+          <a:p>
+            <a:pPr algn="l"/>
+            <a:r>
+              <a:rPr sz="800" b="0">
+                <a:solidFill>
+                  <a:srgbClr val="5B6372"/>
+                </a:solidFill>
+                <a:latin typeface="Arial"/>
+              </a:rPr>
+              <a:t>TGS-2026064178 · ACTIVITY PRACTICE · Tertiary Infotech Academy Pte Ltd</a:t>
+            </a:r>
+          </a:p>
+        </p:txBody>
+      </p:sp>
+      <p:pic>
+        <p:nvPicPr>
+          <p:cNvPr id="8" name="Picture 7" descr="AI-Generated-Sustainability-Asset-Sheet-v1.png"/>
+          <p:cNvPicPr>
+            <a:picLocks noChangeAspect="1"/>
+          </p:cNvPicPr>
+          <p:nvPr/>
+        </p:nvPicPr>
+        <p:blipFill>
+          <a:blip r:embed="rId2"/>
+          <a:stretch>
+            <a:fillRect/>
+          </a:stretch>
+        </p:blipFill>
+        <p:spPr>
+          <a:xfrm>
+            <a:off x="3840480" y="1572768"/>
+            <a:ext cx="4480560" cy="4480560"/>
+          </a:xfrm>
+          <a:prstGeom prst="rect">
+            <a:avLst/>
+          </a:prstGeom>
+        </p:spPr>
+      </p:pic>
+      <p:sp>
+        <p:nvSpPr>
+          <p:cNvPr id="9" name="TextBox 8"/>
+          <p:cNvSpPr txBox="1"/>
+          <p:nvPr/>
+        </p:nvSpPr>
+        <p:spPr>
+          <a:xfrm>
+            <a:off x="777240" y="6108192"/>
+            <a:ext cx="10698480" cy="237744"/>
+          </a:xfrm>
+          <a:prstGeom prst="rect">
+            <a:avLst/>
+          </a:prstGeom>
+          <a:noFill/>
+        </p:spPr>
+        <p:txBody>
+          <a:bodyPr wrap="square" anchor="t">
+            <a:spAutoFit/>
+          </a:bodyPr>
+          <a:lstStyle/>
+          <a:p>
+            <a:pPr algn="ctr"/>
+            <a:r>
+              <a:rPr sz="900" b="0">
+                <a:solidFill>
+                  <a:srgbClr val="5B6372"/>
+                </a:solidFill>
+                <a:latin typeface="Arial"/>
+              </a:rPr>
+              <a:t>Synthetic training assets · prompt and provenance recorded in ASSET-MANIFEST.txt · no data claims embedded</a:t>
+            </a:r>
+          </a:p>
+        </p:txBody>
+      </p:sp>
+    </p:spTree>
+  </p:cSld>
+  <p:clrMapOvr>
+    <a:masterClrMapping/>
+  </p:clrMapOvr>
+</p:sld>
+</file>
+
+<file path=ppt/slides/slide7.xml><?xml version="1.0" encoding="utf-8"?>
+<p:sld xmlns:a="http://schemas.openxmlformats.org/drawingml/2006/main" xmlns:p="http://schemas.openxmlformats.org/presentationml/2006/main" xmlns:r="http://schemas.openxmlformats.org/officeDocument/2006/relationships">
+  <p:cSld>
+    <p:spTree>
+      <p:nvGrpSpPr>
+        <p:cNvPr id="1" name=""/>
+        <p:cNvGrpSpPr/>
+        <p:nvPr/>
+      </p:nvGrpSpPr>
+      <p:grpSpPr/>
+      <p:sp>
+        <p:nvSpPr>
+          <p:cNvPr id="2" name="Rectangle 1"/>
+          <p:cNvSpPr/>
+          <p:nvPr/>
+        </p:nvSpPr>
+        <p:spPr>
+          <a:xfrm>
+            <a:off x="0" y="0"/>
+            <a:ext cx="12191695" cy="6858000"/>
+          </a:xfrm>
+          <a:prstGeom prst="rect">
+            <a:avLst/>
+          </a:prstGeom>
+          <a:solidFill>
+            <a:srgbClr val="FFFFFF"/>
+          </a:solidFill>
+          <a:ln>
+            <a:solidFill>
+              <a:srgbClr val="FFFFFF"/>
+            </a:solidFill>
+          </a:ln>
+        </p:spPr>
+        <p:style>
+          <a:lnRef idx="1">
+            <a:schemeClr val="accent1"/>
+          </a:lnRef>
+          <a:fillRef idx="3">
+            <a:schemeClr val="accent1"/>
+          </a:fillRef>
+          <a:effectRef idx="2">
+            <a:schemeClr val="accent1"/>
+          </a:effectRef>
+          <a:fontRef idx="minor">
+            <a:schemeClr val="lt1"/>
+          </a:fontRef>
+        </p:style>
+        <p:txBody>
+          <a:bodyPr rtlCol="0" anchor="ctr"/>
+          <a:lstStyle/>
+          <a:p>
+            <a:pPr algn="ctr"/>
+          </a:p>
+        </p:txBody>
+      </p:sp>
+      <p:sp>
+        <p:nvSpPr>
+          <p:cNvPr id="3" name="Rectangle 2"/>
+          <p:cNvSpPr/>
+          <p:nvPr/>
+        </p:nvSpPr>
+        <p:spPr>
+          <a:xfrm>
+            <a:off x="0" y="0"/>
+            <a:ext cx="164592" cy="6858000"/>
+          </a:xfrm>
+          <a:prstGeom prst="rect">
+            <a:avLst/>
+          </a:prstGeom>
+          <a:solidFill>
+            <a:srgbClr val="1F6FEB"/>
+          </a:solidFill>
+          <a:ln>
+            <a:solidFill>
+              <a:srgbClr val="1F6FEB"/>
+            </a:solidFill>
+          </a:ln>
+        </p:spPr>
+        <p:style>
+          <a:lnRef idx="1">
+            <a:schemeClr val="accent1"/>
+          </a:lnRef>
+          <a:fillRef idx="3">
+            <a:schemeClr val="accent1"/>
+          </a:fillRef>
+          <a:effectRef idx="2">
+            <a:schemeClr val="accent1"/>
+          </a:effectRef>
+          <a:fontRef idx="minor">
+            <a:schemeClr val="lt1"/>
+          </a:fontRef>
+        </p:style>
+        <p:txBody>
+          <a:bodyPr rtlCol="0" anchor="ctr"/>
+          <a:lstStyle/>
+          <a:p>
+            <a:pPr algn="ctr"/>
+          </a:p>
+        </p:txBody>
+      </p:sp>
+      <p:sp>
+        <p:nvSpPr>
+          <p:cNvPr id="4" name="TextBox 3"/>
+          <p:cNvSpPr txBox="1"/>
+          <p:nvPr/>
+        </p:nvSpPr>
+        <p:spPr>
+          <a:xfrm>
+            <a:off x="658368" y="384048"/>
+            <a:ext cx="10789920" cy="320040"/>
+          </a:xfrm>
+          <a:prstGeom prst="rect">
+            <a:avLst/>
+          </a:prstGeom>
+          <a:noFill/>
+        </p:spPr>
+        <p:txBody>
+          <a:bodyPr wrap="square" anchor="t">
+            <a:spAutoFit/>
+          </a:bodyPr>
+          <a:lstStyle/>
+          <a:p>
+            <a:pPr algn="l"/>
+            <a:r>
+              <a:rPr sz="1100" b="1">
+                <a:solidFill>
+                  <a:srgbClr val="1F6FEB"/>
+                </a:solidFill>
+                <a:latin typeface="Arial"/>
+              </a:rPr>
+              <a:t>ACTIVITY 04 · ACCEPTANCE</a:t>
+            </a:r>
+          </a:p>
+        </p:txBody>
+      </p:sp>
+      <p:sp>
+        <p:nvSpPr>
+          <p:cNvPr id="5" name="TextBox 4"/>
+          <p:cNvSpPr txBox="1"/>
+          <p:nvPr/>
+        </p:nvSpPr>
+        <p:spPr>
+          <a:xfrm>
+            <a:off x="658368" y="749808"/>
+            <a:ext cx="10789920" cy="658368"/>
+          </a:xfrm>
+          <a:prstGeom prst="rect">
+            <a:avLst/>
+          </a:prstGeom>
+          <a:noFill/>
+        </p:spPr>
+        <p:txBody>
+          <a:bodyPr wrap="square" anchor="t">
+            <a:spAutoFit/>
+          </a:bodyPr>
+          <a:lstStyle/>
+          <a:p>
+            <a:pPr algn="l"/>
+            <a:r>
+              <a:rPr sz="2700" b="1">
+                <a:solidFill>
+                  <a:srgbClr val="161B26"/>
+                </a:solidFill>
+                <a:latin typeface="Arial"/>
+              </a:rPr>
+              <a:t>What Good Looks Like</a:t>
+            </a:r>
+          </a:p>
+        </p:txBody>
+      </p:sp>
+      <p:sp>
+        <p:nvSpPr>
+          <p:cNvPr id="6" name="Rectangle 5"/>
+          <p:cNvSpPr/>
+          <p:nvPr/>
+        </p:nvSpPr>
+        <p:spPr>
+          <a:xfrm>
+            <a:off x="658368" y="1444752"/>
+            <a:ext cx="10881360" cy="18288"/>
+          </a:xfrm>
+          <a:prstGeom prst="rect">
+            <a:avLst/>
+          </a:prstGeom>
+          <a:solidFill>
+            <a:srgbClr val="E2E8F0"/>
+          </a:solidFill>
+          <a:ln>
+            <a:solidFill>
+              <a:srgbClr val="E2E8F0"/>
+            </a:solidFill>
+          </a:ln>
+        </p:spPr>
+        <p:style>
+          <a:lnRef idx="1">
+            <a:schemeClr val="accent1"/>
+          </a:lnRef>
+          <a:fillRef idx="3">
+            <a:schemeClr val="accent1"/>
+          </a:fillRef>
+          <a:effectRef idx="2">
+            <a:schemeClr val="accent1"/>
+          </a:effectRef>
+          <a:fontRef idx="minor">
+            <a:schemeClr val="lt1"/>
+          </a:fontRef>
+        </p:style>
+        <p:txBody>
+          <a:bodyPr rtlCol="0" anchor="ctr"/>
+          <a:lstStyle/>
+          <a:p>
+            <a:pPr algn="ctr"/>
+          </a:p>
+        </p:txBody>
+      </p:sp>
+      <p:sp>
+        <p:nvSpPr>
+          <p:cNvPr id="7" name="TextBox 6"/>
+          <p:cNvSpPr txBox="1"/>
+          <p:nvPr/>
+        </p:nvSpPr>
+        <p:spPr>
+          <a:xfrm>
+            <a:off x="658368" y="6473952"/>
+            <a:ext cx="9875520" cy="201168"/>
+          </a:xfrm>
+          <a:prstGeom prst="rect">
+            <a:avLst/>
+          </a:prstGeom>
+          <a:noFill/>
+        </p:spPr>
+        <p:txBody>
+          <a:bodyPr wrap="square" anchor="t">
+            <a:spAutoFit/>
+          </a:bodyPr>
+          <a:lstStyle/>
+          <a:p>
+            <a:pPr algn="l"/>
+            <a:r>
+              <a:rPr sz="800" b="0">
+                <a:solidFill>
+                  <a:srgbClr val="5B6372"/>
+                </a:solidFill>
+                <a:latin typeface="Arial"/>
+              </a:rPr>
+              <a:t>TGS-2026064178 · ACTIVITY PRACTICE · Tertiary Infotech Academy Pte Ltd</a:t>
+            </a:r>
+          </a:p>
+        </p:txBody>
+      </p:sp>
+      <p:sp>
+        <p:nvSpPr>
+          <p:cNvPr id="8" name="Rounded Rectangle 7"/>
+          <p:cNvSpPr/>
+          <p:nvPr/>
+        </p:nvSpPr>
+        <p:spPr>
+          <a:xfrm>
+            <a:off x="749808" y="1810512"/>
+            <a:ext cx="10652760" cy="1005840"/>
+          </a:xfrm>
+          <a:prstGeom prst="roundRect">
+            <a:avLst/>
+          </a:prstGeom>
+          <a:solidFill>
+            <a:srgbClr val="1F6FEB"/>
+          </a:solidFill>
+          <a:ln>
+            <a:solidFill>
+              <a:srgbClr val="1F6FEB"/>
+            </a:solidFill>
+          </a:ln>
+        </p:spPr>
+        <p:style>
+          <a:lnRef idx="1">
+            <a:schemeClr val="accent1"/>
+          </a:lnRef>
+          <a:fillRef idx="3">
+            <a:schemeClr val="accent1"/>
+          </a:fillRef>
+          <a:effectRef idx="2">
+            <a:schemeClr val="accent1"/>
+          </a:effectRef>
+          <a:fontRef idx="minor">
+            <a:schemeClr val="lt1"/>
+          </a:fontRef>
+        </p:style>
+        <p:txBody>
+          <a:bodyPr rtlCol="0" anchor="ctr"/>
+          <a:lstStyle/>
+          <a:p>
+            <a:pPr algn="ctr"/>
+          </a:p>
+        </p:txBody>
+      </p:sp>
+      <p:sp>
+        <p:nvSpPr>
+          <p:cNvPr id="9" name="TextBox 8"/>
+          <p:cNvSpPr txBox="1"/>
+          <p:nvPr/>
+        </p:nvSpPr>
+        <p:spPr>
+          <a:xfrm>
+            <a:off x="1051560" y="2011680"/>
+            <a:ext cx="10058400" cy="566928"/>
+          </a:xfrm>
+          <a:prstGeom prst="rect">
+            <a:avLst/>
+          </a:prstGeom>
+          <a:noFill/>
+        </p:spPr>
+        <p:txBody>
+          <a:bodyPr wrap="square" anchor="ctr">
+            <a:spAutoFit/>
+          </a:bodyPr>
+          <a:lstStyle/>
+          <a:p>
+            <a:pPr algn="ctr"/>
+            <a:r>
+              <a:rPr sz="1900" b="1">
+                <a:solidFill>
+                  <a:srgbClr val="FFFFFF"/>
+                </a:solidFill>
+                <a:latin typeface="Arial"/>
+              </a:rPr>
+              <a:t>A prompt log, consistent AI-generated asset set, editable five-stage infographic and reusable PowerPoint component slide</a:t>
             </a:r>
           </a:p>
         </p:txBody>

--- a/activities/Activity-04-Create-a-Shape-Icon-and-SmartArt-System/A04-Create-a-Shape-Icon-and-SmartArt-System-Sample.pptx
+++ b/activities/Activity-04-Create-a-Shape-Icon-and-SmartArt-System/A04-Create-a-Shape-Icon-and-SmartArt-System-Sample.pptx
@@ -12,6 +12,7 @@
     <p:sldId id="260" r:id="rId11"/>
     <p:sldId id="261" r:id="rId12"/>
     <p:sldId id="262" r:id="rId13"/>
+    <p:sldId id="263" r:id="rId14"/>
   </p:sldIdLst>
   <p:sldSz cx="12191695" cy="6858000" type="screen4x3"/>
   <p:notesSz cx="6858000" cy="9144000"/>
@@ -3294,7 +3295,7 @@
                 </a:solidFill>
                 <a:latin typeface="Arial"/>
               </a:rPr>
-              <a:t>Generate Visual Assets and Refine Them in PowerPoint</a:t>
+              <a:t>Create a Process Infographic with Microsoft 365 Copilot</a:t>
             </a:r>
           </a:p>
         </p:txBody>
@@ -3444,7 +3445,7 @@
                 </a:solidFill>
                 <a:latin typeface="Arial"/>
               </a:rPr>
-              <a:t>Text-to-image AI + PowerPoint</a:t>
+              <a:t>Microsoft 365 Copilot app + PowerPoint</a:t>
             </a:r>
           </a:p>
         </p:txBody>
@@ -3907,7 +3908,7 @@
                 </a:solidFill>
                 <a:latin typeface="Arial"/>
               </a:rPr>
-              <a:t>Data analyst</a:t>
+              <a:t>Analyse the evidence</a:t>
             </a:r>
           </a:p>
         </p:txBody>
@@ -3942,7 +3943,7 @@
                 </a:solidFill>
                 <a:latin typeface="Arial"/>
               </a:rPr>
-              <a:t>Using only the attached approved sources, create a source register, identify duplicates or conflicting definitions, clean the table, show formulas or transformations, and return five candidate insights with citations, caveats and a con…</a:t>
+              <a:t>Using only the attached approved source, identify the three strongest patterns, the denominator for each metric, one limitation and one proportionate business action. Cite the source field or row for every number. Do not invent missing…</a:t>
             </a:r>
           </a:p>
         </p:txBody>
@@ -4147,7 +4148,7 @@
                 </a:solidFill>
                 <a:latin typeface="Arial"/>
               </a:rPr>
-              <a:t>Infographic</a:t>
+              <a:t>Create the infographic</a:t>
             </a:r>
           </a:p>
         </p:txBody>
@@ -4182,7 +4183,7 @@
                 </a:solidFill>
                 <a:latin typeface="Arial"/>
               </a:rPr>
-              <a:t>Create a one-page executive infographic for Singapore retail managers. Lead with one decision insight, show three supporting metrics, include a five-stage flow and a source footer. Use a clean professional style, strong hierarchy and n…</a:t>
+              <a:t>Create a one-page [TYPE] infographic about [TOPIC]. Sections: 1. [SECTION ONE] 2. [SECTION TWO] 3. [SECTION THREE] 4. [SECTION FOUR] 5. [SECTION FIVE]. Audience: [AUDIENCE]. Decision: [DECISION]. Style: professional, high contrast, con…</a:t>
             </a:r>
           </a:p>
         </p:txBody>
@@ -4387,7 +4388,7 @@
                 </a:solidFill>
                 <a:latin typeface="Arial"/>
               </a:rPr>
-              <a:t>Text to image</a:t>
+              <a:t>Refine in PowerPoint</a:t>
             </a:r>
           </a:p>
         </p:txBody>
@@ -4422,7 +4423,7 @@
                 </a:solidFill>
                 <a:latin typeface="Arial"/>
               </a:rPr>
-              <a:t>Create a clean vector-like sustainability delivery illustration for a PowerPoint infographic: one electric van, one reusable parcel, a simple route and a feedback symbol. Transparent background, consistent blue/teal/violet/amber palett…</a:t>
+              <a:t>Turn the selected infographic direction into one editable PowerPoint slide. Keep the action title, labels, numbers, chart or process, source footer and accessibility notes editable. Remove decoration that does not support the message. …</a:t>
             </a:r>
           </a:p>
         </p:txBody>
@@ -4627,7 +4628,7 @@
                 </a:solidFill>
                 <a:latin typeface="Arial"/>
               </a:rPr>
-              <a:t>Gemini Notebook deck</a:t>
+              <a:t>Quality review</a:t>
             </a:r>
           </a:p>
         </p:txBody>
@@ -4662,7 +4663,7 @@
                 </a:solidFill>
                 <a:latin typeface="Arial"/>
               </a:rPr>
-              <a:t>Create Presenter Slides for business stakeholders. Focus on the verified decision insight, use a concise professional style, include source-grounded comparisons and a final recommendation. Avoid claims not supported by selected sources…</a:t>
+              <a:t>Review this infographic against message clarity, data accuracy, visual hierarchy, audience fit, accessibility, editability and business goal. List each issue with evidence, its impact, the proposed change and a pass/fail acceptance che…</a:t>
             </a:r>
           </a:p>
         </p:txBody>
@@ -4745,11 +4746,11 @@
             <a:avLst/>
           </a:prstGeom>
           <a:solidFill>
-            <a:srgbClr val="1F6FEB"/>
+            <a:srgbClr val="7C3AED"/>
           </a:solidFill>
           <a:ln>
             <a:solidFill>
-              <a:srgbClr val="1F6FEB"/>
+              <a:srgbClr val="7C3AED"/>
             </a:solidFill>
           </a:ln>
         </p:spPr>
@@ -4801,11 +4802,11 @@
             <a:r>
               <a:rPr sz="1100" b="1">
                 <a:solidFill>
-                  <a:srgbClr val="1F6FEB"/>
+                  <a:srgbClr val="7C3AED"/>
                 </a:solidFill>
                 <a:latin typeface="Arial"/>
               </a:rPr>
-              <a:t>ACTIVITY 04 · CONTEXT</a:t>
+              <a:t>ACTIVITY 04 · COPY, ADAPT AND VERIFY</a:t>
             </a:r>
           </a:p>
         </p:txBody>
@@ -4840,7 +4841,7 @@
                 </a:solidFill>
                 <a:latin typeface="Arial"/>
               </a:rPr>
-              <a:t>The Scenario</a:t>
+              <a:t>Structured Microsoft 365 Copilot Prompt</a:t>
             </a:r>
           </a:p>
         </p:txBody>
@@ -4933,8 +4934,8 @@
         </p:nvSpPr>
         <p:spPr>
           <a:xfrm>
-            <a:off x="731520" y="1783080"/>
-            <a:ext cx="10698480" cy="1691640"/>
+            <a:off x="749808" y="1700784"/>
+            <a:ext cx="10698480" cy="4370832"/>
           </a:xfrm>
           <a:prstGeom prst="roundRect">
             <a:avLst/>
@@ -4972,104 +4973,14 @@
       </p:sp>
       <p:sp>
         <p:nvSpPr>
-          <p:cNvPr id="9" name="Rectangle 8"/>
-          <p:cNvSpPr/>
-          <p:nvPr/>
-        </p:nvSpPr>
-        <p:spPr>
-          <a:xfrm>
-            <a:off x="731520" y="1783080"/>
-            <a:ext cx="73152" cy="1691640"/>
-          </a:xfrm>
-          <a:prstGeom prst="rect">
-            <a:avLst/>
-          </a:prstGeom>
-          <a:solidFill>
-            <a:srgbClr val="1F6FEB"/>
-          </a:solidFill>
-          <a:ln>
-            <a:solidFill>
-              <a:srgbClr val="1F6FEB"/>
-            </a:solidFill>
-          </a:ln>
-        </p:spPr>
-        <p:style>
-          <a:lnRef idx="1">
-            <a:schemeClr val="accent1"/>
-          </a:lnRef>
-          <a:fillRef idx="3">
-            <a:schemeClr val="accent1"/>
-          </a:fillRef>
-          <a:effectRef idx="2">
-            <a:schemeClr val="accent1"/>
-          </a:effectRef>
-          <a:fontRef idx="minor">
-            <a:schemeClr val="lt1"/>
-          </a:fontRef>
-        </p:style>
-        <p:txBody>
-          <a:bodyPr rtlCol="0" anchor="ctr"/>
-          <a:lstStyle/>
-          <a:p>
-            <a:pPr algn="ctr"/>
-          </a:p>
-        </p:txBody>
-      </p:sp>
-      <p:sp>
-        <p:nvSpPr>
-          <p:cNvPr id="10" name="Rounded Rectangle 9"/>
-          <p:cNvSpPr/>
-          <p:nvPr/>
-        </p:nvSpPr>
-        <p:spPr>
-          <a:xfrm>
-            <a:off x="932688" y="2002536"/>
-            <a:ext cx="438912" cy="438912"/>
-          </a:xfrm>
-          <a:prstGeom prst="roundRect">
-            <a:avLst/>
-          </a:prstGeom>
-          <a:solidFill>
-            <a:srgbClr val="1F6FEB"/>
-          </a:solidFill>
-          <a:ln>
-            <a:solidFill>
-              <a:srgbClr val="1F6FEB"/>
-            </a:solidFill>
-          </a:ln>
-        </p:spPr>
-        <p:style>
-          <a:lnRef idx="1">
-            <a:schemeClr val="accent1"/>
-          </a:lnRef>
-          <a:fillRef idx="3">
-            <a:schemeClr val="accent1"/>
-          </a:fillRef>
-          <a:effectRef idx="2">
-            <a:schemeClr val="accent1"/>
-          </a:effectRef>
-          <a:fontRef idx="minor">
-            <a:schemeClr val="lt1"/>
-          </a:fontRef>
-        </p:style>
-        <p:txBody>
-          <a:bodyPr rtlCol="0" anchor="ctr"/>
-          <a:lstStyle/>
-          <a:p>
-            <a:pPr algn="ctr"/>
-          </a:p>
-        </p:txBody>
-      </p:sp>
-      <p:sp>
-        <p:nvSpPr>
-          <p:cNvPr id="11" name="TextBox 10"/>
+          <p:cNvPr id="9" name="TextBox 8"/>
           <p:cNvSpPr txBox="1"/>
           <p:nvPr/>
         </p:nvSpPr>
         <p:spPr>
           <a:xfrm>
-            <a:off x="932688" y="2011680"/>
-            <a:ext cx="438912" cy="420624"/>
+            <a:off x="960120" y="1874519"/>
+            <a:ext cx="384048" cy="246888"/>
           </a:xfrm>
           <a:prstGeom prst="rect">
             <a:avLst/>
@@ -5077,16 +4988,16 @@
           <a:noFill/>
         </p:spPr>
         <p:txBody>
-          <a:bodyPr wrap="square" anchor="ctr">
+          <a:bodyPr wrap="square" anchor="t">
             <a:spAutoFit/>
           </a:bodyPr>
           <a:lstStyle/>
           <a:p>
-            <a:pPr algn="ctr"/>
-            <a:r>
-              <a:rPr sz="1400" b="1">
-                <a:solidFill>
-                  <a:srgbClr val="FFFFFF"/>
+            <a:pPr algn="r"/>
+            <a:r>
+              <a:rPr sz="900" b="0">
+                <a:solidFill>
+                  <a:srgbClr val="5B6372"/>
                 </a:solidFill>
                 <a:latin typeface="Arial"/>
               </a:rPr>
@@ -5097,14 +5008,14 @@
       </p:sp>
       <p:sp>
         <p:nvSpPr>
-          <p:cNvPr id="12" name="TextBox 11"/>
+          <p:cNvPr id="10" name="TextBox 9"/>
           <p:cNvSpPr txBox="1"/>
           <p:nvPr/>
         </p:nvSpPr>
         <p:spPr>
           <a:xfrm>
-            <a:off x="1536192" y="1965960"/>
-            <a:ext cx="9710928" cy="329184"/>
+            <a:off x="1554480" y="1874519"/>
+            <a:ext cx="9418320" cy="256032"/>
           </a:xfrm>
           <a:prstGeom prst="rect">
             <a:avLst/>
@@ -5119,27 +5030,27 @@
           <a:p>
             <a:pPr algn="l"/>
             <a:r>
-              <a:rPr sz="1400" b="1">
-                <a:solidFill>
-                  <a:srgbClr val="1F6FEB"/>
+              <a:rPr sz="1050" b="0">
+                <a:solidFill>
+                  <a:srgbClr val="161B26"/>
                 </a:solidFill>
                 <a:latin typeface="Arial"/>
               </a:rPr>
-              <a:t>Context</a:t>
-            </a:r>
-          </a:p>
-        </p:txBody>
-      </p:sp>
-      <p:sp>
-        <p:nvSpPr>
-          <p:cNvPr id="13" name="TextBox 12"/>
+              <a:t>Create a one-page process infographic about Create a Process Infographic with Microsoft 365 Copilot.</a:t>
+            </a:r>
+          </a:p>
+        </p:txBody>
+      </p:sp>
+      <p:sp>
+        <p:nvSpPr>
+          <p:cNvPr id="11" name="TextBox 10"/>
           <p:cNvSpPr txBox="1"/>
           <p:nvPr/>
         </p:nvSpPr>
         <p:spPr>
           <a:xfrm>
-            <a:off x="1536192" y="2350008"/>
-            <a:ext cx="9710928" cy="978408"/>
+            <a:off x="960120" y="2157984"/>
+            <a:ext cx="384048" cy="246888"/>
           </a:xfrm>
           <a:prstGeom prst="rect">
             <a:avLst/>
@@ -5152,181 +5063,11 @@
           </a:bodyPr>
           <a:lstStyle/>
           <a:p>
-            <a:pPr algn="l"/>
-            <a:r>
-              <a:rPr sz="1150" b="0">
-                <a:solidFill>
-                  <a:srgbClr val="161B26"/>
-                </a:solidFill>
-                <a:latin typeface="Arial"/>
-              </a:rPr>
-              <a:t>Northstar needs an editable five-stage process infographic for store managers. Use the supplied AI-generated sustainability asset sheet or regenerate a new set from the recorded text-to-image prompt.</a:t>
-            </a:r>
-          </a:p>
-        </p:txBody>
-      </p:sp>
-      <p:sp>
-        <p:nvSpPr>
-          <p:cNvPr id="14" name="Rounded Rectangle 13"/>
-          <p:cNvSpPr/>
-          <p:nvPr/>
-        </p:nvSpPr>
-        <p:spPr>
-          <a:xfrm>
-            <a:off x="731520" y="3776472"/>
-            <a:ext cx="10698480" cy="1691640"/>
-          </a:xfrm>
-          <a:prstGeom prst="roundRect">
-            <a:avLst/>
-          </a:prstGeom>
-          <a:solidFill>
-            <a:srgbClr val="F5F8FC"/>
-          </a:solidFill>
-          <a:ln>
-            <a:solidFill>
-              <a:srgbClr val="E2E8F0"/>
-            </a:solidFill>
-          </a:ln>
-        </p:spPr>
-        <p:style>
-          <a:lnRef idx="1">
-            <a:schemeClr val="accent1"/>
-          </a:lnRef>
-          <a:fillRef idx="3">
-            <a:schemeClr val="accent1"/>
-          </a:fillRef>
-          <a:effectRef idx="2">
-            <a:schemeClr val="accent1"/>
-          </a:effectRef>
-          <a:fontRef idx="minor">
-            <a:schemeClr val="lt1"/>
-          </a:fontRef>
-        </p:style>
-        <p:txBody>
-          <a:bodyPr rtlCol="0" anchor="ctr"/>
-          <a:lstStyle/>
-          <a:p>
-            <a:pPr algn="ctr"/>
-          </a:p>
-        </p:txBody>
-      </p:sp>
-      <p:sp>
-        <p:nvSpPr>
-          <p:cNvPr id="15" name="Rectangle 14"/>
-          <p:cNvSpPr/>
-          <p:nvPr/>
-        </p:nvSpPr>
-        <p:spPr>
-          <a:xfrm>
-            <a:off x="731520" y="3776472"/>
-            <a:ext cx="73152" cy="1691640"/>
-          </a:xfrm>
-          <a:prstGeom prst="rect">
-            <a:avLst/>
-          </a:prstGeom>
-          <a:solidFill>
-            <a:srgbClr val="10B981"/>
-          </a:solidFill>
-          <a:ln>
-            <a:solidFill>
-              <a:srgbClr val="10B981"/>
-            </a:solidFill>
-          </a:ln>
-        </p:spPr>
-        <p:style>
-          <a:lnRef idx="1">
-            <a:schemeClr val="accent1"/>
-          </a:lnRef>
-          <a:fillRef idx="3">
-            <a:schemeClr val="accent1"/>
-          </a:fillRef>
-          <a:effectRef idx="2">
-            <a:schemeClr val="accent1"/>
-          </a:effectRef>
-          <a:fontRef idx="minor">
-            <a:schemeClr val="lt1"/>
-          </a:fontRef>
-        </p:style>
-        <p:txBody>
-          <a:bodyPr rtlCol="0" anchor="ctr"/>
-          <a:lstStyle/>
-          <a:p>
-            <a:pPr algn="ctr"/>
-          </a:p>
-        </p:txBody>
-      </p:sp>
-      <p:sp>
-        <p:nvSpPr>
-          <p:cNvPr id="16" name="Rounded Rectangle 15"/>
-          <p:cNvSpPr/>
-          <p:nvPr/>
-        </p:nvSpPr>
-        <p:spPr>
-          <a:xfrm>
-            <a:off x="932688" y="3995928"/>
-            <a:ext cx="438912" cy="438912"/>
-          </a:xfrm>
-          <a:prstGeom prst="roundRect">
-            <a:avLst/>
-          </a:prstGeom>
-          <a:solidFill>
-            <a:srgbClr val="10B981"/>
-          </a:solidFill>
-          <a:ln>
-            <a:solidFill>
-              <a:srgbClr val="10B981"/>
-            </a:solidFill>
-          </a:ln>
-        </p:spPr>
-        <p:style>
-          <a:lnRef idx="1">
-            <a:schemeClr val="accent1"/>
-          </a:lnRef>
-          <a:fillRef idx="3">
-            <a:schemeClr val="accent1"/>
-          </a:fillRef>
-          <a:effectRef idx="2">
-            <a:schemeClr val="accent1"/>
-          </a:effectRef>
-          <a:fontRef idx="minor">
-            <a:schemeClr val="lt1"/>
-          </a:fontRef>
-        </p:style>
-        <p:txBody>
-          <a:bodyPr rtlCol="0" anchor="ctr"/>
-          <a:lstStyle/>
-          <a:p>
-            <a:pPr algn="ctr"/>
-          </a:p>
-        </p:txBody>
-      </p:sp>
-      <p:sp>
-        <p:nvSpPr>
-          <p:cNvPr id="17" name="TextBox 16"/>
-          <p:cNvSpPr txBox="1"/>
-          <p:nvPr/>
-        </p:nvSpPr>
-        <p:spPr>
-          <a:xfrm>
-            <a:off x="932688" y="4005072"/>
-            <a:ext cx="438912" cy="420624"/>
-          </a:xfrm>
-          <a:prstGeom prst="rect">
-            <a:avLst/>
-          </a:prstGeom>
-          <a:noFill/>
-        </p:spPr>
-        <p:txBody>
-          <a:bodyPr wrap="square" anchor="ctr">
-            <a:spAutoFit/>
-          </a:bodyPr>
-          <a:lstStyle/>
-          <a:p>
-            <a:pPr algn="ctr"/>
-            <a:r>
-              <a:rPr sz="1400" b="1">
-                <a:solidFill>
-                  <a:srgbClr val="FFFFFF"/>
+            <a:pPr algn="r"/>
+            <a:r>
+              <a:rPr sz="900" b="0">
+                <a:solidFill>
+                  <a:srgbClr val="5B6372"/>
                 </a:solidFill>
                 <a:latin typeface="Arial"/>
               </a:rPr>
@@ -5337,14 +5078,224 @@
       </p:sp>
       <p:sp>
         <p:nvSpPr>
+          <p:cNvPr id="12" name="TextBox 11"/>
+          <p:cNvSpPr txBox="1"/>
+          <p:nvPr/>
+        </p:nvSpPr>
+        <p:spPr>
+          <a:xfrm>
+            <a:off x="1554480" y="2157984"/>
+            <a:ext cx="9418320" cy="256032"/>
+          </a:xfrm>
+          <a:prstGeom prst="rect">
+            <a:avLst/>
+          </a:prstGeom>
+          <a:noFill/>
+        </p:spPr>
+        <p:txBody>
+          <a:bodyPr wrap="square" anchor="t">
+            <a:spAutoFit/>
+          </a:bodyPr>
+          <a:lstStyle/>
+          <a:p>
+            <a:pPr algn="l"/>
+            <a:r>
+              <a:rPr sz="1050" b="1">
+                <a:solidFill>
+                  <a:srgbClr val="161B26"/>
+                </a:solidFill>
+                <a:latin typeface="Arial"/>
+              </a:rPr>
+              <a:t>Sections:</a:t>
+            </a:r>
+          </a:p>
+        </p:txBody>
+      </p:sp>
+      <p:sp>
+        <p:nvSpPr>
+          <p:cNvPr id="13" name="TextBox 12"/>
+          <p:cNvSpPr txBox="1"/>
+          <p:nvPr/>
+        </p:nvSpPr>
+        <p:spPr>
+          <a:xfrm>
+            <a:off x="960120" y="2441448"/>
+            <a:ext cx="384048" cy="246888"/>
+          </a:xfrm>
+          <a:prstGeom prst="rect">
+            <a:avLst/>
+          </a:prstGeom>
+          <a:noFill/>
+        </p:spPr>
+        <p:txBody>
+          <a:bodyPr wrap="square" anchor="t">
+            <a:spAutoFit/>
+          </a:bodyPr>
+          <a:lstStyle/>
+          <a:p>
+            <a:pPr algn="r"/>
+            <a:r>
+              <a:rPr sz="900" b="0">
+                <a:solidFill>
+                  <a:srgbClr val="5B6372"/>
+                </a:solidFill>
+                <a:latin typeface="Arial"/>
+              </a:rPr>
+              <a:t>3</a:t>
+            </a:r>
+          </a:p>
+        </p:txBody>
+      </p:sp>
+      <p:sp>
+        <p:nvSpPr>
+          <p:cNvPr id="14" name="TextBox 13"/>
+          <p:cNvSpPr txBox="1"/>
+          <p:nvPr/>
+        </p:nvSpPr>
+        <p:spPr>
+          <a:xfrm>
+            <a:off x="1554480" y="2441448"/>
+            <a:ext cx="9418320" cy="256032"/>
+          </a:xfrm>
+          <a:prstGeom prst="rect">
+            <a:avLst/>
+          </a:prstGeom>
+          <a:noFill/>
+        </p:spPr>
+        <p:txBody>
+          <a:bodyPr wrap="square" anchor="t">
+            <a:spAutoFit/>
+          </a:bodyPr>
+          <a:lstStyle/>
+          <a:p>
+            <a:pPr algn="l"/>
+            <a:r>
+              <a:rPr sz="1050" b="0">
+                <a:solidFill>
+                  <a:srgbClr val="161B26"/>
+                </a:solidFill>
+                <a:latin typeface="Arial"/>
+              </a:rPr>
+              <a:t>1. 1</a:t>
+            </a:r>
+          </a:p>
+        </p:txBody>
+      </p:sp>
+      <p:sp>
+        <p:nvSpPr>
+          <p:cNvPr id="15" name="TextBox 14"/>
+          <p:cNvSpPr txBox="1"/>
+          <p:nvPr/>
+        </p:nvSpPr>
+        <p:spPr>
+          <a:xfrm>
+            <a:off x="960120" y="2724911"/>
+            <a:ext cx="384048" cy="246888"/>
+          </a:xfrm>
+          <a:prstGeom prst="rect">
+            <a:avLst/>
+          </a:prstGeom>
+          <a:noFill/>
+        </p:spPr>
+        <p:txBody>
+          <a:bodyPr wrap="square" anchor="t">
+            <a:spAutoFit/>
+          </a:bodyPr>
+          <a:lstStyle/>
+          <a:p>
+            <a:pPr algn="r"/>
+            <a:r>
+              <a:rPr sz="900" b="0">
+                <a:solidFill>
+                  <a:srgbClr val="5B6372"/>
+                </a:solidFill>
+                <a:latin typeface="Arial"/>
+              </a:rPr>
+              <a:t>4</a:t>
+            </a:r>
+          </a:p>
+        </p:txBody>
+      </p:sp>
+      <p:sp>
+        <p:nvSpPr>
+          <p:cNvPr id="16" name="TextBox 15"/>
+          <p:cNvSpPr txBox="1"/>
+          <p:nvPr/>
+        </p:nvSpPr>
+        <p:spPr>
+          <a:xfrm>
+            <a:off x="1554480" y="2724911"/>
+            <a:ext cx="9418320" cy="256032"/>
+          </a:xfrm>
+          <a:prstGeom prst="rect">
+            <a:avLst/>
+          </a:prstGeom>
+          <a:noFill/>
+        </p:spPr>
+        <p:txBody>
+          <a:bodyPr wrap="square" anchor="t">
+            <a:spAutoFit/>
+          </a:bodyPr>
+          <a:lstStyle/>
+          <a:p>
+            <a:pPr algn="l"/>
+            <a:r>
+              <a:rPr sz="1050" b="0">
+                <a:solidFill>
+                  <a:srgbClr val="161B26"/>
+                </a:solidFill>
+                <a:latin typeface="Arial"/>
+              </a:rPr>
+              <a:t>2. 2</a:t>
+            </a:r>
+          </a:p>
+        </p:txBody>
+      </p:sp>
+      <p:sp>
+        <p:nvSpPr>
+          <p:cNvPr id="17" name="TextBox 16"/>
+          <p:cNvSpPr txBox="1"/>
+          <p:nvPr/>
+        </p:nvSpPr>
+        <p:spPr>
+          <a:xfrm>
+            <a:off x="960120" y="3008376"/>
+            <a:ext cx="384048" cy="246888"/>
+          </a:xfrm>
+          <a:prstGeom prst="rect">
+            <a:avLst/>
+          </a:prstGeom>
+          <a:noFill/>
+        </p:spPr>
+        <p:txBody>
+          <a:bodyPr wrap="square" anchor="t">
+            <a:spAutoFit/>
+          </a:bodyPr>
+          <a:lstStyle/>
+          <a:p>
+            <a:pPr algn="r"/>
+            <a:r>
+              <a:rPr sz="900" b="0">
+                <a:solidFill>
+                  <a:srgbClr val="5B6372"/>
+                </a:solidFill>
+                <a:latin typeface="Arial"/>
+              </a:rPr>
+              <a:t>5</a:t>
+            </a:r>
+          </a:p>
+        </p:txBody>
+      </p:sp>
+      <p:sp>
+        <p:nvSpPr>
           <p:cNvPr id="18" name="TextBox 17"/>
           <p:cNvSpPr txBox="1"/>
           <p:nvPr/>
         </p:nvSpPr>
         <p:spPr>
           <a:xfrm>
-            <a:off x="1536192" y="3959352"/>
-            <a:ext cx="9710928" cy="329184"/>
+            <a:off x="1554480" y="3008376"/>
+            <a:ext cx="9418320" cy="256032"/>
           </a:xfrm>
           <a:prstGeom prst="rect">
             <a:avLst/>
@@ -5359,13 +5310,13 @@
           <a:p>
             <a:pPr algn="l"/>
             <a:r>
-              <a:rPr sz="1400" b="1">
-                <a:solidFill>
-                  <a:srgbClr val="10B981"/>
+              <a:rPr sz="1050" b="0">
+                <a:solidFill>
+                  <a:srgbClr val="161B26"/>
                 </a:solidFill>
                 <a:latin typeface="Arial"/>
               </a:rPr>
-              <a:t>Decision pressure</a:t>
+              <a:t>3. 3</a:t>
             </a:r>
           </a:p>
         </p:txBody>
@@ -5378,8 +5329,8 @@
         </p:nvSpPr>
         <p:spPr>
           <a:xfrm>
-            <a:off x="1536192" y="4343400"/>
-            <a:ext cx="9710928" cy="978408"/>
+            <a:off x="960120" y="3291839"/>
+            <a:ext cx="384048" cy="246888"/>
           </a:xfrm>
           <a:prstGeom prst="rect">
             <a:avLst/>
@@ -5392,15 +5343,470 @@
           </a:bodyPr>
           <a:lstStyle/>
           <a:p>
-            <a:pPr algn="l"/>
-            <a:r>
-              <a:rPr sz="1150" b="0">
-                <a:solidFill>
-                  <a:srgbClr val="161B26"/>
+            <a:pPr algn="r"/>
+            <a:r>
+              <a:rPr sz="900" b="0">
+                <a:solidFill>
+                  <a:srgbClr val="5B6372"/>
                 </a:solidFill>
                 <a:latin typeface="Arial"/>
               </a:rPr>
-              <a:t>Use the images only as supporting visuals. Build all stage names, values, connectors, source labels and decision meaning as editable PowerPoint objects.</a:t>
+              <a:t>6</a:t>
+            </a:r>
+          </a:p>
+        </p:txBody>
+      </p:sp>
+      <p:sp>
+        <p:nvSpPr>
+          <p:cNvPr id="20" name="TextBox 19"/>
+          <p:cNvSpPr txBox="1"/>
+          <p:nvPr/>
+        </p:nvSpPr>
+        <p:spPr>
+          <a:xfrm>
+            <a:off x="1554480" y="3291839"/>
+            <a:ext cx="9418320" cy="256032"/>
+          </a:xfrm>
+          <a:prstGeom prst="rect">
+            <a:avLst/>
+          </a:prstGeom>
+          <a:noFill/>
+        </p:spPr>
+        <p:txBody>
+          <a:bodyPr wrap="square" anchor="t">
+            <a:spAutoFit/>
+          </a:bodyPr>
+          <a:lstStyle/>
+          <a:p>
+            <a:pPr algn="l"/>
+            <a:r>
+              <a:rPr sz="1050" b="0">
+                <a:solidFill>
+                  <a:srgbClr val="161B26"/>
+                </a:solidFill>
+                <a:latin typeface="Arial"/>
+              </a:rPr>
+              <a:t>4. 4</a:t>
+            </a:r>
+          </a:p>
+        </p:txBody>
+      </p:sp>
+      <p:sp>
+        <p:nvSpPr>
+          <p:cNvPr id="21" name="TextBox 20"/>
+          <p:cNvSpPr txBox="1"/>
+          <p:nvPr/>
+        </p:nvSpPr>
+        <p:spPr>
+          <a:xfrm>
+            <a:off x="960120" y="3575303"/>
+            <a:ext cx="384048" cy="246888"/>
+          </a:xfrm>
+          <a:prstGeom prst="rect">
+            <a:avLst/>
+          </a:prstGeom>
+          <a:noFill/>
+        </p:spPr>
+        <p:txBody>
+          <a:bodyPr wrap="square" anchor="t">
+            <a:spAutoFit/>
+          </a:bodyPr>
+          <a:lstStyle/>
+          <a:p>
+            <a:pPr algn="r"/>
+            <a:r>
+              <a:rPr sz="900" b="0">
+                <a:solidFill>
+                  <a:srgbClr val="5B6372"/>
+                </a:solidFill>
+                <a:latin typeface="Arial"/>
+              </a:rPr>
+              <a:t>7</a:t>
+            </a:r>
+          </a:p>
+        </p:txBody>
+      </p:sp>
+      <p:sp>
+        <p:nvSpPr>
+          <p:cNvPr id="22" name="TextBox 21"/>
+          <p:cNvSpPr txBox="1"/>
+          <p:nvPr/>
+        </p:nvSpPr>
+        <p:spPr>
+          <a:xfrm>
+            <a:off x="1554480" y="3575303"/>
+            <a:ext cx="9418320" cy="256032"/>
+          </a:xfrm>
+          <a:prstGeom prst="rect">
+            <a:avLst/>
+          </a:prstGeom>
+          <a:noFill/>
+        </p:spPr>
+        <p:txBody>
+          <a:bodyPr wrap="square" anchor="t">
+            <a:spAutoFit/>
+          </a:bodyPr>
+          <a:lstStyle/>
+          <a:p>
+            <a:pPr algn="l"/>
+            <a:r>
+              <a:rPr sz="1050" b="0">
+                <a:solidFill>
+                  <a:srgbClr val="161B26"/>
+                </a:solidFill>
+                <a:latin typeface="Arial"/>
+              </a:rPr>
+              <a:t>5. 5</a:t>
+            </a:r>
+          </a:p>
+        </p:txBody>
+      </p:sp>
+      <p:sp>
+        <p:nvSpPr>
+          <p:cNvPr id="23" name="TextBox 22"/>
+          <p:cNvSpPr txBox="1"/>
+          <p:nvPr/>
+        </p:nvSpPr>
+        <p:spPr>
+          <a:xfrm>
+            <a:off x="960120" y="3858768"/>
+            <a:ext cx="384048" cy="246888"/>
+          </a:xfrm>
+          <a:prstGeom prst="rect">
+            <a:avLst/>
+          </a:prstGeom>
+          <a:noFill/>
+        </p:spPr>
+        <p:txBody>
+          <a:bodyPr wrap="square" anchor="t">
+            <a:spAutoFit/>
+          </a:bodyPr>
+          <a:lstStyle/>
+          <a:p>
+            <a:pPr algn="r"/>
+            <a:r>
+              <a:rPr sz="900" b="0">
+                <a:solidFill>
+                  <a:srgbClr val="5B6372"/>
+                </a:solidFill>
+                <a:latin typeface="Arial"/>
+              </a:rPr>
+              <a:t>8</a:t>
+            </a:r>
+          </a:p>
+        </p:txBody>
+      </p:sp>
+      <p:sp>
+        <p:nvSpPr>
+          <p:cNvPr id="24" name="TextBox 23"/>
+          <p:cNvSpPr txBox="1"/>
+          <p:nvPr/>
+        </p:nvSpPr>
+        <p:spPr>
+          <a:xfrm>
+            <a:off x="1554480" y="3858768"/>
+            <a:ext cx="9418320" cy="256032"/>
+          </a:xfrm>
+          <a:prstGeom prst="rect">
+            <a:avLst/>
+          </a:prstGeom>
+          <a:noFill/>
+        </p:spPr>
+        <p:txBody>
+          <a:bodyPr wrap="square" anchor="t">
+            <a:spAutoFit/>
+          </a:bodyPr>
+          <a:lstStyle/>
+          <a:p>
+            <a:pPr algn="l"/>
+            <a:r>
+              <a:rPr sz="1050" b="0">
+                <a:solidFill>
+                  <a:srgbClr val="7C3AED"/>
+                </a:solidFill>
+                <a:latin typeface="Arial"/>
+              </a:rPr>
+              <a:t>Audience: store managers</a:t>
+            </a:r>
+          </a:p>
+        </p:txBody>
+      </p:sp>
+      <p:sp>
+        <p:nvSpPr>
+          <p:cNvPr id="25" name="TextBox 24"/>
+          <p:cNvSpPr txBox="1"/>
+          <p:nvPr/>
+        </p:nvSpPr>
+        <p:spPr>
+          <a:xfrm>
+            <a:off x="960120" y="4142231"/>
+            <a:ext cx="384048" cy="246888"/>
+          </a:xfrm>
+          <a:prstGeom prst="rect">
+            <a:avLst/>
+          </a:prstGeom>
+          <a:noFill/>
+        </p:spPr>
+        <p:txBody>
+          <a:bodyPr wrap="square" anchor="t">
+            <a:spAutoFit/>
+          </a:bodyPr>
+          <a:lstStyle/>
+          <a:p>
+            <a:pPr algn="r"/>
+            <a:r>
+              <a:rPr sz="900" b="0">
+                <a:solidFill>
+                  <a:srgbClr val="5B6372"/>
+                </a:solidFill>
+                <a:latin typeface="Arial"/>
+              </a:rPr>
+              <a:t>9</a:t>
+            </a:r>
+          </a:p>
+        </p:txBody>
+      </p:sp>
+      <p:sp>
+        <p:nvSpPr>
+          <p:cNvPr id="26" name="TextBox 25"/>
+          <p:cNvSpPr txBox="1"/>
+          <p:nvPr/>
+        </p:nvSpPr>
+        <p:spPr>
+          <a:xfrm>
+            <a:off x="1554480" y="4142231"/>
+            <a:ext cx="9418320" cy="256032"/>
+          </a:xfrm>
+          <a:prstGeom prst="rect">
+            <a:avLst/>
+          </a:prstGeom>
+          <a:noFill/>
+        </p:spPr>
+        <p:txBody>
+          <a:bodyPr wrap="square" anchor="t">
+            <a:spAutoFit/>
+          </a:bodyPr>
+          <a:lstStyle/>
+          <a:p>
+            <a:pPr algn="l"/>
+            <a:r>
+              <a:rPr sz="1050" b="0">
+                <a:solidFill>
+                  <a:srgbClr val="7C3AED"/>
+                </a:solidFill>
+                <a:latin typeface="Arial"/>
+              </a:rPr>
+              <a:t>Decision: The process uses a consistent component system, real connectors, direct labels, purposeful whitespace and editable PowerPoint objects.</a:t>
+            </a:r>
+          </a:p>
+        </p:txBody>
+      </p:sp>
+      <p:sp>
+        <p:nvSpPr>
+          <p:cNvPr id="27" name="TextBox 26"/>
+          <p:cNvSpPr txBox="1"/>
+          <p:nvPr/>
+        </p:nvSpPr>
+        <p:spPr>
+          <a:xfrm>
+            <a:off x="960120" y="4425696"/>
+            <a:ext cx="384048" cy="246888"/>
+          </a:xfrm>
+          <a:prstGeom prst="rect">
+            <a:avLst/>
+          </a:prstGeom>
+          <a:noFill/>
+        </p:spPr>
+        <p:txBody>
+          <a:bodyPr wrap="square" anchor="t">
+            <a:spAutoFit/>
+          </a:bodyPr>
+          <a:lstStyle/>
+          <a:p>
+            <a:pPr algn="r"/>
+            <a:r>
+              <a:rPr sz="900" b="0">
+                <a:solidFill>
+                  <a:srgbClr val="5B6372"/>
+                </a:solidFill>
+                <a:latin typeface="Arial"/>
+              </a:rPr>
+              <a:t>10</a:t>
+            </a:r>
+          </a:p>
+        </p:txBody>
+      </p:sp>
+      <p:sp>
+        <p:nvSpPr>
+          <p:cNvPr id="28" name="TextBox 27"/>
+          <p:cNvSpPr txBox="1"/>
+          <p:nvPr/>
+        </p:nvSpPr>
+        <p:spPr>
+          <a:xfrm>
+            <a:off x="1554480" y="4425696"/>
+            <a:ext cx="9418320" cy="256032"/>
+          </a:xfrm>
+          <a:prstGeom prst="rect">
+            <a:avLst/>
+          </a:prstGeom>
+          <a:noFill/>
+        </p:spPr>
+        <p:txBody>
+          <a:bodyPr wrap="square" anchor="t">
+            <a:spAutoFit/>
+          </a:bodyPr>
+          <a:lstStyle/>
+          <a:p>
+            <a:pPr algn="l"/>
+            <a:r>
+              <a:rPr sz="1050" b="0">
+                <a:solidFill>
+                  <a:srgbClr val="7C3AED"/>
+                </a:solidFill>
+                <a:latin typeface="Arial"/>
+              </a:rPr>
+              <a:t>Style: professional, concise, high contrast and accessible</a:t>
+            </a:r>
+          </a:p>
+        </p:txBody>
+      </p:sp>
+      <p:sp>
+        <p:nvSpPr>
+          <p:cNvPr id="29" name="TextBox 28"/>
+          <p:cNvSpPr txBox="1"/>
+          <p:nvPr/>
+        </p:nvSpPr>
+        <p:spPr>
+          <a:xfrm>
+            <a:off x="960120" y="4709160"/>
+            <a:ext cx="384048" cy="246888"/>
+          </a:xfrm>
+          <a:prstGeom prst="rect">
+            <a:avLst/>
+          </a:prstGeom>
+          <a:noFill/>
+        </p:spPr>
+        <p:txBody>
+          <a:bodyPr wrap="square" anchor="t">
+            <a:spAutoFit/>
+          </a:bodyPr>
+          <a:lstStyle/>
+          <a:p>
+            <a:pPr algn="r"/>
+            <a:r>
+              <a:rPr sz="900" b="0">
+                <a:solidFill>
+                  <a:srgbClr val="5B6372"/>
+                </a:solidFill>
+                <a:latin typeface="Arial"/>
+              </a:rPr>
+              <a:t>11</a:t>
+            </a:r>
+          </a:p>
+        </p:txBody>
+      </p:sp>
+      <p:sp>
+        <p:nvSpPr>
+          <p:cNvPr id="30" name="TextBox 29"/>
+          <p:cNvSpPr txBox="1"/>
+          <p:nvPr/>
+        </p:nvSpPr>
+        <p:spPr>
+          <a:xfrm>
+            <a:off x="1554480" y="4709160"/>
+            <a:ext cx="9418320" cy="256032"/>
+          </a:xfrm>
+          <a:prstGeom prst="rect">
+            <a:avLst/>
+          </a:prstGeom>
+          <a:noFill/>
+        </p:spPr>
+        <p:txBody>
+          <a:bodyPr wrap="square" anchor="t">
+            <a:spAutoFit/>
+          </a:bodyPr>
+          <a:lstStyle/>
+          <a:p>
+            <a:pPr algn="l"/>
+            <a:r>
+              <a:rPr sz="1050" b="0">
+                <a:solidFill>
+                  <a:srgbClr val="7C3AED"/>
+                </a:solidFill>
+                <a:latin typeface="Arial"/>
+              </a:rPr>
+              <a:t>Format: Wide for PowerPoint unless the brief requires Portrait</a:t>
+            </a:r>
+          </a:p>
+        </p:txBody>
+      </p:sp>
+      <p:sp>
+        <p:nvSpPr>
+          <p:cNvPr id="31" name="TextBox 30"/>
+          <p:cNvSpPr txBox="1"/>
+          <p:nvPr/>
+        </p:nvSpPr>
+        <p:spPr>
+          <a:xfrm>
+            <a:off x="960120" y="4992624"/>
+            <a:ext cx="384048" cy="246888"/>
+          </a:xfrm>
+          <a:prstGeom prst="rect">
+            <a:avLst/>
+          </a:prstGeom>
+          <a:noFill/>
+        </p:spPr>
+        <p:txBody>
+          <a:bodyPr wrap="square" anchor="t">
+            <a:spAutoFit/>
+          </a:bodyPr>
+          <a:lstStyle/>
+          <a:p>
+            <a:pPr algn="r"/>
+            <a:r>
+              <a:rPr sz="900" b="0">
+                <a:solidFill>
+                  <a:srgbClr val="5B6372"/>
+                </a:solidFill>
+                <a:latin typeface="Arial"/>
+              </a:rPr>
+              <a:t>12</a:t>
+            </a:r>
+          </a:p>
+        </p:txBody>
+      </p:sp>
+      <p:sp>
+        <p:nvSpPr>
+          <p:cNvPr id="32" name="TextBox 31"/>
+          <p:cNvSpPr txBox="1"/>
+          <p:nvPr/>
+        </p:nvSpPr>
+        <p:spPr>
+          <a:xfrm>
+            <a:off x="1554480" y="4992624"/>
+            <a:ext cx="9418320" cy="256032"/>
+          </a:xfrm>
+          <a:prstGeom prst="rect">
+            <a:avLst/>
+          </a:prstGeom>
+          <a:noFill/>
+        </p:spPr>
+        <p:txBody>
+          <a:bodyPr wrap="square" anchor="t">
+            <a:spAutoFit/>
+          </a:bodyPr>
+          <a:lstStyle/>
+          <a:p>
+            <a:pPr algn="l"/>
+            <a:r>
+              <a:rPr sz="1050" b="0">
+                <a:solidFill>
+                  <a:srgbClr val="7C3AED"/>
+                </a:solidFill>
+                <a:latin typeface="Arial"/>
+              </a:rPr>
+              <a:t>Source rule: use only the attached approved or synthetic course data; include period and source; do not invent facts</a:t>
             </a:r>
           </a:p>
         </p:txBody>
@@ -5483,11 +5889,11 @@
             <a:avLst/>
           </a:prstGeom>
           <a:solidFill>
-            <a:srgbClr val="10B981"/>
+            <a:srgbClr val="1F6FEB"/>
           </a:solidFill>
           <a:ln>
             <a:solidFill>
-              <a:srgbClr val="10B981"/>
+              <a:srgbClr val="1F6FEB"/>
             </a:solidFill>
           </a:ln>
         </p:spPr>
@@ -5539,11 +5945,11 @@
             <a:r>
               <a:rPr sz="1100" b="1">
                 <a:solidFill>
-                  <a:srgbClr val="10B981"/>
+                  <a:srgbClr val="1F6FEB"/>
                 </a:solidFill>
                 <a:latin typeface="Arial"/>
               </a:rPr>
-              <a:t>ACTIVITY 04 · FRAMEWORK</a:t>
+              <a:t>ACTIVITY 04 · CONTEXT</a:t>
             </a:r>
           </a:p>
         </p:txBody>
@@ -5578,7 +5984,7 @@
                 </a:solidFill>
                 <a:latin typeface="Arial"/>
               </a:rPr>
-              <a:t>Prompt-to-Asset-to-PowerPoint</a:t>
+              <a:t>The Scenario</a:t>
             </a:r>
           </a:p>
         </p:txBody>
@@ -5671,8 +6077,8 @@
         </p:nvSpPr>
         <p:spPr>
           <a:xfrm>
-            <a:off x="685800" y="1920240"/>
-            <a:ext cx="1997049" cy="3566160"/>
+            <a:off x="731520" y="1783080"/>
+            <a:ext cx="10698480" cy="1691640"/>
           </a:xfrm>
           <a:prstGeom prst="roundRect">
             <a:avLst/>
@@ -5716,8 +6122,8 @@
         </p:nvSpPr>
         <p:spPr>
           <a:xfrm>
-            <a:off x="685800" y="1920240"/>
-            <a:ext cx="73152" cy="3566160"/>
+            <a:off x="731520" y="1783080"/>
+            <a:ext cx="73152" cy="1691640"/>
           </a:xfrm>
           <a:prstGeom prst="rect">
             <a:avLst/>
@@ -5761,7 +6167,7 @@
         </p:nvSpPr>
         <p:spPr>
           <a:xfrm>
-            <a:off x="886968" y="2139696"/>
+            <a:off x="932688" y="2002536"/>
             <a:ext cx="438912" cy="438912"/>
           </a:xfrm>
           <a:prstGeom prst="roundRect">
@@ -5806,7 +6212,7 @@
         </p:nvSpPr>
         <p:spPr>
           <a:xfrm>
-            <a:off x="886968" y="2148840"/>
+            <a:off x="932688" y="2011680"/>
             <a:ext cx="438912" cy="420624"/>
           </a:xfrm>
           <a:prstGeom prst="rect">
@@ -5841,8 +6247,8 @@
         </p:nvSpPr>
         <p:spPr>
           <a:xfrm>
-            <a:off x="1490472" y="2103120"/>
-            <a:ext cx="1009497" cy="329184"/>
+            <a:off x="1536192" y="1965960"/>
+            <a:ext cx="9710928" cy="329184"/>
           </a:xfrm>
           <a:prstGeom prst="rect">
             <a:avLst/>
@@ -5863,7 +6269,7 @@
                 </a:solidFill>
                 <a:latin typeface="Arial"/>
               </a:rPr>
-              <a:t>Prompt</a:t>
+              <a:t>Context</a:t>
             </a:r>
           </a:p>
         </p:txBody>
@@ -5876,8 +6282,8 @@
         </p:nvSpPr>
         <p:spPr>
           <a:xfrm>
-            <a:off x="1490472" y="2487168"/>
-            <a:ext cx="1009497" cy="2852928"/>
+            <a:off x="1536192" y="2350008"/>
+            <a:ext cx="9710928" cy="978408"/>
           </a:xfrm>
           <a:prstGeom prst="rect">
             <a:avLst/>
@@ -5898,7 +6304,7 @@
                 </a:solidFill>
                 <a:latin typeface="Arial"/>
               </a:rPr>
-              <a:t>Describe use, subject, style, palette and constraints.</a:t>
+              <a:t>Northstar needs an editable five-stage sustainable-delivery process infographic for store managers. Use the supplied structured Microsoft 365 Copilot prompt and approved synthetic stage data.</a:t>
             </a:r>
           </a:p>
         </p:txBody>
@@ -5911,8 +6317,8 @@
         </p:nvSpPr>
         <p:spPr>
           <a:xfrm>
-            <a:off x="2884017" y="1920240"/>
-            <a:ext cx="1997049" cy="3566160"/>
+            <a:off x="731520" y="3776472"/>
+            <a:ext cx="10698480" cy="1691640"/>
           </a:xfrm>
           <a:prstGeom prst="roundRect">
             <a:avLst/>
@@ -5956,8 +6362,8 @@
         </p:nvSpPr>
         <p:spPr>
           <a:xfrm>
-            <a:off x="2884017" y="1920240"/>
-            <a:ext cx="73152" cy="3566160"/>
+            <a:off x="731520" y="3776472"/>
+            <a:ext cx="73152" cy="1691640"/>
           </a:xfrm>
           <a:prstGeom prst="rect">
             <a:avLst/>
@@ -6001,7 +6407,7 @@
         </p:nvSpPr>
         <p:spPr>
           <a:xfrm>
-            <a:off x="3085185" y="2139696"/>
+            <a:off x="932688" y="3995928"/>
             <a:ext cx="438912" cy="438912"/>
           </a:xfrm>
           <a:prstGeom prst="roundRect">
@@ -6046,7 +6452,7 @@
         </p:nvSpPr>
         <p:spPr>
           <a:xfrm>
-            <a:off x="3085185" y="2148840"/>
+            <a:off x="932688" y="4005072"/>
             <a:ext cx="438912" cy="420624"/>
           </a:xfrm>
           <a:prstGeom prst="rect">
@@ -6081,8 +6487,8 @@
         </p:nvSpPr>
         <p:spPr>
           <a:xfrm>
-            <a:off x="3688689" y="2103120"/>
-            <a:ext cx="1009497" cy="329184"/>
+            <a:off x="1536192" y="3959352"/>
+            <a:ext cx="9710928" cy="329184"/>
           </a:xfrm>
           <a:prstGeom prst="rect">
             <a:avLst/>
@@ -6103,7 +6509,7 @@
                 </a:solidFill>
                 <a:latin typeface="Arial"/>
               </a:rPr>
-              <a:t>Generate</a:t>
+              <a:t>Decision pressure</a:t>
             </a:r>
           </a:p>
         </p:txBody>
@@ -6116,8 +6522,8 @@
         </p:nvSpPr>
         <p:spPr>
           <a:xfrm>
-            <a:off x="3688689" y="2487168"/>
-            <a:ext cx="1009497" cy="2852928"/>
+            <a:off x="1536192" y="4343400"/>
+            <a:ext cx="9710928" cy="978408"/>
           </a:xfrm>
           <a:prstGeom prst="rect">
             <a:avLst/>
@@ -6138,727 +6544,7 @@
                 </a:solidFill>
                 <a:latin typeface="Arial"/>
               </a:rPr>
-              <a:t>Create one asset sheet or a consistent set of separate visuals.</a:t>
-            </a:r>
-          </a:p>
-        </p:txBody>
-      </p:sp>
-      <p:sp>
-        <p:nvSpPr>
-          <p:cNvPr id="20" name="Rounded Rectangle 19"/>
-          <p:cNvSpPr/>
-          <p:nvPr/>
-        </p:nvSpPr>
-        <p:spPr>
-          <a:xfrm>
-            <a:off x="5082235" y="1920240"/>
-            <a:ext cx="1997049" cy="3566160"/>
-          </a:xfrm>
-          <a:prstGeom prst="roundRect">
-            <a:avLst/>
-          </a:prstGeom>
-          <a:solidFill>
-            <a:srgbClr val="F5F8FC"/>
-          </a:solidFill>
-          <a:ln>
-            <a:solidFill>
-              <a:srgbClr val="E2E8F0"/>
-            </a:solidFill>
-          </a:ln>
-        </p:spPr>
-        <p:style>
-          <a:lnRef idx="1">
-            <a:schemeClr val="accent1"/>
-          </a:lnRef>
-          <a:fillRef idx="3">
-            <a:schemeClr val="accent1"/>
-          </a:fillRef>
-          <a:effectRef idx="2">
-            <a:schemeClr val="accent1"/>
-          </a:effectRef>
-          <a:fontRef idx="minor">
-            <a:schemeClr val="lt1"/>
-          </a:fontRef>
-        </p:style>
-        <p:txBody>
-          <a:bodyPr rtlCol="0" anchor="ctr"/>
-          <a:lstStyle/>
-          <a:p>
-            <a:pPr algn="ctr"/>
-          </a:p>
-        </p:txBody>
-      </p:sp>
-      <p:sp>
-        <p:nvSpPr>
-          <p:cNvPr id="21" name="Rectangle 20"/>
-          <p:cNvSpPr/>
-          <p:nvPr/>
-        </p:nvSpPr>
-        <p:spPr>
-          <a:xfrm>
-            <a:off x="5082235" y="1920240"/>
-            <a:ext cx="73152" cy="3566160"/>
-          </a:xfrm>
-          <a:prstGeom prst="rect">
-            <a:avLst/>
-          </a:prstGeom>
-          <a:solidFill>
-            <a:srgbClr val="7C3AED"/>
-          </a:solidFill>
-          <a:ln>
-            <a:solidFill>
-              <a:srgbClr val="7C3AED"/>
-            </a:solidFill>
-          </a:ln>
-        </p:spPr>
-        <p:style>
-          <a:lnRef idx="1">
-            <a:schemeClr val="accent1"/>
-          </a:lnRef>
-          <a:fillRef idx="3">
-            <a:schemeClr val="accent1"/>
-          </a:fillRef>
-          <a:effectRef idx="2">
-            <a:schemeClr val="accent1"/>
-          </a:effectRef>
-          <a:fontRef idx="minor">
-            <a:schemeClr val="lt1"/>
-          </a:fontRef>
-        </p:style>
-        <p:txBody>
-          <a:bodyPr rtlCol="0" anchor="ctr"/>
-          <a:lstStyle/>
-          <a:p>
-            <a:pPr algn="ctr"/>
-          </a:p>
-        </p:txBody>
-      </p:sp>
-      <p:sp>
-        <p:nvSpPr>
-          <p:cNvPr id="22" name="Rounded Rectangle 21"/>
-          <p:cNvSpPr/>
-          <p:nvPr/>
-        </p:nvSpPr>
-        <p:spPr>
-          <a:xfrm>
-            <a:off x="5283403" y="2139696"/>
-            <a:ext cx="438912" cy="438912"/>
-          </a:xfrm>
-          <a:prstGeom prst="roundRect">
-            <a:avLst/>
-          </a:prstGeom>
-          <a:solidFill>
-            <a:srgbClr val="7C3AED"/>
-          </a:solidFill>
-          <a:ln>
-            <a:solidFill>
-              <a:srgbClr val="7C3AED"/>
-            </a:solidFill>
-          </a:ln>
-        </p:spPr>
-        <p:style>
-          <a:lnRef idx="1">
-            <a:schemeClr val="accent1"/>
-          </a:lnRef>
-          <a:fillRef idx="3">
-            <a:schemeClr val="accent1"/>
-          </a:fillRef>
-          <a:effectRef idx="2">
-            <a:schemeClr val="accent1"/>
-          </a:effectRef>
-          <a:fontRef idx="minor">
-            <a:schemeClr val="lt1"/>
-          </a:fontRef>
-        </p:style>
-        <p:txBody>
-          <a:bodyPr rtlCol="0" anchor="ctr"/>
-          <a:lstStyle/>
-          <a:p>
-            <a:pPr algn="ctr"/>
-          </a:p>
-        </p:txBody>
-      </p:sp>
-      <p:sp>
-        <p:nvSpPr>
-          <p:cNvPr id="23" name="TextBox 22"/>
-          <p:cNvSpPr txBox="1"/>
-          <p:nvPr/>
-        </p:nvSpPr>
-        <p:spPr>
-          <a:xfrm>
-            <a:off x="5283403" y="2148840"/>
-            <a:ext cx="438912" cy="420624"/>
-          </a:xfrm>
-          <a:prstGeom prst="rect">
-            <a:avLst/>
-          </a:prstGeom>
-          <a:noFill/>
-        </p:spPr>
-        <p:txBody>
-          <a:bodyPr wrap="square" anchor="ctr">
-            <a:spAutoFit/>
-          </a:bodyPr>
-          <a:lstStyle/>
-          <a:p>
-            <a:pPr algn="ctr"/>
-            <a:r>
-              <a:rPr sz="1400" b="1">
-                <a:solidFill>
-                  <a:srgbClr val="FFFFFF"/>
-                </a:solidFill>
-                <a:latin typeface="Arial"/>
-              </a:rPr>
-              <a:t>3</a:t>
-            </a:r>
-          </a:p>
-        </p:txBody>
-      </p:sp>
-      <p:sp>
-        <p:nvSpPr>
-          <p:cNvPr id="24" name="TextBox 23"/>
-          <p:cNvSpPr txBox="1"/>
-          <p:nvPr/>
-        </p:nvSpPr>
-        <p:spPr>
-          <a:xfrm>
-            <a:off x="5886907" y="2103120"/>
-            <a:ext cx="1009497" cy="329184"/>
-          </a:xfrm>
-          <a:prstGeom prst="rect">
-            <a:avLst/>
-          </a:prstGeom>
-          <a:noFill/>
-        </p:spPr>
-        <p:txBody>
-          <a:bodyPr wrap="square" anchor="t">
-            <a:spAutoFit/>
-          </a:bodyPr>
-          <a:lstStyle/>
-          <a:p>
-            <a:pPr algn="l"/>
-            <a:r>
-              <a:rPr sz="1400" b="1">
-                <a:solidFill>
-                  <a:srgbClr val="7C3AED"/>
-                </a:solidFill>
-                <a:latin typeface="Arial"/>
-              </a:rPr>
-              <a:t>Inspect</a:t>
-            </a:r>
-          </a:p>
-        </p:txBody>
-      </p:sp>
-      <p:sp>
-        <p:nvSpPr>
-          <p:cNvPr id="25" name="TextBox 24"/>
-          <p:cNvSpPr txBox="1"/>
-          <p:nvPr/>
-        </p:nvSpPr>
-        <p:spPr>
-          <a:xfrm>
-            <a:off x="5886907" y="2487168"/>
-            <a:ext cx="1009497" cy="2852928"/>
-          </a:xfrm>
-          <a:prstGeom prst="rect">
-            <a:avLst/>
-          </a:prstGeom>
-          <a:noFill/>
-        </p:spPr>
-        <p:txBody>
-          <a:bodyPr wrap="square" anchor="t">
-            <a:spAutoFit/>
-          </a:bodyPr>
-          <a:lstStyle/>
-          <a:p>
-            <a:pPr algn="l"/>
-            <a:r>
-              <a:rPr sz="1150" b="0">
-                <a:solidFill>
-                  <a:srgbClr val="161B26"/>
-                </a:solidFill>
-                <a:latin typeface="Arial"/>
-              </a:rPr>
-              <a:t>Reject text errors, visual ambiguity, rights risks and inconsistent style.</a:t>
-            </a:r>
-          </a:p>
-        </p:txBody>
-      </p:sp>
-      <p:sp>
-        <p:nvSpPr>
-          <p:cNvPr id="26" name="Rounded Rectangle 25"/>
-          <p:cNvSpPr/>
-          <p:nvPr/>
-        </p:nvSpPr>
-        <p:spPr>
-          <a:xfrm>
-            <a:off x="7280452" y="1920240"/>
-            <a:ext cx="1997049" cy="3566160"/>
-          </a:xfrm>
-          <a:prstGeom prst="roundRect">
-            <a:avLst/>
-          </a:prstGeom>
-          <a:solidFill>
-            <a:srgbClr val="F5F8FC"/>
-          </a:solidFill>
-          <a:ln>
-            <a:solidFill>
-              <a:srgbClr val="E2E8F0"/>
-            </a:solidFill>
-          </a:ln>
-        </p:spPr>
-        <p:style>
-          <a:lnRef idx="1">
-            <a:schemeClr val="accent1"/>
-          </a:lnRef>
-          <a:fillRef idx="3">
-            <a:schemeClr val="accent1"/>
-          </a:fillRef>
-          <a:effectRef idx="2">
-            <a:schemeClr val="accent1"/>
-          </a:effectRef>
-          <a:fontRef idx="minor">
-            <a:schemeClr val="lt1"/>
-          </a:fontRef>
-        </p:style>
-        <p:txBody>
-          <a:bodyPr rtlCol="0" anchor="ctr"/>
-          <a:lstStyle/>
-          <a:p>
-            <a:pPr algn="ctr"/>
-          </a:p>
-        </p:txBody>
-      </p:sp>
-      <p:sp>
-        <p:nvSpPr>
-          <p:cNvPr id="27" name="Rectangle 26"/>
-          <p:cNvSpPr/>
-          <p:nvPr/>
-        </p:nvSpPr>
-        <p:spPr>
-          <a:xfrm>
-            <a:off x="7280452" y="1920240"/>
-            <a:ext cx="73152" cy="3566160"/>
-          </a:xfrm>
-          <a:prstGeom prst="rect">
-            <a:avLst/>
-          </a:prstGeom>
-          <a:solidFill>
-            <a:srgbClr val="F59E0B"/>
-          </a:solidFill>
-          <a:ln>
-            <a:solidFill>
-              <a:srgbClr val="F59E0B"/>
-            </a:solidFill>
-          </a:ln>
-        </p:spPr>
-        <p:style>
-          <a:lnRef idx="1">
-            <a:schemeClr val="accent1"/>
-          </a:lnRef>
-          <a:fillRef idx="3">
-            <a:schemeClr val="accent1"/>
-          </a:fillRef>
-          <a:effectRef idx="2">
-            <a:schemeClr val="accent1"/>
-          </a:effectRef>
-          <a:fontRef idx="minor">
-            <a:schemeClr val="lt1"/>
-          </a:fontRef>
-        </p:style>
-        <p:txBody>
-          <a:bodyPr rtlCol="0" anchor="ctr"/>
-          <a:lstStyle/>
-          <a:p>
-            <a:pPr algn="ctr"/>
-          </a:p>
-        </p:txBody>
-      </p:sp>
-      <p:sp>
-        <p:nvSpPr>
-          <p:cNvPr id="28" name="Rounded Rectangle 27"/>
-          <p:cNvSpPr/>
-          <p:nvPr/>
-        </p:nvSpPr>
-        <p:spPr>
-          <a:xfrm>
-            <a:off x="7481620" y="2139696"/>
-            <a:ext cx="438912" cy="438912"/>
-          </a:xfrm>
-          <a:prstGeom prst="roundRect">
-            <a:avLst/>
-          </a:prstGeom>
-          <a:solidFill>
-            <a:srgbClr val="F59E0B"/>
-          </a:solidFill>
-          <a:ln>
-            <a:solidFill>
-              <a:srgbClr val="F59E0B"/>
-            </a:solidFill>
-          </a:ln>
-        </p:spPr>
-        <p:style>
-          <a:lnRef idx="1">
-            <a:schemeClr val="accent1"/>
-          </a:lnRef>
-          <a:fillRef idx="3">
-            <a:schemeClr val="accent1"/>
-          </a:fillRef>
-          <a:effectRef idx="2">
-            <a:schemeClr val="accent1"/>
-          </a:effectRef>
-          <a:fontRef idx="minor">
-            <a:schemeClr val="lt1"/>
-          </a:fontRef>
-        </p:style>
-        <p:txBody>
-          <a:bodyPr rtlCol="0" anchor="ctr"/>
-          <a:lstStyle/>
-          <a:p>
-            <a:pPr algn="ctr"/>
-          </a:p>
-        </p:txBody>
-      </p:sp>
-      <p:sp>
-        <p:nvSpPr>
-          <p:cNvPr id="29" name="TextBox 28"/>
-          <p:cNvSpPr txBox="1"/>
-          <p:nvPr/>
-        </p:nvSpPr>
-        <p:spPr>
-          <a:xfrm>
-            <a:off x="7481620" y="2148840"/>
-            <a:ext cx="438912" cy="420624"/>
-          </a:xfrm>
-          <a:prstGeom prst="rect">
-            <a:avLst/>
-          </a:prstGeom>
-          <a:noFill/>
-        </p:spPr>
-        <p:txBody>
-          <a:bodyPr wrap="square" anchor="ctr">
-            <a:spAutoFit/>
-          </a:bodyPr>
-          <a:lstStyle/>
-          <a:p>
-            <a:pPr algn="ctr"/>
-            <a:r>
-              <a:rPr sz="1400" b="1">
-                <a:solidFill>
-                  <a:srgbClr val="FFFFFF"/>
-                </a:solidFill>
-                <a:latin typeface="Arial"/>
-              </a:rPr>
-              <a:t>4</a:t>
-            </a:r>
-          </a:p>
-        </p:txBody>
-      </p:sp>
-      <p:sp>
-        <p:nvSpPr>
-          <p:cNvPr id="30" name="TextBox 29"/>
-          <p:cNvSpPr txBox="1"/>
-          <p:nvPr/>
-        </p:nvSpPr>
-        <p:spPr>
-          <a:xfrm>
-            <a:off x="8085124" y="2103120"/>
-            <a:ext cx="1009497" cy="329184"/>
-          </a:xfrm>
-          <a:prstGeom prst="rect">
-            <a:avLst/>
-          </a:prstGeom>
-          <a:noFill/>
-        </p:spPr>
-        <p:txBody>
-          <a:bodyPr wrap="square" anchor="t">
-            <a:spAutoFit/>
-          </a:bodyPr>
-          <a:lstStyle/>
-          <a:p>
-            <a:pPr algn="l"/>
-            <a:r>
-              <a:rPr sz="1400" b="1">
-                <a:solidFill>
-                  <a:srgbClr val="F59E0B"/>
-                </a:solidFill>
-                <a:latin typeface="Arial"/>
-              </a:rPr>
-              <a:t>Insert</a:t>
-            </a:r>
-          </a:p>
-        </p:txBody>
-      </p:sp>
-      <p:sp>
-        <p:nvSpPr>
-          <p:cNvPr id="31" name="TextBox 30"/>
-          <p:cNvSpPr txBox="1"/>
-          <p:nvPr/>
-        </p:nvSpPr>
-        <p:spPr>
-          <a:xfrm>
-            <a:off x="8085124" y="2487168"/>
-            <a:ext cx="1009497" cy="2852928"/>
-          </a:xfrm>
-          <a:prstGeom prst="rect">
-            <a:avLst/>
-          </a:prstGeom>
-          <a:noFill/>
-        </p:spPr>
-        <p:txBody>
-          <a:bodyPr wrap="square" anchor="t">
-            <a:spAutoFit/>
-          </a:bodyPr>
-          <a:lstStyle/>
-          <a:p>
-            <a:pPr algn="l"/>
-            <a:r>
-              <a:rPr sz="1150" b="0">
-                <a:solidFill>
-                  <a:srgbClr val="161B26"/>
-                </a:solidFill>
-                <a:latin typeface="Arial"/>
-              </a:rPr>
-              <a:t>Place approved assets without treating them as measured evidence.</a:t>
-            </a:r>
-          </a:p>
-        </p:txBody>
-      </p:sp>
-      <p:sp>
-        <p:nvSpPr>
-          <p:cNvPr id="32" name="Rounded Rectangle 31"/>
-          <p:cNvSpPr/>
-          <p:nvPr/>
-        </p:nvSpPr>
-        <p:spPr>
-          <a:xfrm>
-            <a:off x="9478670" y="1920240"/>
-            <a:ext cx="1997049" cy="3566160"/>
-          </a:xfrm>
-          <a:prstGeom prst="roundRect">
-            <a:avLst/>
-          </a:prstGeom>
-          <a:solidFill>
-            <a:srgbClr val="F5F8FC"/>
-          </a:solidFill>
-          <a:ln>
-            <a:solidFill>
-              <a:srgbClr val="E2E8F0"/>
-            </a:solidFill>
-          </a:ln>
-        </p:spPr>
-        <p:style>
-          <a:lnRef idx="1">
-            <a:schemeClr val="accent1"/>
-          </a:lnRef>
-          <a:fillRef idx="3">
-            <a:schemeClr val="accent1"/>
-          </a:fillRef>
-          <a:effectRef idx="2">
-            <a:schemeClr val="accent1"/>
-          </a:effectRef>
-          <a:fontRef idx="minor">
-            <a:schemeClr val="lt1"/>
-          </a:fontRef>
-        </p:style>
-        <p:txBody>
-          <a:bodyPr rtlCol="0" anchor="ctr"/>
-          <a:lstStyle/>
-          <a:p>
-            <a:pPr algn="ctr"/>
-          </a:p>
-        </p:txBody>
-      </p:sp>
-      <p:sp>
-        <p:nvSpPr>
-          <p:cNvPr id="33" name="Rectangle 32"/>
-          <p:cNvSpPr/>
-          <p:nvPr/>
-        </p:nvSpPr>
-        <p:spPr>
-          <a:xfrm>
-            <a:off x="9478670" y="1920240"/>
-            <a:ext cx="73152" cy="3566160"/>
-          </a:xfrm>
-          <a:prstGeom prst="rect">
-            <a:avLst/>
-          </a:prstGeom>
-          <a:solidFill>
-            <a:srgbClr val="1F6FEB"/>
-          </a:solidFill>
-          <a:ln>
-            <a:solidFill>
-              <a:srgbClr val="1F6FEB"/>
-            </a:solidFill>
-          </a:ln>
-        </p:spPr>
-        <p:style>
-          <a:lnRef idx="1">
-            <a:schemeClr val="accent1"/>
-          </a:lnRef>
-          <a:fillRef idx="3">
-            <a:schemeClr val="accent1"/>
-          </a:fillRef>
-          <a:effectRef idx="2">
-            <a:schemeClr val="accent1"/>
-          </a:effectRef>
-          <a:fontRef idx="minor">
-            <a:schemeClr val="lt1"/>
-          </a:fontRef>
-        </p:style>
-        <p:txBody>
-          <a:bodyPr rtlCol="0" anchor="ctr"/>
-          <a:lstStyle/>
-          <a:p>
-            <a:pPr algn="ctr"/>
-          </a:p>
-        </p:txBody>
-      </p:sp>
-      <p:sp>
-        <p:nvSpPr>
-          <p:cNvPr id="34" name="Rounded Rectangle 33"/>
-          <p:cNvSpPr/>
-          <p:nvPr/>
-        </p:nvSpPr>
-        <p:spPr>
-          <a:xfrm>
-            <a:off x="9679838" y="2139696"/>
-            <a:ext cx="438912" cy="438912"/>
-          </a:xfrm>
-          <a:prstGeom prst="roundRect">
-            <a:avLst/>
-          </a:prstGeom>
-          <a:solidFill>
-            <a:srgbClr val="1F6FEB"/>
-          </a:solidFill>
-          <a:ln>
-            <a:solidFill>
-              <a:srgbClr val="1F6FEB"/>
-            </a:solidFill>
-          </a:ln>
-        </p:spPr>
-        <p:style>
-          <a:lnRef idx="1">
-            <a:schemeClr val="accent1"/>
-          </a:lnRef>
-          <a:fillRef idx="3">
-            <a:schemeClr val="accent1"/>
-          </a:fillRef>
-          <a:effectRef idx="2">
-            <a:schemeClr val="accent1"/>
-          </a:effectRef>
-          <a:fontRef idx="minor">
-            <a:schemeClr val="lt1"/>
-          </a:fontRef>
-        </p:style>
-        <p:txBody>
-          <a:bodyPr rtlCol="0" anchor="ctr"/>
-          <a:lstStyle/>
-          <a:p>
-            <a:pPr algn="ctr"/>
-          </a:p>
-        </p:txBody>
-      </p:sp>
-      <p:sp>
-        <p:nvSpPr>
-          <p:cNvPr id="35" name="TextBox 34"/>
-          <p:cNvSpPr txBox="1"/>
-          <p:nvPr/>
-        </p:nvSpPr>
-        <p:spPr>
-          <a:xfrm>
-            <a:off x="9679838" y="2148840"/>
-            <a:ext cx="438912" cy="420624"/>
-          </a:xfrm>
-          <a:prstGeom prst="rect">
-            <a:avLst/>
-          </a:prstGeom>
-          <a:noFill/>
-        </p:spPr>
-        <p:txBody>
-          <a:bodyPr wrap="square" anchor="ctr">
-            <a:spAutoFit/>
-          </a:bodyPr>
-          <a:lstStyle/>
-          <a:p>
-            <a:pPr algn="ctr"/>
-            <a:r>
-              <a:rPr sz="1400" b="1">
-                <a:solidFill>
-                  <a:srgbClr val="FFFFFF"/>
-                </a:solidFill>
-                <a:latin typeface="Arial"/>
-              </a:rPr>
-              <a:t>5</a:t>
-            </a:r>
-          </a:p>
-        </p:txBody>
-      </p:sp>
-      <p:sp>
-        <p:nvSpPr>
-          <p:cNvPr id="36" name="TextBox 35"/>
-          <p:cNvSpPr txBox="1"/>
-          <p:nvPr/>
-        </p:nvSpPr>
-        <p:spPr>
-          <a:xfrm>
-            <a:off x="10283342" y="2103120"/>
-            <a:ext cx="1009497" cy="329184"/>
-          </a:xfrm>
-          <a:prstGeom prst="rect">
-            <a:avLst/>
-          </a:prstGeom>
-          <a:noFill/>
-        </p:spPr>
-        <p:txBody>
-          <a:bodyPr wrap="square" anchor="t">
-            <a:spAutoFit/>
-          </a:bodyPr>
-          <a:lstStyle/>
-          <a:p>
-            <a:pPr algn="l"/>
-            <a:r>
-              <a:rPr sz="1400" b="1">
-                <a:solidFill>
-                  <a:srgbClr val="1F6FEB"/>
-                </a:solidFill>
-                <a:latin typeface="Arial"/>
-              </a:rPr>
-              <a:t>Refine</a:t>
-            </a:r>
-          </a:p>
-        </p:txBody>
-      </p:sp>
-      <p:sp>
-        <p:nvSpPr>
-          <p:cNvPr id="37" name="TextBox 36"/>
-          <p:cNvSpPr txBox="1"/>
-          <p:nvPr/>
-        </p:nvSpPr>
-        <p:spPr>
-          <a:xfrm>
-            <a:off x="10283342" y="2487168"/>
-            <a:ext cx="1009497" cy="2852928"/>
-          </a:xfrm>
-          <a:prstGeom prst="rect">
-            <a:avLst/>
-          </a:prstGeom>
-          <a:noFill/>
-        </p:spPr>
-        <p:txBody>
-          <a:bodyPr wrap="square" anchor="t">
-            <a:spAutoFit/>
-          </a:bodyPr>
-          <a:lstStyle/>
-          <a:p>
-            <a:pPr algn="l"/>
-            <a:r>
-              <a:rPr sz="1150" b="0">
-                <a:solidFill>
-                  <a:srgbClr val="161B26"/>
-                </a:solidFill>
-                <a:latin typeface="Arial"/>
-              </a:rPr>
-              <a:t>Add editable labels, shapes, connectors, alt text and source notes.</a:t>
+              <a:t>Treat the Copilot output as a design direction. Build all stage names, values, connectors, source labels and decision meaning as editable PowerPoint objects.</a:t>
             </a:r>
           </a:p>
         </p:txBody>
@@ -6941,11 +6627,11 @@
             <a:avLst/>
           </a:prstGeom>
           <a:solidFill>
-            <a:srgbClr val="7C3AED"/>
+            <a:srgbClr val="10B981"/>
           </a:solidFill>
           <a:ln>
             <a:solidFill>
-              <a:srgbClr val="7C3AED"/>
+              <a:srgbClr val="10B981"/>
             </a:solidFill>
           </a:ln>
         </p:spPr>
@@ -6997,11 +6683,11 @@
             <a:r>
               <a:rPr sz="1100" b="1">
                 <a:solidFill>
-                  <a:srgbClr val="7C3AED"/>
+                  <a:srgbClr val="10B981"/>
                 </a:solidFill>
                 <a:latin typeface="Arial"/>
               </a:rPr>
-              <a:t>ACTIVITY 04 · EXAMPLE</a:t>
+              <a:t>ACTIVITY 04 · FRAMEWORK</a:t>
             </a:r>
           </a:p>
         </p:txBody>
@@ -7036,7 +6722,7 @@
                 </a:solidFill>
                 <a:latin typeface="Arial"/>
               </a:rPr>
-              <a:t>Worked Output</a:t>
+              <a:t>Prompt-to-Process-to-PowerPoint</a:t>
             </a:r>
           </a:p>
         </p:txBody>
@@ -7129,8 +6815,8 @@
         </p:nvSpPr>
         <p:spPr>
           <a:xfrm>
-            <a:off x="731520" y="1783080"/>
-            <a:ext cx="3401568" cy="1719072"/>
+            <a:off x="685800" y="1920240"/>
+            <a:ext cx="1997049" cy="3566160"/>
           </a:xfrm>
           <a:prstGeom prst="roundRect">
             <a:avLst/>
@@ -7174,8 +6860,8 @@
         </p:nvSpPr>
         <p:spPr>
           <a:xfrm>
-            <a:off x="731520" y="1783080"/>
-            <a:ext cx="73152" cy="1719072"/>
+            <a:off x="685800" y="1920240"/>
+            <a:ext cx="73152" cy="3566160"/>
           </a:xfrm>
           <a:prstGeom prst="rect">
             <a:avLst/>
@@ -7219,7 +6905,7 @@
         </p:nvSpPr>
         <p:spPr>
           <a:xfrm>
-            <a:off x="932688" y="2002536"/>
+            <a:off x="886968" y="2139696"/>
             <a:ext cx="438912" cy="438912"/>
           </a:xfrm>
           <a:prstGeom prst="roundRect">
@@ -7264,7 +6950,7 @@
         </p:nvSpPr>
         <p:spPr>
           <a:xfrm>
-            <a:off x="932688" y="2011680"/>
+            <a:off x="886968" y="2148840"/>
             <a:ext cx="438912" cy="420624"/>
           </a:xfrm>
           <a:prstGeom prst="rect">
@@ -7299,8 +6985,8 @@
         </p:nvSpPr>
         <p:spPr>
           <a:xfrm>
-            <a:off x="1536192" y="1965960"/>
-            <a:ext cx="2414016" cy="329184"/>
+            <a:off x="1490472" y="2103120"/>
+            <a:ext cx="1009497" cy="329184"/>
           </a:xfrm>
           <a:prstGeom prst="rect">
             <a:avLst/>
@@ -7321,7 +7007,7 @@
                 </a:solidFill>
                 <a:latin typeface="Arial"/>
               </a:rPr>
-              <a:t>1</a:t>
+              <a:t>Describe</a:t>
             </a:r>
           </a:p>
         </p:txBody>
@@ -7334,8 +7020,8 @@
         </p:nvSpPr>
         <p:spPr>
           <a:xfrm>
-            <a:off x="1536192" y="2350008"/>
-            <a:ext cx="2414016" cy="1005839"/>
+            <a:off x="1490472" y="2487168"/>
+            <a:ext cx="1009497" cy="2852928"/>
           </a:xfrm>
           <a:prstGeom prst="rect">
             <a:avLst/>
@@ -7356,7 +7042,7 @@
                 </a:solidFill>
                 <a:latin typeface="Arial"/>
               </a:rPr>
-              <a:t>Order confirmed</a:t>
+              <a:t>Name the five stages, audience, decision, source and visual constraints.</a:t>
             </a:r>
           </a:p>
         </p:txBody>
@@ -7369,8 +7055,8 @@
         </p:nvSpPr>
         <p:spPr>
           <a:xfrm>
-            <a:off x="4315968" y="1783080"/>
-            <a:ext cx="3401568" cy="1719072"/>
+            <a:off x="2884017" y="1920240"/>
+            <a:ext cx="1997049" cy="3566160"/>
           </a:xfrm>
           <a:prstGeom prst="roundRect">
             <a:avLst/>
@@ -7414,8 +7100,8 @@
         </p:nvSpPr>
         <p:spPr>
           <a:xfrm>
-            <a:off x="4315968" y="1783080"/>
-            <a:ext cx="73152" cy="1719072"/>
+            <a:off x="2884017" y="1920240"/>
+            <a:ext cx="73152" cy="3566160"/>
           </a:xfrm>
           <a:prstGeom prst="rect">
             <a:avLst/>
@@ -7459,7 +7145,7 @@
         </p:nvSpPr>
         <p:spPr>
           <a:xfrm>
-            <a:off x="4517136" y="2002536"/>
+            <a:off x="3085185" y="2139696"/>
             <a:ext cx="438912" cy="438912"/>
           </a:xfrm>
           <a:prstGeom prst="roundRect">
@@ -7504,7 +7190,7 @@
         </p:nvSpPr>
         <p:spPr>
           <a:xfrm>
-            <a:off x="4517136" y="2011680"/>
+            <a:off x="3085185" y="2148840"/>
             <a:ext cx="438912" cy="420624"/>
           </a:xfrm>
           <a:prstGeom prst="rect">
@@ -7539,8 +7225,8 @@
         </p:nvSpPr>
         <p:spPr>
           <a:xfrm>
-            <a:off x="5120640" y="1965960"/>
-            <a:ext cx="2414016" cy="329184"/>
+            <a:off x="3688689" y="2103120"/>
+            <a:ext cx="1009497" cy="329184"/>
           </a:xfrm>
           <a:prstGeom prst="rect">
             <a:avLst/>
@@ -7561,7 +7247,7 @@
                 </a:solidFill>
                 <a:latin typeface="Arial"/>
               </a:rPr>
-              <a:t>2</a:t>
+              <a:t>Generate</a:t>
             </a:r>
           </a:p>
         </p:txBody>
@@ -7574,8 +7260,8 @@
         </p:nvSpPr>
         <p:spPr>
           <a:xfrm>
-            <a:off x="5120640" y="2350008"/>
-            <a:ext cx="2414016" cy="1005839"/>
+            <a:off x="3688689" y="2487168"/>
+            <a:ext cx="1009497" cy="2852928"/>
           </a:xfrm>
           <a:prstGeom prst="rect">
             <a:avLst/>
@@ -7596,7 +7282,7 @@
                 </a:solidFill>
                 <a:latin typeface="Arial"/>
               </a:rPr>
-              <a:t>Inventory reserved</a:t>
+              <a:t>Create a Wide process infographic in Microsoft 365 Copilot.</a:t>
             </a:r>
           </a:p>
         </p:txBody>
@@ -7609,8 +7295,8 @@
         </p:nvSpPr>
         <p:spPr>
           <a:xfrm>
-            <a:off x="7900416" y="1783080"/>
-            <a:ext cx="3401568" cy="1719072"/>
+            <a:off x="5082235" y="1920240"/>
+            <a:ext cx="1997049" cy="3566160"/>
           </a:xfrm>
           <a:prstGeom prst="roundRect">
             <a:avLst/>
@@ -7654,8 +7340,8 @@
         </p:nvSpPr>
         <p:spPr>
           <a:xfrm>
-            <a:off x="7900416" y="1783080"/>
-            <a:ext cx="73152" cy="1719072"/>
+            <a:off x="5082235" y="1920240"/>
+            <a:ext cx="73152" cy="3566160"/>
           </a:xfrm>
           <a:prstGeom prst="rect">
             <a:avLst/>
@@ -7699,7 +7385,7 @@
         </p:nvSpPr>
         <p:spPr>
           <a:xfrm>
-            <a:off x="8101584" y="2002536"/>
+            <a:off x="5283403" y="2139696"/>
             <a:ext cx="438912" cy="438912"/>
           </a:xfrm>
           <a:prstGeom prst="roundRect">
@@ -7744,7 +7430,7 @@
         </p:nvSpPr>
         <p:spPr>
           <a:xfrm>
-            <a:off x="8101584" y="2011680"/>
+            <a:off x="5283403" y="2148840"/>
             <a:ext cx="438912" cy="420624"/>
           </a:xfrm>
           <a:prstGeom prst="rect">
@@ -7779,8 +7465,8 @@
         </p:nvSpPr>
         <p:spPr>
           <a:xfrm>
-            <a:off x="8705088" y="1965960"/>
-            <a:ext cx="2414016" cy="329184"/>
+            <a:off x="5886907" y="2103120"/>
+            <a:ext cx="1009497" cy="329184"/>
           </a:xfrm>
           <a:prstGeom prst="rect">
             <a:avLst/>
@@ -7801,7 +7487,7 @@
                 </a:solidFill>
                 <a:latin typeface="Arial"/>
               </a:rPr>
-              <a:t>3</a:t>
+              <a:t>Inspect</a:t>
             </a:r>
           </a:p>
         </p:txBody>
@@ -7814,8 +7500,8 @@
         </p:nvSpPr>
         <p:spPr>
           <a:xfrm>
-            <a:off x="8705088" y="2350008"/>
-            <a:ext cx="2414016" cy="1005839"/>
+            <a:off x="5886907" y="2487168"/>
+            <a:ext cx="1009497" cy="2852928"/>
           </a:xfrm>
           <a:prstGeom prst="rect">
             <a:avLst/>
@@ -7836,7 +7522,7 @@
                 </a:solidFill>
                 <a:latin typeface="Arial"/>
               </a:rPr>
-              <a:t>Route optimised</a:t>
+              <a:t>Reject wrong sequence, invented claims, ambiguous symbols and clutter.</a:t>
             </a:r>
           </a:p>
         </p:txBody>
@@ -7849,8 +7535,8 @@
         </p:nvSpPr>
         <p:spPr>
           <a:xfrm>
-            <a:off x="731520" y="3776472"/>
-            <a:ext cx="3401568" cy="1719072"/>
+            <a:off x="7280452" y="1920240"/>
+            <a:ext cx="1997049" cy="3566160"/>
           </a:xfrm>
           <a:prstGeom prst="roundRect">
             <a:avLst/>
@@ -7894,8 +7580,8 @@
         </p:nvSpPr>
         <p:spPr>
           <a:xfrm>
-            <a:off x="731520" y="3776472"/>
-            <a:ext cx="73152" cy="1719072"/>
+            <a:off x="7280452" y="1920240"/>
+            <a:ext cx="73152" cy="3566160"/>
           </a:xfrm>
           <a:prstGeom prst="rect">
             <a:avLst/>
@@ -7939,7 +7625,7 @@
         </p:nvSpPr>
         <p:spPr>
           <a:xfrm>
-            <a:off x="932688" y="3995928"/>
+            <a:off x="7481620" y="2139696"/>
             <a:ext cx="438912" cy="438912"/>
           </a:xfrm>
           <a:prstGeom prst="roundRect">
@@ -7984,7 +7670,7 @@
         </p:nvSpPr>
         <p:spPr>
           <a:xfrm>
-            <a:off x="932688" y="4005072"/>
+            <a:off x="7481620" y="2148840"/>
             <a:ext cx="438912" cy="420624"/>
           </a:xfrm>
           <a:prstGeom prst="rect">
@@ -8019,8 +7705,8 @@
         </p:nvSpPr>
         <p:spPr>
           <a:xfrm>
-            <a:off x="1536192" y="3959352"/>
-            <a:ext cx="2414016" cy="329184"/>
+            <a:off x="8085124" y="2103120"/>
+            <a:ext cx="1009497" cy="329184"/>
           </a:xfrm>
           <a:prstGeom prst="rect">
             <a:avLst/>
@@ -8041,7 +7727,7 @@
                 </a:solidFill>
                 <a:latin typeface="Arial"/>
               </a:rPr>
-              <a:t>4</a:t>
+              <a:t>Rebuild</a:t>
             </a:r>
           </a:p>
         </p:txBody>
@@ -8054,8 +7740,8 @@
         </p:nvSpPr>
         <p:spPr>
           <a:xfrm>
-            <a:off x="1536192" y="4343400"/>
-            <a:ext cx="2414016" cy="1005839"/>
+            <a:off x="8085124" y="2487168"/>
+            <a:ext cx="1009497" cy="2852928"/>
           </a:xfrm>
           <a:prstGeom prst="rect">
             <a:avLst/>
@@ -8076,7 +7762,7 @@
                 </a:solidFill>
                 <a:latin typeface="Arial"/>
               </a:rPr>
-              <a:t>Low-emission delivery</a:t>
+              <a:t>Create editable PowerPoint stages, connectors, labels and metrics.</a:t>
             </a:r>
           </a:p>
         </p:txBody>
@@ -8089,8 +7775,8 @@
         </p:nvSpPr>
         <p:spPr>
           <a:xfrm>
-            <a:off x="4315968" y="3776472"/>
-            <a:ext cx="3401568" cy="1719072"/>
+            <a:off x="9478670" y="1920240"/>
+            <a:ext cx="1997049" cy="3566160"/>
           </a:xfrm>
           <a:prstGeom prst="roundRect">
             <a:avLst/>
@@ -8134,8 +7820,8 @@
         </p:nvSpPr>
         <p:spPr>
           <a:xfrm>
-            <a:off x="4315968" y="3776472"/>
-            <a:ext cx="73152" cy="1719072"/>
+            <a:off x="9478670" y="1920240"/>
+            <a:ext cx="73152" cy="3566160"/>
           </a:xfrm>
           <a:prstGeom prst="rect">
             <a:avLst/>
@@ -8179,7 +7865,7 @@
         </p:nvSpPr>
         <p:spPr>
           <a:xfrm>
-            <a:off x="4517136" y="3995928"/>
+            <a:off x="9679838" y="2139696"/>
             <a:ext cx="438912" cy="438912"/>
           </a:xfrm>
           <a:prstGeom prst="roundRect">
@@ -8224,7 +7910,7 @@
         </p:nvSpPr>
         <p:spPr>
           <a:xfrm>
-            <a:off x="4517136" y="4005072"/>
+            <a:off x="9679838" y="2148840"/>
             <a:ext cx="438912" cy="420624"/>
           </a:xfrm>
           <a:prstGeom prst="rect">
@@ -8259,8 +7945,8 @@
         </p:nvSpPr>
         <p:spPr>
           <a:xfrm>
-            <a:off x="5120640" y="3959352"/>
-            <a:ext cx="2414016" cy="329184"/>
+            <a:off x="10283342" y="2103120"/>
+            <a:ext cx="1009497" cy="329184"/>
           </a:xfrm>
           <a:prstGeom prst="rect">
             <a:avLst/>
@@ -8281,7 +7967,7 @@
                 </a:solidFill>
                 <a:latin typeface="Arial"/>
               </a:rPr>
-              <a:t>5</a:t>
+              <a:t>Verify</a:t>
             </a:r>
           </a:p>
         </p:txBody>
@@ -8294,8 +7980,8 @@
         </p:nvSpPr>
         <p:spPr>
           <a:xfrm>
-            <a:off x="5120640" y="4343400"/>
-            <a:ext cx="2414016" cy="1005839"/>
+            <a:off x="10283342" y="2487168"/>
+            <a:ext cx="1009497" cy="2852928"/>
           </a:xfrm>
           <a:prstGeom prst="rect">
             <a:avLst/>
@@ -8316,247 +8002,7 @@
                 </a:solidFill>
                 <a:latin typeface="Arial"/>
               </a:rPr>
-              <a:t>Customer feedback</a:t>
-            </a:r>
-          </a:p>
-        </p:txBody>
-      </p:sp>
-      <p:sp>
-        <p:nvSpPr>
-          <p:cNvPr id="38" name="Rounded Rectangle 37"/>
-          <p:cNvSpPr/>
-          <p:nvPr/>
-        </p:nvSpPr>
-        <p:spPr>
-          <a:xfrm>
-            <a:off x="7900416" y="3776472"/>
-            <a:ext cx="3401568" cy="1719072"/>
-          </a:xfrm>
-          <a:prstGeom prst="roundRect">
-            <a:avLst/>
-          </a:prstGeom>
-          <a:solidFill>
-            <a:srgbClr val="F5F8FC"/>
-          </a:solidFill>
-          <a:ln>
-            <a:solidFill>
-              <a:srgbClr val="E2E8F0"/>
-            </a:solidFill>
-          </a:ln>
-        </p:spPr>
-        <p:style>
-          <a:lnRef idx="1">
-            <a:schemeClr val="accent1"/>
-          </a:lnRef>
-          <a:fillRef idx="3">
-            <a:schemeClr val="accent1"/>
-          </a:fillRef>
-          <a:effectRef idx="2">
-            <a:schemeClr val="accent1"/>
-          </a:effectRef>
-          <a:fontRef idx="minor">
-            <a:schemeClr val="lt1"/>
-          </a:fontRef>
-        </p:style>
-        <p:txBody>
-          <a:bodyPr rtlCol="0" anchor="ctr"/>
-          <a:lstStyle/>
-          <a:p>
-            <a:pPr algn="ctr"/>
-          </a:p>
-        </p:txBody>
-      </p:sp>
-      <p:sp>
-        <p:nvSpPr>
-          <p:cNvPr id="39" name="Rectangle 38"/>
-          <p:cNvSpPr/>
-          <p:nvPr/>
-        </p:nvSpPr>
-        <p:spPr>
-          <a:xfrm>
-            <a:off x="7900416" y="3776472"/>
-            <a:ext cx="73152" cy="1719072"/>
-          </a:xfrm>
-          <a:prstGeom prst="rect">
-            <a:avLst/>
-          </a:prstGeom>
-          <a:solidFill>
-            <a:srgbClr val="10B981"/>
-          </a:solidFill>
-          <a:ln>
-            <a:solidFill>
-              <a:srgbClr val="10B981"/>
-            </a:solidFill>
-          </a:ln>
-        </p:spPr>
-        <p:style>
-          <a:lnRef idx="1">
-            <a:schemeClr val="accent1"/>
-          </a:lnRef>
-          <a:fillRef idx="3">
-            <a:schemeClr val="accent1"/>
-          </a:fillRef>
-          <a:effectRef idx="2">
-            <a:schemeClr val="accent1"/>
-          </a:effectRef>
-          <a:fontRef idx="minor">
-            <a:schemeClr val="lt1"/>
-          </a:fontRef>
-        </p:style>
-        <p:txBody>
-          <a:bodyPr rtlCol="0" anchor="ctr"/>
-          <a:lstStyle/>
-          <a:p>
-            <a:pPr algn="ctr"/>
-          </a:p>
-        </p:txBody>
-      </p:sp>
-      <p:sp>
-        <p:nvSpPr>
-          <p:cNvPr id="40" name="Rounded Rectangle 39"/>
-          <p:cNvSpPr/>
-          <p:nvPr/>
-        </p:nvSpPr>
-        <p:spPr>
-          <a:xfrm>
-            <a:off x="8101584" y="3995928"/>
-            <a:ext cx="438912" cy="438912"/>
-          </a:xfrm>
-          <a:prstGeom prst="roundRect">
-            <a:avLst/>
-          </a:prstGeom>
-          <a:solidFill>
-            <a:srgbClr val="10B981"/>
-          </a:solidFill>
-          <a:ln>
-            <a:solidFill>
-              <a:srgbClr val="10B981"/>
-            </a:solidFill>
-          </a:ln>
-        </p:spPr>
-        <p:style>
-          <a:lnRef idx="1">
-            <a:schemeClr val="accent1"/>
-          </a:lnRef>
-          <a:fillRef idx="3">
-            <a:schemeClr val="accent1"/>
-          </a:fillRef>
-          <a:effectRef idx="2">
-            <a:schemeClr val="accent1"/>
-          </a:effectRef>
-          <a:fontRef idx="minor">
-            <a:schemeClr val="lt1"/>
-          </a:fontRef>
-        </p:style>
-        <p:txBody>
-          <a:bodyPr rtlCol="0" anchor="ctr"/>
-          <a:lstStyle/>
-          <a:p>
-            <a:pPr algn="ctr"/>
-          </a:p>
-        </p:txBody>
-      </p:sp>
-      <p:sp>
-        <p:nvSpPr>
-          <p:cNvPr id="41" name="TextBox 40"/>
-          <p:cNvSpPr txBox="1"/>
-          <p:nvPr/>
-        </p:nvSpPr>
-        <p:spPr>
-          <a:xfrm>
-            <a:off x="8101584" y="4005072"/>
-            <a:ext cx="438912" cy="420624"/>
-          </a:xfrm>
-          <a:prstGeom prst="rect">
-            <a:avLst/>
-          </a:prstGeom>
-          <a:noFill/>
-        </p:spPr>
-        <p:txBody>
-          <a:bodyPr wrap="square" anchor="ctr">
-            <a:spAutoFit/>
-          </a:bodyPr>
-          <a:lstStyle/>
-          <a:p>
-            <a:pPr algn="ctr"/>
-            <a:r>
-              <a:rPr sz="1400" b="1">
-                <a:solidFill>
-                  <a:srgbClr val="FFFFFF"/>
-                </a:solidFill>
-                <a:latin typeface="Arial"/>
-              </a:rPr>
-              <a:t>6</a:t>
-            </a:r>
-          </a:p>
-        </p:txBody>
-      </p:sp>
-      <p:sp>
-        <p:nvSpPr>
-          <p:cNvPr id="42" name="TextBox 41"/>
-          <p:cNvSpPr txBox="1"/>
-          <p:nvPr/>
-        </p:nvSpPr>
-        <p:spPr>
-          <a:xfrm>
-            <a:off x="8705088" y="3959352"/>
-            <a:ext cx="2414016" cy="329184"/>
-          </a:xfrm>
-          <a:prstGeom prst="rect">
-            <a:avLst/>
-          </a:prstGeom>
-          <a:noFill/>
-        </p:spPr>
-        <p:txBody>
-          <a:bodyPr wrap="square" anchor="t">
-            <a:spAutoFit/>
-          </a:bodyPr>
-          <a:lstStyle/>
-          <a:p>
-            <a:pPr algn="l"/>
-            <a:r>
-              <a:rPr sz="1400" b="1">
-                <a:solidFill>
-                  <a:srgbClr val="10B981"/>
-                </a:solidFill>
-                <a:latin typeface="Arial"/>
-              </a:rPr>
-              <a:t>Rule</a:t>
-            </a:r>
-          </a:p>
-        </p:txBody>
-      </p:sp>
-      <p:sp>
-        <p:nvSpPr>
-          <p:cNvPr id="43" name="TextBox 42"/>
-          <p:cNvSpPr txBox="1"/>
-          <p:nvPr/>
-        </p:nvSpPr>
-        <p:spPr>
-          <a:xfrm>
-            <a:off x="8705088" y="4343400"/>
-            <a:ext cx="2414016" cy="1005839"/>
-          </a:xfrm>
-          <a:prstGeom prst="rect">
-            <a:avLst/>
-          </a:prstGeom>
-          <a:noFill/>
-        </p:spPr>
-        <p:txBody>
-          <a:bodyPr wrap="square" anchor="t">
-            <a:spAutoFit/>
-          </a:bodyPr>
-          <a:lstStyle/>
-          <a:p>
-            <a:pPr algn="l"/>
-            <a:r>
-              <a:rPr sz="1150" b="0">
-                <a:solidFill>
-                  <a:srgbClr val="161B26"/>
-                </a:solidFill>
-                <a:latin typeface="Arial"/>
-              </a:rPr>
-              <a:t>One stage, one verb, one icon</a:t>
+              <a:t>Check source, alt text, reading order and export.</a:t>
             </a:r>
           </a:p>
         </p:txBody>
@@ -8639,11 +8085,11 @@
             <a:avLst/>
           </a:prstGeom>
           <a:solidFill>
-            <a:srgbClr val="10B981"/>
+            <a:srgbClr val="7C3AED"/>
           </a:solidFill>
           <a:ln>
             <a:solidFill>
-              <a:srgbClr val="10B981"/>
+              <a:srgbClr val="7C3AED"/>
             </a:solidFill>
           </a:ln>
         </p:spPr>
@@ -8695,11 +8141,11 @@
             <a:r>
               <a:rPr sz="1100" b="1">
                 <a:solidFill>
-                  <a:srgbClr val="10B981"/>
+                  <a:srgbClr val="7C3AED"/>
                 </a:solidFill>
                 <a:latin typeface="Arial"/>
               </a:rPr>
-              <a:t>ACTIVITY 04 · SYNTHETIC VISUAL ASSETS</a:t>
+              <a:t>ACTIVITY 04 · EXAMPLE</a:t>
             </a:r>
           </a:p>
         </p:txBody>
@@ -8734,7 +8180,7 @@
                 </a:solidFill>
                 <a:latin typeface="Arial"/>
               </a:rPr>
-              <a:t>AI-Generated Practice Asset Sheet</a:t>
+              <a:t>Worked Output</a:t>
             </a:r>
           </a:p>
         </p:txBody>
@@ -8819,40 +8265,186 @@
           </a:p>
         </p:txBody>
       </p:sp>
-      <p:pic>
-        <p:nvPicPr>
-          <p:cNvPr id="8" name="Picture 7" descr="AI-Generated-Sustainability-Asset-Sheet-v1.png"/>
-          <p:cNvPicPr>
-            <a:picLocks noChangeAspect="1"/>
-          </p:cNvPicPr>
-          <p:nvPr/>
-        </p:nvPicPr>
-        <p:blipFill>
-          <a:blip r:embed="rId2"/>
-          <a:stretch>
-            <a:fillRect/>
-          </a:stretch>
-        </p:blipFill>
-        <p:spPr>
-          <a:xfrm>
-            <a:off x="3840480" y="1572768"/>
-            <a:ext cx="4480560" cy="4480560"/>
-          </a:xfrm>
-          <a:prstGeom prst="rect">
-            <a:avLst/>
-          </a:prstGeom>
-        </p:spPr>
-      </p:pic>
-      <p:sp>
-        <p:nvSpPr>
-          <p:cNvPr id="9" name="TextBox 8"/>
+      <p:sp>
+        <p:nvSpPr>
+          <p:cNvPr id="8" name="Rounded Rectangle 7"/>
+          <p:cNvSpPr/>
+          <p:nvPr/>
+        </p:nvSpPr>
+        <p:spPr>
+          <a:xfrm>
+            <a:off x="731520" y="1783080"/>
+            <a:ext cx="3401568" cy="1719072"/>
+          </a:xfrm>
+          <a:prstGeom prst="roundRect">
+            <a:avLst/>
+          </a:prstGeom>
+          <a:solidFill>
+            <a:srgbClr val="F5F8FC"/>
+          </a:solidFill>
+          <a:ln>
+            <a:solidFill>
+              <a:srgbClr val="E2E8F0"/>
+            </a:solidFill>
+          </a:ln>
+        </p:spPr>
+        <p:style>
+          <a:lnRef idx="1">
+            <a:schemeClr val="accent1"/>
+          </a:lnRef>
+          <a:fillRef idx="3">
+            <a:schemeClr val="accent1"/>
+          </a:fillRef>
+          <a:effectRef idx="2">
+            <a:schemeClr val="accent1"/>
+          </a:effectRef>
+          <a:fontRef idx="minor">
+            <a:schemeClr val="lt1"/>
+          </a:fontRef>
+        </p:style>
+        <p:txBody>
+          <a:bodyPr rtlCol="0" anchor="ctr"/>
+          <a:lstStyle/>
+          <a:p>
+            <a:pPr algn="ctr"/>
+          </a:p>
+        </p:txBody>
+      </p:sp>
+      <p:sp>
+        <p:nvSpPr>
+          <p:cNvPr id="9" name="Rectangle 8"/>
+          <p:cNvSpPr/>
+          <p:nvPr/>
+        </p:nvSpPr>
+        <p:spPr>
+          <a:xfrm>
+            <a:off x="731520" y="1783080"/>
+            <a:ext cx="73152" cy="1719072"/>
+          </a:xfrm>
+          <a:prstGeom prst="rect">
+            <a:avLst/>
+          </a:prstGeom>
+          <a:solidFill>
+            <a:srgbClr val="1F6FEB"/>
+          </a:solidFill>
+          <a:ln>
+            <a:solidFill>
+              <a:srgbClr val="1F6FEB"/>
+            </a:solidFill>
+          </a:ln>
+        </p:spPr>
+        <p:style>
+          <a:lnRef idx="1">
+            <a:schemeClr val="accent1"/>
+          </a:lnRef>
+          <a:fillRef idx="3">
+            <a:schemeClr val="accent1"/>
+          </a:fillRef>
+          <a:effectRef idx="2">
+            <a:schemeClr val="accent1"/>
+          </a:effectRef>
+          <a:fontRef idx="minor">
+            <a:schemeClr val="lt1"/>
+          </a:fontRef>
+        </p:style>
+        <p:txBody>
+          <a:bodyPr rtlCol="0" anchor="ctr"/>
+          <a:lstStyle/>
+          <a:p>
+            <a:pPr algn="ctr"/>
+          </a:p>
+        </p:txBody>
+      </p:sp>
+      <p:sp>
+        <p:nvSpPr>
+          <p:cNvPr id="10" name="Rounded Rectangle 9"/>
+          <p:cNvSpPr/>
+          <p:nvPr/>
+        </p:nvSpPr>
+        <p:spPr>
+          <a:xfrm>
+            <a:off x="932688" y="2002536"/>
+            <a:ext cx="438912" cy="438912"/>
+          </a:xfrm>
+          <a:prstGeom prst="roundRect">
+            <a:avLst/>
+          </a:prstGeom>
+          <a:solidFill>
+            <a:srgbClr val="1F6FEB"/>
+          </a:solidFill>
+          <a:ln>
+            <a:solidFill>
+              <a:srgbClr val="1F6FEB"/>
+            </a:solidFill>
+          </a:ln>
+        </p:spPr>
+        <p:style>
+          <a:lnRef idx="1">
+            <a:schemeClr val="accent1"/>
+          </a:lnRef>
+          <a:fillRef idx="3">
+            <a:schemeClr val="accent1"/>
+          </a:fillRef>
+          <a:effectRef idx="2">
+            <a:schemeClr val="accent1"/>
+          </a:effectRef>
+          <a:fontRef idx="minor">
+            <a:schemeClr val="lt1"/>
+          </a:fontRef>
+        </p:style>
+        <p:txBody>
+          <a:bodyPr rtlCol="0" anchor="ctr"/>
+          <a:lstStyle/>
+          <a:p>
+            <a:pPr algn="ctr"/>
+          </a:p>
+        </p:txBody>
+      </p:sp>
+      <p:sp>
+        <p:nvSpPr>
+          <p:cNvPr id="11" name="TextBox 10"/>
           <p:cNvSpPr txBox="1"/>
           <p:nvPr/>
         </p:nvSpPr>
         <p:spPr>
           <a:xfrm>
-            <a:off x="777240" y="6108192"/>
-            <a:ext cx="10698480" cy="237744"/>
+            <a:off x="932688" y="2011680"/>
+            <a:ext cx="438912" cy="420624"/>
+          </a:xfrm>
+          <a:prstGeom prst="rect">
+            <a:avLst/>
+          </a:prstGeom>
+          <a:noFill/>
+        </p:spPr>
+        <p:txBody>
+          <a:bodyPr wrap="square" anchor="ctr">
+            <a:spAutoFit/>
+          </a:bodyPr>
+          <a:lstStyle/>
+          <a:p>
+            <a:pPr algn="ctr"/>
+            <a:r>
+              <a:rPr sz="1400" b="1">
+                <a:solidFill>
+                  <a:srgbClr val="FFFFFF"/>
+                </a:solidFill>
+                <a:latin typeface="Arial"/>
+              </a:rPr>
+              <a:t>1</a:t>
+            </a:r>
+          </a:p>
+        </p:txBody>
+      </p:sp>
+      <p:sp>
+        <p:nvSpPr>
+          <p:cNvPr id="12" name="TextBox 11"/>
+          <p:cNvSpPr txBox="1"/>
+          <p:nvPr/>
+        </p:nvSpPr>
+        <p:spPr>
+          <a:xfrm>
+            <a:off x="1536192" y="1965960"/>
+            <a:ext cx="2414016" cy="329184"/>
           </a:xfrm>
           <a:prstGeom prst="rect">
             <a:avLst/>
@@ -8865,15 +8457,1250 @@
           </a:bodyPr>
           <a:lstStyle/>
           <a:p>
-            <a:pPr algn="ctr"/>
-            <a:r>
-              <a:rPr sz="900" b="0">
-                <a:solidFill>
-                  <a:srgbClr val="5B6372"/>
+            <a:pPr algn="l"/>
+            <a:r>
+              <a:rPr sz="1400" b="1">
+                <a:solidFill>
+                  <a:srgbClr val="1F6FEB"/>
                 </a:solidFill>
                 <a:latin typeface="Arial"/>
               </a:rPr>
-              <a:t>Synthetic training assets · prompt and provenance recorded in ASSET-MANIFEST.txt · no data claims embedded</a:t>
+              <a:t>1</a:t>
+            </a:r>
+          </a:p>
+        </p:txBody>
+      </p:sp>
+      <p:sp>
+        <p:nvSpPr>
+          <p:cNvPr id="13" name="TextBox 12"/>
+          <p:cNvSpPr txBox="1"/>
+          <p:nvPr/>
+        </p:nvSpPr>
+        <p:spPr>
+          <a:xfrm>
+            <a:off x="1536192" y="2350008"/>
+            <a:ext cx="2414016" cy="1005839"/>
+          </a:xfrm>
+          <a:prstGeom prst="rect">
+            <a:avLst/>
+          </a:prstGeom>
+          <a:noFill/>
+        </p:spPr>
+        <p:txBody>
+          <a:bodyPr wrap="square" anchor="t">
+            <a:spAutoFit/>
+          </a:bodyPr>
+          <a:lstStyle/>
+          <a:p>
+            <a:pPr algn="l"/>
+            <a:r>
+              <a:rPr sz="1150" b="0">
+                <a:solidFill>
+                  <a:srgbClr val="161B26"/>
+                </a:solidFill>
+                <a:latin typeface="Arial"/>
+              </a:rPr>
+              <a:t>Order confirmed</a:t>
+            </a:r>
+          </a:p>
+        </p:txBody>
+      </p:sp>
+      <p:sp>
+        <p:nvSpPr>
+          <p:cNvPr id="14" name="Rounded Rectangle 13"/>
+          <p:cNvSpPr/>
+          <p:nvPr/>
+        </p:nvSpPr>
+        <p:spPr>
+          <a:xfrm>
+            <a:off x="4315968" y="1783080"/>
+            <a:ext cx="3401568" cy="1719072"/>
+          </a:xfrm>
+          <a:prstGeom prst="roundRect">
+            <a:avLst/>
+          </a:prstGeom>
+          <a:solidFill>
+            <a:srgbClr val="F5F8FC"/>
+          </a:solidFill>
+          <a:ln>
+            <a:solidFill>
+              <a:srgbClr val="E2E8F0"/>
+            </a:solidFill>
+          </a:ln>
+        </p:spPr>
+        <p:style>
+          <a:lnRef idx="1">
+            <a:schemeClr val="accent1"/>
+          </a:lnRef>
+          <a:fillRef idx="3">
+            <a:schemeClr val="accent1"/>
+          </a:fillRef>
+          <a:effectRef idx="2">
+            <a:schemeClr val="accent1"/>
+          </a:effectRef>
+          <a:fontRef idx="minor">
+            <a:schemeClr val="lt1"/>
+          </a:fontRef>
+        </p:style>
+        <p:txBody>
+          <a:bodyPr rtlCol="0" anchor="ctr"/>
+          <a:lstStyle/>
+          <a:p>
+            <a:pPr algn="ctr"/>
+          </a:p>
+        </p:txBody>
+      </p:sp>
+      <p:sp>
+        <p:nvSpPr>
+          <p:cNvPr id="15" name="Rectangle 14"/>
+          <p:cNvSpPr/>
+          <p:nvPr/>
+        </p:nvSpPr>
+        <p:spPr>
+          <a:xfrm>
+            <a:off x="4315968" y="1783080"/>
+            <a:ext cx="73152" cy="1719072"/>
+          </a:xfrm>
+          <a:prstGeom prst="rect">
+            <a:avLst/>
+          </a:prstGeom>
+          <a:solidFill>
+            <a:srgbClr val="10B981"/>
+          </a:solidFill>
+          <a:ln>
+            <a:solidFill>
+              <a:srgbClr val="10B981"/>
+            </a:solidFill>
+          </a:ln>
+        </p:spPr>
+        <p:style>
+          <a:lnRef idx="1">
+            <a:schemeClr val="accent1"/>
+          </a:lnRef>
+          <a:fillRef idx="3">
+            <a:schemeClr val="accent1"/>
+          </a:fillRef>
+          <a:effectRef idx="2">
+            <a:schemeClr val="accent1"/>
+          </a:effectRef>
+          <a:fontRef idx="minor">
+            <a:schemeClr val="lt1"/>
+          </a:fontRef>
+        </p:style>
+        <p:txBody>
+          <a:bodyPr rtlCol="0" anchor="ctr"/>
+          <a:lstStyle/>
+          <a:p>
+            <a:pPr algn="ctr"/>
+          </a:p>
+        </p:txBody>
+      </p:sp>
+      <p:sp>
+        <p:nvSpPr>
+          <p:cNvPr id="16" name="Rounded Rectangle 15"/>
+          <p:cNvSpPr/>
+          <p:nvPr/>
+        </p:nvSpPr>
+        <p:spPr>
+          <a:xfrm>
+            <a:off x="4517136" y="2002536"/>
+            <a:ext cx="438912" cy="438912"/>
+          </a:xfrm>
+          <a:prstGeom prst="roundRect">
+            <a:avLst/>
+          </a:prstGeom>
+          <a:solidFill>
+            <a:srgbClr val="10B981"/>
+          </a:solidFill>
+          <a:ln>
+            <a:solidFill>
+              <a:srgbClr val="10B981"/>
+            </a:solidFill>
+          </a:ln>
+        </p:spPr>
+        <p:style>
+          <a:lnRef idx="1">
+            <a:schemeClr val="accent1"/>
+          </a:lnRef>
+          <a:fillRef idx="3">
+            <a:schemeClr val="accent1"/>
+          </a:fillRef>
+          <a:effectRef idx="2">
+            <a:schemeClr val="accent1"/>
+          </a:effectRef>
+          <a:fontRef idx="minor">
+            <a:schemeClr val="lt1"/>
+          </a:fontRef>
+        </p:style>
+        <p:txBody>
+          <a:bodyPr rtlCol="0" anchor="ctr"/>
+          <a:lstStyle/>
+          <a:p>
+            <a:pPr algn="ctr"/>
+          </a:p>
+        </p:txBody>
+      </p:sp>
+      <p:sp>
+        <p:nvSpPr>
+          <p:cNvPr id="17" name="TextBox 16"/>
+          <p:cNvSpPr txBox="1"/>
+          <p:nvPr/>
+        </p:nvSpPr>
+        <p:spPr>
+          <a:xfrm>
+            <a:off x="4517136" y="2011680"/>
+            <a:ext cx="438912" cy="420624"/>
+          </a:xfrm>
+          <a:prstGeom prst="rect">
+            <a:avLst/>
+          </a:prstGeom>
+          <a:noFill/>
+        </p:spPr>
+        <p:txBody>
+          <a:bodyPr wrap="square" anchor="ctr">
+            <a:spAutoFit/>
+          </a:bodyPr>
+          <a:lstStyle/>
+          <a:p>
+            <a:pPr algn="ctr"/>
+            <a:r>
+              <a:rPr sz="1400" b="1">
+                <a:solidFill>
+                  <a:srgbClr val="FFFFFF"/>
+                </a:solidFill>
+                <a:latin typeface="Arial"/>
+              </a:rPr>
+              <a:t>2</a:t>
+            </a:r>
+          </a:p>
+        </p:txBody>
+      </p:sp>
+      <p:sp>
+        <p:nvSpPr>
+          <p:cNvPr id="18" name="TextBox 17"/>
+          <p:cNvSpPr txBox="1"/>
+          <p:nvPr/>
+        </p:nvSpPr>
+        <p:spPr>
+          <a:xfrm>
+            <a:off x="5120640" y="1965960"/>
+            <a:ext cx="2414016" cy="329184"/>
+          </a:xfrm>
+          <a:prstGeom prst="rect">
+            <a:avLst/>
+          </a:prstGeom>
+          <a:noFill/>
+        </p:spPr>
+        <p:txBody>
+          <a:bodyPr wrap="square" anchor="t">
+            <a:spAutoFit/>
+          </a:bodyPr>
+          <a:lstStyle/>
+          <a:p>
+            <a:pPr algn="l"/>
+            <a:r>
+              <a:rPr sz="1400" b="1">
+                <a:solidFill>
+                  <a:srgbClr val="10B981"/>
+                </a:solidFill>
+                <a:latin typeface="Arial"/>
+              </a:rPr>
+              <a:t>2</a:t>
+            </a:r>
+          </a:p>
+        </p:txBody>
+      </p:sp>
+      <p:sp>
+        <p:nvSpPr>
+          <p:cNvPr id="19" name="TextBox 18"/>
+          <p:cNvSpPr txBox="1"/>
+          <p:nvPr/>
+        </p:nvSpPr>
+        <p:spPr>
+          <a:xfrm>
+            <a:off x="5120640" y="2350008"/>
+            <a:ext cx="2414016" cy="1005839"/>
+          </a:xfrm>
+          <a:prstGeom prst="rect">
+            <a:avLst/>
+          </a:prstGeom>
+          <a:noFill/>
+        </p:spPr>
+        <p:txBody>
+          <a:bodyPr wrap="square" anchor="t">
+            <a:spAutoFit/>
+          </a:bodyPr>
+          <a:lstStyle/>
+          <a:p>
+            <a:pPr algn="l"/>
+            <a:r>
+              <a:rPr sz="1150" b="0">
+                <a:solidFill>
+                  <a:srgbClr val="161B26"/>
+                </a:solidFill>
+                <a:latin typeface="Arial"/>
+              </a:rPr>
+              <a:t>Inventory reserved</a:t>
+            </a:r>
+          </a:p>
+        </p:txBody>
+      </p:sp>
+      <p:sp>
+        <p:nvSpPr>
+          <p:cNvPr id="20" name="Rounded Rectangle 19"/>
+          <p:cNvSpPr/>
+          <p:nvPr/>
+        </p:nvSpPr>
+        <p:spPr>
+          <a:xfrm>
+            <a:off x="7900416" y="1783080"/>
+            <a:ext cx="3401568" cy="1719072"/>
+          </a:xfrm>
+          <a:prstGeom prst="roundRect">
+            <a:avLst/>
+          </a:prstGeom>
+          <a:solidFill>
+            <a:srgbClr val="F5F8FC"/>
+          </a:solidFill>
+          <a:ln>
+            <a:solidFill>
+              <a:srgbClr val="E2E8F0"/>
+            </a:solidFill>
+          </a:ln>
+        </p:spPr>
+        <p:style>
+          <a:lnRef idx="1">
+            <a:schemeClr val="accent1"/>
+          </a:lnRef>
+          <a:fillRef idx="3">
+            <a:schemeClr val="accent1"/>
+          </a:fillRef>
+          <a:effectRef idx="2">
+            <a:schemeClr val="accent1"/>
+          </a:effectRef>
+          <a:fontRef idx="minor">
+            <a:schemeClr val="lt1"/>
+          </a:fontRef>
+        </p:style>
+        <p:txBody>
+          <a:bodyPr rtlCol="0" anchor="ctr"/>
+          <a:lstStyle/>
+          <a:p>
+            <a:pPr algn="ctr"/>
+          </a:p>
+        </p:txBody>
+      </p:sp>
+      <p:sp>
+        <p:nvSpPr>
+          <p:cNvPr id="21" name="Rectangle 20"/>
+          <p:cNvSpPr/>
+          <p:nvPr/>
+        </p:nvSpPr>
+        <p:spPr>
+          <a:xfrm>
+            <a:off x="7900416" y="1783080"/>
+            <a:ext cx="73152" cy="1719072"/>
+          </a:xfrm>
+          <a:prstGeom prst="rect">
+            <a:avLst/>
+          </a:prstGeom>
+          <a:solidFill>
+            <a:srgbClr val="7C3AED"/>
+          </a:solidFill>
+          <a:ln>
+            <a:solidFill>
+              <a:srgbClr val="7C3AED"/>
+            </a:solidFill>
+          </a:ln>
+        </p:spPr>
+        <p:style>
+          <a:lnRef idx="1">
+            <a:schemeClr val="accent1"/>
+          </a:lnRef>
+          <a:fillRef idx="3">
+            <a:schemeClr val="accent1"/>
+          </a:fillRef>
+          <a:effectRef idx="2">
+            <a:schemeClr val="accent1"/>
+          </a:effectRef>
+          <a:fontRef idx="minor">
+            <a:schemeClr val="lt1"/>
+          </a:fontRef>
+        </p:style>
+        <p:txBody>
+          <a:bodyPr rtlCol="0" anchor="ctr"/>
+          <a:lstStyle/>
+          <a:p>
+            <a:pPr algn="ctr"/>
+          </a:p>
+        </p:txBody>
+      </p:sp>
+      <p:sp>
+        <p:nvSpPr>
+          <p:cNvPr id="22" name="Rounded Rectangle 21"/>
+          <p:cNvSpPr/>
+          <p:nvPr/>
+        </p:nvSpPr>
+        <p:spPr>
+          <a:xfrm>
+            <a:off x="8101584" y="2002536"/>
+            <a:ext cx="438912" cy="438912"/>
+          </a:xfrm>
+          <a:prstGeom prst="roundRect">
+            <a:avLst/>
+          </a:prstGeom>
+          <a:solidFill>
+            <a:srgbClr val="7C3AED"/>
+          </a:solidFill>
+          <a:ln>
+            <a:solidFill>
+              <a:srgbClr val="7C3AED"/>
+            </a:solidFill>
+          </a:ln>
+        </p:spPr>
+        <p:style>
+          <a:lnRef idx="1">
+            <a:schemeClr val="accent1"/>
+          </a:lnRef>
+          <a:fillRef idx="3">
+            <a:schemeClr val="accent1"/>
+          </a:fillRef>
+          <a:effectRef idx="2">
+            <a:schemeClr val="accent1"/>
+          </a:effectRef>
+          <a:fontRef idx="minor">
+            <a:schemeClr val="lt1"/>
+          </a:fontRef>
+        </p:style>
+        <p:txBody>
+          <a:bodyPr rtlCol="0" anchor="ctr"/>
+          <a:lstStyle/>
+          <a:p>
+            <a:pPr algn="ctr"/>
+          </a:p>
+        </p:txBody>
+      </p:sp>
+      <p:sp>
+        <p:nvSpPr>
+          <p:cNvPr id="23" name="TextBox 22"/>
+          <p:cNvSpPr txBox="1"/>
+          <p:nvPr/>
+        </p:nvSpPr>
+        <p:spPr>
+          <a:xfrm>
+            <a:off x="8101584" y="2011680"/>
+            <a:ext cx="438912" cy="420624"/>
+          </a:xfrm>
+          <a:prstGeom prst="rect">
+            <a:avLst/>
+          </a:prstGeom>
+          <a:noFill/>
+        </p:spPr>
+        <p:txBody>
+          <a:bodyPr wrap="square" anchor="ctr">
+            <a:spAutoFit/>
+          </a:bodyPr>
+          <a:lstStyle/>
+          <a:p>
+            <a:pPr algn="ctr"/>
+            <a:r>
+              <a:rPr sz="1400" b="1">
+                <a:solidFill>
+                  <a:srgbClr val="FFFFFF"/>
+                </a:solidFill>
+                <a:latin typeface="Arial"/>
+              </a:rPr>
+              <a:t>3</a:t>
+            </a:r>
+          </a:p>
+        </p:txBody>
+      </p:sp>
+      <p:sp>
+        <p:nvSpPr>
+          <p:cNvPr id="24" name="TextBox 23"/>
+          <p:cNvSpPr txBox="1"/>
+          <p:nvPr/>
+        </p:nvSpPr>
+        <p:spPr>
+          <a:xfrm>
+            <a:off x="8705088" y="1965960"/>
+            <a:ext cx="2414016" cy="329184"/>
+          </a:xfrm>
+          <a:prstGeom prst="rect">
+            <a:avLst/>
+          </a:prstGeom>
+          <a:noFill/>
+        </p:spPr>
+        <p:txBody>
+          <a:bodyPr wrap="square" anchor="t">
+            <a:spAutoFit/>
+          </a:bodyPr>
+          <a:lstStyle/>
+          <a:p>
+            <a:pPr algn="l"/>
+            <a:r>
+              <a:rPr sz="1400" b="1">
+                <a:solidFill>
+                  <a:srgbClr val="7C3AED"/>
+                </a:solidFill>
+                <a:latin typeface="Arial"/>
+              </a:rPr>
+              <a:t>3</a:t>
+            </a:r>
+          </a:p>
+        </p:txBody>
+      </p:sp>
+      <p:sp>
+        <p:nvSpPr>
+          <p:cNvPr id="25" name="TextBox 24"/>
+          <p:cNvSpPr txBox="1"/>
+          <p:nvPr/>
+        </p:nvSpPr>
+        <p:spPr>
+          <a:xfrm>
+            <a:off x="8705088" y="2350008"/>
+            <a:ext cx="2414016" cy="1005839"/>
+          </a:xfrm>
+          <a:prstGeom prst="rect">
+            <a:avLst/>
+          </a:prstGeom>
+          <a:noFill/>
+        </p:spPr>
+        <p:txBody>
+          <a:bodyPr wrap="square" anchor="t">
+            <a:spAutoFit/>
+          </a:bodyPr>
+          <a:lstStyle/>
+          <a:p>
+            <a:pPr algn="l"/>
+            <a:r>
+              <a:rPr sz="1150" b="0">
+                <a:solidFill>
+                  <a:srgbClr val="161B26"/>
+                </a:solidFill>
+                <a:latin typeface="Arial"/>
+              </a:rPr>
+              <a:t>Route optimised</a:t>
+            </a:r>
+          </a:p>
+        </p:txBody>
+      </p:sp>
+      <p:sp>
+        <p:nvSpPr>
+          <p:cNvPr id="26" name="Rounded Rectangle 25"/>
+          <p:cNvSpPr/>
+          <p:nvPr/>
+        </p:nvSpPr>
+        <p:spPr>
+          <a:xfrm>
+            <a:off x="731520" y="3776472"/>
+            <a:ext cx="3401568" cy="1719072"/>
+          </a:xfrm>
+          <a:prstGeom prst="roundRect">
+            <a:avLst/>
+          </a:prstGeom>
+          <a:solidFill>
+            <a:srgbClr val="F5F8FC"/>
+          </a:solidFill>
+          <a:ln>
+            <a:solidFill>
+              <a:srgbClr val="E2E8F0"/>
+            </a:solidFill>
+          </a:ln>
+        </p:spPr>
+        <p:style>
+          <a:lnRef idx="1">
+            <a:schemeClr val="accent1"/>
+          </a:lnRef>
+          <a:fillRef idx="3">
+            <a:schemeClr val="accent1"/>
+          </a:fillRef>
+          <a:effectRef idx="2">
+            <a:schemeClr val="accent1"/>
+          </a:effectRef>
+          <a:fontRef idx="minor">
+            <a:schemeClr val="lt1"/>
+          </a:fontRef>
+        </p:style>
+        <p:txBody>
+          <a:bodyPr rtlCol="0" anchor="ctr"/>
+          <a:lstStyle/>
+          <a:p>
+            <a:pPr algn="ctr"/>
+          </a:p>
+        </p:txBody>
+      </p:sp>
+      <p:sp>
+        <p:nvSpPr>
+          <p:cNvPr id="27" name="Rectangle 26"/>
+          <p:cNvSpPr/>
+          <p:nvPr/>
+        </p:nvSpPr>
+        <p:spPr>
+          <a:xfrm>
+            <a:off x="731520" y="3776472"/>
+            <a:ext cx="73152" cy="1719072"/>
+          </a:xfrm>
+          <a:prstGeom prst="rect">
+            <a:avLst/>
+          </a:prstGeom>
+          <a:solidFill>
+            <a:srgbClr val="F59E0B"/>
+          </a:solidFill>
+          <a:ln>
+            <a:solidFill>
+              <a:srgbClr val="F59E0B"/>
+            </a:solidFill>
+          </a:ln>
+        </p:spPr>
+        <p:style>
+          <a:lnRef idx="1">
+            <a:schemeClr val="accent1"/>
+          </a:lnRef>
+          <a:fillRef idx="3">
+            <a:schemeClr val="accent1"/>
+          </a:fillRef>
+          <a:effectRef idx="2">
+            <a:schemeClr val="accent1"/>
+          </a:effectRef>
+          <a:fontRef idx="minor">
+            <a:schemeClr val="lt1"/>
+          </a:fontRef>
+        </p:style>
+        <p:txBody>
+          <a:bodyPr rtlCol="0" anchor="ctr"/>
+          <a:lstStyle/>
+          <a:p>
+            <a:pPr algn="ctr"/>
+          </a:p>
+        </p:txBody>
+      </p:sp>
+      <p:sp>
+        <p:nvSpPr>
+          <p:cNvPr id="28" name="Rounded Rectangle 27"/>
+          <p:cNvSpPr/>
+          <p:nvPr/>
+        </p:nvSpPr>
+        <p:spPr>
+          <a:xfrm>
+            <a:off x="932688" y="3995928"/>
+            <a:ext cx="438912" cy="438912"/>
+          </a:xfrm>
+          <a:prstGeom prst="roundRect">
+            <a:avLst/>
+          </a:prstGeom>
+          <a:solidFill>
+            <a:srgbClr val="F59E0B"/>
+          </a:solidFill>
+          <a:ln>
+            <a:solidFill>
+              <a:srgbClr val="F59E0B"/>
+            </a:solidFill>
+          </a:ln>
+        </p:spPr>
+        <p:style>
+          <a:lnRef idx="1">
+            <a:schemeClr val="accent1"/>
+          </a:lnRef>
+          <a:fillRef idx="3">
+            <a:schemeClr val="accent1"/>
+          </a:fillRef>
+          <a:effectRef idx="2">
+            <a:schemeClr val="accent1"/>
+          </a:effectRef>
+          <a:fontRef idx="minor">
+            <a:schemeClr val="lt1"/>
+          </a:fontRef>
+        </p:style>
+        <p:txBody>
+          <a:bodyPr rtlCol="0" anchor="ctr"/>
+          <a:lstStyle/>
+          <a:p>
+            <a:pPr algn="ctr"/>
+          </a:p>
+        </p:txBody>
+      </p:sp>
+      <p:sp>
+        <p:nvSpPr>
+          <p:cNvPr id="29" name="TextBox 28"/>
+          <p:cNvSpPr txBox="1"/>
+          <p:nvPr/>
+        </p:nvSpPr>
+        <p:spPr>
+          <a:xfrm>
+            <a:off x="932688" y="4005072"/>
+            <a:ext cx="438912" cy="420624"/>
+          </a:xfrm>
+          <a:prstGeom prst="rect">
+            <a:avLst/>
+          </a:prstGeom>
+          <a:noFill/>
+        </p:spPr>
+        <p:txBody>
+          <a:bodyPr wrap="square" anchor="ctr">
+            <a:spAutoFit/>
+          </a:bodyPr>
+          <a:lstStyle/>
+          <a:p>
+            <a:pPr algn="ctr"/>
+            <a:r>
+              <a:rPr sz="1400" b="1">
+                <a:solidFill>
+                  <a:srgbClr val="FFFFFF"/>
+                </a:solidFill>
+                <a:latin typeface="Arial"/>
+              </a:rPr>
+              <a:t>4</a:t>
+            </a:r>
+          </a:p>
+        </p:txBody>
+      </p:sp>
+      <p:sp>
+        <p:nvSpPr>
+          <p:cNvPr id="30" name="TextBox 29"/>
+          <p:cNvSpPr txBox="1"/>
+          <p:nvPr/>
+        </p:nvSpPr>
+        <p:spPr>
+          <a:xfrm>
+            <a:off x="1536192" y="3959352"/>
+            <a:ext cx="2414016" cy="329184"/>
+          </a:xfrm>
+          <a:prstGeom prst="rect">
+            <a:avLst/>
+          </a:prstGeom>
+          <a:noFill/>
+        </p:spPr>
+        <p:txBody>
+          <a:bodyPr wrap="square" anchor="t">
+            <a:spAutoFit/>
+          </a:bodyPr>
+          <a:lstStyle/>
+          <a:p>
+            <a:pPr algn="l"/>
+            <a:r>
+              <a:rPr sz="1400" b="1">
+                <a:solidFill>
+                  <a:srgbClr val="F59E0B"/>
+                </a:solidFill>
+                <a:latin typeface="Arial"/>
+              </a:rPr>
+              <a:t>4</a:t>
+            </a:r>
+          </a:p>
+        </p:txBody>
+      </p:sp>
+      <p:sp>
+        <p:nvSpPr>
+          <p:cNvPr id="31" name="TextBox 30"/>
+          <p:cNvSpPr txBox="1"/>
+          <p:nvPr/>
+        </p:nvSpPr>
+        <p:spPr>
+          <a:xfrm>
+            <a:off x="1536192" y="4343400"/>
+            <a:ext cx="2414016" cy="1005839"/>
+          </a:xfrm>
+          <a:prstGeom prst="rect">
+            <a:avLst/>
+          </a:prstGeom>
+          <a:noFill/>
+        </p:spPr>
+        <p:txBody>
+          <a:bodyPr wrap="square" anchor="t">
+            <a:spAutoFit/>
+          </a:bodyPr>
+          <a:lstStyle/>
+          <a:p>
+            <a:pPr algn="l"/>
+            <a:r>
+              <a:rPr sz="1150" b="0">
+                <a:solidFill>
+                  <a:srgbClr val="161B26"/>
+                </a:solidFill>
+                <a:latin typeface="Arial"/>
+              </a:rPr>
+              <a:t>Low-emission delivery</a:t>
+            </a:r>
+          </a:p>
+        </p:txBody>
+      </p:sp>
+      <p:sp>
+        <p:nvSpPr>
+          <p:cNvPr id="32" name="Rounded Rectangle 31"/>
+          <p:cNvSpPr/>
+          <p:nvPr/>
+        </p:nvSpPr>
+        <p:spPr>
+          <a:xfrm>
+            <a:off x="4315968" y="3776472"/>
+            <a:ext cx="3401568" cy="1719072"/>
+          </a:xfrm>
+          <a:prstGeom prst="roundRect">
+            <a:avLst/>
+          </a:prstGeom>
+          <a:solidFill>
+            <a:srgbClr val="F5F8FC"/>
+          </a:solidFill>
+          <a:ln>
+            <a:solidFill>
+              <a:srgbClr val="E2E8F0"/>
+            </a:solidFill>
+          </a:ln>
+        </p:spPr>
+        <p:style>
+          <a:lnRef idx="1">
+            <a:schemeClr val="accent1"/>
+          </a:lnRef>
+          <a:fillRef idx="3">
+            <a:schemeClr val="accent1"/>
+          </a:fillRef>
+          <a:effectRef idx="2">
+            <a:schemeClr val="accent1"/>
+          </a:effectRef>
+          <a:fontRef idx="minor">
+            <a:schemeClr val="lt1"/>
+          </a:fontRef>
+        </p:style>
+        <p:txBody>
+          <a:bodyPr rtlCol="0" anchor="ctr"/>
+          <a:lstStyle/>
+          <a:p>
+            <a:pPr algn="ctr"/>
+          </a:p>
+        </p:txBody>
+      </p:sp>
+      <p:sp>
+        <p:nvSpPr>
+          <p:cNvPr id="33" name="Rectangle 32"/>
+          <p:cNvSpPr/>
+          <p:nvPr/>
+        </p:nvSpPr>
+        <p:spPr>
+          <a:xfrm>
+            <a:off x="4315968" y="3776472"/>
+            <a:ext cx="73152" cy="1719072"/>
+          </a:xfrm>
+          <a:prstGeom prst="rect">
+            <a:avLst/>
+          </a:prstGeom>
+          <a:solidFill>
+            <a:srgbClr val="1F6FEB"/>
+          </a:solidFill>
+          <a:ln>
+            <a:solidFill>
+              <a:srgbClr val="1F6FEB"/>
+            </a:solidFill>
+          </a:ln>
+        </p:spPr>
+        <p:style>
+          <a:lnRef idx="1">
+            <a:schemeClr val="accent1"/>
+          </a:lnRef>
+          <a:fillRef idx="3">
+            <a:schemeClr val="accent1"/>
+          </a:fillRef>
+          <a:effectRef idx="2">
+            <a:schemeClr val="accent1"/>
+          </a:effectRef>
+          <a:fontRef idx="minor">
+            <a:schemeClr val="lt1"/>
+          </a:fontRef>
+        </p:style>
+        <p:txBody>
+          <a:bodyPr rtlCol="0" anchor="ctr"/>
+          <a:lstStyle/>
+          <a:p>
+            <a:pPr algn="ctr"/>
+          </a:p>
+        </p:txBody>
+      </p:sp>
+      <p:sp>
+        <p:nvSpPr>
+          <p:cNvPr id="34" name="Rounded Rectangle 33"/>
+          <p:cNvSpPr/>
+          <p:nvPr/>
+        </p:nvSpPr>
+        <p:spPr>
+          <a:xfrm>
+            <a:off x="4517136" y="3995928"/>
+            <a:ext cx="438912" cy="438912"/>
+          </a:xfrm>
+          <a:prstGeom prst="roundRect">
+            <a:avLst/>
+          </a:prstGeom>
+          <a:solidFill>
+            <a:srgbClr val="1F6FEB"/>
+          </a:solidFill>
+          <a:ln>
+            <a:solidFill>
+              <a:srgbClr val="1F6FEB"/>
+            </a:solidFill>
+          </a:ln>
+        </p:spPr>
+        <p:style>
+          <a:lnRef idx="1">
+            <a:schemeClr val="accent1"/>
+          </a:lnRef>
+          <a:fillRef idx="3">
+            <a:schemeClr val="accent1"/>
+          </a:fillRef>
+          <a:effectRef idx="2">
+            <a:schemeClr val="accent1"/>
+          </a:effectRef>
+          <a:fontRef idx="minor">
+            <a:schemeClr val="lt1"/>
+          </a:fontRef>
+        </p:style>
+        <p:txBody>
+          <a:bodyPr rtlCol="0" anchor="ctr"/>
+          <a:lstStyle/>
+          <a:p>
+            <a:pPr algn="ctr"/>
+          </a:p>
+        </p:txBody>
+      </p:sp>
+      <p:sp>
+        <p:nvSpPr>
+          <p:cNvPr id="35" name="TextBox 34"/>
+          <p:cNvSpPr txBox="1"/>
+          <p:nvPr/>
+        </p:nvSpPr>
+        <p:spPr>
+          <a:xfrm>
+            <a:off x="4517136" y="4005072"/>
+            <a:ext cx="438912" cy="420624"/>
+          </a:xfrm>
+          <a:prstGeom prst="rect">
+            <a:avLst/>
+          </a:prstGeom>
+          <a:noFill/>
+        </p:spPr>
+        <p:txBody>
+          <a:bodyPr wrap="square" anchor="ctr">
+            <a:spAutoFit/>
+          </a:bodyPr>
+          <a:lstStyle/>
+          <a:p>
+            <a:pPr algn="ctr"/>
+            <a:r>
+              <a:rPr sz="1400" b="1">
+                <a:solidFill>
+                  <a:srgbClr val="FFFFFF"/>
+                </a:solidFill>
+                <a:latin typeface="Arial"/>
+              </a:rPr>
+              <a:t>5</a:t>
+            </a:r>
+          </a:p>
+        </p:txBody>
+      </p:sp>
+      <p:sp>
+        <p:nvSpPr>
+          <p:cNvPr id="36" name="TextBox 35"/>
+          <p:cNvSpPr txBox="1"/>
+          <p:nvPr/>
+        </p:nvSpPr>
+        <p:spPr>
+          <a:xfrm>
+            <a:off x="5120640" y="3959352"/>
+            <a:ext cx="2414016" cy="329184"/>
+          </a:xfrm>
+          <a:prstGeom prst="rect">
+            <a:avLst/>
+          </a:prstGeom>
+          <a:noFill/>
+        </p:spPr>
+        <p:txBody>
+          <a:bodyPr wrap="square" anchor="t">
+            <a:spAutoFit/>
+          </a:bodyPr>
+          <a:lstStyle/>
+          <a:p>
+            <a:pPr algn="l"/>
+            <a:r>
+              <a:rPr sz="1400" b="1">
+                <a:solidFill>
+                  <a:srgbClr val="1F6FEB"/>
+                </a:solidFill>
+                <a:latin typeface="Arial"/>
+              </a:rPr>
+              <a:t>5</a:t>
+            </a:r>
+          </a:p>
+        </p:txBody>
+      </p:sp>
+      <p:sp>
+        <p:nvSpPr>
+          <p:cNvPr id="37" name="TextBox 36"/>
+          <p:cNvSpPr txBox="1"/>
+          <p:nvPr/>
+        </p:nvSpPr>
+        <p:spPr>
+          <a:xfrm>
+            <a:off x="5120640" y="4343400"/>
+            <a:ext cx="2414016" cy="1005839"/>
+          </a:xfrm>
+          <a:prstGeom prst="rect">
+            <a:avLst/>
+          </a:prstGeom>
+          <a:noFill/>
+        </p:spPr>
+        <p:txBody>
+          <a:bodyPr wrap="square" anchor="t">
+            <a:spAutoFit/>
+          </a:bodyPr>
+          <a:lstStyle/>
+          <a:p>
+            <a:pPr algn="l"/>
+            <a:r>
+              <a:rPr sz="1150" b="0">
+                <a:solidFill>
+                  <a:srgbClr val="161B26"/>
+                </a:solidFill>
+                <a:latin typeface="Arial"/>
+              </a:rPr>
+              <a:t>Customer feedback</a:t>
+            </a:r>
+          </a:p>
+        </p:txBody>
+      </p:sp>
+      <p:sp>
+        <p:nvSpPr>
+          <p:cNvPr id="38" name="Rounded Rectangle 37"/>
+          <p:cNvSpPr/>
+          <p:nvPr/>
+        </p:nvSpPr>
+        <p:spPr>
+          <a:xfrm>
+            <a:off x="7900416" y="3776472"/>
+            <a:ext cx="3401568" cy="1719072"/>
+          </a:xfrm>
+          <a:prstGeom prst="roundRect">
+            <a:avLst/>
+          </a:prstGeom>
+          <a:solidFill>
+            <a:srgbClr val="F5F8FC"/>
+          </a:solidFill>
+          <a:ln>
+            <a:solidFill>
+              <a:srgbClr val="E2E8F0"/>
+            </a:solidFill>
+          </a:ln>
+        </p:spPr>
+        <p:style>
+          <a:lnRef idx="1">
+            <a:schemeClr val="accent1"/>
+          </a:lnRef>
+          <a:fillRef idx="3">
+            <a:schemeClr val="accent1"/>
+          </a:fillRef>
+          <a:effectRef idx="2">
+            <a:schemeClr val="accent1"/>
+          </a:effectRef>
+          <a:fontRef idx="minor">
+            <a:schemeClr val="lt1"/>
+          </a:fontRef>
+        </p:style>
+        <p:txBody>
+          <a:bodyPr rtlCol="0" anchor="ctr"/>
+          <a:lstStyle/>
+          <a:p>
+            <a:pPr algn="ctr"/>
+          </a:p>
+        </p:txBody>
+      </p:sp>
+      <p:sp>
+        <p:nvSpPr>
+          <p:cNvPr id="39" name="Rectangle 38"/>
+          <p:cNvSpPr/>
+          <p:nvPr/>
+        </p:nvSpPr>
+        <p:spPr>
+          <a:xfrm>
+            <a:off x="7900416" y="3776472"/>
+            <a:ext cx="73152" cy="1719072"/>
+          </a:xfrm>
+          <a:prstGeom prst="rect">
+            <a:avLst/>
+          </a:prstGeom>
+          <a:solidFill>
+            <a:srgbClr val="10B981"/>
+          </a:solidFill>
+          <a:ln>
+            <a:solidFill>
+              <a:srgbClr val="10B981"/>
+            </a:solidFill>
+          </a:ln>
+        </p:spPr>
+        <p:style>
+          <a:lnRef idx="1">
+            <a:schemeClr val="accent1"/>
+          </a:lnRef>
+          <a:fillRef idx="3">
+            <a:schemeClr val="accent1"/>
+          </a:fillRef>
+          <a:effectRef idx="2">
+            <a:schemeClr val="accent1"/>
+          </a:effectRef>
+          <a:fontRef idx="minor">
+            <a:schemeClr val="lt1"/>
+          </a:fontRef>
+        </p:style>
+        <p:txBody>
+          <a:bodyPr rtlCol="0" anchor="ctr"/>
+          <a:lstStyle/>
+          <a:p>
+            <a:pPr algn="ctr"/>
+          </a:p>
+        </p:txBody>
+      </p:sp>
+      <p:sp>
+        <p:nvSpPr>
+          <p:cNvPr id="40" name="Rounded Rectangle 39"/>
+          <p:cNvSpPr/>
+          <p:nvPr/>
+        </p:nvSpPr>
+        <p:spPr>
+          <a:xfrm>
+            <a:off x="8101584" y="3995928"/>
+            <a:ext cx="438912" cy="438912"/>
+          </a:xfrm>
+          <a:prstGeom prst="roundRect">
+            <a:avLst/>
+          </a:prstGeom>
+          <a:solidFill>
+            <a:srgbClr val="10B981"/>
+          </a:solidFill>
+          <a:ln>
+            <a:solidFill>
+              <a:srgbClr val="10B981"/>
+            </a:solidFill>
+          </a:ln>
+        </p:spPr>
+        <p:style>
+          <a:lnRef idx="1">
+            <a:schemeClr val="accent1"/>
+          </a:lnRef>
+          <a:fillRef idx="3">
+            <a:schemeClr val="accent1"/>
+          </a:fillRef>
+          <a:effectRef idx="2">
+            <a:schemeClr val="accent1"/>
+          </a:effectRef>
+          <a:fontRef idx="minor">
+            <a:schemeClr val="lt1"/>
+          </a:fontRef>
+        </p:style>
+        <p:txBody>
+          <a:bodyPr rtlCol="0" anchor="ctr"/>
+          <a:lstStyle/>
+          <a:p>
+            <a:pPr algn="ctr"/>
+          </a:p>
+        </p:txBody>
+      </p:sp>
+      <p:sp>
+        <p:nvSpPr>
+          <p:cNvPr id="41" name="TextBox 40"/>
+          <p:cNvSpPr txBox="1"/>
+          <p:nvPr/>
+        </p:nvSpPr>
+        <p:spPr>
+          <a:xfrm>
+            <a:off x="8101584" y="4005072"/>
+            <a:ext cx="438912" cy="420624"/>
+          </a:xfrm>
+          <a:prstGeom prst="rect">
+            <a:avLst/>
+          </a:prstGeom>
+          <a:noFill/>
+        </p:spPr>
+        <p:txBody>
+          <a:bodyPr wrap="square" anchor="ctr">
+            <a:spAutoFit/>
+          </a:bodyPr>
+          <a:lstStyle/>
+          <a:p>
+            <a:pPr algn="ctr"/>
+            <a:r>
+              <a:rPr sz="1400" b="1">
+                <a:solidFill>
+                  <a:srgbClr val="FFFFFF"/>
+                </a:solidFill>
+                <a:latin typeface="Arial"/>
+              </a:rPr>
+              <a:t>6</a:t>
+            </a:r>
+          </a:p>
+        </p:txBody>
+      </p:sp>
+      <p:sp>
+        <p:nvSpPr>
+          <p:cNvPr id="42" name="TextBox 41"/>
+          <p:cNvSpPr txBox="1"/>
+          <p:nvPr/>
+        </p:nvSpPr>
+        <p:spPr>
+          <a:xfrm>
+            <a:off x="8705088" y="3959352"/>
+            <a:ext cx="2414016" cy="329184"/>
+          </a:xfrm>
+          <a:prstGeom prst="rect">
+            <a:avLst/>
+          </a:prstGeom>
+          <a:noFill/>
+        </p:spPr>
+        <p:txBody>
+          <a:bodyPr wrap="square" anchor="t">
+            <a:spAutoFit/>
+          </a:bodyPr>
+          <a:lstStyle/>
+          <a:p>
+            <a:pPr algn="l"/>
+            <a:r>
+              <a:rPr sz="1400" b="1">
+                <a:solidFill>
+                  <a:srgbClr val="10B981"/>
+                </a:solidFill>
+                <a:latin typeface="Arial"/>
+              </a:rPr>
+              <a:t>Rule</a:t>
+            </a:r>
+          </a:p>
+        </p:txBody>
+      </p:sp>
+      <p:sp>
+        <p:nvSpPr>
+          <p:cNvPr id="43" name="TextBox 42"/>
+          <p:cNvSpPr txBox="1"/>
+          <p:nvPr/>
+        </p:nvSpPr>
+        <p:spPr>
+          <a:xfrm>
+            <a:off x="8705088" y="4343400"/>
+            <a:ext cx="2414016" cy="1005839"/>
+          </a:xfrm>
+          <a:prstGeom prst="rect">
+            <a:avLst/>
+          </a:prstGeom>
+          <a:noFill/>
+        </p:spPr>
+        <p:txBody>
+          <a:bodyPr wrap="square" anchor="t">
+            <a:spAutoFit/>
+          </a:bodyPr>
+          <a:lstStyle/>
+          <a:p>
+            <a:pPr algn="l"/>
+            <a:r>
+              <a:rPr sz="1150" b="0">
+                <a:solidFill>
+                  <a:srgbClr val="161B26"/>
+                </a:solidFill>
+                <a:latin typeface="Arial"/>
+              </a:rPr>
+              <a:t>One stage, one verb, one icon</a:t>
             </a:r>
           </a:p>
         </p:txBody>
@@ -8956,11 +9783,11 @@
             <a:avLst/>
           </a:prstGeom>
           <a:solidFill>
-            <a:srgbClr val="1F6FEB"/>
+            <a:srgbClr val="10B981"/>
           </a:solidFill>
           <a:ln>
             <a:solidFill>
-              <a:srgbClr val="1F6FEB"/>
+              <a:srgbClr val="10B981"/>
             </a:solidFill>
           </a:ln>
         </p:spPr>
@@ -9012,11 +9839,11 @@
             <a:r>
               <a:rPr sz="1100" b="1">
                 <a:solidFill>
-                  <a:srgbClr val="1F6FEB"/>
+                  <a:srgbClr val="10B981"/>
                 </a:solidFill>
                 <a:latin typeface="Arial"/>
               </a:rPr>
-              <a:t>ACTIVITY 04 · ACCEPTANCE</a:t>
+              <a:t>ACTIVITY 04 · SYNTHETIC VISUAL ASSETS</a:t>
             </a:r>
           </a:p>
         </p:txBody>
@@ -9051,7 +9878,7 @@
                 </a:solidFill>
                 <a:latin typeface="Arial"/>
               </a:rPr>
-              <a:t>What Good Looks Like</a:t>
+              <a:t>AI-Generated Practice Asset Sheet</a:t>
             </a:r>
           </a:p>
         </p:txBody>
@@ -9136,18 +9963,140 @@
           </a:p>
         </p:txBody>
       </p:sp>
-      <p:sp>
-        <p:nvSpPr>
-          <p:cNvPr id="8" name="Rounded Rectangle 7"/>
+      <p:pic>
+        <p:nvPicPr>
+          <p:cNvPr id="8" name="Picture 7" descr="AI-Generated-Sustainability-Asset-Sheet-v1.png"/>
+          <p:cNvPicPr>
+            <a:picLocks noChangeAspect="1"/>
+          </p:cNvPicPr>
+          <p:nvPr/>
+        </p:nvPicPr>
+        <p:blipFill>
+          <a:blip r:embed="rId2"/>
+          <a:stretch>
+            <a:fillRect/>
+          </a:stretch>
+        </p:blipFill>
+        <p:spPr>
+          <a:xfrm>
+            <a:off x="3840480" y="1572768"/>
+            <a:ext cx="4480560" cy="4480560"/>
+          </a:xfrm>
+          <a:prstGeom prst="rect">
+            <a:avLst/>
+          </a:prstGeom>
+        </p:spPr>
+      </p:pic>
+      <p:sp>
+        <p:nvSpPr>
+          <p:cNvPr id="9" name="TextBox 8"/>
+          <p:cNvSpPr txBox="1"/>
+          <p:nvPr/>
+        </p:nvSpPr>
+        <p:spPr>
+          <a:xfrm>
+            <a:off x="777240" y="6108192"/>
+            <a:ext cx="10698480" cy="237744"/>
+          </a:xfrm>
+          <a:prstGeom prst="rect">
+            <a:avLst/>
+          </a:prstGeom>
+          <a:noFill/>
+        </p:spPr>
+        <p:txBody>
+          <a:bodyPr wrap="square" anchor="t">
+            <a:spAutoFit/>
+          </a:bodyPr>
+          <a:lstStyle/>
+          <a:p>
+            <a:pPr algn="ctr"/>
+            <a:r>
+              <a:rPr sz="900" b="0">
+                <a:solidFill>
+                  <a:srgbClr val="5B6372"/>
+                </a:solidFill>
+                <a:latin typeface="Arial"/>
+              </a:rPr>
+              <a:t>Synthetic training assets · prompt and provenance recorded in ASSET-MANIFEST.txt · no data claims embedded</a:t>
+            </a:r>
+          </a:p>
+        </p:txBody>
+      </p:sp>
+    </p:spTree>
+  </p:cSld>
+  <p:clrMapOvr>
+    <a:masterClrMapping/>
+  </p:clrMapOvr>
+</p:sld>
+</file>
+
+<file path=ppt/slides/slide8.xml><?xml version="1.0" encoding="utf-8"?>
+<p:sld xmlns:a="http://schemas.openxmlformats.org/drawingml/2006/main" xmlns:p="http://schemas.openxmlformats.org/presentationml/2006/main" xmlns:r="http://schemas.openxmlformats.org/officeDocument/2006/relationships">
+  <p:cSld>
+    <p:spTree>
+      <p:nvGrpSpPr>
+        <p:cNvPr id="1" name=""/>
+        <p:cNvGrpSpPr/>
+        <p:nvPr/>
+      </p:nvGrpSpPr>
+      <p:grpSpPr/>
+      <p:sp>
+        <p:nvSpPr>
+          <p:cNvPr id="2" name="Rectangle 1"/>
           <p:cNvSpPr/>
           <p:nvPr/>
         </p:nvSpPr>
         <p:spPr>
           <a:xfrm>
-            <a:off x="749808" y="1810512"/>
-            <a:ext cx="10652760" cy="1005840"/>
-          </a:xfrm>
-          <a:prstGeom prst="roundRect">
+            <a:off x="0" y="0"/>
+            <a:ext cx="12191695" cy="6858000"/>
+          </a:xfrm>
+          <a:prstGeom prst="rect">
+            <a:avLst/>
+          </a:prstGeom>
+          <a:solidFill>
+            <a:srgbClr val="FFFFFF"/>
+          </a:solidFill>
+          <a:ln>
+            <a:solidFill>
+              <a:srgbClr val="FFFFFF"/>
+            </a:solidFill>
+          </a:ln>
+        </p:spPr>
+        <p:style>
+          <a:lnRef idx="1">
+            <a:schemeClr val="accent1"/>
+          </a:lnRef>
+          <a:fillRef idx="3">
+            <a:schemeClr val="accent1"/>
+          </a:fillRef>
+          <a:effectRef idx="2">
+            <a:schemeClr val="accent1"/>
+          </a:effectRef>
+          <a:fontRef idx="minor">
+            <a:schemeClr val="lt1"/>
+          </a:fontRef>
+        </p:style>
+        <p:txBody>
+          <a:bodyPr rtlCol="0" anchor="ctr"/>
+          <a:lstStyle/>
+          <a:p>
+            <a:pPr algn="ctr"/>
+          </a:p>
+        </p:txBody>
+      </p:sp>
+      <p:sp>
+        <p:nvSpPr>
+          <p:cNvPr id="3" name="Rectangle 2"/>
+          <p:cNvSpPr/>
+          <p:nvPr/>
+        </p:nvSpPr>
+        <p:spPr>
+          <a:xfrm>
+            <a:off x="0" y="0"/>
+            <a:ext cx="164592" cy="6858000"/>
+          </a:xfrm>
+          <a:prstGeom prst="rect">
             <a:avLst/>
           </a:prstGeom>
           <a:solidFill>
@@ -9183,6 +10132,201 @@
       </p:sp>
       <p:sp>
         <p:nvSpPr>
+          <p:cNvPr id="4" name="TextBox 3"/>
+          <p:cNvSpPr txBox="1"/>
+          <p:nvPr/>
+        </p:nvSpPr>
+        <p:spPr>
+          <a:xfrm>
+            <a:off x="658368" y="384048"/>
+            <a:ext cx="10789920" cy="320040"/>
+          </a:xfrm>
+          <a:prstGeom prst="rect">
+            <a:avLst/>
+          </a:prstGeom>
+          <a:noFill/>
+        </p:spPr>
+        <p:txBody>
+          <a:bodyPr wrap="square" anchor="t">
+            <a:spAutoFit/>
+          </a:bodyPr>
+          <a:lstStyle/>
+          <a:p>
+            <a:pPr algn="l"/>
+            <a:r>
+              <a:rPr sz="1100" b="1">
+                <a:solidFill>
+                  <a:srgbClr val="1F6FEB"/>
+                </a:solidFill>
+                <a:latin typeface="Arial"/>
+              </a:rPr>
+              <a:t>ACTIVITY 04 · ACCEPTANCE</a:t>
+            </a:r>
+          </a:p>
+        </p:txBody>
+      </p:sp>
+      <p:sp>
+        <p:nvSpPr>
+          <p:cNvPr id="5" name="TextBox 4"/>
+          <p:cNvSpPr txBox="1"/>
+          <p:nvPr/>
+        </p:nvSpPr>
+        <p:spPr>
+          <a:xfrm>
+            <a:off x="658368" y="749808"/>
+            <a:ext cx="10789920" cy="658368"/>
+          </a:xfrm>
+          <a:prstGeom prst="rect">
+            <a:avLst/>
+          </a:prstGeom>
+          <a:noFill/>
+        </p:spPr>
+        <p:txBody>
+          <a:bodyPr wrap="square" anchor="t">
+            <a:spAutoFit/>
+          </a:bodyPr>
+          <a:lstStyle/>
+          <a:p>
+            <a:pPr algn="l"/>
+            <a:r>
+              <a:rPr sz="2700" b="1">
+                <a:solidFill>
+                  <a:srgbClr val="161B26"/>
+                </a:solidFill>
+                <a:latin typeface="Arial"/>
+              </a:rPr>
+              <a:t>What Good Looks Like</a:t>
+            </a:r>
+          </a:p>
+        </p:txBody>
+      </p:sp>
+      <p:sp>
+        <p:nvSpPr>
+          <p:cNvPr id="6" name="Rectangle 5"/>
+          <p:cNvSpPr/>
+          <p:nvPr/>
+        </p:nvSpPr>
+        <p:spPr>
+          <a:xfrm>
+            <a:off x="658368" y="1444752"/>
+            <a:ext cx="10881360" cy="18288"/>
+          </a:xfrm>
+          <a:prstGeom prst="rect">
+            <a:avLst/>
+          </a:prstGeom>
+          <a:solidFill>
+            <a:srgbClr val="E2E8F0"/>
+          </a:solidFill>
+          <a:ln>
+            <a:solidFill>
+              <a:srgbClr val="E2E8F0"/>
+            </a:solidFill>
+          </a:ln>
+        </p:spPr>
+        <p:style>
+          <a:lnRef idx="1">
+            <a:schemeClr val="accent1"/>
+          </a:lnRef>
+          <a:fillRef idx="3">
+            <a:schemeClr val="accent1"/>
+          </a:fillRef>
+          <a:effectRef idx="2">
+            <a:schemeClr val="accent1"/>
+          </a:effectRef>
+          <a:fontRef idx="minor">
+            <a:schemeClr val="lt1"/>
+          </a:fontRef>
+        </p:style>
+        <p:txBody>
+          <a:bodyPr rtlCol="0" anchor="ctr"/>
+          <a:lstStyle/>
+          <a:p>
+            <a:pPr algn="ctr"/>
+          </a:p>
+        </p:txBody>
+      </p:sp>
+      <p:sp>
+        <p:nvSpPr>
+          <p:cNvPr id="7" name="TextBox 6"/>
+          <p:cNvSpPr txBox="1"/>
+          <p:nvPr/>
+        </p:nvSpPr>
+        <p:spPr>
+          <a:xfrm>
+            <a:off x="658368" y="6473952"/>
+            <a:ext cx="9875520" cy="201168"/>
+          </a:xfrm>
+          <a:prstGeom prst="rect">
+            <a:avLst/>
+          </a:prstGeom>
+          <a:noFill/>
+        </p:spPr>
+        <p:txBody>
+          <a:bodyPr wrap="square" anchor="t">
+            <a:spAutoFit/>
+          </a:bodyPr>
+          <a:lstStyle/>
+          <a:p>
+            <a:pPr algn="l"/>
+            <a:r>
+              <a:rPr sz="800" b="0">
+                <a:solidFill>
+                  <a:srgbClr val="5B6372"/>
+                </a:solidFill>
+                <a:latin typeface="Arial"/>
+              </a:rPr>
+              <a:t>TGS-2026064178 · ACTIVITY PRACTICE · Tertiary Infotech Academy Pte Ltd</a:t>
+            </a:r>
+          </a:p>
+        </p:txBody>
+      </p:sp>
+      <p:sp>
+        <p:nvSpPr>
+          <p:cNvPr id="8" name="Rounded Rectangle 7"/>
+          <p:cNvSpPr/>
+          <p:nvPr/>
+        </p:nvSpPr>
+        <p:spPr>
+          <a:xfrm>
+            <a:off x="749808" y="1810512"/>
+            <a:ext cx="10652760" cy="1005840"/>
+          </a:xfrm>
+          <a:prstGeom prst="roundRect">
+            <a:avLst/>
+          </a:prstGeom>
+          <a:solidFill>
+            <a:srgbClr val="1F6FEB"/>
+          </a:solidFill>
+          <a:ln>
+            <a:solidFill>
+              <a:srgbClr val="1F6FEB"/>
+            </a:solidFill>
+          </a:ln>
+        </p:spPr>
+        <p:style>
+          <a:lnRef idx="1">
+            <a:schemeClr val="accent1"/>
+          </a:lnRef>
+          <a:fillRef idx="3">
+            <a:schemeClr val="accent1"/>
+          </a:fillRef>
+          <a:effectRef idx="2">
+            <a:schemeClr val="accent1"/>
+          </a:effectRef>
+          <a:fontRef idx="minor">
+            <a:schemeClr val="lt1"/>
+          </a:fontRef>
+        </p:style>
+        <p:txBody>
+          <a:bodyPr rtlCol="0" anchor="ctr"/>
+          <a:lstStyle/>
+          <a:p>
+            <a:pPr algn="ctr"/>
+          </a:p>
+        </p:txBody>
+      </p:sp>
+      <p:sp>
+        <p:nvSpPr>
           <p:cNvPr id="9" name="TextBox 8"/>
           <p:cNvSpPr txBox="1"/>
           <p:nvPr/>
@@ -9211,7 +10355,7 @@
                 </a:solidFill>
                 <a:latin typeface="Arial"/>
               </a:rPr>
-              <a:t>A prompt log, consistent AI-generated asset set, editable five-stage infographic and reusable PowerPoint component slide</a:t>
+              <a:t>A Copilot prompt log, editable five-stage process infographic and reusable PowerPoint component slide</a:t>
             </a:r>
           </a:p>
         </p:txBody>
